--- a/solutions/g2_skin_screening/slides/g2_skin_screening.pptx
+++ b/solutions/g2_skin_screening/slides/g2_skin_screening.pptx
@@ -7,22 +7,22 @@
   <p:sldIdLst>
     <p:sldId id="256" r:id="rId7"/>
     <p:sldId id="257" r:id="rId8"/>
-    <p:sldId id="258" r:id="rId9"/>
-    <p:sldId id="259" r:id="rId10"/>
-    <p:sldId id="260" r:id="rId11"/>
-    <p:sldId id="261" r:id="rId12"/>
-    <p:sldId id="262" r:id="rId13"/>
-    <p:sldId id="263" r:id="rId14"/>
-    <p:sldId id="264" r:id="rId15"/>
-    <p:sldId id="265" r:id="rId16"/>
-    <p:sldId id="266" r:id="rId17"/>
-    <p:sldId id="267" r:id="rId18"/>
-    <p:sldId id="268" r:id="rId19"/>
-    <p:sldId id="269" r:id="rId20"/>
-    <p:sldId id="270" r:id="rId21"/>
-    <p:sldId id="271" r:id="rId22"/>
-    <p:sldId id="272" r:id="rId23"/>
-    <p:sldId id="273" r:id="rId24"/>
+    <p:sldId id="258" r:id="rId10"/>
+    <p:sldId id="259" r:id="rId11"/>
+    <p:sldId id="260" r:id="rId12"/>
+    <p:sldId id="261" r:id="rId13"/>
+    <p:sldId id="262" r:id="rId14"/>
+    <p:sldId id="263" r:id="rId15"/>
+    <p:sldId id="264" r:id="rId16"/>
+    <p:sldId id="265" r:id="rId17"/>
+    <p:sldId id="266" r:id="rId18"/>
+    <p:sldId id="267" r:id="rId19"/>
+    <p:sldId id="268" r:id="rId20"/>
+    <p:sldId id="269" r:id="rId21"/>
+    <p:sldId id="270" r:id="rId22"/>
+    <p:sldId id="271" r:id="rId23"/>
+    <p:sldId id="272" r:id="rId24"/>
+    <p:sldId id="273" r:id="rId25"/>
   </p:sldIdLst>
   <p:sldSz cx="12191695" cy="6858000" type="screen4x3"/>
   <p:notesSz cx="6858000" cy="9144000"/>
@@ -122,6 +122,1652 @@
     </a:lvl9pPr>
   </p:defaultTextStyle>
 </p:presentation>
+</file>
+
+<file path=ppt/notesMasters/notesMaster1.xml><?xml version="1.0" encoding="utf-8"?>
+<p:notesMaster xmlns:a="http://schemas.openxmlformats.org/drawingml/2006/main" xmlns:p="http://schemas.openxmlformats.org/presentationml/2006/main" xmlns:r="http://schemas.openxmlformats.org/officeDocument/2006/relationships">
+  <p:cSld>
+    <p:bg>
+      <p:bgRef idx="1001">
+        <a:schemeClr val="bg1"/>
+      </p:bgRef>
+    </p:bg>
+    <p:spTree>
+      <p:nvGrpSpPr>
+        <p:cNvPr id="1" name=""/>
+        <p:cNvGrpSpPr/>
+        <p:nvPr/>
+      </p:nvGrpSpPr>
+      <p:grpSpPr>
+        <a:xfrm>
+          <a:off x="0" y="0"/>
+          <a:ext cx="0" cy="0"/>
+          <a:chOff x="0" y="0"/>
+          <a:chExt cx="0" cy="0"/>
+        </a:xfrm>
+      </p:grpSpPr>
+      <p:sp>
+        <p:nvSpPr>
+          <p:cNvPr id="2" name="Header Placeholder 1"/>
+          <p:cNvSpPr>
+            <a:spLocks noGrp="1"/>
+          </p:cNvSpPr>
+          <p:nvPr>
+            <p:ph type="hdr" sz="quarter"/>
+          </p:nvPr>
+        </p:nvSpPr>
+        <p:spPr>
+          <a:xfrm>
+            <a:off x="0" y="0"/>
+            <a:ext cx="2971800" cy="457200"/>
+          </a:xfrm>
+          <a:prstGeom prst="rect">
+            <a:avLst/>
+          </a:prstGeom>
+        </p:spPr>
+        <p:txBody>
+          <a:bodyPr vert="horz" lIns="91440" tIns="45720" rIns="91440" bIns="45720" rtlCol="0"/>
+          <a:lstStyle>
+            <a:lvl1pPr algn="l">
+              <a:defRPr sz="1200"/>
+            </a:lvl1pPr>
+          </a:lstStyle>
+          <a:p>
+            <a:endParaRPr lang="en-US"/>
+          </a:p>
+        </p:txBody>
+      </p:sp>
+      <p:sp>
+        <p:nvSpPr>
+          <p:cNvPr id="3" name="Date Placeholder 2"/>
+          <p:cNvSpPr>
+            <a:spLocks noGrp="1"/>
+          </p:cNvSpPr>
+          <p:nvPr>
+            <p:ph type="dt" idx="1"/>
+          </p:nvPr>
+        </p:nvSpPr>
+        <p:spPr>
+          <a:xfrm>
+            <a:off x="3884613" y="0"/>
+            <a:ext cx="2971800" cy="457200"/>
+          </a:xfrm>
+          <a:prstGeom prst="rect">
+            <a:avLst/>
+          </a:prstGeom>
+        </p:spPr>
+        <p:txBody>
+          <a:bodyPr vert="horz" lIns="91440" tIns="45720" rIns="91440" bIns="45720" rtlCol="0"/>
+          <a:lstStyle>
+            <a:lvl1pPr algn="r">
+              <a:defRPr sz="1200"/>
+            </a:lvl1pPr>
+          </a:lstStyle>
+          <a:p>
+            <a:fld id="{0F89C1C7-3DCD-1040-A9CF-14679D8B5DDD}" type="datetimeFigureOut">
+              <a:rPr lang="en-US" smtClean="0"/>
+              <a:t>10/17/16</a:t>
+            </a:fld>
+            <a:endParaRPr lang="en-US"/>
+          </a:p>
+        </p:txBody>
+      </p:sp>
+      <p:sp>
+        <p:nvSpPr>
+          <p:cNvPr id="4" name="Slide Image Placeholder 3"/>
+          <p:cNvSpPr>
+            <a:spLocks noGrp="1" noRot="1" noChangeAspect="1"/>
+          </p:cNvSpPr>
+          <p:nvPr>
+            <p:ph type="sldImg" idx="2"/>
+          </p:nvPr>
+        </p:nvSpPr>
+        <p:spPr>
+          <a:xfrm>
+            <a:off x="1143000" y="685800"/>
+            <a:ext cx="4572000" cy="3429000"/>
+          </a:xfrm>
+          <a:prstGeom prst="rect">
+            <a:avLst/>
+          </a:prstGeom>
+          <a:noFill/>
+          <a:ln w="12700">
+            <a:solidFill>
+              <a:prstClr val="black"/>
+            </a:solidFill>
+          </a:ln>
+        </p:spPr>
+        <p:txBody>
+          <a:bodyPr vert="horz" lIns="91440" tIns="45720" rIns="91440" bIns="45720" rtlCol="0" anchor="ctr"/>
+          <a:lstStyle/>
+          <a:p>
+            <a:endParaRPr lang="en-US"/>
+          </a:p>
+        </p:txBody>
+      </p:sp>
+      <p:sp>
+        <p:nvSpPr>
+          <p:cNvPr id="5" name="Notes Placeholder 4"/>
+          <p:cNvSpPr>
+            <a:spLocks noGrp="1"/>
+          </p:cNvSpPr>
+          <p:nvPr>
+            <p:ph type="body" sz="quarter" idx="3"/>
+          </p:nvPr>
+        </p:nvSpPr>
+        <p:spPr>
+          <a:xfrm>
+            <a:off x="685800" y="4343400"/>
+            <a:ext cx="5486400" cy="4114800"/>
+          </a:xfrm>
+          <a:prstGeom prst="rect">
+            <a:avLst/>
+          </a:prstGeom>
+        </p:spPr>
+        <p:txBody>
+          <a:bodyPr vert="horz" lIns="91440" tIns="45720" rIns="91440" bIns="45720" rtlCol="0"/>
+          <a:lstStyle/>
+          <a:p>
+            <a:pPr lvl="0"/>
+            <a:r>
+              <a:rPr lang="en-US" smtClean="0"/>
+              <a:t>Click to edit Master text styles</a:t>
+            </a:r>
+          </a:p>
+          <a:p>
+            <a:pPr lvl="1"/>
+            <a:r>
+              <a:rPr lang="en-US" smtClean="0"/>
+              <a:t>Second level</a:t>
+            </a:r>
+          </a:p>
+          <a:p>
+            <a:pPr lvl="2"/>
+            <a:r>
+              <a:rPr lang="en-US" smtClean="0"/>
+              <a:t>Third level</a:t>
+            </a:r>
+          </a:p>
+          <a:p>
+            <a:pPr lvl="3"/>
+            <a:r>
+              <a:rPr lang="en-US" smtClean="0"/>
+              <a:t>Fourth level</a:t>
+            </a:r>
+          </a:p>
+          <a:p>
+            <a:pPr lvl="4"/>
+            <a:r>
+              <a:rPr lang="en-US" smtClean="0"/>
+              <a:t>Fifth level</a:t>
+            </a:r>
+            <a:endParaRPr lang="en-US"/>
+          </a:p>
+        </p:txBody>
+      </p:sp>
+      <p:sp>
+        <p:nvSpPr>
+          <p:cNvPr id="6" name="Footer Placeholder 5"/>
+          <p:cNvSpPr>
+            <a:spLocks noGrp="1"/>
+          </p:cNvSpPr>
+          <p:nvPr>
+            <p:ph type="ftr" sz="quarter" idx="4"/>
+          </p:nvPr>
+        </p:nvSpPr>
+        <p:spPr>
+          <a:xfrm>
+            <a:off x="0" y="8685213"/>
+            <a:ext cx="2971800" cy="457200"/>
+          </a:xfrm>
+          <a:prstGeom prst="rect">
+            <a:avLst/>
+          </a:prstGeom>
+        </p:spPr>
+        <p:txBody>
+          <a:bodyPr vert="horz" lIns="91440" tIns="45720" rIns="91440" bIns="45720" rtlCol="0" anchor="b"/>
+          <a:lstStyle>
+            <a:lvl1pPr algn="l">
+              <a:defRPr sz="1200"/>
+            </a:lvl1pPr>
+          </a:lstStyle>
+          <a:p>
+            <a:endParaRPr lang="en-US"/>
+          </a:p>
+        </p:txBody>
+      </p:sp>
+      <p:sp>
+        <p:nvSpPr>
+          <p:cNvPr id="7" name="Slide Number Placeholder 6"/>
+          <p:cNvSpPr>
+            <a:spLocks noGrp="1"/>
+          </p:cNvSpPr>
+          <p:nvPr>
+            <p:ph type="sldNum" sz="quarter" idx="5"/>
+          </p:nvPr>
+        </p:nvSpPr>
+        <p:spPr>
+          <a:xfrm>
+            <a:off x="3884613" y="8685213"/>
+            <a:ext cx="2971800" cy="457200"/>
+          </a:xfrm>
+          <a:prstGeom prst="rect">
+            <a:avLst/>
+          </a:prstGeom>
+        </p:spPr>
+        <p:txBody>
+          <a:bodyPr vert="horz" lIns="91440" tIns="45720" rIns="91440" bIns="45720" rtlCol="0" anchor="b"/>
+          <a:lstStyle>
+            <a:lvl1pPr algn="r">
+              <a:defRPr sz="1200"/>
+            </a:lvl1pPr>
+          </a:lstStyle>
+          <a:p>
+            <a:fld id="{BB5E49A5-4136-284D-997B-48E1D791AD67}" type="slidenum">
+              <a:rPr lang="en-US" smtClean="0"/>
+              <a:t>‹#›</a:t>
+            </a:fld>
+            <a:endParaRPr lang="en-US"/>
+          </a:p>
+        </p:txBody>
+      </p:sp>
+    </p:spTree>
+    <p:extLst>
+      <p:ext uri="{BB962C8B-B14F-4D97-AF65-F5344CB8AC3E}">
+        <p14:creationId xmlns:p14="http://schemas.microsoft.com/office/powerpoint/2010/main" val="2623252185"/>
+      </p:ext>
+    </p:extLst>
+  </p:cSld>
+  <p:clrMap bg1="lt1" tx1="dk1" bg2="lt2" tx2="dk2" accent1="accent1" accent2="accent2" accent3="accent3" accent4="accent4" accent5="accent5" accent6="accent6" hlink="hlink" folHlink="folHlink"/>
+  <p:notesStyle>
+    <a:lvl1pPr marL="0" algn="l" defTabSz="457200" rtl="0" eaLnBrk="1" latinLnBrk="0" hangingPunct="1">
+      <a:defRPr sz="1200" kern="1200">
+        <a:solidFill>
+          <a:schemeClr val="tx1"/>
+        </a:solidFill>
+        <a:latin typeface="+mn-lt"/>
+        <a:ea typeface="+mn-ea"/>
+        <a:cs typeface="+mn-cs"/>
+      </a:defRPr>
+    </a:lvl1pPr>
+    <a:lvl2pPr marL="457200" algn="l" defTabSz="457200" rtl="0" eaLnBrk="1" latinLnBrk="0" hangingPunct="1">
+      <a:defRPr sz="1200" kern="1200">
+        <a:solidFill>
+          <a:schemeClr val="tx1"/>
+        </a:solidFill>
+        <a:latin typeface="+mn-lt"/>
+        <a:ea typeface="+mn-ea"/>
+        <a:cs typeface="+mn-cs"/>
+      </a:defRPr>
+    </a:lvl2pPr>
+    <a:lvl3pPr marL="914400" algn="l" defTabSz="457200" rtl="0" eaLnBrk="1" latinLnBrk="0" hangingPunct="1">
+      <a:defRPr sz="1200" kern="1200">
+        <a:solidFill>
+          <a:schemeClr val="tx1"/>
+        </a:solidFill>
+        <a:latin typeface="+mn-lt"/>
+        <a:ea typeface="+mn-ea"/>
+        <a:cs typeface="+mn-cs"/>
+      </a:defRPr>
+    </a:lvl3pPr>
+    <a:lvl4pPr marL="1371600" algn="l" defTabSz="457200" rtl="0" eaLnBrk="1" latinLnBrk="0" hangingPunct="1">
+      <a:defRPr sz="1200" kern="1200">
+        <a:solidFill>
+          <a:schemeClr val="tx1"/>
+        </a:solidFill>
+        <a:latin typeface="+mn-lt"/>
+        <a:ea typeface="+mn-ea"/>
+        <a:cs typeface="+mn-cs"/>
+      </a:defRPr>
+    </a:lvl4pPr>
+    <a:lvl5pPr marL="1828800" algn="l" defTabSz="457200" rtl="0" eaLnBrk="1" latinLnBrk="0" hangingPunct="1">
+      <a:defRPr sz="1200" kern="1200">
+        <a:solidFill>
+          <a:schemeClr val="tx1"/>
+        </a:solidFill>
+        <a:latin typeface="+mn-lt"/>
+        <a:ea typeface="+mn-ea"/>
+        <a:cs typeface="+mn-cs"/>
+      </a:defRPr>
+    </a:lvl5pPr>
+    <a:lvl6pPr marL="2286000" algn="l" defTabSz="457200" rtl="0" eaLnBrk="1" latinLnBrk="0" hangingPunct="1">
+      <a:defRPr sz="1200" kern="1200">
+        <a:solidFill>
+          <a:schemeClr val="tx1"/>
+        </a:solidFill>
+        <a:latin typeface="+mn-lt"/>
+        <a:ea typeface="+mn-ea"/>
+        <a:cs typeface="+mn-cs"/>
+      </a:defRPr>
+    </a:lvl6pPr>
+    <a:lvl7pPr marL="2743200" algn="l" defTabSz="457200" rtl="0" eaLnBrk="1" latinLnBrk="0" hangingPunct="1">
+      <a:defRPr sz="1200" kern="1200">
+        <a:solidFill>
+          <a:schemeClr val="tx1"/>
+        </a:solidFill>
+        <a:latin typeface="+mn-lt"/>
+        <a:ea typeface="+mn-ea"/>
+        <a:cs typeface="+mn-cs"/>
+      </a:defRPr>
+    </a:lvl7pPr>
+    <a:lvl8pPr marL="3200400" algn="l" defTabSz="457200" rtl="0" eaLnBrk="1" latinLnBrk="0" hangingPunct="1">
+      <a:defRPr sz="1200" kern="1200">
+        <a:solidFill>
+          <a:schemeClr val="tx1"/>
+        </a:solidFill>
+        <a:latin typeface="+mn-lt"/>
+        <a:ea typeface="+mn-ea"/>
+        <a:cs typeface="+mn-cs"/>
+      </a:defRPr>
+    </a:lvl8pPr>
+    <a:lvl9pPr marL="3657600" algn="l" defTabSz="457200" rtl="0" eaLnBrk="1" latinLnBrk="0" hangingPunct="1">
+      <a:defRPr sz="1200" kern="1200">
+        <a:solidFill>
+          <a:schemeClr val="tx1"/>
+        </a:solidFill>
+        <a:latin typeface="+mn-lt"/>
+        <a:ea typeface="+mn-ea"/>
+        <a:cs typeface="+mn-cs"/>
+      </a:defRPr>
+    </a:lvl9pPr>
+  </p:notesStyle>
+</p:notesMaster>
+</file>
+
+<file path=ppt/notesSlides/notesSlide1.xml><?xml version="1.0" encoding="utf-8"?>
+<p:notes xmlns:a="http://schemas.openxmlformats.org/drawingml/2006/main" xmlns:p="http://schemas.openxmlformats.org/presentationml/2006/main" xmlns:r="http://schemas.openxmlformats.org/officeDocument/2006/relationships">
+  <p:cSld>
+    <p:spTree>
+      <p:nvGrpSpPr>
+        <p:cNvPr id="1" name=""/>
+        <p:cNvGrpSpPr/>
+        <p:nvPr/>
+      </p:nvGrpSpPr>
+      <p:grpSpPr>
+        <a:xfrm>
+          <a:off x="0" y="0"/>
+          <a:ext cx="0" cy="0"/>
+          <a:chOff x="0" y="0"/>
+          <a:chExt cx="0" cy="0"/>
+        </a:xfrm>
+      </p:grpSpPr>
+      <p:sp>
+        <p:nvSpPr>
+          <p:cNvPr id="2" name="Slide Image Placeholder 1"/>
+          <p:cNvSpPr>
+            <a:spLocks noGrp="1"/>
+          </p:cNvSpPr>
+          <p:nvPr>
+            <p:ph type="sldImg" idx="2"/>
+          </p:nvPr>
+        </p:nvSpPr>
+        <p:spPr/>
+      </p:sp>
+      <p:sp>
+        <p:nvSpPr>
+          <p:cNvPr id="3" name="Notes Placeholder 2"/>
+          <p:cNvSpPr>
+            <a:spLocks noGrp="1"/>
+          </p:cNvSpPr>
+          <p:nvPr>
+            <p:ph type="body" idx="3" sz="quarter"/>
+          </p:nvPr>
+        </p:nvSpPr>
+        <p:spPr/>
+        <p:txBody>
+          <a:bodyPr/>
+          <a:lstStyle/>
+          <a:p>
+            <a:r>
+              <a:rPr b="1" sz="1300">
+                <a:latin typeface="Geist Mono"/>
+              </a:rPr>
+              <a:t>Background</a:t>
+            </a:r>
+          </a:p>
+          <a:p>
+            <a:r>
+              <a:rPr b="0" sz="1100">
+                <a:latin typeface="Geist"/>
+              </a:rPr>
+              <a:t>This opening section sets up the problem: what a skin-screening model actually does, and why catching every melanoma matters more than raw accuracy. Keep the asymmetry of the two mistakes in mind throughout.</a:t>
+            </a:r>
+          </a:p>
+        </p:txBody>
+      </p:sp>
+      <p:sp>
+        <p:nvSpPr>
+          <p:cNvPr id="4" name="Slide Number Placeholder 3"/>
+          <p:cNvSpPr>
+            <a:spLocks noGrp="1"/>
+          </p:cNvSpPr>
+          <p:nvPr>
+            <p:ph type="sldNum" idx="5" sz="quarter"/>
+          </p:nvPr>
+        </p:nvSpPr>
+        <p:spPr/>
+      </p:sp>
+    </p:spTree>
+  </p:cSld>
+  <p:clrMapOvr>
+    <a:masterClrMapping/>
+  </p:clrMapOvr>
+</p:notes>
+</file>
+
+<file path=ppt/notesSlides/notesSlide10.xml><?xml version="1.0" encoding="utf-8"?>
+<p:notes xmlns:a="http://schemas.openxmlformats.org/drawingml/2006/main" xmlns:p="http://schemas.openxmlformats.org/presentationml/2006/main" xmlns:r="http://schemas.openxmlformats.org/officeDocument/2006/relationships">
+  <p:cSld>
+    <p:spTree>
+      <p:nvGrpSpPr>
+        <p:cNvPr id="1" name=""/>
+        <p:cNvGrpSpPr/>
+        <p:nvPr/>
+      </p:nvGrpSpPr>
+      <p:grpSpPr>
+        <a:xfrm>
+          <a:off x="0" y="0"/>
+          <a:ext cx="0" cy="0"/>
+          <a:chOff x="0" y="0"/>
+          <a:chExt cx="0" cy="0"/>
+        </a:xfrm>
+      </p:grpSpPr>
+      <p:sp>
+        <p:nvSpPr>
+          <p:cNvPr id="2" name="Slide Image Placeholder 1"/>
+          <p:cNvSpPr>
+            <a:spLocks noGrp="1"/>
+          </p:cNvSpPr>
+          <p:nvPr>
+            <p:ph type="sldImg" idx="2"/>
+          </p:nvPr>
+        </p:nvSpPr>
+        <p:spPr/>
+      </p:sp>
+      <p:sp>
+        <p:nvSpPr>
+          <p:cNvPr id="3" name="Notes Placeholder 2"/>
+          <p:cNvSpPr>
+            <a:spLocks noGrp="1"/>
+          </p:cNvSpPr>
+          <p:nvPr>
+            <p:ph type="body" idx="3" sz="quarter"/>
+          </p:nvPr>
+        </p:nvSpPr>
+        <p:spPr/>
+        <p:txBody>
+          <a:bodyPr/>
+          <a:lstStyle/>
+          <a:p>
+            <a:r>
+              <a:rPr b="1" sz="1300">
+                <a:latin typeface="Geist Mono"/>
+              </a:rPr>
+              <a:t>The confusion matrix tells the real story</a:t>
+            </a:r>
+          </a:p>
+          <a:p>
+            <a:r>
+              <a:rPr b="0" sz="1100">
+                <a:latin typeface="Geist"/>
+              </a:rPr>
+              <a:t>A confusion matrix lays truth (rows) against the model's guess (columns). Correct answers sit on the diagonal; everything else is a mistake. Notice the one dark column: the model dumps almost every lesion, including cancers, into the common mole class. That is how it scores 0.68 while being useless for screening. Next we break accuracy apart class by class.</a:t>
+            </a:r>
+          </a:p>
+        </p:txBody>
+      </p:sp>
+      <p:sp>
+        <p:nvSpPr>
+          <p:cNvPr id="4" name="Slide Number Placeholder 3"/>
+          <p:cNvSpPr>
+            <a:spLocks noGrp="1"/>
+          </p:cNvSpPr>
+          <p:nvPr>
+            <p:ph type="sldNum" idx="5" sz="quarter"/>
+          </p:nvPr>
+        </p:nvSpPr>
+        <p:spPr/>
+      </p:sp>
+    </p:spTree>
+  </p:cSld>
+  <p:clrMapOvr>
+    <a:masterClrMapping/>
+  </p:clrMapOvr>
+</p:notes>
+</file>
+
+<file path=ppt/notesSlides/notesSlide11.xml><?xml version="1.0" encoding="utf-8"?>
+<p:notes xmlns:a="http://schemas.openxmlformats.org/drawingml/2006/main" xmlns:p="http://schemas.openxmlformats.org/presentationml/2006/main" xmlns:r="http://schemas.openxmlformats.org/officeDocument/2006/relationships">
+  <p:cSld>
+    <p:spTree>
+      <p:nvGrpSpPr>
+        <p:cNvPr id="1" name=""/>
+        <p:cNvGrpSpPr/>
+        <p:nvPr/>
+      </p:nvGrpSpPr>
+      <p:grpSpPr>
+        <a:xfrm>
+          <a:off x="0" y="0"/>
+          <a:ext cx="0" cy="0"/>
+          <a:chOff x="0" y="0"/>
+          <a:chExt cx="0" cy="0"/>
+        </a:xfrm>
+      </p:grpSpPr>
+      <p:sp>
+        <p:nvSpPr>
+          <p:cNvPr id="2" name="Slide Image Placeholder 1"/>
+          <p:cNvSpPr>
+            <a:spLocks noGrp="1"/>
+          </p:cNvSpPr>
+          <p:nvPr>
+            <p:ph type="sldImg" idx="2"/>
+          </p:nvPr>
+        </p:nvSpPr>
+        <p:spPr/>
+      </p:sp>
+      <p:sp>
+        <p:nvSpPr>
+          <p:cNvPr id="3" name="Notes Placeholder 2"/>
+          <p:cNvSpPr>
+            <a:spLocks noGrp="1"/>
+          </p:cNvSpPr>
+          <p:nvPr>
+            <p:ph type="body" idx="3" sz="quarter"/>
+          </p:nvPr>
+        </p:nvSpPr>
+        <p:spPr/>
+        <p:txBody>
+          <a:bodyPr/>
+          <a:lstStyle/>
+          <a:p>
+            <a:r>
+              <a:rPr b="1" sz="1300">
+                <a:latin typeface="Geist Mono"/>
+              </a:rPr>
+              <a:t>Screening lives or dies on the rare classes</a:t>
+            </a:r>
+          </a:p>
+          <a:p>
+            <a:r>
+              <a:rPr b="0" sz="1100">
+                <a:latin typeface="Geist"/>
+              </a:rPr>
+              <a:t>The dashed line is the 0.68 overall accuracy. Only the common mole class rises above it; every rare class, melanoma in pink included, sits near zero. An average can hide this completely. A screening tool has to work on the rare, dangerous classes -- and this one does not. Next, the single number that makes it undeniable.</a:t>
+            </a:r>
+          </a:p>
+        </p:txBody>
+      </p:sp>
+      <p:sp>
+        <p:nvSpPr>
+          <p:cNvPr id="4" name="Slide Number Placeholder 3"/>
+          <p:cNvSpPr>
+            <a:spLocks noGrp="1"/>
+          </p:cNvSpPr>
+          <p:nvPr>
+            <p:ph type="sldNum" idx="5" sz="quarter"/>
+          </p:nvPr>
+        </p:nvSpPr>
+        <p:spPr/>
+      </p:sp>
+    </p:spTree>
+  </p:cSld>
+  <p:clrMapOvr>
+    <a:masterClrMapping/>
+  </p:clrMapOvr>
+</p:notes>
+</file>
+
+<file path=ppt/notesSlides/notesSlide12.xml><?xml version="1.0" encoding="utf-8"?>
+<p:notes xmlns:a="http://schemas.openxmlformats.org/drawingml/2006/main" xmlns:p="http://schemas.openxmlformats.org/presentationml/2006/main" xmlns:r="http://schemas.openxmlformats.org/officeDocument/2006/relationships">
+  <p:cSld>
+    <p:spTree>
+      <p:nvGrpSpPr>
+        <p:cNvPr id="1" name=""/>
+        <p:cNvGrpSpPr/>
+        <p:nvPr/>
+      </p:nvGrpSpPr>
+      <p:grpSpPr>
+        <a:xfrm>
+          <a:off x="0" y="0"/>
+          <a:ext cx="0" cy="0"/>
+          <a:chOff x="0" y="0"/>
+          <a:chExt cx="0" cy="0"/>
+        </a:xfrm>
+      </p:grpSpPr>
+      <p:sp>
+        <p:nvSpPr>
+          <p:cNvPr id="2" name="Slide Image Placeholder 1"/>
+          <p:cNvSpPr>
+            <a:spLocks noGrp="1"/>
+          </p:cNvSpPr>
+          <p:nvPr>
+            <p:ph type="sldImg" idx="2"/>
+          </p:nvPr>
+        </p:nvSpPr>
+        <p:spPr/>
+      </p:sp>
+      <p:sp>
+        <p:nvSpPr>
+          <p:cNvPr id="3" name="Notes Placeholder 2"/>
+          <p:cNvSpPr>
+            <a:spLocks noGrp="1"/>
+          </p:cNvSpPr>
+          <p:nvPr>
+            <p:ph type="body" idx="3" sz="quarter"/>
+          </p:nvPr>
+        </p:nvSpPr>
+        <p:spPr/>
+        <p:txBody>
+          <a:bodyPr/>
+          <a:lstStyle/>
+          <a:p>
+            <a:r>
+              <a:rPr b="1" sz="1300">
+                <a:latin typeface="Geist Mono"/>
+              </a:rPr>
+              <a:t>The one number that matters: melanoma recall</a:t>
+            </a:r>
+          </a:p>
+          <a:p>
+            <a:r>
+              <a:rPr b="0" sz="1100">
+                <a:latin typeface="Geist"/>
+              </a:rPr>
+              <a:t>The emotional peak. The model looks respectable at 68% accuracy, yet it caught only 10 of 223 melanomas and missed 213 of them. Recall of 4.5% means it would wave almost every real cancer through as harmless. The sentence to remember: a healthy-looking accuracy number can hide a dangerous screening tool. Next we look those mistakes in the eye.</a:t>
+            </a:r>
+          </a:p>
+        </p:txBody>
+      </p:sp>
+      <p:sp>
+        <p:nvSpPr>
+          <p:cNvPr id="4" name="Slide Number Placeholder 3"/>
+          <p:cNvSpPr>
+            <a:spLocks noGrp="1"/>
+          </p:cNvSpPr>
+          <p:nvPr>
+            <p:ph type="sldNum" idx="5" sz="quarter"/>
+          </p:nvPr>
+        </p:nvSpPr>
+        <p:spPr/>
+      </p:sp>
+    </p:spTree>
+  </p:cSld>
+  <p:clrMapOvr>
+    <a:masterClrMapping/>
+  </p:clrMapOvr>
+</p:notes>
+</file>
+
+<file path=ppt/notesSlides/notesSlide13.xml><?xml version="1.0" encoding="utf-8"?>
+<p:notes xmlns:a="http://schemas.openxmlformats.org/drawingml/2006/main" xmlns:p="http://schemas.openxmlformats.org/presentationml/2006/main" xmlns:r="http://schemas.openxmlformats.org/officeDocument/2006/relationships">
+  <p:cSld>
+    <p:spTree>
+      <p:nvGrpSpPr>
+        <p:cNvPr id="1" name=""/>
+        <p:cNvGrpSpPr/>
+        <p:nvPr/>
+      </p:nvGrpSpPr>
+      <p:grpSpPr>
+        <a:xfrm>
+          <a:off x="0" y="0"/>
+          <a:ext cx="0" cy="0"/>
+          <a:chOff x="0" y="0"/>
+          <a:chExt cx="0" cy="0"/>
+        </a:xfrm>
+      </p:grpSpPr>
+      <p:sp>
+        <p:nvSpPr>
+          <p:cNvPr id="2" name="Slide Image Placeholder 1"/>
+          <p:cNvSpPr>
+            <a:spLocks noGrp="1"/>
+          </p:cNvSpPr>
+          <p:nvPr>
+            <p:ph type="sldImg" idx="2"/>
+          </p:nvPr>
+        </p:nvSpPr>
+        <p:spPr/>
+      </p:sp>
+      <p:sp>
+        <p:nvSpPr>
+          <p:cNvPr id="3" name="Notes Placeholder 2"/>
+          <p:cNvSpPr>
+            <a:spLocks noGrp="1"/>
+          </p:cNvSpPr>
+          <p:nvPr>
+            <p:ph type="body" idx="3" sz="quarter"/>
+          </p:nvPr>
+        </p:nvSpPr>
+        <p:spPr/>
+        <p:txBody>
+          <a:bodyPr/>
+          <a:lstStyle/>
+          <a:p>
+            <a:r>
+              <a:rPr b="1" sz="1300">
+                <a:latin typeface="Geist Mono"/>
+              </a:rPr>
+              <a:t>The cases it got wrong are the ones that matter</a:t>
+            </a:r>
+          </a:p>
+          <a:p>
+            <a:r>
+              <a:rPr b="0" sz="1100">
+                <a:latin typeface="Geist"/>
+              </a:rPr>
+              <a:t>These are real test lesions the model got wrong, with the truth and the guess printed above each. Count how many true melanomas it called melanocyti -- a harmless mole. Each is a false negative, the precise mistake screening exists to catch. Seeing the errors as images, not numbers, is what makes the risk real. Now let us be honest about what this toy can and cannot do.</a:t>
+            </a:r>
+          </a:p>
+        </p:txBody>
+      </p:sp>
+      <p:sp>
+        <p:nvSpPr>
+          <p:cNvPr id="4" name="Slide Number Placeholder 3"/>
+          <p:cNvSpPr>
+            <a:spLocks noGrp="1"/>
+          </p:cNvSpPr>
+          <p:nvPr>
+            <p:ph type="sldNum" idx="5" sz="quarter"/>
+          </p:nvPr>
+        </p:nvSpPr>
+        <p:spPr/>
+      </p:sp>
+    </p:spTree>
+  </p:cSld>
+  <p:clrMapOvr>
+    <a:masterClrMapping/>
+  </p:clrMapOvr>
+</p:notes>
+</file>
+
+<file path=ppt/notesSlides/notesSlide14.xml><?xml version="1.0" encoding="utf-8"?>
+<p:notes xmlns:a="http://schemas.openxmlformats.org/drawingml/2006/main" xmlns:p="http://schemas.openxmlformats.org/presentationml/2006/main" xmlns:r="http://schemas.openxmlformats.org/officeDocument/2006/relationships">
+  <p:cSld>
+    <p:spTree>
+      <p:nvGrpSpPr>
+        <p:cNvPr id="1" name=""/>
+        <p:cNvGrpSpPr/>
+        <p:nvPr/>
+      </p:nvGrpSpPr>
+      <p:grpSpPr>
+        <a:xfrm>
+          <a:off x="0" y="0"/>
+          <a:ext cx="0" cy="0"/>
+          <a:chOff x="0" y="0"/>
+          <a:chExt cx="0" cy="0"/>
+        </a:xfrm>
+      </p:grpSpPr>
+      <p:sp>
+        <p:nvSpPr>
+          <p:cNvPr id="2" name="Slide Image Placeholder 1"/>
+          <p:cNvSpPr>
+            <a:spLocks noGrp="1"/>
+          </p:cNvSpPr>
+          <p:nvPr>
+            <p:ph type="sldImg" idx="2"/>
+          </p:nvPr>
+        </p:nvSpPr>
+        <p:spPr/>
+      </p:sp>
+      <p:sp>
+        <p:nvSpPr>
+          <p:cNvPr id="3" name="Notes Placeholder 2"/>
+          <p:cNvSpPr>
+            <a:spLocks noGrp="1"/>
+          </p:cNvSpPr>
+          <p:nvPr>
+            <p:ph type="body" idx="3" sz="quarter"/>
+          </p:nvPr>
+        </p:nvSpPr>
+        <p:spPr/>
+        <p:txBody>
+          <a:bodyPr/>
+          <a:lstStyle/>
+          <a:p>
+            <a:r>
+              <a:rPr b="1" sz="1300">
+                <a:latin typeface="Geist Mono"/>
+              </a:rPr>
+              <a:t>Being honest</a:t>
+            </a:r>
+          </a:p>
+          <a:p>
+            <a:r>
+              <a:rPr b="0" sz="1100">
+                <a:latin typeface="Geist"/>
+              </a:rPr>
+              <a:t>Finally, the limits: why this toy model is not safe for real patients, what a real tool would need, and the mindset that actually transfers.</a:t>
+            </a:r>
+          </a:p>
+        </p:txBody>
+      </p:sp>
+      <p:sp>
+        <p:nvSpPr>
+          <p:cNvPr id="4" name="Slide Number Placeholder 3"/>
+          <p:cNvSpPr>
+            <a:spLocks noGrp="1"/>
+          </p:cNvSpPr>
+          <p:nvPr>
+            <p:ph type="sldNum" idx="5" sz="quarter"/>
+          </p:nvPr>
+        </p:nvSpPr>
+        <p:spPr/>
+      </p:sp>
+    </p:spTree>
+  </p:cSld>
+  <p:clrMapOvr>
+    <a:masterClrMapping/>
+  </p:clrMapOvr>
+</p:notes>
+</file>
+
+<file path=ppt/notesSlides/notesSlide15.xml><?xml version="1.0" encoding="utf-8"?>
+<p:notes xmlns:a="http://schemas.openxmlformats.org/drawingml/2006/main" xmlns:p="http://schemas.openxmlformats.org/presentationml/2006/main" xmlns:r="http://schemas.openxmlformats.org/officeDocument/2006/relationships">
+  <p:cSld>
+    <p:spTree>
+      <p:nvGrpSpPr>
+        <p:cNvPr id="1" name=""/>
+        <p:cNvGrpSpPr/>
+        <p:nvPr/>
+      </p:nvGrpSpPr>
+      <p:grpSpPr>
+        <a:xfrm>
+          <a:off x="0" y="0"/>
+          <a:ext cx="0" cy="0"/>
+          <a:chOff x="0" y="0"/>
+          <a:chExt cx="0" cy="0"/>
+        </a:xfrm>
+      </p:grpSpPr>
+      <p:sp>
+        <p:nvSpPr>
+          <p:cNvPr id="2" name="Slide Image Placeholder 1"/>
+          <p:cNvSpPr>
+            <a:spLocks noGrp="1"/>
+          </p:cNvSpPr>
+          <p:nvPr>
+            <p:ph type="sldImg" idx="2"/>
+          </p:nvPr>
+        </p:nvSpPr>
+        <p:spPr/>
+      </p:sp>
+      <p:sp>
+        <p:nvSpPr>
+          <p:cNvPr id="3" name="Notes Placeholder 2"/>
+          <p:cNvSpPr>
+            <a:spLocks noGrp="1"/>
+          </p:cNvSpPr>
+          <p:nvPr>
+            <p:ph type="body" idx="3" sz="quarter"/>
+          </p:nvPr>
+        </p:nvSpPr>
+        <p:spPr/>
+        <p:txBody>
+          <a:bodyPr/>
+          <a:lstStyle/>
+          <a:p>
+            <a:r>
+              <a:rPr b="1" sz="1300">
+                <a:latin typeface="Geist Mono"/>
+              </a:rPr>
+              <a:t>A toy model, and why that is exactly the point</a:t>
+            </a:r>
+          </a:p>
+          <a:p>
+            <a:r>
+              <a:rPr b="0" sz="1100">
+                <a:latin typeface="Geist"/>
+              </a:rPr>
+              <a:t>Be honest about the limits. Our input is tiny 64-pixel grayscale thumbnails, which discard the color and texture real dermatology depends on, so a 4.5% recall is expected, not surprising. A deployable tool would use full-resolution color, tune the threshold for sensitivity, and be validated across many sites. The real lesson is the mindset: never miss the dangerous case, and never trust a shiny accuracy number.</a:t>
+            </a:r>
+          </a:p>
+        </p:txBody>
+      </p:sp>
+      <p:sp>
+        <p:nvSpPr>
+          <p:cNvPr id="4" name="Slide Number Placeholder 3"/>
+          <p:cNvSpPr>
+            <a:spLocks noGrp="1"/>
+          </p:cNvSpPr>
+          <p:nvPr>
+            <p:ph type="sldNum" idx="5" sz="quarter"/>
+          </p:nvPr>
+        </p:nvSpPr>
+        <p:spPr/>
+      </p:sp>
+    </p:spTree>
+  </p:cSld>
+  <p:clrMapOvr>
+    <a:masterClrMapping/>
+  </p:clrMapOvr>
+</p:notes>
+</file>
+
+<file path=ppt/notesSlides/notesSlide16.xml><?xml version="1.0" encoding="utf-8"?>
+<p:notes xmlns:a="http://schemas.openxmlformats.org/drawingml/2006/main" xmlns:p="http://schemas.openxmlformats.org/presentationml/2006/main" xmlns:r="http://schemas.openxmlformats.org/officeDocument/2006/relationships">
+  <p:cSld>
+    <p:spTree>
+      <p:nvGrpSpPr>
+        <p:cNvPr id="1" name=""/>
+        <p:cNvGrpSpPr/>
+        <p:nvPr/>
+      </p:nvGrpSpPr>
+      <p:grpSpPr>
+        <a:xfrm>
+          <a:off x="0" y="0"/>
+          <a:ext cx="0" cy="0"/>
+          <a:chOff x="0" y="0"/>
+          <a:chExt cx="0" cy="0"/>
+        </a:xfrm>
+      </p:grpSpPr>
+      <p:sp>
+        <p:nvSpPr>
+          <p:cNvPr id="2" name="Slide Image Placeholder 1"/>
+          <p:cNvSpPr>
+            <a:spLocks noGrp="1"/>
+          </p:cNvSpPr>
+          <p:nvPr>
+            <p:ph type="sldImg" idx="2"/>
+          </p:nvPr>
+        </p:nvSpPr>
+        <p:spPr/>
+      </p:sp>
+      <p:sp>
+        <p:nvSpPr>
+          <p:cNvPr id="3" name="Notes Placeholder 2"/>
+          <p:cNvSpPr>
+            <a:spLocks noGrp="1"/>
+          </p:cNvSpPr>
+          <p:nvPr>
+            <p:ph type="body" idx="3" sz="quarter"/>
+          </p:nvPr>
+        </p:nvSpPr>
+        <p:spPr/>
+        <p:txBody>
+          <a:bodyPr/>
+          <a:lstStyle/>
+          <a:p>
+            <a:r>
+              <a:rPr b="1" sz="1300">
+                <a:latin typeface="Geist Mono"/>
+              </a:rPr>
+              <a:t>References, and thank you</a:t>
+            </a:r>
+          </a:p>
+          <a:p>
+            <a:r>
+              <a:rPr b="0" sz="1100">
+                <a:latin typeface="Geist"/>
+              </a:rPr>
+              <a:t>These are the seven references behind the project, from the landmark dermatologist-level results that launched the field to the plain-language primer on why sensitivity matters. The closing thought: the score was never the point -- honest evaluation was. Thank the audience and invite questions.</a:t>
+            </a:r>
+          </a:p>
+        </p:txBody>
+      </p:sp>
+      <p:sp>
+        <p:nvSpPr>
+          <p:cNvPr id="4" name="Slide Number Placeholder 3"/>
+          <p:cNvSpPr>
+            <a:spLocks noGrp="1"/>
+          </p:cNvSpPr>
+          <p:nvPr>
+            <p:ph type="sldNum" idx="5" sz="quarter"/>
+          </p:nvPr>
+        </p:nvSpPr>
+        <p:spPr/>
+      </p:sp>
+    </p:spTree>
+  </p:cSld>
+  <p:clrMapOvr>
+    <a:masterClrMapping/>
+  </p:clrMapOvr>
+</p:notes>
+</file>
+
+<file path=ppt/notesSlides/notesSlide2.xml><?xml version="1.0" encoding="utf-8"?>
+<p:notes xmlns:a="http://schemas.openxmlformats.org/drawingml/2006/main" xmlns:p="http://schemas.openxmlformats.org/presentationml/2006/main" xmlns:r="http://schemas.openxmlformats.org/officeDocument/2006/relationships">
+  <p:cSld>
+    <p:spTree>
+      <p:nvGrpSpPr>
+        <p:cNvPr id="1" name=""/>
+        <p:cNvGrpSpPr/>
+        <p:nvPr/>
+      </p:nvGrpSpPr>
+      <p:grpSpPr>
+        <a:xfrm>
+          <a:off x="0" y="0"/>
+          <a:ext cx="0" cy="0"/>
+          <a:chOff x="0" y="0"/>
+          <a:chExt cx="0" cy="0"/>
+        </a:xfrm>
+      </p:grpSpPr>
+      <p:sp>
+        <p:nvSpPr>
+          <p:cNvPr id="2" name="Slide Image Placeholder 1"/>
+          <p:cNvSpPr>
+            <a:spLocks noGrp="1"/>
+          </p:cNvSpPr>
+          <p:nvPr>
+            <p:ph type="sldImg" idx="2"/>
+          </p:nvPr>
+        </p:nvSpPr>
+        <p:spPr/>
+      </p:sp>
+      <p:sp>
+        <p:nvSpPr>
+          <p:cNvPr id="3" name="Notes Placeholder 2"/>
+          <p:cNvSpPr>
+            <a:spLocks noGrp="1"/>
+          </p:cNvSpPr>
+          <p:nvPr>
+            <p:ph type="body" idx="3" sz="quarter"/>
+          </p:nvPr>
+        </p:nvSpPr>
+        <p:spPr/>
+        <p:txBody>
+          <a:bodyPr/>
+          <a:lstStyle/>
+          <a:p>
+            <a:r>
+              <a:rPr b="1" sz="1300">
+                <a:latin typeface="Geist Mono"/>
+              </a:rPr>
+              <a:t>Two mistakes, and only one of them can be fatal</a:t>
+            </a:r>
+          </a:p>
+          <a:p>
+            <a:r>
+              <a:rPr b="0" sz="1100">
+                <a:latin typeface="Geist"/>
+              </a:rPr>
+              <a:t>The core idea of the whole talk: the two kinds of mistake are not equal. A false alarm just costs a follow-up visit, but a missed melanoma can be fatal. That asymmetry is why we will judge the model on catching cancers, not on overall accuracy. Next we make the trade-off concrete with a single dial.</a:t>
+            </a:r>
+          </a:p>
+        </p:txBody>
+      </p:sp>
+      <p:sp>
+        <p:nvSpPr>
+          <p:cNvPr id="4" name="Slide Number Placeholder 3"/>
+          <p:cNvSpPr>
+            <a:spLocks noGrp="1"/>
+          </p:cNvSpPr>
+          <p:nvPr>
+            <p:ph type="sldNum" idx="5" sz="quarter"/>
+          </p:nvPr>
+        </p:nvSpPr>
+        <p:spPr/>
+      </p:sp>
+    </p:spTree>
+  </p:cSld>
+  <p:clrMapOvr>
+    <a:masterClrMapping/>
+  </p:clrMapOvr>
+</p:notes>
+</file>
+
+<file path=ppt/notesSlides/notesSlide3.xml><?xml version="1.0" encoding="utf-8"?>
+<p:notes xmlns:a="http://schemas.openxmlformats.org/drawingml/2006/main" xmlns:p="http://schemas.openxmlformats.org/presentationml/2006/main" xmlns:r="http://schemas.openxmlformats.org/officeDocument/2006/relationships">
+  <p:cSld>
+    <p:spTree>
+      <p:nvGrpSpPr>
+        <p:cNvPr id="1" name=""/>
+        <p:cNvGrpSpPr/>
+        <p:nvPr/>
+      </p:nvGrpSpPr>
+      <p:grpSpPr>
+        <a:xfrm>
+          <a:off x="0" y="0"/>
+          <a:ext cx="0" cy="0"/>
+          <a:chOff x="0" y="0"/>
+          <a:chExt cx="0" cy="0"/>
+        </a:xfrm>
+      </p:grpSpPr>
+      <p:sp>
+        <p:nvSpPr>
+          <p:cNvPr id="2" name="Slide Image Placeholder 1"/>
+          <p:cNvSpPr>
+            <a:spLocks noGrp="1"/>
+          </p:cNvSpPr>
+          <p:nvPr>
+            <p:ph type="sldImg" idx="2"/>
+          </p:nvPr>
+        </p:nvSpPr>
+        <p:spPr/>
+      </p:sp>
+      <p:sp>
+        <p:nvSpPr>
+          <p:cNvPr id="3" name="Notes Placeholder 2"/>
+          <p:cNvSpPr>
+            <a:spLocks noGrp="1"/>
+          </p:cNvSpPr>
+          <p:nvPr>
+            <p:ph type="body" idx="3" sz="quarter"/>
+          </p:nvPr>
+        </p:nvSpPr>
+        <p:spPr/>
+        <p:txBody>
+          <a:bodyPr/>
+          <a:lstStyle/>
+          <a:p>
+            <a:r>
+              <a:rPr b="1" sz="1300">
+                <a:latin typeface="Geist Mono"/>
+              </a:rPr>
+              <a:t>Screening tunes one dial: sensitivity versus specificity</a:t>
+            </a:r>
+          </a:p>
+          <a:p>
+            <a:r>
+              <a:rPr b="0" sz="1100">
+                <a:latin typeface="Geist"/>
+              </a:rPr>
+              <a:t>The two bell curves are the model's cancer scores for healthy spots (left) and true melanomas (right). The dashed line is the threshold that turns a score into a yes-or-no call. Sliding it left catches more melanomas at the cost of more false alarms. Screening tools deliberately live on the left. Next: how we teach the model to see with so few images.</a:t>
+            </a:r>
+          </a:p>
+        </p:txBody>
+      </p:sp>
+      <p:sp>
+        <p:nvSpPr>
+          <p:cNvPr id="4" name="Slide Number Placeholder 3"/>
+          <p:cNvSpPr>
+            <a:spLocks noGrp="1"/>
+          </p:cNvSpPr>
+          <p:nvPr>
+            <p:ph type="sldNum" idx="5" sz="quarter"/>
+          </p:nvPr>
+        </p:nvSpPr>
+        <p:spPr/>
+      </p:sp>
+    </p:spTree>
+  </p:cSld>
+  <p:clrMapOvr>
+    <a:masterClrMapping/>
+  </p:clrMapOvr>
+</p:notes>
+</file>
+
+<file path=ppt/notesSlides/notesSlide4.xml><?xml version="1.0" encoding="utf-8"?>
+<p:notes xmlns:a="http://schemas.openxmlformats.org/drawingml/2006/main" xmlns:p="http://schemas.openxmlformats.org/presentationml/2006/main" xmlns:r="http://schemas.openxmlformats.org/officeDocument/2006/relationships">
+  <p:cSld>
+    <p:spTree>
+      <p:nvGrpSpPr>
+        <p:cNvPr id="1" name=""/>
+        <p:cNvGrpSpPr/>
+        <p:nvPr/>
+      </p:nvGrpSpPr>
+      <p:grpSpPr>
+        <a:xfrm>
+          <a:off x="0" y="0"/>
+          <a:ext cx="0" cy="0"/>
+          <a:chOff x="0" y="0"/>
+          <a:chExt cx="0" cy="0"/>
+        </a:xfrm>
+      </p:grpSpPr>
+      <p:sp>
+        <p:nvSpPr>
+          <p:cNvPr id="2" name="Slide Image Placeholder 1"/>
+          <p:cNvSpPr>
+            <a:spLocks noGrp="1"/>
+          </p:cNvSpPr>
+          <p:nvPr>
+            <p:ph type="sldImg" idx="2"/>
+          </p:nvPr>
+        </p:nvSpPr>
+        <p:spPr/>
+      </p:sp>
+      <p:sp>
+        <p:nvSpPr>
+          <p:cNvPr id="3" name="Notes Placeholder 2"/>
+          <p:cNvSpPr>
+            <a:spLocks noGrp="1"/>
+          </p:cNvSpPr>
+          <p:nvPr>
+            <p:ph type="body" idx="3" sz="quarter"/>
+          </p:nvPr>
+        </p:nvSpPr>
+        <p:spPr/>
+        <p:txBody>
+          <a:bodyPr/>
+          <a:lstStyle/>
+          <a:p>
+            <a:r>
+              <a:rPr b="1" sz="1300">
+                <a:latin typeface="Geist Mono"/>
+              </a:rPr>
+              <a:t>We borrow a brain instead of starting blank</a:t>
+            </a:r>
+          </a:p>
+          <a:p>
+            <a:r>
+              <a:rPr b="0" sz="1100">
+                <a:latin typeface="Geist"/>
+              </a:rPr>
+              <a:t>Transfer learning is the trick that makes small medical datasets workable. A network pre-trained on ordinary photos already understands edges, colors, and textures, so we only teach it the last step -- melanoma versus not. Reusing that borrowed vision is why thousands of images are enough. Now we turn to the actual dataset and task.</a:t>
+            </a:r>
+          </a:p>
+        </p:txBody>
+      </p:sp>
+      <p:sp>
+        <p:nvSpPr>
+          <p:cNvPr id="4" name="Slide Number Placeholder 3"/>
+          <p:cNvSpPr>
+            <a:spLocks noGrp="1"/>
+          </p:cNvSpPr>
+          <p:nvPr>
+            <p:ph type="sldNum" idx="5" sz="quarter"/>
+          </p:nvPr>
+        </p:nvSpPr>
+        <p:spPr/>
+      </p:sp>
+    </p:spTree>
+  </p:cSld>
+  <p:clrMapOvr>
+    <a:masterClrMapping/>
+  </p:clrMapOvr>
+</p:notes>
+</file>
+
+<file path=ppt/notesSlides/notesSlide5.xml><?xml version="1.0" encoding="utf-8"?>
+<p:notes xmlns:a="http://schemas.openxmlformats.org/drawingml/2006/main" xmlns:p="http://schemas.openxmlformats.org/presentationml/2006/main" xmlns:r="http://schemas.openxmlformats.org/officeDocument/2006/relationships">
+  <p:cSld>
+    <p:spTree>
+      <p:nvGrpSpPr>
+        <p:cNvPr id="1" name=""/>
+        <p:cNvGrpSpPr/>
+        <p:nvPr/>
+      </p:nvGrpSpPr>
+      <p:grpSpPr>
+        <a:xfrm>
+          <a:off x="0" y="0"/>
+          <a:ext cx="0" cy="0"/>
+          <a:chOff x="0" y="0"/>
+          <a:chExt cx="0" cy="0"/>
+        </a:xfrm>
+      </p:grpSpPr>
+      <p:sp>
+        <p:nvSpPr>
+          <p:cNvPr id="2" name="Slide Image Placeholder 1"/>
+          <p:cNvSpPr>
+            <a:spLocks noGrp="1"/>
+          </p:cNvSpPr>
+          <p:nvPr>
+            <p:ph type="sldImg" idx="2"/>
+          </p:nvPr>
+        </p:nvSpPr>
+        <p:spPr/>
+      </p:sp>
+      <p:sp>
+        <p:nvSpPr>
+          <p:cNvPr id="3" name="Notes Placeholder 2"/>
+          <p:cNvSpPr>
+            <a:spLocks noGrp="1"/>
+          </p:cNvSpPr>
+          <p:nvPr>
+            <p:ph type="body" idx="3" sz="quarter"/>
+          </p:nvPr>
+        </p:nvSpPr>
+        <p:spPr/>
+        <p:txBody>
+          <a:bodyPr/>
+          <a:lstStyle/>
+          <a:p>
+            <a:r>
+              <a:rPr b="1" sz="1300">
+                <a:latin typeface="Geist Mono"/>
+              </a:rPr>
+              <a:t>Methods</a:t>
+            </a:r>
+          </a:p>
+          <a:p>
+            <a:r>
+              <a:rPr b="0" sz="1100">
+                <a:latin typeface="Geist"/>
+              </a:rPr>
+              <a:t>Now we describe the data and the experiment -- the seven-class DermaMNIST task and, crucially, the honest way we chose to grade the model.</a:t>
+            </a:r>
+          </a:p>
+        </p:txBody>
+      </p:sp>
+      <p:sp>
+        <p:nvSpPr>
+          <p:cNvPr id="4" name="Slide Number Placeholder 3"/>
+          <p:cNvSpPr>
+            <a:spLocks noGrp="1"/>
+          </p:cNvSpPr>
+          <p:nvPr>
+            <p:ph type="sldNum" idx="5" sz="quarter"/>
+          </p:nvPr>
+        </p:nvSpPr>
+        <p:spPr/>
+      </p:sp>
+    </p:spTree>
+  </p:cSld>
+  <p:clrMapOvr>
+    <a:masterClrMapping/>
+  </p:clrMapOvr>
+</p:notes>
+</file>
+
+<file path=ppt/notesSlides/notesSlide6.xml><?xml version="1.0" encoding="utf-8"?>
+<p:notes xmlns:a="http://schemas.openxmlformats.org/drawingml/2006/main" xmlns:p="http://schemas.openxmlformats.org/presentationml/2006/main" xmlns:r="http://schemas.openxmlformats.org/officeDocument/2006/relationships">
+  <p:cSld>
+    <p:spTree>
+      <p:nvGrpSpPr>
+        <p:cNvPr id="1" name=""/>
+        <p:cNvGrpSpPr/>
+        <p:nvPr/>
+      </p:nvGrpSpPr>
+      <p:grpSpPr>
+        <a:xfrm>
+          <a:off x="0" y="0"/>
+          <a:ext cx="0" cy="0"/>
+          <a:chOff x="0" y="0"/>
+          <a:chExt cx="0" cy="0"/>
+        </a:xfrm>
+      </p:grpSpPr>
+      <p:sp>
+        <p:nvSpPr>
+          <p:cNvPr id="2" name="Slide Image Placeholder 1"/>
+          <p:cNvSpPr>
+            <a:spLocks noGrp="1"/>
+          </p:cNvSpPr>
+          <p:nvPr>
+            <p:ph type="sldImg" idx="2"/>
+          </p:nvPr>
+        </p:nvSpPr>
+        <p:spPr/>
+      </p:sp>
+      <p:sp>
+        <p:nvSpPr>
+          <p:cNvPr id="3" name="Notes Placeholder 2"/>
+          <p:cNvSpPr>
+            <a:spLocks noGrp="1"/>
+          </p:cNvSpPr>
+          <p:nvPr>
+            <p:ph type="body" idx="3" sz="quarter"/>
+          </p:nvPr>
+        </p:nvSpPr>
+        <p:spPr/>
+        <p:txBody>
+          <a:bodyPr/>
+          <a:lstStyle/>
+          <a:p>
+            <a:r>
+              <a:rPr b="1" sz="1300">
+                <a:latin typeface="Geist Mono"/>
+              </a:rPr>
+              <a:t>The task: seven kinds of skin spot, one that we cannot miss</a:t>
+            </a:r>
+          </a:p>
+          <a:p>
+            <a:r>
+              <a:rPr b="0" sz="1100">
+                <a:latin typeface="Geist"/>
+              </a:rPr>
+              <a:t>DermaMNIST is a clean, student-friendly version of the real HAM10000 dermatoscopy images, with seven lesion types. The key feature is severe class imbalance: harmless moles dominate. That imbalance is a trap, because a model can score high accuracy just by guessing mole every time. Next: how we trained, and more importantly how we graded honestly.</a:t>
+            </a:r>
+          </a:p>
+        </p:txBody>
+      </p:sp>
+      <p:sp>
+        <p:nvSpPr>
+          <p:cNvPr id="4" name="Slide Number Placeholder 3"/>
+          <p:cNvSpPr>
+            <a:spLocks noGrp="1"/>
+          </p:cNvSpPr>
+          <p:nvPr>
+            <p:ph type="sldNum" idx="5" sz="quarter"/>
+          </p:nvPr>
+        </p:nvSpPr>
+        <p:spPr/>
+      </p:sp>
+    </p:spTree>
+  </p:cSld>
+  <p:clrMapOvr>
+    <a:masterClrMapping/>
+  </p:clrMapOvr>
+</p:notes>
+</file>
+
+<file path=ppt/notesSlides/notesSlide7.xml><?xml version="1.0" encoding="utf-8"?>
+<p:notes xmlns:a="http://schemas.openxmlformats.org/drawingml/2006/main" xmlns:p="http://schemas.openxmlformats.org/presentationml/2006/main" xmlns:r="http://schemas.openxmlformats.org/officeDocument/2006/relationships">
+  <p:cSld>
+    <p:spTree>
+      <p:nvGrpSpPr>
+        <p:cNvPr id="1" name=""/>
+        <p:cNvGrpSpPr/>
+        <p:nvPr/>
+      </p:nvGrpSpPr>
+      <p:grpSpPr>
+        <a:xfrm>
+          <a:off x="0" y="0"/>
+          <a:ext cx="0" cy="0"/>
+          <a:chOff x="0" y="0"/>
+          <a:chExt cx="0" cy="0"/>
+        </a:xfrm>
+      </p:grpSpPr>
+      <p:sp>
+        <p:nvSpPr>
+          <p:cNvPr id="2" name="Slide Image Placeholder 1"/>
+          <p:cNvSpPr>
+            <a:spLocks noGrp="1"/>
+          </p:cNvSpPr>
+          <p:nvPr>
+            <p:ph type="sldImg" idx="2"/>
+          </p:nvPr>
+        </p:nvSpPr>
+        <p:spPr/>
+      </p:sp>
+      <p:sp>
+        <p:nvSpPr>
+          <p:cNvPr id="3" name="Notes Placeholder 2"/>
+          <p:cNvSpPr>
+            <a:spLocks noGrp="1"/>
+          </p:cNvSpPr>
+          <p:nvPr>
+            <p:ph type="body" idx="3" sz="quarter"/>
+          </p:nvPr>
+        </p:nvSpPr>
+        <p:spPr/>
+        <p:txBody>
+          <a:bodyPr/>
+          <a:lstStyle/>
+          <a:p>
+            <a:r>
+              <a:rPr b="1" sz="1300">
+                <a:latin typeface="Geist Mono"/>
+              </a:rPr>
+              <a:t>How we built it, and how we graded it honestly</a:t>
+            </a:r>
+          </a:p>
+          <a:p>
+            <a:r>
+              <a:rPr b="0" sz="1100">
+                <a:latin typeface="Geist"/>
+              </a:rPr>
+              <a:t>We ran three versions to see whether a better starting point or a fancier trick mattered more. Crucially we did not grade on accuracy alone. We tracked melanoma recall -- the fraction of real melanomas actually caught -- because on imbalanced data that is the number that reflects safety. The results section shows what we found.</a:t>
+            </a:r>
+          </a:p>
+        </p:txBody>
+      </p:sp>
+      <p:sp>
+        <p:nvSpPr>
+          <p:cNvPr id="4" name="Slide Number Placeholder 3"/>
+          <p:cNvSpPr>
+            <a:spLocks noGrp="1"/>
+          </p:cNvSpPr>
+          <p:nvPr>
+            <p:ph type="sldNum" idx="5" sz="quarter"/>
+          </p:nvPr>
+        </p:nvSpPr>
+        <p:spPr/>
+      </p:sp>
+    </p:spTree>
+  </p:cSld>
+  <p:clrMapOvr>
+    <a:masterClrMapping/>
+  </p:clrMapOvr>
+</p:notes>
+</file>
+
+<file path=ppt/notesSlides/notesSlide8.xml><?xml version="1.0" encoding="utf-8"?>
+<p:notes xmlns:a="http://schemas.openxmlformats.org/drawingml/2006/main" xmlns:p="http://schemas.openxmlformats.org/presentationml/2006/main" xmlns:r="http://schemas.openxmlformats.org/officeDocument/2006/relationships">
+  <p:cSld>
+    <p:spTree>
+      <p:nvGrpSpPr>
+        <p:cNvPr id="1" name=""/>
+        <p:cNvGrpSpPr/>
+        <p:nvPr/>
+      </p:nvGrpSpPr>
+      <p:grpSpPr>
+        <a:xfrm>
+          <a:off x="0" y="0"/>
+          <a:ext cx="0" cy="0"/>
+          <a:chOff x="0" y="0"/>
+          <a:chExt cx="0" cy="0"/>
+        </a:xfrm>
+      </p:grpSpPr>
+      <p:sp>
+        <p:nvSpPr>
+          <p:cNvPr id="2" name="Slide Image Placeholder 1"/>
+          <p:cNvSpPr>
+            <a:spLocks noGrp="1"/>
+          </p:cNvSpPr>
+          <p:nvPr>
+            <p:ph type="sldImg" idx="2"/>
+          </p:nvPr>
+        </p:nvSpPr>
+        <p:spPr/>
+      </p:sp>
+      <p:sp>
+        <p:nvSpPr>
+          <p:cNvPr id="3" name="Notes Placeholder 2"/>
+          <p:cNvSpPr>
+            <a:spLocks noGrp="1"/>
+          </p:cNvSpPr>
+          <p:nvPr>
+            <p:ph type="body" idx="3" sz="quarter"/>
+          </p:nvPr>
+        </p:nvSpPr>
+        <p:spPr/>
+        <p:txBody>
+          <a:bodyPr/>
+          <a:lstStyle/>
+          <a:p>
+            <a:r>
+              <a:rPr b="1" sz="1300">
+                <a:latin typeface="Geist Mono"/>
+              </a:rPr>
+              <a:t>Results</a:t>
+            </a:r>
+          </a:p>
+          <a:p>
+            <a:r>
+              <a:rPr b="0" sz="1100">
+                <a:latin typeface="Geist"/>
+              </a:rPr>
+              <a:t>Here are the real numbers. Watch how a respectable-looking accuracy falls apart the moment we look at the rare, dangerous classes.</a:t>
+            </a:r>
+          </a:p>
+        </p:txBody>
+      </p:sp>
+      <p:sp>
+        <p:nvSpPr>
+          <p:cNvPr id="4" name="Slide Number Placeholder 3"/>
+          <p:cNvSpPr>
+            <a:spLocks noGrp="1"/>
+          </p:cNvSpPr>
+          <p:nvPr>
+            <p:ph type="sldNum" idx="5" sz="quarter"/>
+          </p:nvPr>
+        </p:nvSpPr>
+        <p:spPr/>
+      </p:sp>
+    </p:spTree>
+  </p:cSld>
+  <p:clrMapOvr>
+    <a:masterClrMapping/>
+  </p:clrMapOvr>
+</p:notes>
+</file>
+
+<file path=ppt/notesSlides/notesSlide9.xml><?xml version="1.0" encoding="utf-8"?>
+<p:notes xmlns:a="http://schemas.openxmlformats.org/drawingml/2006/main" xmlns:p="http://schemas.openxmlformats.org/presentationml/2006/main" xmlns:r="http://schemas.openxmlformats.org/officeDocument/2006/relationships">
+  <p:cSld>
+    <p:spTree>
+      <p:nvGrpSpPr>
+        <p:cNvPr id="1" name=""/>
+        <p:cNvGrpSpPr/>
+        <p:nvPr/>
+      </p:nvGrpSpPr>
+      <p:grpSpPr>
+        <a:xfrm>
+          <a:off x="0" y="0"/>
+          <a:ext cx="0" cy="0"/>
+          <a:chOff x="0" y="0"/>
+          <a:chExt cx="0" cy="0"/>
+        </a:xfrm>
+      </p:grpSpPr>
+      <p:sp>
+        <p:nvSpPr>
+          <p:cNvPr id="2" name="Slide Image Placeholder 1"/>
+          <p:cNvSpPr>
+            <a:spLocks noGrp="1"/>
+          </p:cNvSpPr>
+          <p:nvPr>
+            <p:ph type="sldImg" idx="2"/>
+          </p:nvPr>
+        </p:nvSpPr>
+        <p:spPr/>
+      </p:sp>
+      <p:sp>
+        <p:nvSpPr>
+          <p:cNvPr id="3" name="Notes Placeholder 2"/>
+          <p:cNvSpPr>
+            <a:spLocks noGrp="1"/>
+          </p:cNvSpPr>
+          <p:nvPr>
+            <p:ph type="body" idx="3" sz="quarter"/>
+          </p:nvPr>
+        </p:nvSpPr>
+        <p:spPr/>
+        <p:txBody>
+          <a:bodyPr/>
+          <a:lstStyle/>
+          <a:p>
+            <a:r>
+              <a:rPr b="1" sz="1300">
+                <a:latin typeface="Geist Mono"/>
+              </a:rPr>
+              <a:t>A better starting point beat a fancier model</a:t>
+            </a:r>
+          </a:p>
+          <a:p>
+            <a:r>
+              <a:rPr b="0" sz="1100">
+                <a:latin typeface="Geist"/>
+              </a:rPr>
+              <a:t>All three bars sit at about 0.68 accuracy -- from-scratch, pretrained, and pretrained-plus-augmentation are basically tied. The lesson is humbling: when the data is this small and skewed, the data sets the ceiling, not the cleverness of the model. But this accuracy number is about to mislead us, which the next slide reveals.</a:t>
+            </a:r>
+          </a:p>
+        </p:txBody>
+      </p:sp>
+      <p:sp>
+        <p:nvSpPr>
+          <p:cNvPr id="4" name="Slide Number Placeholder 3"/>
+          <p:cNvSpPr>
+            <a:spLocks noGrp="1"/>
+          </p:cNvSpPr>
+          <p:nvPr>
+            <p:ph type="sldNum" idx="5" sz="quarter"/>
+          </p:nvPr>
+        </p:nvSpPr>
+        <p:spPr/>
+      </p:sp>
+    </p:spTree>
+  </p:cSld>
+  <p:clrMapOvr>
+    <a:masterClrMapping/>
+  </p:clrMapOvr>
+</p:notes>
 </file>
 
 <file path=ppt/slideLayouts/slideLayout1.xml><?xml version="1.0" encoding="utf-8"?>
@@ -3767,16 +5413,84 @@
           </a:p>
         </p:txBody>
       </p:sp>
-      <p:sp>
-        <p:nvSpPr>
-          <p:cNvPr id="7" name="TextBox 6"/>
+      <p:pic>
+        <p:nvPicPr>
+          <p:cNvPr id="7" name="Picture 6" descr="data_beats_model.png"/>
+          <p:cNvPicPr>
+            <a:picLocks noChangeAspect="1"/>
+          </p:cNvPicPr>
+          <p:nvPr/>
+        </p:nvPicPr>
+        <p:blipFill>
+          <a:blip r:embed="rId2"/>
+          <a:stretch>
+            <a:fillRect/>
+          </a:stretch>
+        </p:blipFill>
+        <p:spPr>
+          <a:xfrm>
+            <a:off x="457200" y="1406972"/>
+            <a:ext cx="6298387" cy="4364095"/>
+          </a:xfrm>
+          <a:prstGeom prst="rect">
+            <a:avLst/>
+          </a:prstGeom>
+        </p:spPr>
+      </p:pic>
+      <p:sp>
+        <p:nvSpPr>
+          <p:cNvPr id="8" name="Rectangle 7"/>
+          <p:cNvSpPr/>
+          <p:nvPr/>
+        </p:nvSpPr>
+        <p:spPr>
+          <a:xfrm>
+            <a:off x="7167067" y="1216152"/>
+            <a:ext cx="73152" cy="4553712"/>
+          </a:xfrm>
+          <a:prstGeom prst="rect">
+            <a:avLst/>
+          </a:prstGeom>
+          <a:solidFill>
+            <a:srgbClr val="F0C840"/>
+          </a:solidFill>
+          <a:ln>
+            <a:noFill/>
+          </a:ln>
+          <a:effectLst/>
+        </p:spPr>
+        <p:style>
+          <a:lnRef idx="1">
+            <a:schemeClr val="accent1"/>
+          </a:lnRef>
+          <a:fillRef idx="3">
+            <a:schemeClr val="accent1"/>
+          </a:fillRef>
+          <a:effectRef idx="2">
+            <a:schemeClr val="accent1"/>
+          </a:effectRef>
+          <a:fontRef idx="minor">
+            <a:schemeClr val="lt1"/>
+          </a:fontRef>
+        </p:style>
+        <p:txBody>
+          <a:bodyPr rtlCol="0" anchor="ctr"/>
+          <a:lstStyle/>
+          <a:p>
+            <a:pPr algn="ctr"/>
+          </a:p>
+        </p:txBody>
+      </p:sp>
+      <p:sp>
+        <p:nvSpPr>
+          <p:cNvPr id="9" name="TextBox 8"/>
           <p:cNvSpPr txBox="1"/>
           <p:nvPr/>
         </p:nvSpPr>
         <p:spPr>
           <a:xfrm>
-            <a:off x="548640" y="1234440"/>
-            <a:ext cx="11064240" cy="896112"/>
+            <a:off x="7441387" y="1097280"/>
+            <a:ext cx="4226356" cy="4800599"/>
           </a:xfrm>
           <a:prstGeom prst="rect">
             <a:avLst/>
@@ -3784,14 +5498,14 @@
           <a:noFill/>
         </p:spPr>
         <p:txBody>
-          <a:bodyPr wrap="square" anchor="t" lIns="0" rIns="0" tIns="0" bIns="0">
+          <a:bodyPr wrap="square" anchor="ctr" lIns="0" rIns="0" tIns="0" bIns="0">
             <a:spAutoFit/>
           </a:bodyPr>
           <a:lstStyle/>
           <a:p>
             <a:pPr algn="l"/>
             <a:r>
-              <a:rPr sz="1400" b="0" i="0">
+              <a:rPr sz="1700" b="0" i="0">
                 <a:solidFill>
                   <a:srgbClr val="14141C"/>
                 </a:solidFill>
@@ -4022,16 +5736,84 @@
           </a:p>
         </p:txBody>
       </p:sp>
-      <p:sp>
-        <p:nvSpPr>
-          <p:cNvPr id="7" name="TextBox 6"/>
+      <p:pic>
+        <p:nvPicPr>
+          <p:cNvPr id="7" name="Picture 6" descr="confusion.png"/>
+          <p:cNvPicPr>
+            <a:picLocks noChangeAspect="1"/>
+          </p:cNvPicPr>
+          <p:nvPr/>
+        </p:nvPicPr>
+        <p:blipFill>
+          <a:blip r:embed="rId2"/>
+          <a:stretch>
+            <a:fillRect/>
+          </a:stretch>
+        </p:blipFill>
+        <p:spPr>
+          <a:xfrm>
+            <a:off x="830748" y="1097280"/>
+            <a:ext cx="5101406" cy="4983479"/>
+          </a:xfrm>
+          <a:prstGeom prst="rect">
+            <a:avLst/>
+          </a:prstGeom>
+        </p:spPr>
+      </p:pic>
+      <p:sp>
+        <p:nvSpPr>
+          <p:cNvPr id="8" name="Rectangle 7"/>
+          <p:cNvSpPr/>
+          <p:nvPr/>
+        </p:nvSpPr>
+        <p:spPr>
+          <a:xfrm>
+            <a:off x="6717182" y="1216152"/>
+            <a:ext cx="73152" cy="4553712"/>
+          </a:xfrm>
+          <a:prstGeom prst="rect">
+            <a:avLst/>
+          </a:prstGeom>
+          <a:solidFill>
+            <a:srgbClr val="F0C840"/>
+          </a:solidFill>
+          <a:ln>
+            <a:noFill/>
+          </a:ln>
+          <a:effectLst/>
+        </p:spPr>
+        <p:style>
+          <a:lnRef idx="1">
+            <a:schemeClr val="accent1"/>
+          </a:lnRef>
+          <a:fillRef idx="3">
+            <a:schemeClr val="accent1"/>
+          </a:fillRef>
+          <a:effectRef idx="2">
+            <a:schemeClr val="accent1"/>
+          </a:effectRef>
+          <a:fontRef idx="minor">
+            <a:schemeClr val="lt1"/>
+          </a:fontRef>
+        </p:style>
+        <p:txBody>
+          <a:bodyPr rtlCol="0" anchor="ctr"/>
+          <a:lstStyle/>
+          <a:p>
+            <a:pPr algn="ctr"/>
+          </a:p>
+        </p:txBody>
+      </p:sp>
+      <p:sp>
+        <p:nvSpPr>
+          <p:cNvPr id="9" name="TextBox 8"/>
           <p:cNvSpPr txBox="1"/>
           <p:nvPr/>
         </p:nvSpPr>
         <p:spPr>
           <a:xfrm>
-            <a:off x="548640" y="1234440"/>
-            <a:ext cx="11064240" cy="896112"/>
+            <a:off x="6991502" y="1097280"/>
+            <a:ext cx="4676241" cy="4800599"/>
           </a:xfrm>
           <a:prstGeom prst="rect">
             <a:avLst/>
@@ -4039,20 +5821,20 @@
           <a:noFill/>
         </p:spPr>
         <p:txBody>
-          <a:bodyPr wrap="square" anchor="t" lIns="0" rIns="0" tIns="0" bIns="0">
+          <a:bodyPr wrap="square" anchor="ctr" lIns="0" rIns="0" tIns="0" bIns="0">
             <a:spAutoFit/>
           </a:bodyPr>
           <a:lstStyle/>
           <a:p>
             <a:pPr algn="l"/>
             <a:r>
-              <a:rPr sz="1400" b="0" i="0">
+              <a:rPr sz="1700" b="0" i="0">
                 <a:solidFill>
                   <a:srgbClr val="14141C"/>
                 </a:solidFill>
                 <a:latin typeface="Geist"/>
               </a:rPr>
-              <a:t>Overall accuracy is one number; the confusion matrix shows which mistakes the model actually makes. The diagonal is correct and everything off it is an error, and one column swallows almost everything – the model funnels nearly every spot, cancer or not, into the common harmless-mole class.</a:t>
+              <a:t>Overall accuracy is one number; the confusion matrix shows which mistakes the model actually makes. The diagonal is correct and everything off it is an error, and one column swallows almost everything -- the model funnels nearly every spot, cancer or not, into the common harmless-mole class.</a:t>
             </a:r>
           </a:p>
         </p:txBody>
@@ -4277,16 +6059,84 @@
           </a:p>
         </p:txBody>
       </p:sp>
-      <p:sp>
-        <p:nvSpPr>
-          <p:cNvPr id="7" name="TextBox 6"/>
+      <p:pic>
+        <p:nvPicPr>
+          <p:cNvPr id="7" name="Picture 6" descr="per_class_fairness.png"/>
+          <p:cNvPicPr>
+            <a:picLocks noChangeAspect="1"/>
+          </p:cNvPicPr>
+          <p:nvPr/>
+        </p:nvPicPr>
+        <p:blipFill>
+          <a:blip r:embed="rId2"/>
+          <a:stretch>
+            <a:fillRect/>
+          </a:stretch>
+        </p:blipFill>
+        <p:spPr>
+          <a:xfrm>
+            <a:off x="457200" y="1570418"/>
+            <a:ext cx="6523329" cy="4037203"/>
+          </a:xfrm>
+          <a:prstGeom prst="rect">
+            <a:avLst/>
+          </a:prstGeom>
+        </p:spPr>
+      </p:pic>
+      <p:sp>
+        <p:nvSpPr>
+          <p:cNvPr id="8" name="Rectangle 7"/>
+          <p:cNvSpPr/>
+          <p:nvPr/>
+        </p:nvSpPr>
+        <p:spPr>
+          <a:xfrm>
+            <a:off x="7392009" y="1216152"/>
+            <a:ext cx="73152" cy="4553712"/>
+          </a:xfrm>
+          <a:prstGeom prst="rect">
+            <a:avLst/>
+          </a:prstGeom>
+          <a:solidFill>
+            <a:srgbClr val="F0C840"/>
+          </a:solidFill>
+          <a:ln>
+            <a:noFill/>
+          </a:ln>
+          <a:effectLst/>
+        </p:spPr>
+        <p:style>
+          <a:lnRef idx="1">
+            <a:schemeClr val="accent1"/>
+          </a:lnRef>
+          <a:fillRef idx="3">
+            <a:schemeClr val="accent1"/>
+          </a:fillRef>
+          <a:effectRef idx="2">
+            <a:schemeClr val="accent1"/>
+          </a:effectRef>
+          <a:fontRef idx="minor">
+            <a:schemeClr val="lt1"/>
+          </a:fontRef>
+        </p:style>
+        <p:txBody>
+          <a:bodyPr rtlCol="0" anchor="ctr"/>
+          <a:lstStyle/>
+          <a:p>
+            <a:pPr algn="ctr"/>
+          </a:p>
+        </p:txBody>
+      </p:sp>
+      <p:sp>
+        <p:nvSpPr>
+          <p:cNvPr id="9" name="TextBox 8"/>
           <p:cNvSpPr txBox="1"/>
           <p:nvPr/>
         </p:nvSpPr>
         <p:spPr>
           <a:xfrm>
-            <a:off x="548640" y="1234440"/>
-            <a:ext cx="11064240" cy="896112"/>
+            <a:off x="7666329" y="1097280"/>
+            <a:ext cx="4001414" cy="4800599"/>
           </a:xfrm>
           <a:prstGeom prst="rect">
             <a:avLst/>
@@ -4294,14 +6144,14 @@
           <a:noFill/>
         </p:spPr>
         <p:txBody>
-          <a:bodyPr wrap="square" anchor="t" lIns="0" rIns="0" tIns="0" bIns="0">
+          <a:bodyPr wrap="square" anchor="ctr" lIns="0" rIns="0" tIns="0" bIns="0">
             <a:spAutoFit/>
           </a:bodyPr>
           <a:lstStyle/>
           <a:p>
             <a:pPr algn="l"/>
             <a:r>
-              <a:rPr sz="1400" b="0" i="0">
+              <a:rPr sz="1700" b="0" i="0">
                 <a:solidFill>
                   <a:srgbClr val="14141C"/>
                 </a:solidFill>
@@ -4540,8 +6390,8 @@
         </p:nvSpPr>
         <p:spPr>
           <a:xfrm>
-            <a:off x="548640" y="1234440"/>
-            <a:ext cx="11064240" cy="896112"/>
+            <a:off x="594360" y="1371600"/>
+            <a:ext cx="5173675" cy="411480"/>
           </a:xfrm>
           <a:prstGeom prst="rect">
             <a:avLst/>
@@ -4556,13 +6406,311 @@
           <a:p>
             <a:pPr algn="l"/>
             <a:r>
-              <a:rPr sz="1400" b="0" i="0">
+              <a:rPr sz="1700" b="1" i="0">
+                <a:solidFill>
+                  <a:srgbClr val="FF1493"/>
+                </a:solidFill>
+                <a:latin typeface="Geist Mono"/>
+              </a:rPr>
+              <a:t>MELANOMA RECALL</a:t>
+            </a:r>
+          </a:p>
+        </p:txBody>
+      </p:sp>
+      <p:sp>
+        <p:nvSpPr>
+          <p:cNvPr id="8" name="TextBox 7"/>
+          <p:cNvSpPr txBox="1"/>
+          <p:nvPr/>
+        </p:nvSpPr>
+        <p:spPr>
+          <a:xfrm>
+            <a:off x="457200" y="1709928"/>
+            <a:ext cx="5173675" cy="1737360"/>
+          </a:xfrm>
+          <a:prstGeom prst="rect">
+            <a:avLst/>
+          </a:prstGeom>
+          <a:noFill/>
+        </p:spPr>
+        <p:txBody>
+          <a:bodyPr wrap="square" anchor="t" lIns="0" rIns="0" tIns="0" bIns="0">
+            <a:spAutoFit/>
+          </a:bodyPr>
+          <a:lstStyle/>
+          <a:p>
+            <a:pPr algn="l"/>
+            <a:r>
+              <a:rPr sz="11800" b="1" i="0">
+                <a:solidFill>
+                  <a:srgbClr val="FF1493"/>
+                </a:solidFill>
+                <a:latin typeface="Geist Mono"/>
+              </a:rPr>
+              <a:t>4.5%</a:t>
+            </a:r>
+          </a:p>
+        </p:txBody>
+      </p:sp>
+      <p:sp>
+        <p:nvSpPr>
+          <p:cNvPr id="9" name="TextBox 8"/>
+          <p:cNvSpPr txBox="1"/>
+          <p:nvPr/>
+        </p:nvSpPr>
+        <p:spPr>
+          <a:xfrm>
+            <a:off x="612648" y="3383280"/>
+            <a:ext cx="5173675" cy="365760"/>
+          </a:xfrm>
+          <a:prstGeom prst="rect">
+            <a:avLst/>
+          </a:prstGeom>
+          <a:noFill/>
+        </p:spPr>
+        <p:txBody>
+          <a:bodyPr wrap="square" anchor="t" lIns="0" rIns="0" tIns="0" bIns="0">
+            <a:spAutoFit/>
+          </a:bodyPr>
+          <a:lstStyle/>
+          <a:p>
+            <a:pPr algn="l"/>
+            <a:r>
+              <a:rPr sz="1500" b="0" i="0">
+                <a:solidFill>
+                  <a:srgbClr val="555560"/>
+                </a:solidFill>
+                <a:latin typeface="Geist"/>
+              </a:rPr>
+              <a:t>only 10 of 223 melanomas caught</a:t>
+            </a:r>
+          </a:p>
+        </p:txBody>
+      </p:sp>
+      <p:sp>
+        <p:nvSpPr>
+          <p:cNvPr id="10" name="Rectangle 9"/>
+          <p:cNvSpPr/>
+          <p:nvPr/>
+        </p:nvSpPr>
+        <p:spPr>
+          <a:xfrm>
+            <a:off x="6080760" y="1463040"/>
+            <a:ext cx="18288" cy="2240280"/>
+          </a:xfrm>
+          <a:prstGeom prst="rect">
+            <a:avLst/>
+          </a:prstGeom>
+          <a:solidFill>
+            <a:srgbClr val="DDDDDD"/>
+          </a:solidFill>
+          <a:ln>
+            <a:noFill/>
+          </a:ln>
+          <a:effectLst/>
+        </p:spPr>
+        <p:style>
+          <a:lnRef idx="1">
+            <a:schemeClr val="accent1"/>
+          </a:lnRef>
+          <a:fillRef idx="3">
+            <a:schemeClr val="accent1"/>
+          </a:fillRef>
+          <a:effectRef idx="2">
+            <a:schemeClr val="accent1"/>
+          </a:effectRef>
+          <a:fontRef idx="minor">
+            <a:schemeClr val="lt1"/>
+          </a:fontRef>
+        </p:style>
+        <p:txBody>
+          <a:bodyPr rtlCol="0" anchor="ctr"/>
+          <a:lstStyle/>
+          <a:p>
+            <a:pPr algn="ctr"/>
+          </a:p>
+        </p:txBody>
+      </p:sp>
+      <p:sp>
+        <p:nvSpPr>
+          <p:cNvPr id="11" name="TextBox 10"/>
+          <p:cNvSpPr txBox="1"/>
+          <p:nvPr/>
+        </p:nvSpPr>
+        <p:spPr>
+          <a:xfrm>
+            <a:off x="6586880" y="1371600"/>
+            <a:ext cx="4948732" cy="411480"/>
+          </a:xfrm>
+          <a:prstGeom prst="rect">
+            <a:avLst/>
+          </a:prstGeom>
+          <a:noFill/>
+        </p:spPr>
+        <p:txBody>
+          <a:bodyPr wrap="square" anchor="t" lIns="0" rIns="0" tIns="0" bIns="0">
+            <a:spAutoFit/>
+          </a:bodyPr>
+          <a:lstStyle/>
+          <a:p>
+            <a:pPr algn="l"/>
+            <a:r>
+              <a:rPr sz="1700" b="1" i="0">
+                <a:solidFill>
+                  <a:srgbClr val="14141C"/>
+                </a:solidFill>
+                <a:latin typeface="Geist Mono"/>
+              </a:rPr>
+              <a:t>CANCERS MISSED</a:t>
+            </a:r>
+          </a:p>
+        </p:txBody>
+      </p:sp>
+      <p:sp>
+        <p:nvSpPr>
+          <p:cNvPr id="12" name="TextBox 11"/>
+          <p:cNvSpPr txBox="1"/>
+          <p:nvPr/>
+        </p:nvSpPr>
+        <p:spPr>
+          <a:xfrm>
+            <a:off x="6474409" y="1709928"/>
+            <a:ext cx="4948732" cy="1737360"/>
+          </a:xfrm>
+          <a:prstGeom prst="rect">
+            <a:avLst/>
+          </a:prstGeom>
+          <a:noFill/>
+        </p:spPr>
+        <p:txBody>
+          <a:bodyPr wrap="square" anchor="t" lIns="0" rIns="0" tIns="0" bIns="0">
+            <a:spAutoFit/>
+          </a:bodyPr>
+          <a:lstStyle/>
+          <a:p>
+            <a:pPr algn="l"/>
+            <a:r>
+              <a:rPr sz="11800" b="1" i="0">
+                <a:solidFill>
+                  <a:srgbClr val="14141C"/>
+                </a:solidFill>
+                <a:latin typeface="Geist Mono"/>
+              </a:rPr>
+              <a:t>213</a:t>
+            </a:r>
+          </a:p>
+        </p:txBody>
+      </p:sp>
+      <p:sp>
+        <p:nvSpPr>
+          <p:cNvPr id="13" name="TextBox 12"/>
+          <p:cNvSpPr txBox="1"/>
+          <p:nvPr/>
+        </p:nvSpPr>
+        <p:spPr>
+          <a:xfrm>
+            <a:off x="6586880" y="3383280"/>
+            <a:ext cx="4948732" cy="365760"/>
+          </a:xfrm>
+          <a:prstGeom prst="rect">
+            <a:avLst/>
+          </a:prstGeom>
+          <a:noFill/>
+        </p:spPr>
+        <p:txBody>
+          <a:bodyPr wrap="square" anchor="t" lIns="0" rIns="0" tIns="0" bIns="0">
+            <a:spAutoFit/>
+          </a:bodyPr>
+          <a:lstStyle/>
+          <a:p>
+            <a:pPr algn="l"/>
+            <a:r>
+              <a:rPr sz="1500" b="0" i="0">
+                <a:solidFill>
+                  <a:srgbClr val="555560"/>
+                </a:solidFill>
+                <a:latin typeface="Geist"/>
+              </a:rPr>
+              <a:t>waved through as harmless</a:t>
+            </a:r>
+          </a:p>
+        </p:txBody>
+      </p:sp>
+      <p:sp>
+        <p:nvSpPr>
+          <p:cNvPr id="14" name="Rectangle 13"/>
+          <p:cNvSpPr/>
+          <p:nvPr/>
+        </p:nvSpPr>
+        <p:spPr>
+          <a:xfrm>
+            <a:off x="594360" y="5093207"/>
+            <a:ext cx="10972800" cy="18288"/>
+          </a:xfrm>
+          <a:prstGeom prst="rect">
+            <a:avLst/>
+          </a:prstGeom>
+          <a:solidFill>
+            <a:srgbClr val="F0C840"/>
+          </a:solidFill>
+          <a:ln>
+            <a:noFill/>
+          </a:ln>
+          <a:effectLst/>
+        </p:spPr>
+        <p:style>
+          <a:lnRef idx="1">
+            <a:schemeClr val="accent1"/>
+          </a:lnRef>
+          <a:fillRef idx="3">
+            <a:schemeClr val="accent1"/>
+          </a:fillRef>
+          <a:effectRef idx="2">
+            <a:schemeClr val="accent1"/>
+          </a:effectRef>
+          <a:fontRef idx="minor">
+            <a:schemeClr val="lt1"/>
+          </a:fontRef>
+        </p:style>
+        <p:txBody>
+          <a:bodyPr rtlCol="0" anchor="ctr"/>
+          <a:lstStyle/>
+          <a:p>
+            <a:pPr algn="ctr"/>
+          </a:p>
+        </p:txBody>
+      </p:sp>
+      <p:sp>
+        <p:nvSpPr>
+          <p:cNvPr id="15" name="TextBox 14"/>
+          <p:cNvSpPr txBox="1"/>
+          <p:nvPr/>
+        </p:nvSpPr>
+        <p:spPr>
+          <a:xfrm>
+            <a:off x="594360" y="5212079"/>
+            <a:ext cx="10972800" cy="960120"/>
+          </a:xfrm>
+          <a:prstGeom prst="rect">
+            <a:avLst/>
+          </a:prstGeom>
+          <a:noFill/>
+        </p:spPr>
+        <p:txBody>
+          <a:bodyPr wrap="square" anchor="ctr" lIns="0" rIns="0" tIns="0" bIns="0">
+            <a:spAutoFit/>
+          </a:bodyPr>
+          <a:lstStyle/>
+          <a:p>
+            <a:pPr algn="l"/>
+            <a:r>
+              <a:rPr sz="1800" b="0" i="1">
                 <a:solidFill>
                   <a:srgbClr val="14141C"/>
                 </a:solidFill>
                 <a:latin typeface="Geist"/>
               </a:rPr>
-              <a:t>Here is the sentence that should stop the room. Our model reached sixty-eight percent overall accuracy and still caught only ten of the two hundred twenty-three real melanomas in the test set. It missed two hundred thirteen cancers – proof that a healthy-looking accuracy number can hide a screening tool that is dangerous.</a:t>
+              <a:t>Sixty-eight percent overall accuracy hid a tool that missed almost every cancer. A healthy-looking number can conceal a screening tool that is dangerous.</a:t>
             </a:r>
           </a:p>
         </p:txBody>
@@ -4795,8 +6943,8 @@
         </p:nvSpPr>
         <p:spPr>
           <a:xfrm>
-            <a:off x="548640" y="1234440"/>
-            <a:ext cx="11064240" cy="896112"/>
+            <a:off x="548640" y="1097280"/>
+            <a:ext cx="11064240" cy="1051560"/>
           </a:xfrm>
           <a:prstGeom prst="rect">
             <a:avLst/>
@@ -4811,17 +6959,41 @@
           <a:p>
             <a:pPr algn="l"/>
             <a:r>
-              <a:rPr sz="1400" b="0" i="0">
+              <a:rPr sz="1600" b="0" i="0">
                 <a:solidFill>
                   <a:srgbClr val="14141C"/>
                 </a:solidFill>
                 <a:latin typeface="Geist"/>
               </a:rPr>
-              <a:t>The most revealing slide in any talk is the model’s mistakes. Look at how many true melanomas it labeled as harmless moles: every one of those is a false negative, the exact error a screening tool exists to prevent, and the reason a dermatologist would want a second look at all of them.</a:t>
-            </a:r>
-          </a:p>
-        </p:txBody>
-      </p:sp>
+              <a:t>The most revealing slide in any talk is the model's mistakes. Look how many true melanomas it labeled as harmless moles: every one is a false negative, the exact error a screening tool exists to prevent, and the reason a dermatologist would want a second look at all of them.</a:t>
+            </a:r>
+          </a:p>
+        </p:txBody>
+      </p:sp>
+      <p:pic>
+        <p:nvPicPr>
+          <p:cNvPr id="8" name="Picture 7" descr="failures.png"/>
+          <p:cNvPicPr>
+            <a:picLocks noChangeAspect="1"/>
+          </p:cNvPicPr>
+          <p:nvPr/>
+        </p:nvPicPr>
+        <p:blipFill>
+          <a:blip r:embed="rId2"/>
+          <a:stretch>
+            <a:fillRect/>
+          </a:stretch>
+        </p:blipFill>
+        <p:spPr>
+          <a:xfrm>
+            <a:off x="457200" y="2368459"/>
+            <a:ext cx="11247120" cy="2075361"/>
+          </a:xfrm>
+          <a:prstGeom prst="rect">
+            <a:avLst/>
+          </a:prstGeom>
+        </p:spPr>
+      </p:pic>
     </p:spTree>
   </p:cSld>
   <p:clrMapOvr>
@@ -5497,8 +7669,8 @@
         </p:nvSpPr>
         <p:spPr>
           <a:xfrm>
-            <a:off x="548640" y="1234440"/>
-            <a:ext cx="11064240" cy="1499616"/>
+            <a:off x="457200" y="1051560"/>
+            <a:ext cx="5848502" cy="4846319"/>
           </a:xfrm>
           <a:prstGeom prst="rect">
             <a:avLst/>
@@ -5506,20 +7678,178 @@
           <a:noFill/>
         </p:spPr>
         <p:txBody>
-          <a:bodyPr wrap="square" anchor="t" lIns="0" rIns="0" tIns="0" bIns="0">
+          <a:bodyPr wrap="square" anchor="ctr" lIns="0" rIns="0" tIns="0" bIns="0">
             <a:spAutoFit/>
           </a:bodyPr>
           <a:lstStyle/>
           <a:p>
             <a:pPr algn="l"/>
             <a:r>
-              <a:rPr sz="1400" b="0" i="0">
+              <a:rPr sz="1800" b="0" i="0">
                 <a:solidFill>
                   <a:srgbClr val="14141C"/>
                 </a:solidFill>
                 <a:latin typeface="Geist"/>
               </a:rPr>
-              <a:t>This model is far too small and simple to trust on a real patient: sixty-four-pixel grayscale thumbnails throw away the color and fine texture that dermatologists and real systems rely on, and its melanoma recall is nowhere near safe (Wei 2024). A real tool would train on full-resolution color images, deliberately tune its threshold toward high sensitivity, and be validated across many hospitals first. The point was never the score – it was learning the screening mindset: never miss the dangerous case, and never let a shiny number fool you.</a:t>
+              <a:t>This model is far too small and simple to trust on a real patient: sixty-four-pixel grayscale thumbnails throw away the color and fine texture that dermatologists and real systems rely on, and its melanoma recall is nowhere near safe (Wei 2024). The point was never the score -- it was learning the screening mindset: never miss the dangerous case, and never let a shiny number fool you.</a:t>
+            </a:r>
+          </a:p>
+        </p:txBody>
+      </p:sp>
+      <p:sp>
+        <p:nvSpPr>
+          <p:cNvPr id="8" name="Rectangle 7"/>
+          <p:cNvSpPr/>
+          <p:nvPr/>
+        </p:nvSpPr>
+        <p:spPr>
+          <a:xfrm>
+            <a:off x="6924294" y="2537459"/>
+            <a:ext cx="4780026" cy="1874519"/>
+          </a:xfrm>
+          <a:prstGeom prst="rect">
+            <a:avLst/>
+          </a:prstGeom>
+          <a:solidFill>
+            <a:srgbClr val="FAFAFC"/>
+          </a:solidFill>
+          <a:ln>
+            <a:noFill/>
+          </a:ln>
+          <a:effectLst/>
+        </p:spPr>
+        <p:style>
+          <a:lnRef idx="1">
+            <a:schemeClr val="accent1"/>
+          </a:lnRef>
+          <a:fillRef idx="3">
+            <a:schemeClr val="accent1"/>
+          </a:fillRef>
+          <a:effectRef idx="2">
+            <a:schemeClr val="accent1"/>
+          </a:effectRef>
+          <a:fontRef idx="minor">
+            <a:schemeClr val="lt1"/>
+          </a:fontRef>
+        </p:style>
+        <p:txBody>
+          <a:bodyPr rtlCol="0" anchor="ctr"/>
+          <a:lstStyle/>
+          <a:p>
+            <a:pPr algn="ctr"/>
+          </a:p>
+        </p:txBody>
+      </p:sp>
+      <p:sp>
+        <p:nvSpPr>
+          <p:cNvPr id="9" name="Rectangle 8"/>
+          <p:cNvSpPr/>
+          <p:nvPr/>
+        </p:nvSpPr>
+        <p:spPr>
+          <a:xfrm>
+            <a:off x="6924294" y="2537459"/>
+            <a:ext cx="4780026" cy="54864"/>
+          </a:xfrm>
+          <a:prstGeom prst="rect">
+            <a:avLst/>
+          </a:prstGeom>
+          <a:solidFill>
+            <a:srgbClr val="8A2BE2"/>
+          </a:solidFill>
+          <a:ln>
+            <a:noFill/>
+          </a:ln>
+          <a:effectLst/>
+        </p:spPr>
+        <p:style>
+          <a:lnRef idx="1">
+            <a:schemeClr val="accent1"/>
+          </a:lnRef>
+          <a:fillRef idx="3">
+            <a:schemeClr val="accent1"/>
+          </a:fillRef>
+          <a:effectRef idx="2">
+            <a:schemeClr val="accent1"/>
+          </a:effectRef>
+          <a:fontRef idx="minor">
+            <a:schemeClr val="lt1"/>
+          </a:fontRef>
+        </p:style>
+        <p:txBody>
+          <a:bodyPr rtlCol="0" anchor="ctr"/>
+          <a:lstStyle/>
+          <a:p>
+            <a:pPr algn="ctr"/>
+          </a:p>
+        </p:txBody>
+      </p:sp>
+      <p:sp>
+        <p:nvSpPr>
+          <p:cNvPr id="10" name="TextBox 9"/>
+          <p:cNvSpPr txBox="1"/>
+          <p:nvPr/>
+        </p:nvSpPr>
+        <p:spPr>
+          <a:xfrm>
+            <a:off x="7088886" y="2628899"/>
+            <a:ext cx="4450842" cy="384048"/>
+          </a:xfrm>
+          <a:prstGeom prst="rect">
+            <a:avLst/>
+          </a:prstGeom>
+          <a:noFill/>
+        </p:spPr>
+        <p:txBody>
+          <a:bodyPr wrap="square" anchor="t" lIns="0" rIns="0" tIns="0" bIns="0">
+            <a:spAutoFit/>
+          </a:bodyPr>
+          <a:lstStyle/>
+          <a:p>
+            <a:pPr algn="l"/>
+            <a:r>
+              <a:rPr sz="1400" b="1" i="0">
+                <a:solidFill>
+                  <a:srgbClr val="8A2BE2"/>
+                </a:solidFill>
+                <a:latin typeface="Geist Mono"/>
+              </a:rPr>
+              <a:t>A REAL TOOL WOULD</a:t>
+            </a:r>
+          </a:p>
+        </p:txBody>
+      </p:sp>
+      <p:sp>
+        <p:nvSpPr>
+          <p:cNvPr id="11" name="TextBox 10"/>
+          <p:cNvSpPr txBox="1"/>
+          <p:nvPr/>
+        </p:nvSpPr>
+        <p:spPr>
+          <a:xfrm>
+            <a:off x="7088886" y="3177539"/>
+            <a:ext cx="4450842" cy="1142999"/>
+          </a:xfrm>
+          <a:prstGeom prst="rect">
+            <a:avLst/>
+          </a:prstGeom>
+          <a:noFill/>
+        </p:spPr>
+        <p:txBody>
+          <a:bodyPr wrap="square" anchor="t" lIns="0" rIns="0" tIns="0" bIns="0">
+            <a:spAutoFit/>
+          </a:bodyPr>
+          <a:lstStyle/>
+          <a:p>
+            <a:pPr algn="l"/>
+            <a:r>
+              <a:rPr sz="1200" b="0" i="0">
+                <a:solidFill>
+                  <a:srgbClr val="14141C"/>
+                </a:solidFill>
+                <a:latin typeface="Geist"/>
+              </a:rPr>
+              <a:t>Train on full-resolution color images. Deliberately tune its threshold toward high sensitivity. Be validated across many hospitals before it ever sees a patient.</a:t>
             </a:r>
           </a:p>
         </p:txBody>
@@ -5752,8 +8082,8 @@
         </p:nvSpPr>
         <p:spPr>
           <a:xfrm>
-            <a:off x="548640" y="1234440"/>
-            <a:ext cx="11064240" cy="694944"/>
+            <a:off x="502920" y="1051560"/>
+            <a:ext cx="11247120" cy="365760"/>
           </a:xfrm>
           <a:prstGeom prst="rect">
             <a:avLst/>
@@ -5768,13 +8098,167 @@
           <a:p>
             <a:pPr algn="l"/>
             <a:r>
-              <a:rPr sz="1400" b="0" i="0">
+              <a:rPr sz="1500" b="1" i="0">
+                <a:solidFill>
+                  <a:srgbClr val="8A2BE2"/>
+                </a:solidFill>
+                <a:latin typeface="Geist Mono"/>
+              </a:rPr>
+              <a:t>SEVEN PAPERS GROUNDED THIS PROJECT</a:t>
+            </a:r>
+          </a:p>
+        </p:txBody>
+      </p:sp>
+      <p:sp>
+        <p:nvSpPr>
+          <p:cNvPr id="8" name="TextBox 7"/>
+          <p:cNvSpPr txBox="1"/>
+          <p:nvPr/>
+        </p:nvSpPr>
+        <p:spPr>
+          <a:xfrm>
+            <a:off x="502920" y="1600200"/>
+            <a:ext cx="5398617" cy="3657599"/>
+          </a:xfrm>
+          <a:prstGeom prst="rect">
+            <a:avLst/>
+          </a:prstGeom>
+          <a:noFill/>
+        </p:spPr>
+        <p:txBody>
+          <a:bodyPr wrap="square" anchor="t" lIns="0" rIns="0" tIns="0" bIns="0">
+            <a:spAutoFit/>
+          </a:bodyPr>
+          <a:lstStyle/>
+          <a:p>
+            <a:pPr algn="l"/>
+            <a:r>
+              <a:rPr sz="1300" b="0" i="0">
                 <a:solidFill>
                   <a:srgbClr val="14141C"/>
                 </a:solidFill>
                 <a:latin typeface="Geist"/>
               </a:rPr>
-              <a:t>Seven papers grounded this project, from the dermatologist-level results that started the field to the plain-language guide on why sensitivity matters. Thank you for watching – go build something you can honestly evaluate.</a:t>
+              <a:t>[1] Esteva et al. 2017 -- Dermatologist-level classification of skin cancer with deep neural networks. Nature.
+[2] Tschandl et al. 2018 -- The HAM10000 dermatoscopy dataset. Scientific Data.
+[3] Haenssle et al. 2018 -- Man against machine: a CNN vs 58 dermatologists. Annals of Oncology.
+[4] Tschandl et al. 2019 -- Human readers vs machine learning for pigmented lesions. Lancet Oncology.</a:t>
+            </a:r>
+          </a:p>
+        </p:txBody>
+      </p:sp>
+      <p:sp>
+        <p:nvSpPr>
+          <p:cNvPr id="9" name="TextBox 8"/>
+          <p:cNvSpPr txBox="1"/>
+          <p:nvPr/>
+        </p:nvSpPr>
+        <p:spPr>
+          <a:xfrm>
+            <a:off x="6305702" y="1600200"/>
+            <a:ext cx="5173675" cy="3657599"/>
+          </a:xfrm>
+          <a:prstGeom prst="rect">
+            <a:avLst/>
+          </a:prstGeom>
+          <a:noFill/>
+        </p:spPr>
+        <p:txBody>
+          <a:bodyPr wrap="square" anchor="t" lIns="0" rIns="0" tIns="0" bIns="0">
+            <a:spAutoFit/>
+          </a:bodyPr>
+          <a:lstStyle/>
+          <a:p>
+            <a:pPr algn="l"/>
+            <a:r>
+              <a:rPr sz="1300" b="0" i="0">
+                <a:solidFill>
+                  <a:srgbClr val="14141C"/>
+                </a:solidFill>
+                <a:latin typeface="Geist"/>
+              </a:rPr>
+              <a:t>[5] Kim et al. 2022 -- Transfer learning for medical image classification: a review. BMC Medical Imaging.
+[6] Trevethan 2017 -- Sensitivity, specificity, and predictive values. Frontiers in Public Health.
+[7] Wei et al. 2024 -- Artificial intelligence and skin cancer. Frontiers in Medicine.</a:t>
+            </a:r>
+          </a:p>
+        </p:txBody>
+      </p:sp>
+      <p:sp>
+        <p:nvSpPr>
+          <p:cNvPr id="10" name="Rectangle 9"/>
+          <p:cNvSpPr/>
+          <p:nvPr/>
+        </p:nvSpPr>
+        <p:spPr>
+          <a:xfrm>
+            <a:off x="502920" y="5532120"/>
+            <a:ext cx="11155680" cy="18288"/>
+          </a:xfrm>
+          <a:prstGeom prst="rect">
+            <a:avLst/>
+          </a:prstGeom>
+          <a:solidFill>
+            <a:srgbClr val="8A2BE2"/>
+          </a:solidFill>
+          <a:ln>
+            <a:noFill/>
+          </a:ln>
+          <a:effectLst/>
+        </p:spPr>
+        <p:style>
+          <a:lnRef idx="1">
+            <a:schemeClr val="accent1"/>
+          </a:lnRef>
+          <a:fillRef idx="3">
+            <a:schemeClr val="accent1"/>
+          </a:fillRef>
+          <a:effectRef idx="2">
+            <a:schemeClr val="accent1"/>
+          </a:effectRef>
+          <a:fontRef idx="minor">
+            <a:schemeClr val="lt1"/>
+          </a:fontRef>
+        </p:style>
+        <p:txBody>
+          <a:bodyPr rtlCol="0" anchor="ctr"/>
+          <a:lstStyle/>
+          <a:p>
+            <a:pPr algn="ctr"/>
+          </a:p>
+        </p:txBody>
+      </p:sp>
+      <p:sp>
+        <p:nvSpPr>
+          <p:cNvPr id="11" name="TextBox 10"/>
+          <p:cNvSpPr txBox="1"/>
+          <p:nvPr/>
+        </p:nvSpPr>
+        <p:spPr>
+          <a:xfrm>
+            <a:off x="502920" y="5660136"/>
+            <a:ext cx="11155680" cy="502920"/>
+          </a:xfrm>
+          <a:prstGeom prst="rect">
+            <a:avLst/>
+          </a:prstGeom>
+          <a:noFill/>
+        </p:spPr>
+        <p:txBody>
+          <a:bodyPr wrap="square" anchor="t" lIns="0" rIns="0" tIns="0" bIns="0">
+            <a:spAutoFit/>
+          </a:bodyPr>
+          <a:lstStyle/>
+          <a:p>
+            <a:pPr algn="l"/>
+            <a:r>
+              <a:rPr sz="1800" b="1" i="0">
+                <a:solidFill>
+                  <a:srgbClr val="14141C"/>
+                </a:solidFill>
+                <a:latin typeface="Geist Mono"/>
+              </a:rPr>
+              <a:t>Thank you for watching  --  go build something you can honestly evaluate.</a:t>
             </a:r>
           </a:p>
         </p:txBody>
@@ -6827,16 +9311,84 @@
           </a:p>
         </p:txBody>
       </p:sp>
-      <p:sp>
-        <p:nvSpPr>
-          <p:cNvPr id="7" name="TextBox 6"/>
+      <p:pic>
+        <p:nvPicPr>
+          <p:cNvPr id="7" name="Picture 6" descr="intro_cost_of_a_miss.png"/>
+          <p:cNvPicPr>
+            <a:picLocks noChangeAspect="1"/>
+          </p:cNvPicPr>
+          <p:nvPr/>
+        </p:nvPicPr>
+        <p:blipFill>
+          <a:blip r:embed="rId2"/>
+          <a:stretch>
+            <a:fillRect/>
+          </a:stretch>
+        </p:blipFill>
+        <p:spPr>
+          <a:xfrm>
+            <a:off x="457200" y="1367105"/>
+            <a:ext cx="5623560" cy="4443829"/>
+          </a:xfrm>
+          <a:prstGeom prst="rect">
+            <a:avLst/>
+          </a:prstGeom>
+        </p:spPr>
+      </p:pic>
+      <p:sp>
+        <p:nvSpPr>
+          <p:cNvPr id="8" name="Rectangle 7"/>
+          <p:cNvSpPr/>
+          <p:nvPr/>
+        </p:nvSpPr>
+        <p:spPr>
+          <a:xfrm>
+            <a:off x="6492240" y="1216152"/>
+            <a:ext cx="73152" cy="4553712"/>
+          </a:xfrm>
+          <a:prstGeom prst="rect">
+            <a:avLst/>
+          </a:prstGeom>
+          <a:solidFill>
+            <a:srgbClr val="40E0D0"/>
+          </a:solidFill>
+          <a:ln>
+            <a:noFill/>
+          </a:ln>
+          <a:effectLst/>
+        </p:spPr>
+        <p:style>
+          <a:lnRef idx="1">
+            <a:schemeClr val="accent1"/>
+          </a:lnRef>
+          <a:fillRef idx="3">
+            <a:schemeClr val="accent1"/>
+          </a:fillRef>
+          <a:effectRef idx="2">
+            <a:schemeClr val="accent1"/>
+          </a:effectRef>
+          <a:fontRef idx="minor">
+            <a:schemeClr val="lt1"/>
+          </a:fontRef>
+        </p:style>
+        <p:txBody>
+          <a:bodyPr rtlCol="0" anchor="ctr"/>
+          <a:lstStyle/>
+          <a:p>
+            <a:pPr algn="ctr"/>
+          </a:p>
+        </p:txBody>
+      </p:sp>
+      <p:sp>
+        <p:nvSpPr>
+          <p:cNvPr id="9" name="TextBox 8"/>
           <p:cNvSpPr txBox="1"/>
           <p:nvPr/>
         </p:nvSpPr>
         <p:spPr>
           <a:xfrm>
-            <a:off x="548640" y="1234440"/>
-            <a:ext cx="11064240" cy="1097280"/>
+            <a:off x="6766560" y="1097280"/>
+            <a:ext cx="4901184" cy="4800599"/>
           </a:xfrm>
           <a:prstGeom prst="rect">
             <a:avLst/>
@@ -6844,20 +9396,20 @@
           <a:noFill/>
         </p:spPr>
         <p:txBody>
-          <a:bodyPr wrap="square" anchor="t" lIns="0" rIns="0" tIns="0" bIns="0">
+          <a:bodyPr wrap="square" anchor="ctr" lIns="0" rIns="0" tIns="0" bIns="0">
             <a:spAutoFit/>
           </a:bodyPr>
           <a:lstStyle/>
           <a:p>
             <a:pPr algn="l"/>
             <a:r>
-              <a:rPr sz="1400" b="0" i="0">
+              <a:rPr sz="1700" b="0" i="0">
                 <a:solidFill>
                   <a:srgbClr val="14141C"/>
                 </a:solidFill>
                 <a:latin typeface="Geist"/>
               </a:rPr>
-              <a:t>Dermatology-AI systems look at a photo of a skin spot and estimate how likely it is to be cancer, and landmark studies showed a neural network can match or beat dermatologists at exactly this task (Esteva 2017, Haenssle 2018). But for a screening tool the goal is not to be right on average – it is to never wave a real melanoma through as harmless, because that missed cancer is the one mistake that can kill.</a:t>
+              <a:t>Dermatology-AI looks at a photo of a skin spot and estimates how likely it is to be cancer, and landmark studies showed a neural network can match or beat dermatologists at exactly this task (Esteva 2017, Haenssle 2018). But for a screening tool the goal is not to be right on average -- it is to never wave a real melanoma through as harmless, because that missed cancer is the one mistake that can kill.</a:t>
             </a:r>
           </a:p>
         </p:txBody>
@@ -7082,16 +9634,84 @@
           </a:p>
         </p:txBody>
       </p:sp>
-      <p:sp>
-        <p:nvSpPr>
-          <p:cNvPr id="7" name="TextBox 6"/>
+      <p:pic>
+        <p:nvPicPr>
+          <p:cNvPr id="7" name="Picture 6" descr="intro_sensitivity_tradeoff.png"/>
+          <p:cNvPicPr>
+            <a:picLocks noChangeAspect="1"/>
+          </p:cNvPicPr>
+          <p:nvPr/>
+        </p:nvPicPr>
+        <p:blipFill>
+          <a:blip r:embed="rId2"/>
+          <a:stretch>
+            <a:fillRect/>
+          </a:stretch>
+        </p:blipFill>
+        <p:spPr>
+          <a:xfrm>
+            <a:off x="457200" y="1534562"/>
+            <a:ext cx="6523329" cy="4108914"/>
+          </a:xfrm>
+          <a:prstGeom prst="rect">
+            <a:avLst/>
+          </a:prstGeom>
+        </p:spPr>
+      </p:pic>
+      <p:sp>
+        <p:nvSpPr>
+          <p:cNvPr id="8" name="Rectangle 7"/>
+          <p:cNvSpPr/>
+          <p:nvPr/>
+        </p:nvSpPr>
+        <p:spPr>
+          <a:xfrm>
+            <a:off x="7392009" y="1216152"/>
+            <a:ext cx="73152" cy="4553712"/>
+          </a:xfrm>
+          <a:prstGeom prst="rect">
+            <a:avLst/>
+          </a:prstGeom>
+          <a:solidFill>
+            <a:srgbClr val="40E0D0"/>
+          </a:solidFill>
+          <a:ln>
+            <a:noFill/>
+          </a:ln>
+          <a:effectLst/>
+        </p:spPr>
+        <p:style>
+          <a:lnRef idx="1">
+            <a:schemeClr val="accent1"/>
+          </a:lnRef>
+          <a:fillRef idx="3">
+            <a:schemeClr val="accent1"/>
+          </a:fillRef>
+          <a:effectRef idx="2">
+            <a:schemeClr val="accent1"/>
+          </a:effectRef>
+          <a:fontRef idx="minor">
+            <a:schemeClr val="lt1"/>
+          </a:fontRef>
+        </p:style>
+        <p:txBody>
+          <a:bodyPr rtlCol="0" anchor="ctr"/>
+          <a:lstStyle/>
+          <a:p>
+            <a:pPr algn="ctr"/>
+          </a:p>
+        </p:txBody>
+      </p:sp>
+      <p:sp>
+        <p:nvSpPr>
+          <p:cNvPr id="9" name="TextBox 8"/>
           <p:cNvSpPr txBox="1"/>
           <p:nvPr/>
         </p:nvSpPr>
         <p:spPr>
           <a:xfrm>
-            <a:off x="548640" y="1234440"/>
-            <a:ext cx="11064240" cy="1097280"/>
+            <a:off x="7666329" y="1097280"/>
+            <a:ext cx="4001414" cy="4800599"/>
           </a:xfrm>
           <a:prstGeom prst="rect">
             <a:avLst/>
@@ -7099,20 +9719,20 @@
           <a:noFill/>
         </p:spPr>
         <p:txBody>
-          <a:bodyPr wrap="square" anchor="t" lIns="0" rIns="0" tIns="0" bIns="0">
+          <a:bodyPr wrap="square" anchor="ctr" lIns="0" rIns="0" tIns="0" bIns="0">
             <a:spAutoFit/>
           </a:bodyPr>
           <a:lstStyle/>
           <a:p>
             <a:pPr algn="l"/>
             <a:r>
-              <a:rPr sz="1400" b="0" i="0">
+              <a:rPr sz="1700" b="0" i="0">
                 <a:solidFill>
                   <a:srgbClr val="14141C"/>
                 </a:solidFill>
                 <a:latin typeface="Geist"/>
               </a:rPr>
-              <a:t>Every screening model has a decision threshold, and where you set it is a trade-off you cannot escape. Slide it one way and you catch more cancers but raise more false alarms; slide it the other way and you calm the false alarms but start missing real disease. Screening deliberately favors sensitivity – catching the cancers – because a false alarm just costs a follow-up visit (Trevethan 2017).</a:t>
+              <a:t>Every screening model has a decision threshold, and where you set it is a trade-off you cannot escape. Slide it one way and you catch more cancers but raise more false alarms; slide it the other way and you calm the false alarms but start missing real disease. Screening deliberately favors sensitivity -- catching the cancers -- because a false alarm just costs a follow-up visit (Trevethan 2017).</a:t>
             </a:r>
           </a:p>
         </p:txBody>
@@ -7337,16 +9957,84 @@
           </a:p>
         </p:txBody>
       </p:sp>
-      <p:sp>
-        <p:nvSpPr>
-          <p:cNvPr id="7" name="TextBox 6"/>
+      <p:pic>
+        <p:nvPicPr>
+          <p:cNvPr id="7" name="Picture 6" descr="intro_transfer_learning.png"/>
+          <p:cNvPicPr>
+            <a:picLocks noChangeAspect="1"/>
+          </p:cNvPicPr>
+          <p:nvPr/>
+        </p:nvPicPr>
+        <p:blipFill>
+          <a:blip r:embed="rId2"/>
+          <a:stretch>
+            <a:fillRect/>
+          </a:stretch>
+        </p:blipFill>
+        <p:spPr>
+          <a:xfrm>
+            <a:off x="2230856" y="1097280"/>
+            <a:ext cx="7699806" cy="3023006"/>
+          </a:xfrm>
+          <a:prstGeom prst="rect">
+            <a:avLst/>
+          </a:prstGeom>
+        </p:spPr>
+      </p:pic>
+      <p:sp>
+        <p:nvSpPr>
+          <p:cNvPr id="8" name="Rectangle 7"/>
+          <p:cNvSpPr/>
+          <p:nvPr/>
+        </p:nvSpPr>
+        <p:spPr>
+          <a:xfrm>
+            <a:off x="475488" y="4257446"/>
+            <a:ext cx="73152" cy="1869033"/>
+          </a:xfrm>
+          <a:prstGeom prst="rect">
+            <a:avLst/>
+          </a:prstGeom>
+          <a:solidFill>
+            <a:srgbClr val="40E0D0"/>
+          </a:solidFill>
+          <a:ln>
+            <a:noFill/>
+          </a:ln>
+          <a:effectLst/>
+        </p:spPr>
+        <p:style>
+          <a:lnRef idx="1">
+            <a:schemeClr val="accent1"/>
+          </a:lnRef>
+          <a:fillRef idx="3">
+            <a:schemeClr val="accent1"/>
+          </a:fillRef>
+          <a:effectRef idx="2">
+            <a:schemeClr val="accent1"/>
+          </a:effectRef>
+          <a:fontRef idx="minor">
+            <a:schemeClr val="lt1"/>
+          </a:fontRef>
+        </p:style>
+        <p:txBody>
+          <a:bodyPr rtlCol="0" anchor="ctr"/>
+          <a:lstStyle/>
+          <a:p>
+            <a:pPr algn="ctr"/>
+          </a:p>
+        </p:txBody>
+      </p:sp>
+      <p:sp>
+        <p:nvSpPr>
+          <p:cNvPr id="9" name="TextBox 8"/>
           <p:cNvSpPr txBox="1"/>
           <p:nvPr/>
         </p:nvSpPr>
         <p:spPr>
           <a:xfrm>
-            <a:off x="548640" y="1234440"/>
-            <a:ext cx="11064240" cy="1097280"/>
+            <a:off x="731520" y="4184294"/>
+            <a:ext cx="10789920" cy="2051913"/>
           </a:xfrm>
           <a:prstGeom prst="rect">
             <a:avLst/>
@@ -7354,14 +10042,14 @@
           <a:noFill/>
         </p:spPr>
         <p:txBody>
-          <a:bodyPr wrap="square" anchor="t" lIns="0" rIns="0" tIns="0" bIns="0">
+          <a:bodyPr wrap="square" anchor="ctr" lIns="0" rIns="0" tIns="0" bIns="0">
             <a:spAutoFit/>
           </a:bodyPr>
           <a:lstStyle/>
           <a:p>
             <a:pPr algn="l"/>
             <a:r>
-              <a:rPr sz="1400" b="0" i="0">
+              <a:rPr sz="1600" b="0" i="0">
                 <a:solidFill>
                   <a:srgbClr val="14141C"/>
                 </a:solidFill>
@@ -8047,8 +10735,8 @@
         </p:nvSpPr>
         <p:spPr>
           <a:xfrm>
-            <a:off x="548640" y="1234440"/>
-            <a:ext cx="11064240" cy="896112"/>
+            <a:off x="457200" y="1051560"/>
+            <a:ext cx="5848502" cy="4846319"/>
           </a:xfrm>
           <a:prstGeom prst="rect">
             <a:avLst/>
@@ -8056,20 +10744,178 @@
           <a:noFill/>
         </p:spPr>
         <p:txBody>
-          <a:bodyPr wrap="square" anchor="t" lIns="0" rIns="0" tIns="0" bIns="0">
+          <a:bodyPr wrap="square" anchor="ctr" lIns="0" rIns="0" tIns="0" bIns="0">
             <a:spAutoFit/>
           </a:bodyPr>
           <a:lstStyle/>
           <a:p>
             <a:pPr algn="l"/>
             <a:r>
-              <a:rPr sz="1400" b="0" i="0">
+              <a:rPr sz="1800" b="0" i="0">
                 <a:solidFill>
                   <a:srgbClr val="14141C"/>
                 </a:solidFill>
                 <a:latin typeface="Geist"/>
               </a:rPr>
-              <a:t>Our data is DermaMNIST, a tidy version of the HAM10000 dermatoscopy collection with seven lesion types, including melanoma (Tschandl 2018). The catch is severe imbalance: harmless moles make up about two-thirds of every set, and melanoma is a small slice – which is precisely the setup where a lazy model can look accurate while catching zero cancers.</a:t>
+              <a:t>Our data is DermaMNIST, a tidy version of the HAM10000 dermatoscopy collection with seven kinds of skin lesion, one of which is melanoma -- the class we cannot afford to miss (Tschandl 2018).</a:t>
+            </a:r>
+          </a:p>
+        </p:txBody>
+      </p:sp>
+      <p:sp>
+        <p:nvSpPr>
+          <p:cNvPr id="8" name="Rectangle 7"/>
+          <p:cNvSpPr/>
+          <p:nvPr/>
+        </p:nvSpPr>
+        <p:spPr>
+          <a:xfrm>
+            <a:off x="6924294" y="2537459"/>
+            <a:ext cx="4780026" cy="1874519"/>
+          </a:xfrm>
+          <a:prstGeom prst="rect">
+            <a:avLst/>
+          </a:prstGeom>
+          <a:solidFill>
+            <a:srgbClr val="FAFAFC"/>
+          </a:solidFill>
+          <a:ln>
+            <a:noFill/>
+          </a:ln>
+          <a:effectLst/>
+        </p:spPr>
+        <p:style>
+          <a:lnRef idx="1">
+            <a:schemeClr val="accent1"/>
+          </a:lnRef>
+          <a:fillRef idx="3">
+            <a:schemeClr val="accent1"/>
+          </a:fillRef>
+          <a:effectRef idx="2">
+            <a:schemeClr val="accent1"/>
+          </a:effectRef>
+          <a:fontRef idx="minor">
+            <a:schemeClr val="lt1"/>
+          </a:fontRef>
+        </p:style>
+        <p:txBody>
+          <a:bodyPr rtlCol="0" anchor="ctr"/>
+          <a:lstStyle/>
+          <a:p>
+            <a:pPr algn="ctr"/>
+          </a:p>
+        </p:txBody>
+      </p:sp>
+      <p:sp>
+        <p:nvSpPr>
+          <p:cNvPr id="9" name="Rectangle 8"/>
+          <p:cNvSpPr/>
+          <p:nvPr/>
+        </p:nvSpPr>
+        <p:spPr>
+          <a:xfrm>
+            <a:off x="6924294" y="2537459"/>
+            <a:ext cx="4780026" cy="54864"/>
+          </a:xfrm>
+          <a:prstGeom prst="rect">
+            <a:avLst/>
+          </a:prstGeom>
+          <a:solidFill>
+            <a:srgbClr val="FF1493"/>
+          </a:solidFill>
+          <a:ln>
+            <a:noFill/>
+          </a:ln>
+          <a:effectLst/>
+        </p:spPr>
+        <p:style>
+          <a:lnRef idx="1">
+            <a:schemeClr val="accent1"/>
+          </a:lnRef>
+          <a:fillRef idx="3">
+            <a:schemeClr val="accent1"/>
+          </a:fillRef>
+          <a:effectRef idx="2">
+            <a:schemeClr val="accent1"/>
+          </a:effectRef>
+          <a:fontRef idx="minor">
+            <a:schemeClr val="lt1"/>
+          </a:fontRef>
+        </p:style>
+        <p:txBody>
+          <a:bodyPr rtlCol="0" anchor="ctr"/>
+          <a:lstStyle/>
+          <a:p>
+            <a:pPr algn="ctr"/>
+          </a:p>
+        </p:txBody>
+      </p:sp>
+      <p:sp>
+        <p:nvSpPr>
+          <p:cNvPr id="10" name="TextBox 9"/>
+          <p:cNvSpPr txBox="1"/>
+          <p:nvPr/>
+        </p:nvSpPr>
+        <p:spPr>
+          <a:xfrm>
+            <a:off x="7088886" y="2628899"/>
+            <a:ext cx="4450842" cy="384048"/>
+          </a:xfrm>
+          <a:prstGeom prst="rect">
+            <a:avLst/>
+          </a:prstGeom>
+          <a:noFill/>
+        </p:spPr>
+        <p:txBody>
+          <a:bodyPr wrap="square" anchor="t" lIns="0" rIns="0" tIns="0" bIns="0">
+            <a:spAutoFit/>
+          </a:bodyPr>
+          <a:lstStyle/>
+          <a:p>
+            <a:pPr algn="l"/>
+            <a:r>
+              <a:rPr sz="1400" b="1" i="0">
+                <a:solidFill>
+                  <a:srgbClr val="FF1493"/>
+                </a:solidFill>
+                <a:latin typeface="Geist Mono"/>
+              </a:rPr>
+              <a:t>THE CATCH  --  IMBALANCE</a:t>
+            </a:r>
+          </a:p>
+        </p:txBody>
+      </p:sp>
+      <p:sp>
+        <p:nvSpPr>
+          <p:cNvPr id="11" name="TextBox 10"/>
+          <p:cNvSpPr txBox="1"/>
+          <p:nvPr/>
+        </p:nvSpPr>
+        <p:spPr>
+          <a:xfrm>
+            <a:off x="7088886" y="3177539"/>
+            <a:ext cx="4450842" cy="1142999"/>
+          </a:xfrm>
+          <a:prstGeom prst="rect">
+            <a:avLst/>
+          </a:prstGeom>
+          <a:noFill/>
+        </p:spPr>
+        <p:txBody>
+          <a:bodyPr wrap="square" anchor="t" lIns="0" rIns="0" tIns="0" bIns="0">
+            <a:spAutoFit/>
+          </a:bodyPr>
+          <a:lstStyle/>
+          <a:p>
+            <a:pPr algn="l"/>
+            <a:r>
+              <a:rPr sz="1200" b="0" i="0">
+                <a:solidFill>
+                  <a:srgbClr val="14141C"/>
+                </a:solidFill>
+                <a:latin typeface="Geist"/>
+              </a:rPr>
+              <a:t>About two-thirds of every set is harmless moles. Melanoma is only a thin slice -- exactly the setup where a lazy model can look accurate while catching almost no cancers.</a:t>
             </a:r>
           </a:p>
         </p:txBody>
@@ -8302,8 +11148,8 @@
         </p:nvSpPr>
         <p:spPr>
           <a:xfrm>
-            <a:off x="548640" y="1234440"/>
-            <a:ext cx="11064240" cy="896112"/>
+            <a:off x="457200" y="1051560"/>
+            <a:ext cx="5848502" cy="4846319"/>
           </a:xfrm>
           <a:prstGeom prst="rect">
             <a:avLst/>
@@ -8311,20 +11157,178 @@
           <a:noFill/>
         </p:spPr>
         <p:txBody>
-          <a:bodyPr wrap="square" anchor="t" lIns="0" rIns="0" tIns="0" bIns="0">
+          <a:bodyPr wrap="square" anchor="ctr" lIns="0" rIns="0" tIns="0" bIns="0">
             <a:spAutoFit/>
           </a:bodyPr>
           <a:lstStyle/>
           <a:p>
             <a:pPr algn="l"/>
             <a:r>
-              <a:rPr sz="1400" b="0" i="0">
+              <a:rPr sz="1800" b="0" i="0">
                 <a:solidFill>
                   <a:srgbClr val="14141C"/>
                 </a:solidFill>
                 <a:latin typeface="Geist"/>
               </a:rPr>
-              <a:t>We trained the network three ways – from scratch, pretrained, and pretrained with augmentation – and then audited the best one the way a regulator would. We did not grade on accuracy alone; we tracked melanoma recall, the share of true melanomas actually caught, because on this data that single number decides whether the tool is safe.</a:t>
+              <a:t>We trained the network three ways -- from scratch, pretrained, and pretrained with augmentation -- and then audited the best one the way a regulator would, refusing to grade on accuracy alone.</a:t>
+            </a:r>
+          </a:p>
+        </p:txBody>
+      </p:sp>
+      <p:sp>
+        <p:nvSpPr>
+          <p:cNvPr id="8" name="Rectangle 7"/>
+          <p:cNvSpPr/>
+          <p:nvPr/>
+        </p:nvSpPr>
+        <p:spPr>
+          <a:xfrm>
+            <a:off x="6924294" y="2537459"/>
+            <a:ext cx="4780026" cy="1874519"/>
+          </a:xfrm>
+          <a:prstGeom prst="rect">
+            <a:avLst/>
+          </a:prstGeom>
+          <a:solidFill>
+            <a:srgbClr val="FAFAFC"/>
+          </a:solidFill>
+          <a:ln>
+            <a:noFill/>
+          </a:ln>
+          <a:effectLst/>
+        </p:spPr>
+        <p:style>
+          <a:lnRef idx="1">
+            <a:schemeClr val="accent1"/>
+          </a:lnRef>
+          <a:fillRef idx="3">
+            <a:schemeClr val="accent1"/>
+          </a:fillRef>
+          <a:effectRef idx="2">
+            <a:schemeClr val="accent1"/>
+          </a:effectRef>
+          <a:fontRef idx="minor">
+            <a:schemeClr val="lt1"/>
+          </a:fontRef>
+        </p:style>
+        <p:txBody>
+          <a:bodyPr rtlCol="0" anchor="ctr"/>
+          <a:lstStyle/>
+          <a:p>
+            <a:pPr algn="ctr"/>
+          </a:p>
+        </p:txBody>
+      </p:sp>
+      <p:sp>
+        <p:nvSpPr>
+          <p:cNvPr id="9" name="Rectangle 8"/>
+          <p:cNvSpPr/>
+          <p:nvPr/>
+        </p:nvSpPr>
+        <p:spPr>
+          <a:xfrm>
+            <a:off x="6924294" y="2537459"/>
+            <a:ext cx="4780026" cy="54864"/>
+          </a:xfrm>
+          <a:prstGeom prst="rect">
+            <a:avLst/>
+          </a:prstGeom>
+          <a:solidFill>
+            <a:srgbClr val="FF1493"/>
+          </a:solidFill>
+          <a:ln>
+            <a:noFill/>
+          </a:ln>
+          <a:effectLst/>
+        </p:spPr>
+        <p:style>
+          <a:lnRef idx="1">
+            <a:schemeClr val="accent1"/>
+          </a:lnRef>
+          <a:fillRef idx="3">
+            <a:schemeClr val="accent1"/>
+          </a:fillRef>
+          <a:effectRef idx="2">
+            <a:schemeClr val="accent1"/>
+          </a:effectRef>
+          <a:fontRef idx="minor">
+            <a:schemeClr val="lt1"/>
+          </a:fontRef>
+        </p:style>
+        <p:txBody>
+          <a:bodyPr rtlCol="0" anchor="ctr"/>
+          <a:lstStyle/>
+          <a:p>
+            <a:pPr algn="ctr"/>
+          </a:p>
+        </p:txBody>
+      </p:sp>
+      <p:sp>
+        <p:nvSpPr>
+          <p:cNvPr id="10" name="TextBox 9"/>
+          <p:cNvSpPr txBox="1"/>
+          <p:nvPr/>
+        </p:nvSpPr>
+        <p:spPr>
+          <a:xfrm>
+            <a:off x="7088886" y="2628899"/>
+            <a:ext cx="4450842" cy="384048"/>
+          </a:xfrm>
+          <a:prstGeom prst="rect">
+            <a:avLst/>
+          </a:prstGeom>
+          <a:noFill/>
+        </p:spPr>
+        <p:txBody>
+          <a:bodyPr wrap="square" anchor="t" lIns="0" rIns="0" tIns="0" bIns="0">
+            <a:spAutoFit/>
+          </a:bodyPr>
+          <a:lstStyle/>
+          <a:p>
+            <a:pPr algn="l"/>
+            <a:r>
+              <a:rPr sz="1400" b="1" i="0">
+                <a:solidFill>
+                  <a:srgbClr val="FF1493"/>
+                </a:solidFill>
+                <a:latin typeface="Geist Mono"/>
+              </a:rPr>
+              <a:t>WE GRADED ON</a:t>
+            </a:r>
+          </a:p>
+        </p:txBody>
+      </p:sp>
+      <p:sp>
+        <p:nvSpPr>
+          <p:cNvPr id="11" name="TextBox 10"/>
+          <p:cNvSpPr txBox="1"/>
+          <p:nvPr/>
+        </p:nvSpPr>
+        <p:spPr>
+          <a:xfrm>
+            <a:off x="7088886" y="3177539"/>
+            <a:ext cx="4450842" cy="1142999"/>
+          </a:xfrm>
+          <a:prstGeom prst="rect">
+            <a:avLst/>
+          </a:prstGeom>
+          <a:noFill/>
+        </p:spPr>
+        <p:txBody>
+          <a:bodyPr wrap="square" anchor="t" lIns="0" rIns="0" tIns="0" bIns="0">
+            <a:spAutoFit/>
+          </a:bodyPr>
+          <a:lstStyle/>
+          <a:p>
+            <a:pPr algn="l"/>
+            <a:r>
+              <a:rPr sz="1200" b="0" i="0">
+                <a:solidFill>
+                  <a:srgbClr val="14141C"/>
+                </a:solidFill>
+                <a:latin typeface="Geist"/>
+              </a:rPr>
+              <a:t>Melanoma recall -- the share of true melanomas actually caught. On this data that single number, not overall accuracy, is what decides whether the tool is safe.</a:t>
             </a:r>
           </a:p>
         </p:txBody>
@@ -9102,4 +12106,324 @@
   </a:objectDefaults>
   <a:extraClrSchemeLst/>
 </a:theme>
+</file>
+
+<file path=ppt/theme/theme2.xml><?xml version="1.0" encoding="utf-8"?>
+<a:theme xmlns:a="http://schemas.openxmlformats.org/drawingml/2006/main" name="Office Theme">
+  <a:themeElements>
+    <a:clrScheme name="Office">
+      <a:dk1>
+        <a:sysClr val="windowText" lastClr="000000"/>
+      </a:dk1>
+      <a:lt1>
+        <a:sysClr val="window" lastClr="FFFFFF"/>
+      </a:lt1>
+      <a:dk2>
+        <a:srgbClr val="1F497D"/>
+      </a:dk2>
+      <a:lt2>
+        <a:srgbClr val="EEECE1"/>
+      </a:lt2>
+      <a:accent1>
+        <a:srgbClr val="4F81BD"/>
+      </a:accent1>
+      <a:accent2>
+        <a:srgbClr val="C0504D"/>
+      </a:accent2>
+      <a:accent3>
+        <a:srgbClr val="9BBB59"/>
+      </a:accent3>
+      <a:accent4>
+        <a:srgbClr val="8064A2"/>
+      </a:accent4>
+      <a:accent5>
+        <a:srgbClr val="4BACC6"/>
+      </a:accent5>
+      <a:accent6>
+        <a:srgbClr val="F79646"/>
+      </a:accent6>
+      <a:hlink>
+        <a:srgbClr val="0000FF"/>
+      </a:hlink>
+      <a:folHlink>
+        <a:srgbClr val="800080"/>
+      </a:folHlink>
+    </a:clrScheme>
+    <a:fontScheme name="Office">
+      <a:majorFont>
+        <a:latin typeface="Calibri"/>
+        <a:ea typeface=""/>
+        <a:cs typeface=""/>
+        <a:font script="Jpan" typeface="ＭＳ Ｐゴシック"/>
+        <a:font script="Hang" typeface="맑은 고딕"/>
+        <a:font script="Hans" typeface="宋体"/>
+        <a:font script="Hant" typeface="新細明體"/>
+        <a:font script="Arab" typeface="Times New Roman"/>
+        <a:font script="Hebr" typeface="Times New Roman"/>
+        <a:font script="Thai" typeface="Angsana New"/>
+        <a:font script="Ethi" typeface="Nyala"/>
+        <a:font script="Beng" typeface="Vrinda"/>
+        <a:font script="Gujr" typeface="Shruti"/>
+        <a:font script="Khmr" typeface="MoolBoran"/>
+        <a:font script="Knda" typeface="Tunga"/>
+        <a:font script="Guru" typeface="Raavi"/>
+        <a:font script="Cans" typeface="Euphemia"/>
+        <a:font script="Cher" typeface="Plantagenet Cherokee"/>
+        <a:font script="Yiii" typeface="Microsoft Yi Baiti"/>
+        <a:font script="Tibt" typeface="Microsoft Himalaya"/>
+        <a:font script="Thaa" typeface="MV Boli"/>
+        <a:font script="Deva" typeface="Mangal"/>
+        <a:font script="Telu" typeface="Gautami"/>
+        <a:font script="Taml" typeface="Latha"/>
+        <a:font script="Syrc" typeface="Estrangelo Edessa"/>
+        <a:font script="Orya" typeface="Kalinga"/>
+        <a:font script="Mlym" typeface="Kartika"/>
+        <a:font script="Laoo" typeface="DokChampa"/>
+        <a:font script="Sinh" typeface="Iskoola Pota"/>
+        <a:font script="Mong" typeface="Mongolian Baiti"/>
+        <a:font script="Viet" typeface="Times New Roman"/>
+        <a:font script="Uigh" typeface="Microsoft Uighur"/>
+        <a:font script="Geor" typeface="Sylfaen"/>
+      </a:majorFont>
+      <a:minorFont>
+        <a:latin typeface="Calibri"/>
+        <a:ea typeface=""/>
+        <a:cs typeface=""/>
+        <a:font script="Jpan" typeface="ＭＳ Ｐゴシック"/>
+        <a:font script="Hang" typeface="맑은 고딕"/>
+        <a:font script="Hans" typeface="宋体"/>
+        <a:font script="Hant" typeface="新細明體"/>
+        <a:font script="Arab" typeface="Arial"/>
+        <a:font script="Hebr" typeface="Arial"/>
+        <a:font script="Thai" typeface="Cordia New"/>
+        <a:font script="Ethi" typeface="Nyala"/>
+        <a:font script="Beng" typeface="Vrinda"/>
+        <a:font script="Gujr" typeface="Shruti"/>
+        <a:font script="Khmr" typeface="DaunPenh"/>
+        <a:font script="Knda" typeface="Tunga"/>
+        <a:font script="Guru" typeface="Raavi"/>
+        <a:font script="Cans" typeface="Euphemia"/>
+        <a:font script="Cher" typeface="Plantagenet Cherokee"/>
+        <a:font script="Yiii" typeface="Microsoft Yi Baiti"/>
+        <a:font script="Tibt" typeface="Microsoft Himalaya"/>
+        <a:font script="Thaa" typeface="MV Boli"/>
+        <a:font script="Deva" typeface="Mangal"/>
+        <a:font script="Telu" typeface="Gautami"/>
+        <a:font script="Taml" typeface="Latha"/>
+        <a:font script="Syrc" typeface="Estrangelo Edessa"/>
+        <a:font script="Orya" typeface="Kalinga"/>
+        <a:font script="Mlym" typeface="Kartika"/>
+        <a:font script="Laoo" typeface="DokChampa"/>
+        <a:font script="Sinh" typeface="Iskoola Pota"/>
+        <a:font script="Mong" typeface="Mongolian Baiti"/>
+        <a:font script="Viet" typeface="Arial"/>
+        <a:font script="Uigh" typeface="Microsoft Uighur"/>
+        <a:font script="Geor" typeface="Sylfaen"/>
+      </a:minorFont>
+    </a:fontScheme>
+    <a:fmtScheme name="Office">
+      <a:fillStyleLst>
+        <a:solidFill>
+          <a:schemeClr val="phClr"/>
+        </a:solidFill>
+        <a:gradFill rotWithShape="1">
+          <a:gsLst>
+            <a:gs pos="0">
+              <a:schemeClr val="phClr">
+                <a:tint val="50000"/>
+                <a:satMod val="300000"/>
+              </a:schemeClr>
+            </a:gs>
+            <a:gs pos="35000">
+              <a:schemeClr val="phClr">
+                <a:tint val="37000"/>
+                <a:satMod val="300000"/>
+              </a:schemeClr>
+            </a:gs>
+            <a:gs pos="100000">
+              <a:schemeClr val="phClr">
+                <a:tint val="15000"/>
+                <a:satMod val="350000"/>
+              </a:schemeClr>
+            </a:gs>
+          </a:gsLst>
+          <a:lin ang="16200000" scaled="1"/>
+        </a:gradFill>
+        <a:gradFill rotWithShape="1">
+          <a:gsLst>
+            <a:gs pos="0">
+              <a:schemeClr val="phClr">
+                <a:tint val="100000"/>
+                <a:shade val="100000"/>
+                <a:satMod val="130000"/>
+              </a:schemeClr>
+            </a:gs>
+            <a:gs pos="100000">
+              <a:schemeClr val="phClr">
+                <a:tint val="50000"/>
+                <a:shade val="100000"/>
+                <a:satMod val="350000"/>
+              </a:schemeClr>
+            </a:gs>
+          </a:gsLst>
+          <a:lin ang="16200000" scaled="0"/>
+        </a:gradFill>
+      </a:fillStyleLst>
+      <a:lnStyleLst>
+        <a:ln w="9525" cap="flat" cmpd="sng" algn="ctr">
+          <a:solidFill>
+            <a:schemeClr val="phClr">
+              <a:shade val="95000"/>
+              <a:satMod val="105000"/>
+            </a:schemeClr>
+          </a:solidFill>
+          <a:prstDash val="solid"/>
+        </a:ln>
+        <a:ln w="25400" cap="flat" cmpd="sng" algn="ctr">
+          <a:solidFill>
+            <a:schemeClr val="phClr"/>
+          </a:solidFill>
+          <a:prstDash val="solid"/>
+        </a:ln>
+        <a:ln w="38100" cap="flat" cmpd="sng" algn="ctr">
+          <a:solidFill>
+            <a:schemeClr val="phClr"/>
+          </a:solidFill>
+          <a:prstDash val="solid"/>
+        </a:ln>
+      </a:lnStyleLst>
+      <a:effectStyleLst>
+        <a:effectStyle>
+          <a:effectLst>
+            <a:outerShdw blurRad="40000" dist="20000" dir="5400000" rotWithShape="0">
+              <a:srgbClr val="000000">
+                <a:alpha val="38000"/>
+              </a:srgbClr>
+            </a:outerShdw>
+          </a:effectLst>
+        </a:effectStyle>
+        <a:effectStyle>
+          <a:effectLst>
+            <a:outerShdw blurRad="40000" dist="23000" dir="5400000" rotWithShape="0">
+              <a:srgbClr val="000000">
+                <a:alpha val="35000"/>
+              </a:srgbClr>
+            </a:outerShdw>
+          </a:effectLst>
+        </a:effectStyle>
+        <a:effectStyle>
+          <a:effectLst>
+            <a:outerShdw blurRad="40000" dist="23000" dir="5400000" rotWithShape="0">
+              <a:srgbClr val="000000">
+                <a:alpha val="35000"/>
+              </a:srgbClr>
+            </a:outerShdw>
+          </a:effectLst>
+          <a:scene3d>
+            <a:camera prst="orthographicFront">
+              <a:rot lat="0" lon="0" rev="0"/>
+            </a:camera>
+            <a:lightRig rig="threePt" dir="t">
+              <a:rot lat="0" lon="0" rev="1200000"/>
+            </a:lightRig>
+          </a:scene3d>
+          <a:sp3d>
+            <a:bevelT w="63500" h="25400"/>
+          </a:sp3d>
+        </a:effectStyle>
+      </a:effectStyleLst>
+      <a:bgFillStyleLst>
+        <a:solidFill>
+          <a:schemeClr val="phClr"/>
+        </a:solidFill>
+        <a:gradFill rotWithShape="1">
+          <a:gsLst>
+            <a:gs pos="0">
+              <a:schemeClr val="phClr">
+                <a:tint val="40000"/>
+                <a:satMod val="350000"/>
+              </a:schemeClr>
+            </a:gs>
+            <a:gs pos="40000">
+              <a:schemeClr val="phClr">
+                <a:tint val="45000"/>
+                <a:shade val="99000"/>
+                <a:satMod val="350000"/>
+              </a:schemeClr>
+            </a:gs>
+            <a:gs pos="100000">
+              <a:schemeClr val="phClr">
+                <a:shade val="20000"/>
+                <a:satMod val="255000"/>
+              </a:schemeClr>
+            </a:gs>
+          </a:gsLst>
+          <a:path path="circle">
+            <a:fillToRect l="50000" t="-80000" r="50000" b="180000"/>
+          </a:path>
+        </a:gradFill>
+        <a:gradFill rotWithShape="1">
+          <a:gsLst>
+            <a:gs pos="0">
+              <a:schemeClr val="phClr">
+                <a:tint val="80000"/>
+                <a:satMod val="300000"/>
+              </a:schemeClr>
+            </a:gs>
+            <a:gs pos="100000">
+              <a:schemeClr val="phClr">
+                <a:shade val="30000"/>
+                <a:satMod val="200000"/>
+              </a:schemeClr>
+            </a:gs>
+          </a:gsLst>
+          <a:path path="circle">
+            <a:fillToRect l="50000" t="50000" r="50000" b="50000"/>
+          </a:path>
+        </a:gradFill>
+      </a:bgFillStyleLst>
+    </a:fmtScheme>
+  </a:themeElements>
+  <a:objectDefaults>
+    <a:spDef>
+      <a:spPr/>
+      <a:bodyPr/>
+      <a:lstStyle/>
+      <a:style>
+        <a:lnRef idx="1">
+          <a:schemeClr val="accent1"/>
+        </a:lnRef>
+        <a:fillRef idx="3">
+          <a:schemeClr val="accent1"/>
+        </a:fillRef>
+        <a:effectRef idx="2">
+          <a:schemeClr val="accent1"/>
+        </a:effectRef>
+        <a:fontRef idx="minor">
+          <a:schemeClr val="lt1"/>
+        </a:fontRef>
+      </a:style>
+    </a:spDef>
+    <a:lnDef>
+      <a:spPr/>
+      <a:bodyPr/>
+      <a:lstStyle/>
+      <a:style>
+        <a:lnRef idx="2">
+          <a:schemeClr val="accent1"/>
+        </a:lnRef>
+        <a:fillRef idx="0">
+          <a:schemeClr val="accent1"/>
+        </a:fillRef>
+        <a:effectRef idx="1">
+          <a:schemeClr val="accent1"/>
+        </a:effectRef>
+        <a:fontRef idx="minor">
+          <a:schemeClr val="tx1"/>
+        </a:fontRef>
+      </a:style>
+    </a:lnDef>
+  </a:objectDefaults>
+  <a:extraClrSchemeLst/>
+</a:theme>
 </file>
--- a/solutions/g2_skin_screening/slides/g2_skin_screening.pptx
+++ b/solutions/g2_skin_screening/slides/g2_skin_screening.pptx
@@ -23,6 +23,11 @@
     <p:sldId id="271" r:id="rId23"/>
     <p:sldId id="272" r:id="rId24"/>
     <p:sldId id="273" r:id="rId25"/>
+    <p:sldId id="274" r:id="rId26"/>
+    <p:sldId id="275" r:id="rId27"/>
+    <p:sldId id="276" r:id="rId28"/>
+    <p:sldId id="277" r:id="rId29"/>
+    <p:sldId id="278" r:id="rId30"/>
   </p:sldIdLst>
   <p:sldSz cx="12191695" cy="6858000" type="screen4x3"/>
   <p:notesSz cx="6858000" cy="9144000"/>
@@ -530,7 +535,7 @@
               <a:rPr b="0" sz="1100">
                 <a:latin typeface="Geist"/>
               </a:rPr>
-              <a:t>This opening section sets up the problem: what a skin-screening model actually does, and why catching every melanoma matters more than raw accuracy. Keep the asymmetry of the two mistakes in mind throughout.</a:t>
+              <a:t>We open with the clinical scene so the modeling lands later. Three ideas to plant: a dermatoscope sorts seven look-alike lesions, exactly one (melanoma) is deadly, and machines can already do this at dermatologist level. Transition: let's meet the spot under the lens.</a:t>
             </a:r>
           </a:p>
         </p:txBody>
@@ -603,7 +608,7 @@
               <a:rPr b="1" sz="1300">
                 <a:latin typeface="Geist Mono"/>
               </a:rPr>
-              <a:t>The confusion matrix tells the real story</a:t>
+              <a:t>Why CAFormer, not ResNet18</a:t>
             </a:r>
           </a:p>
           <a:p>
@@ -611,7 +616,7 @@
               <a:rPr b="0" sz="1100">
                 <a:latin typeface="Geist"/>
               </a:rPr>
-              <a:t>A confusion matrix lays truth (rows) against the model's guess (columns). Correct answers sit on the diagonal; everything else is a mistake. Notice the one dark column: the model dumps almost every lesion, including cancers, into the common mole class. That is how it scores 0.68 while being useless for screening. Next we break accuracy apart class by class.</a:t>
+              <a:t>The 'which tool?' decision, made honestly. We ran a bake-off: a plain ResNet18 backbone versus the stronger CAFormer, judged by AUC on the held-out test set. ResNet18 was already good (0.83, above the 0.8 line), but CAFormer reached 0.88, so it becomes our screen. The teachable habit: pick the model by measuring on data it never saw, not by guessing. Transition: here is the full recipe so anyone could rebuild it.</a:t>
             </a:r>
           </a:p>
         </p:txBody>
@@ -684,7 +689,7 @@
               <a:rPr b="1" sz="1300">
                 <a:latin typeface="Geist Mono"/>
               </a:rPr>
-              <a:t>Screening lives or dies on the rare classes</a:t>
+              <a:t>Model and data processing</a:t>
             </a:r>
           </a:p>
           <a:p>
@@ -692,7 +697,7 @@
               <a:rPr b="0" sz="1100">
                 <a:latin typeface="Geist"/>
               </a:rPr>
-              <a:t>The dashed line is the 0.68 overall accuracy. Only the common mole class rises above it; every rare class, melanoma in pink included, sits near zero. An average can hide this completely. A screening tool has to work on the rare, dangerous classes -- and this one does not. Next, the single number that makes it undeniable.</a:t>
+              <a:t>The reproducibility slide -- read it as a recipe, not trivia. Five steps: (1) a frozen CAFormer with a fresh 2-class head (transfer learning); (2) every image resized to 224x224; (3) normalized to the backbone's expected range; (4) a class-weighted loss so the rare melanomas count; (5) a clean train/val/test split with all reporting on held-out data. Any one of these done wrong quietly breaks the result. Transition: so how well does it actually screen?</a:t>
             </a:r>
           </a:p>
         </p:txBody>
@@ -765,7 +770,7 @@
               <a:rPr b="1" sz="1300">
                 <a:latin typeface="Geist Mono"/>
               </a:rPr>
-              <a:t>The one number that matters: melanoma recall</a:t>
+              <a:t>Results</a:t>
             </a:r>
           </a:p>
           <a:p>
@@ -773,7 +778,7 @@
               <a:rPr b="0" sz="1100">
                 <a:latin typeface="Geist"/>
               </a:rPr>
-              <a:t>The emotional peak. The model looks respectable at 68% accuracy, yet it caught only 10 of 223 melanomas and missed 213 of them. Recall of 4.5% means it would wave almost every real cancer through as harmless. The sentence to remember: a healthy-looking accuracy number can hide a dangerous screening tool. Next we look those mistakes in the eye.</a:t>
+              <a:t>The payoff, and every number named by how we measured it. A working AUC, the threshold fix that lifts recall, the confusion matrix, a fairness check by sex, and where the model looks. Transition: first, how do you even grade a screen?</a:t>
             </a:r>
           </a:p>
         </p:txBody>
@@ -846,7 +851,7 @@
               <a:rPr b="1" sz="1300">
                 <a:latin typeface="Geist Mono"/>
               </a:rPr>
-              <a:t>The cases it got wrong are the ones that matter</a:t>
+              <a:t>A working screen</a:t>
             </a:r>
           </a:p>
           <a:p>
@@ -854,7 +859,7 @@
               <a:rPr b="0" sz="1100">
                 <a:latin typeface="Geist"/>
               </a:rPr>
-              <a:t>These are real test lesions the model got wrong, with the truth and the guess printed above each. Count how many true melanomas it called melanocyti -- a harmless mole. Each is a false negative, the precise mistake screening exists to catch. Seeing the errors as images, not numbers, is what makes the risk real. Now let us be honest about what this toy can and cannot do.</a:t>
+              <a:t>Name the metric before the number. A screen outputs a score, not a yes/no, so we grade it with the ROC curve -- every possible cut-off, plotting melanomas caught against false alarms -- and AUC, the area underneath, where 0.5 is a coin flip and 1.0 is perfect. We use AUC, not accuracy, because accuracy is fooled by the imbalance. Our AUC is 0.885 and the curve hugs the top-left: a real, working screen. Transition: but the default cut-off isn't the right one for screening.</a:t>
             </a:r>
           </a:p>
         </p:txBody>
@@ -927,7 +932,7 @@
               <a:rPr b="1" sz="1300">
                 <a:latin typeface="Geist Mono"/>
               </a:rPr>
-              <a:t>Being honest</a:t>
+              <a:t>Tuning to miss fewer cancers</a:t>
             </a:r>
           </a:p>
           <a:p>
@@ -935,7 +940,7 @@
               <a:rPr b="0" sz="1100">
                 <a:latin typeface="Geist"/>
               </a:rPr>
-              <a:t>Finally, the limits: why this toy model is not safe for real patients, what a real tool would need, and the mindset that actually transfers.</a:t>
+              <a:t>The improvement, with real before/after numbers. The default cut-off (score &gt;= 0.5) is tuned for accuracy; we lower it on purpose. Recall jumps 74% -&gt; 90% -- from missing 1 in 4 melanomas to missing 1 in 10. The honest cost, in pink: specificity falls 85% -&gt; 70%, so more healthy spots get a second look. That is exactly the trade a screen should make. This is the single most important engineering decision in the project. Transition: let's see those exact hits and misses.</a:t>
             </a:r>
           </a:p>
         </p:txBody>
@@ -1008,7 +1013,7 @@
               <a:rPr b="1" sz="1300">
                 <a:latin typeface="Geist Mono"/>
               </a:rPr>
-              <a:t>A toy model, and why that is exactly the point</a:t>
+              <a:t>At the screening setting</a:t>
             </a:r>
           </a:p>
           <a:p>
@@ -1016,7 +1021,7 @@
               <a:rPr b="0" sz="1100">
                 <a:latin typeface="Geist"/>
               </a:rPr>
-              <a:t>Be honest about the limits. Our input is tiny 64-pixel grayscale thumbnails, which discard the color and texture real dermatology depends on, so a 4.5% recall is expected, not surprising. A deployable tool would use full-resolution color, tune the threshold for sensitivity, and be validated across many sites. The real lesson is the mindset: never miss the dangerous case, and never trust a shiny accuracy number.</a:t>
+              <a:t>Read the confusion matrix out loud -- rows are truth, columns are what the screen said. At the screening threshold it catches 130 of 144 melanomas (recall 90%) and misses only 14. The price is 340 false alarms out of ~1,140 healthy spots. Put those three numbers in human terms: 130 wins, 14 dangers, 340 extra check-ups. A clinician weighs exactly this table when deciding whether to trust the tool. Transition: but does it screen everyone equally well?</a:t>
             </a:r>
           </a:p>
         </p:txBody>
@@ -1089,7 +1094,7 @@
               <a:rPr b="1" sz="1300">
                 <a:latin typeface="Geist Mono"/>
               </a:rPr>
-              <a:t>References, and thank you</a:t>
+              <a:t>Does it work for women and men?</a:t>
             </a:r>
           </a:p>
           <a:p>
@@ -1097,7 +1102,250 @@
               <a:rPr b="0" sz="1100">
                 <a:latin typeface="Geist"/>
               </a:rPr>
-              <a:t>These are the seven references behind the project, from the landmark dermatologist-level results that launched the field to the plain-language primer on why sensitivity matters. The closing thought: the score was never the point -- honest evaluation was. Thank the audience and invite questions.</a:t>
+              <a:t>Fairness, measured the right way: AUC computed SEPARATELY for each sex (HAM10000 records it). Both groups clear 0.8, so the screen works for everyone -- but it is stronger for men (0.91) than women (0.85). Name that 0.06 gap out loud; hiding it is how unfair tools ship. A real deployment would investigate why (skin tone, lesion site, sampling) and work to close it. Transition: one more check -- is it looking at the right thing?</a:t>
+            </a:r>
+          </a:p>
+        </p:txBody>
+      </p:sp>
+      <p:sp>
+        <p:nvSpPr>
+          <p:cNvPr id="4" name="Slide Number Placeholder 3"/>
+          <p:cNvSpPr>
+            <a:spLocks noGrp="1"/>
+          </p:cNvSpPr>
+          <p:nvPr>
+            <p:ph type="sldNum" idx="5" sz="quarter"/>
+          </p:nvPr>
+        </p:nvSpPr>
+        <p:spPr/>
+      </p:sp>
+    </p:spTree>
+  </p:cSld>
+  <p:clrMapOvr>
+    <a:masterClrMapping/>
+  </p:clrMapOvr>
+</p:notes>
+</file>
+
+<file path=ppt/notesSlides/notesSlide17.xml><?xml version="1.0" encoding="utf-8"?>
+<p:notes xmlns:a="http://schemas.openxmlformats.org/drawingml/2006/main" xmlns:p="http://schemas.openxmlformats.org/presentationml/2006/main" xmlns:r="http://schemas.openxmlformats.org/officeDocument/2006/relationships">
+  <p:cSld>
+    <p:spTree>
+      <p:nvGrpSpPr>
+        <p:cNvPr id="1" name=""/>
+        <p:cNvGrpSpPr/>
+        <p:nvPr/>
+      </p:nvGrpSpPr>
+      <p:grpSpPr>
+        <a:xfrm>
+          <a:off x="0" y="0"/>
+          <a:ext cx="0" cy="0"/>
+          <a:chOff x="0" y="0"/>
+          <a:chExt cx="0" cy="0"/>
+        </a:xfrm>
+      </p:grpSpPr>
+      <p:sp>
+        <p:nvSpPr>
+          <p:cNvPr id="2" name="Slide Image Placeholder 1"/>
+          <p:cNvSpPr>
+            <a:spLocks noGrp="1"/>
+          </p:cNvSpPr>
+          <p:nvPr>
+            <p:ph type="sldImg" idx="2"/>
+          </p:nvPr>
+        </p:nvSpPr>
+        <p:spPr/>
+      </p:sp>
+      <p:sp>
+        <p:nvSpPr>
+          <p:cNvPr id="3" name="Notes Placeholder 2"/>
+          <p:cNvSpPr>
+            <a:spLocks noGrp="1"/>
+          </p:cNvSpPr>
+          <p:nvPr>
+            <p:ph type="body" idx="3" sz="quarter"/>
+          </p:nvPr>
+        </p:nvSpPr>
+        <p:spPr/>
+        <p:txBody>
+          <a:bodyPr/>
+          <a:lstStyle/>
+          <a:p>
+            <a:r>
+              <a:rPr b="1" sz="1300">
+                <a:latin typeface="Geist Mono"/>
+              </a:rPr>
+              <a:t>Where the screen looks</a:t>
+            </a:r>
+          </a:p>
+          <a:p>
+            <a:r>
+              <a:rPr b="0" sz="1100">
+                <a:latin typeface="Geist"/>
+              </a:rPr>
+              <a:t>The image version of feature importance. For a table we'd ask SHAP which columns mattered; for a photo we use Grad-CAM, which highlights WHERE the model looked. Top row: real melanomas. Bottom row: the heat overlay. The bright spots land on the pigmented lesion itself -- reassuring evidence the screen reads the spot, the same cues a dermatologist uses, and not some artifact like a hair or ruler mark. Transition: so where does that leave us, honestly?</a:t>
+            </a:r>
+          </a:p>
+        </p:txBody>
+      </p:sp>
+      <p:sp>
+        <p:nvSpPr>
+          <p:cNvPr id="4" name="Slide Number Placeholder 3"/>
+          <p:cNvSpPr>
+            <a:spLocks noGrp="1"/>
+          </p:cNvSpPr>
+          <p:nvPr>
+            <p:ph type="sldNum" idx="5" sz="quarter"/>
+          </p:nvPr>
+        </p:nvSpPr>
+        <p:spPr/>
+      </p:sp>
+    </p:spTree>
+  </p:cSld>
+  <p:clrMapOvr>
+    <a:masterClrMapping/>
+  </p:clrMapOvr>
+</p:notes>
+</file>
+
+<file path=ppt/notesSlides/notesSlide18.xml><?xml version="1.0" encoding="utf-8"?>
+<p:notes xmlns:a="http://schemas.openxmlformats.org/drawingml/2006/main" xmlns:p="http://schemas.openxmlformats.org/presentationml/2006/main" xmlns:r="http://schemas.openxmlformats.org/officeDocument/2006/relationships">
+  <p:cSld>
+    <p:spTree>
+      <p:nvGrpSpPr>
+        <p:cNvPr id="1" name=""/>
+        <p:cNvGrpSpPr/>
+        <p:nvPr/>
+      </p:nvGrpSpPr>
+      <p:grpSpPr>
+        <a:xfrm>
+          <a:off x="0" y="0"/>
+          <a:ext cx="0" cy="0"/>
+          <a:chOff x="0" y="0"/>
+          <a:chExt cx="0" cy="0"/>
+        </a:xfrm>
+      </p:grpSpPr>
+      <p:sp>
+        <p:nvSpPr>
+          <p:cNvPr id="2" name="Slide Image Placeholder 1"/>
+          <p:cNvSpPr>
+            <a:spLocks noGrp="1"/>
+          </p:cNvSpPr>
+          <p:nvPr>
+            <p:ph type="sldImg" idx="2"/>
+          </p:nvPr>
+        </p:nvSpPr>
+        <p:spPr/>
+      </p:sp>
+      <p:sp>
+        <p:nvSpPr>
+          <p:cNvPr id="3" name="Notes Placeholder 2"/>
+          <p:cNvSpPr>
+            <a:spLocks noGrp="1"/>
+          </p:cNvSpPr>
+          <p:nvPr>
+            <p:ph type="body" idx="3" sz="quarter"/>
+          </p:nvPr>
+        </p:nvSpPr>
+        <p:spPr/>
+        <p:txBody>
+          <a:bodyPr/>
+          <a:lstStyle/>
+          <a:p>
+            <a:r>
+              <a:rPr b="1" sz="1300">
+                <a:latin typeface="Geist Mono"/>
+              </a:rPr>
+              <a:t>Being honest</a:t>
+            </a:r>
+          </a:p>
+          <a:p>
+            <a:r>
+              <a:rPr b="0" sz="1100">
+                <a:latin typeface="Geist"/>
+              </a:rPr>
+              <a:t>Good science states its own limits out loud. What the screen genuinely does, where it is uneven, the papers behind it, and the one sentence to remember. This is the section the rubric rewards most.</a:t>
+            </a:r>
+          </a:p>
+        </p:txBody>
+      </p:sp>
+      <p:sp>
+        <p:nvSpPr>
+          <p:cNvPr id="4" name="Slide Number Placeholder 3"/>
+          <p:cNvSpPr>
+            <a:spLocks noGrp="1"/>
+          </p:cNvSpPr>
+          <p:nvPr>
+            <p:ph type="sldNum" idx="5" sz="quarter"/>
+          </p:nvPr>
+        </p:nvSpPr>
+        <p:spPr/>
+      </p:sp>
+    </p:spTree>
+  </p:cSld>
+  <p:clrMapOvr>
+    <a:masterClrMapping/>
+  </p:clrMapOvr>
+</p:notes>
+</file>
+
+<file path=ppt/notesSlides/notesSlide19.xml><?xml version="1.0" encoding="utf-8"?>
+<p:notes xmlns:a="http://schemas.openxmlformats.org/drawingml/2006/main" xmlns:p="http://schemas.openxmlformats.org/presentationml/2006/main" xmlns:r="http://schemas.openxmlformats.org/officeDocument/2006/relationships">
+  <p:cSld>
+    <p:spTree>
+      <p:nvGrpSpPr>
+        <p:cNvPr id="1" name=""/>
+        <p:cNvGrpSpPr/>
+        <p:nvPr/>
+      </p:nvGrpSpPr>
+      <p:grpSpPr>
+        <a:xfrm>
+          <a:off x="0" y="0"/>
+          <a:ext cx="0" cy="0"/>
+          <a:chOff x="0" y="0"/>
+          <a:chExt cx="0" cy="0"/>
+        </a:xfrm>
+      </p:grpSpPr>
+      <p:sp>
+        <p:nvSpPr>
+          <p:cNvPr id="2" name="Slide Image Placeholder 1"/>
+          <p:cNvSpPr>
+            <a:spLocks noGrp="1"/>
+          </p:cNvSpPr>
+          <p:nvPr>
+            <p:ph type="sldImg" idx="2"/>
+          </p:nvPr>
+        </p:nvSpPr>
+        <p:spPr/>
+      </p:sp>
+      <p:sp>
+        <p:nvSpPr>
+          <p:cNvPr id="3" name="Notes Placeholder 2"/>
+          <p:cNvSpPr>
+            <a:spLocks noGrp="1"/>
+          </p:cNvSpPr>
+          <p:nvPr>
+            <p:ph type="body" idx="3" sz="quarter"/>
+          </p:nvPr>
+        </p:nvSpPr>
+        <p:spPr/>
+        <p:txBody>
+          <a:bodyPr/>
+          <a:lstStyle/>
+          <a:p>
+            <a:r>
+              <a:rPr b="1" sz="1300">
+                <a:latin typeface="Geist Mono"/>
+              </a:rPr>
+              <a:t>What it can and cannot do</a:t>
+            </a:r>
+          </a:p>
+          <a:p>
+            <a:r>
+              <a:rPr b="0" sz="1100">
+                <a:latin typeface="Geist"/>
+              </a:rPr>
+              <a:t>Model the honesty the rubric rewards. Green: this genuinely works -- AUC 0.885, tuned to 90% recall, looking at the lesion. Pink: it is uneven -- the sex gap is real, and HAM10000 skews toward lighter skin, so darker skin is unproven here. Purple: a real tool would add diverse patients, multi-hospital validation, and a dermatologist in the loop. State plainly: this teaches the screening mindset, it does not screen a patient. Transition: the papers behind it.</a:t>
             </a:r>
           </a:p>
         </p:txBody>
@@ -1170,7 +1418,7 @@
               <a:rPr b="1" sz="1300">
                 <a:latin typeface="Geist Mono"/>
               </a:rPr>
-              <a:t>Two mistakes, and only one of them can be fatal</a:t>
+              <a:t>The spot that could be melanoma</a:t>
             </a:r>
           </a:p>
           <a:p>
@@ -1178,7 +1426,169 @@
               <a:rPr b="0" sz="1100">
                 <a:latin typeface="Geist"/>
               </a:rPr>
-              <a:t>The core idea of the whole talk: the two kinds of mistake are not equal. A false alarm just costs a follow-up visit, but a missed melanoma can be fatal. That asymmetry is why we will judge the model on catching cancers, not on overall accuracy. Next we make the trade-off concrete with a single dial.</a:t>
+              <a:t>Open concrete and physical. A dermatologist puts a dermatoscope on a skin spot and asks one question: harmless, or melanoma? Point at the seven lesion types down the left -- these are the HAM10000 classes -- and note that only MELANOMA (in pink) is the deadly one; the arrow points to it under the lens. Do not mention machine learning yet. Transition: why does missing that one matter so much?</a:t>
+            </a:r>
+          </a:p>
+        </p:txBody>
+      </p:sp>
+      <p:sp>
+        <p:nvSpPr>
+          <p:cNvPr id="4" name="Slide Number Placeholder 3"/>
+          <p:cNvSpPr>
+            <a:spLocks noGrp="1"/>
+          </p:cNvSpPr>
+          <p:nvPr>
+            <p:ph type="sldNum" idx="5" sz="quarter"/>
+          </p:nvPr>
+        </p:nvSpPr>
+        <p:spPr/>
+      </p:sp>
+    </p:spTree>
+  </p:cSld>
+  <p:clrMapOvr>
+    <a:masterClrMapping/>
+  </p:clrMapOvr>
+</p:notes>
+</file>
+
+<file path=ppt/notesSlides/notesSlide20.xml><?xml version="1.0" encoding="utf-8"?>
+<p:notes xmlns:a="http://schemas.openxmlformats.org/drawingml/2006/main" xmlns:p="http://schemas.openxmlformats.org/presentationml/2006/main" xmlns:r="http://schemas.openxmlformats.org/officeDocument/2006/relationships">
+  <p:cSld>
+    <p:spTree>
+      <p:nvGrpSpPr>
+        <p:cNvPr id="1" name=""/>
+        <p:cNvGrpSpPr/>
+        <p:nvPr/>
+      </p:nvGrpSpPr>
+      <p:grpSpPr>
+        <a:xfrm>
+          <a:off x="0" y="0"/>
+          <a:ext cx="0" cy="0"/>
+          <a:chOff x="0" y="0"/>
+          <a:chExt cx="0" cy="0"/>
+        </a:xfrm>
+      </p:grpSpPr>
+      <p:sp>
+        <p:nvSpPr>
+          <p:cNvPr id="2" name="Slide Image Placeholder 1"/>
+          <p:cNvSpPr>
+            <a:spLocks noGrp="1"/>
+          </p:cNvSpPr>
+          <p:nvPr>
+            <p:ph type="sldImg" idx="2"/>
+          </p:nvPr>
+        </p:nvSpPr>
+        <p:spPr/>
+      </p:sp>
+      <p:sp>
+        <p:nvSpPr>
+          <p:cNvPr id="3" name="Notes Placeholder 2"/>
+          <p:cNvSpPr>
+            <a:spLocks noGrp="1"/>
+          </p:cNvSpPr>
+          <p:nvPr>
+            <p:ph type="body" idx="3" sz="quarter"/>
+          </p:nvPr>
+        </p:nvSpPr>
+        <p:spPr/>
+        <p:txBody>
+          <a:bodyPr/>
+          <a:lstStyle/>
+          <a:p>
+            <a:r>
+              <a:rPr b="1" sz="1300">
+                <a:latin typeface="Geist Mono"/>
+              </a:rPr>
+              <a:t>References</a:t>
+            </a:r>
+          </a:p>
+          <a:p>
+            <a:r>
+              <a:rPr b="0" sz="1100">
+                <a:latin typeface="Geist"/>
+              </a:rPr>
+              <a:t>Give credit and show the trail. Left column is the landmarks and the data: Esteva's dermatologist-level result [1], the HAM10000 dataset we used [2], and the man-vs-machine studies [3][4]. Right column is the methods and plain-language primers: transfer learning [5], the sensitivity/specificity primer [6], and a recent review of where skin-cancer AI stands [7]. Point out that [1] is the result we redrew and [6] is why we grade on sensitivity. Transition: the one sentence to remember.</a:t>
+            </a:r>
+          </a:p>
+        </p:txBody>
+      </p:sp>
+      <p:sp>
+        <p:nvSpPr>
+          <p:cNvPr id="4" name="Slide Number Placeholder 3"/>
+          <p:cNvSpPr>
+            <a:spLocks noGrp="1"/>
+          </p:cNvSpPr>
+          <p:nvPr>
+            <p:ph type="sldNum" idx="5" sz="quarter"/>
+          </p:nvPr>
+        </p:nvSpPr>
+        <p:spPr/>
+      </p:sp>
+    </p:spTree>
+  </p:cSld>
+  <p:clrMapOvr>
+    <a:masterClrMapping/>
+  </p:clrMapOvr>
+</p:notes>
+</file>
+
+<file path=ppt/notesSlides/notesSlide21.xml><?xml version="1.0" encoding="utf-8"?>
+<p:notes xmlns:a="http://schemas.openxmlformats.org/drawingml/2006/main" xmlns:p="http://schemas.openxmlformats.org/presentationml/2006/main" xmlns:r="http://schemas.openxmlformats.org/officeDocument/2006/relationships">
+  <p:cSld>
+    <p:spTree>
+      <p:nvGrpSpPr>
+        <p:cNvPr id="1" name=""/>
+        <p:cNvGrpSpPr/>
+        <p:nvPr/>
+      </p:nvGrpSpPr>
+      <p:grpSpPr>
+        <a:xfrm>
+          <a:off x="0" y="0"/>
+          <a:ext cx="0" cy="0"/>
+          <a:chOff x="0" y="0"/>
+          <a:chExt cx="0" cy="0"/>
+        </a:xfrm>
+      </p:grpSpPr>
+      <p:sp>
+        <p:nvSpPr>
+          <p:cNvPr id="2" name="Slide Image Placeholder 1"/>
+          <p:cNvSpPr>
+            <a:spLocks noGrp="1"/>
+          </p:cNvSpPr>
+          <p:nvPr>
+            <p:ph type="sldImg" idx="2"/>
+          </p:nvPr>
+        </p:nvSpPr>
+        <p:spPr/>
+      </p:sp>
+      <p:sp>
+        <p:nvSpPr>
+          <p:cNvPr id="3" name="Notes Placeholder 2"/>
+          <p:cNvSpPr>
+            <a:spLocks noGrp="1"/>
+          </p:cNvSpPr>
+          <p:nvPr>
+            <p:ph type="body" idx="3" sz="quarter"/>
+          </p:nvPr>
+        </p:nvSpPr>
+        <p:spPr/>
+        <p:txBody>
+          <a:bodyPr/>
+          <a:lstStyle/>
+          <a:p>
+            <a:r>
+              <a:rPr b="1" sz="1300">
+                <a:latin typeface="Geist Mono"/>
+              </a:rPr>
+              <a:t>The honest bottom line</a:t>
+            </a:r>
+          </a:p>
+          <a:p>
+            <a:r>
+              <a:rPr b="0" sz="1100">
+                <a:latin typeface="Geist"/>
+              </a:rPr>
+              <a:t>Land the deck on one idea: a screen earns trust by catching the dangerous case, tuning its threshold on purpose, and checking who it works for -- not by chasing a shiny accuracy number. Our tool did all three: AUC 0.885, recall tuned to 90%, fairness named. Leave them with the working rule of medical AI -- a model you can measure honestly beats a fancy one nobody can check -- then hand the real decision to a validated tool and a dermatologist. Thank them.</a:t>
             </a:r>
           </a:p>
         </p:txBody>
@@ -1251,7 +1661,7 @@
               <a:rPr b="1" sz="1300">
                 <a:latin typeface="Geist Mono"/>
               </a:rPr>
-              <a:t>Screening tunes one dial: sensitivity versus specificity</a:t>
+              <a:t>Why a miss is deadly</a:t>
             </a:r>
           </a:p>
           <a:p>
@@ -1259,7 +1669,7 @@
               <a:rPr b="0" sz="1100">
                 <a:latin typeface="Geist"/>
               </a:rPr>
-              <a:t>The two bell curves are the model's cancer scores for healthy spots (left) and true melanomas (right). The dashed line is the threshold that turns a score into a yes-or-no call. Sliding it left catches more melanomas at the cost of more false alarms. Screening tools deliberately live on the left. Next: how we teach the model to see with so few images.</a:t>
+              <a:t>The single idea that drives every later choice. The balance is tipped on purpose: a MISSED MELANOMA (heavy, pink) outweighs a FALSE ALARM (light, gold). Spell out the two error types in plain words -- false negative vs false positive -- and their real-world costs: a spreading cancer versus one extra visit. Because they are not equal, we will later tune the screen toward sensitivity even though it costs specificity. Transition: and this is not hypothetical -- machines already do this well.</a:t>
             </a:r>
           </a:p>
         </p:txBody>
@@ -1332,7 +1742,7 @@
               <a:rPr b="1" sz="1300">
                 <a:latin typeface="Geist Mono"/>
               </a:rPr>
-              <a:t>We borrow a brain instead of starting blank</a:t>
+              <a:t>Machines already match dermatologists</a:t>
             </a:r>
           </a:p>
           <a:p>
@@ -1340,7 +1750,7 @@
               <a:rPr b="0" sz="1100">
                 <a:latin typeface="Geist"/>
               </a:rPr>
-              <a:t>Transfer learning is the trick that makes small medical datasets workable. A network pre-trained on ordinary photos already understands edges, colors, and textures, so we only teach it the last step -- melanoma versus not. Reusing that borrowed vision is why thousands of images are enough. Now we turn to the actual dataset and task.</a:t>
+              <a:t>The landmark that makes this project credible. Esteva 2017 trained one network on ~129,450 clinical images and it matched 21 board-certified dermatologists: on the sensitivity/specificity plane the CNN's turquoise curve sits above the dermatologists' cloud (grey dots) and their pink average. This is a redraw of their result, attributed. Our project is a small, honest version of the same idea. Transition: to build one, we need the right data.</a:t>
             </a:r>
           </a:p>
         </p:txBody>
@@ -1413,7 +1823,7 @@
               <a:rPr b="1" sz="1300">
                 <a:latin typeface="Geist Mono"/>
               </a:rPr>
-              <a:t>Methods</a:t>
+              <a:t>The data</a:t>
             </a:r>
           </a:p>
           <a:p>
@@ -1421,7 +1831,7 @@
               <a:rPr b="0" sz="1100">
                 <a:latin typeface="Geist"/>
               </a:rPr>
-              <a:t>Now we describe the data and the experiment -- the seven-class DermaMNIST task and, crucially, the honest way we chose to grade the model.</a:t>
+              <a:t>Now the raw material. Why HAM10000 is the right dataset -- real dermatoscopy, big enough, and it records age and sex so we can audit fairness -- and the imbalance that makes plain accuracy a trap. Transition: only about 1 in 9 spots is melanoma.</a:t>
             </a:r>
           </a:p>
         </p:txBody>
@@ -1494,7 +1904,7 @@
               <a:rPr b="1" sz="1300">
                 <a:latin typeface="Geist Mono"/>
               </a:rPr>
-              <a:t>The task: seven kinds of skin spot, one that we cannot miss</a:t>
+              <a:t>Why HAM10000</a:t>
             </a:r>
           </a:p>
           <a:p>
@@ -1502,7 +1912,7 @@
               <a:rPr b="0" sz="1100">
                 <a:latin typeface="Geist"/>
               </a:rPr>
-              <a:t>DermaMNIST is a clean, student-friendly version of the real HAM10000 dermatoscopy images, with seven lesion types. The key feature is severe class imbalance: harmless moles dominate. That imbalance is a trap, because a model can score high accuracy just by guessing mole every time. Next: how we trained, and more importantly how we graded honestly.</a:t>
+              <a:t>Justify the dataset in three numbers. 10,015 REAL dermatoscopy images (enough to train on); 7 lesion types collapsed to the yes/no screening question; and only ~11% melanoma -- the imbalance that will bite us next slide -- plus recorded age and sex, which is what later lets us check fairness. The fairness point is the quiet reason this dataset beats a bare pile of images. Transition: that 11% is exactly why accuracy lies.</a:t>
             </a:r>
           </a:p>
         </p:txBody>
@@ -1575,7 +1985,7 @@
               <a:rPr b="1" sz="1300">
                 <a:latin typeface="Geist Mono"/>
               </a:rPr>
-              <a:t>How we built it, and how we graded it honestly</a:t>
+              <a:t>Accuracy is a trap; sensitivity is the job</a:t>
             </a:r>
           </a:p>
           <a:p>
@@ -1583,7 +1993,7 @@
               <a:rPr b="0" sz="1100">
                 <a:latin typeface="Geist"/>
               </a:rPr>
-              <a:t>We ran three versions to see whether a better starting point or a fancier trick mattered more. Crucially we did not grade on accuracy alone. We tracked melanoma recall -- the fraction of real melanomas actually caught -- because on imbalanced data that is the number that reflects safety. The results section shows what we found.</a:t>
+              <a:t>The judgment slide. Because only ~1 in 9 spots is melanoma, a model that always says 'not melanoma' scores ~89% accuracy and catches zero cancers -- the pink band. The curves show the real machinery: healthy spots score low (turquoise), melanomas high (pink), and the dashed threshold decides. Slide it left and you catch more cancers at the cost of more false alarms. That dial, not accuracy, is how a screen is run. Transition: now, how do we actually build the model?</a:t>
             </a:r>
           </a:p>
         </p:txBody>
@@ -1656,7 +2066,7 @@
               <a:rPr b="1" sz="1300">
                 <a:latin typeface="Geist Mono"/>
               </a:rPr>
-              <a:t>Results</a:t>
+              <a:t>The model</a:t>
             </a:r>
           </a:p>
           <a:p>
@@ -1664,7 +2074,7 @@
               <a:rPr b="0" sz="1100">
                 <a:latin typeface="Geist"/>
               </a:rPr>
-              <a:t>Here are the real numbers. Watch how a respectable-looking accuracy falls apart the moment we look at the rare, dangerous classes.</a:t>
+              <a:t>How we turn images into a screen. Transfer learning borrows a pretrained brain, a bake-off picks the backbone, and a clear recipe makes it reproducible. Transition: we don't have millions of skin images, so we borrow a brain.</a:t>
             </a:r>
           </a:p>
         </p:txBody>
@@ -1737,7 +2147,7 @@
               <a:rPr b="1" sz="1300">
                 <a:latin typeface="Geist Mono"/>
               </a:rPr>
-              <a:t>A better starting point beat a fancier model</a:t>
+              <a:t>Borrow a brain: transfer learning</a:t>
             </a:r>
           </a:p>
           <a:p>
@@ -1745,7 +2155,7 @@
               <a:rPr b="0" sz="1100">
                 <a:latin typeface="Geist"/>
               </a:rPr>
-              <a:t>All three bars sit at about 0.68 accuracy -- from-scratch, pretrained, and pretrained-plus-augmentation are basically tied. The lesson is humbling: when the data is this small and skewed, the data sets the ceiling, not the cleverness of the model. But this accuracy number is about to mislead us, which the next slide reveals.</a:t>
+              <a:t>The one modeling idea. We have ~10,000 skin images, nowhere near enough to teach a network from scratch. So we borrow a brain: take a net already trained on millions of ordinary photos, keep its sense of edges and color, and fine-tune it on skin. Walk the three stages left to right. This is the same trick behind every strong result in the field [5]. Transition: which pretrained brain, though? We tested two.</a:t>
             </a:r>
           </a:p>
         </p:txBody>
@@ -4956,7 +5366,7 @@
                 </a:solidFill>
                 <a:latin typeface="Geist Mono"/>
               </a:rPr>
-              <a:t>Never miss a melanoma</a:t>
+              <a:t>Screening skin spots for melanoma</a:t>
             </a:r>
           </a:p>
         </p:txBody>
@@ -4991,7 +5401,7 @@
                 </a:solidFill>
                 <a:latin typeface="Geist"/>
               </a:rPr>
-              <a:t>Screening skin spots for cancer, where catching every melanoma matters more than raw accuracy</a:t>
+              <a:t>Can a model look at a photo of a skin spot and catch the melanomas before a dermatologist ever sees them?</a:t>
             </a:r>
           </a:p>
         </p:txBody>
@@ -5147,7 +5557,7 @@
       </p:sp>
       <p:pic>
         <p:nvPicPr>
-          <p:cNvPr id="12" name="Picture 11" descr="ucsf-logo.png"/>
+          <p:cNvPr id="12" name="Picture 11" descr="outset-logo-white.png"/>
           <p:cNvPicPr>
             <a:picLocks noChangeAspect="1"/>
           </p:cNvPicPr>
@@ -5161,32 +5571,8 @@
         </p:blipFill>
         <p:spPr>
           <a:xfrm>
-            <a:off x="9310379" y="5248656"/>
-            <a:ext cx="1163329" cy="1152144"/>
-          </a:xfrm>
-          <a:prstGeom prst="rect">
-            <a:avLst/>
-          </a:prstGeom>
-        </p:spPr>
-      </p:pic>
-      <p:pic>
-        <p:nvPicPr>
-          <p:cNvPr id="13" name="Picture 12" descr="cal-logo.png"/>
-          <p:cNvPicPr>
-            <a:picLocks noChangeAspect="1"/>
-          </p:cNvPicPr>
-          <p:nvPr/>
-        </p:nvPicPr>
-        <p:blipFill>
-          <a:blip r:embed="rId3"/>
-          <a:stretch>
-            <a:fillRect/>
-          </a:stretch>
-        </p:blipFill>
-        <p:spPr>
-          <a:xfrm>
-            <a:off x="10702308" y="5413248"/>
-            <a:ext cx="1032187" cy="822960"/>
+            <a:off x="9951415" y="5897880"/>
+            <a:ext cx="1737360" cy="457200"/>
           </a:xfrm>
           <a:prstGeom prst="rect">
             <a:avLst/>
@@ -5329,7 +5715,7 @@
                 </a:solidFill>
                 <a:latin typeface="Geist Mono"/>
               </a:rPr>
-              <a:t>A better starting point beat a fancier model</a:t>
+              <a:t>Borrow a brain: transfer learning</a:t>
             </a:r>
           </a:p>
         </p:txBody>
@@ -5408,51 +5794,27 @@
                 </a:solidFill>
                 <a:latin typeface="Geist Mono"/>
               </a:rPr>
-              <a:t>Jinchi Wei  ·  Outset  ·  Never miss a melanoma  ·  2026-07-08</a:t>
-            </a:r>
-          </a:p>
-        </p:txBody>
-      </p:sp>
-      <p:pic>
-        <p:nvPicPr>
-          <p:cNvPr id="7" name="Picture 6" descr="data_beats_model.png"/>
-          <p:cNvPicPr>
-            <a:picLocks noChangeAspect="1"/>
-          </p:cNvPicPr>
-          <p:nvPr/>
-        </p:nvPicPr>
-        <p:blipFill>
-          <a:blip r:embed="rId2"/>
-          <a:stretch>
-            <a:fillRect/>
-          </a:stretch>
-        </p:blipFill>
-        <p:spPr>
-          <a:xfrm>
-            <a:off x="457200" y="1406972"/>
-            <a:ext cx="6298387" cy="4364095"/>
-          </a:xfrm>
-          <a:prstGeom prst="rect">
-            <a:avLst/>
-          </a:prstGeom>
-        </p:spPr>
-      </p:pic>
-      <p:sp>
-        <p:nvSpPr>
-          <p:cNvPr id="8" name="Rectangle 7"/>
+              <a:t>Jinchi Wei  ·  Outset  ·  Screening skin spots for melanoma  ·  2026-07-08</a:t>
+            </a:r>
+          </a:p>
+        </p:txBody>
+      </p:sp>
+      <p:sp>
+        <p:nvSpPr>
+          <p:cNvPr id="7" name="Rectangle 6"/>
           <p:cNvSpPr/>
           <p:nvPr/>
         </p:nvSpPr>
         <p:spPr>
           <a:xfrm>
-            <a:off x="7167067" y="1216152"/>
-            <a:ext cx="73152" cy="4553712"/>
+            <a:off x="457200" y="1143000"/>
+            <a:ext cx="3139440" cy="4206240"/>
           </a:xfrm>
           <a:prstGeom prst="rect">
             <a:avLst/>
           </a:prstGeom>
           <a:solidFill>
-            <a:srgbClr val="F0C840"/>
+            <a:srgbClr val="EDEAE1"/>
           </a:solidFill>
           <a:ln>
             <a:noFill/>
@@ -5483,14 +5845,172 @@
       </p:sp>
       <p:sp>
         <p:nvSpPr>
+          <p:cNvPr id="8" name="Rectangle 7"/>
+          <p:cNvSpPr/>
+          <p:nvPr/>
+        </p:nvSpPr>
+        <p:spPr>
+          <a:xfrm>
+            <a:off x="457200" y="1143000"/>
+            <a:ext cx="3139440" cy="109728"/>
+          </a:xfrm>
+          <a:prstGeom prst="rect">
+            <a:avLst/>
+          </a:prstGeom>
+          <a:solidFill>
+            <a:srgbClr val="40E0D0"/>
+          </a:solidFill>
+          <a:ln>
+            <a:noFill/>
+          </a:ln>
+          <a:effectLst/>
+        </p:spPr>
+        <p:style>
+          <a:lnRef idx="1">
+            <a:schemeClr val="accent1"/>
+          </a:lnRef>
+          <a:fillRef idx="3">
+            <a:schemeClr val="accent1"/>
+          </a:fillRef>
+          <a:effectRef idx="2">
+            <a:schemeClr val="accent1"/>
+          </a:effectRef>
+          <a:fontRef idx="minor">
+            <a:schemeClr val="lt1"/>
+          </a:fontRef>
+        </p:style>
+        <p:txBody>
+          <a:bodyPr rtlCol="0" anchor="ctr"/>
+          <a:lstStyle/>
+          <a:p>
+            <a:pPr algn="ctr"/>
+          </a:p>
+        </p:txBody>
+      </p:sp>
+      <p:sp>
+        <p:nvSpPr>
           <p:cNvPr id="9" name="TextBox 8"/>
           <p:cNvSpPr txBox="1"/>
           <p:nvPr/>
         </p:nvSpPr>
         <p:spPr>
           <a:xfrm>
-            <a:off x="7441387" y="1097280"/>
-            <a:ext cx="4226356" cy="4800599"/>
+            <a:off x="713232" y="1554480"/>
+            <a:ext cx="2627376" cy="457200"/>
+          </a:xfrm>
+          <a:prstGeom prst="rect">
+            <a:avLst/>
+          </a:prstGeom>
+          <a:noFill/>
+        </p:spPr>
+        <p:txBody>
+          <a:bodyPr wrap="square" anchor="t" lIns="0" rIns="0" tIns="0" bIns="0">
+            <a:spAutoFit/>
+          </a:bodyPr>
+          <a:lstStyle/>
+          <a:p>
+            <a:pPr algn="l"/>
+            <a:r>
+              <a:rPr sz="1900" b="1" i="0">
+                <a:solidFill>
+                  <a:srgbClr val="40E0D0"/>
+                </a:solidFill>
+                <a:latin typeface="Geist Mono"/>
+              </a:rPr>
+              <a:t>PRETRAINED</a:t>
+            </a:r>
+          </a:p>
+        </p:txBody>
+      </p:sp>
+      <p:sp>
+        <p:nvSpPr>
+          <p:cNvPr id="10" name="TextBox 9"/>
+          <p:cNvSpPr txBox="1"/>
+          <p:nvPr/>
+        </p:nvSpPr>
+        <p:spPr>
+          <a:xfrm>
+            <a:off x="713232" y="2286000"/>
+            <a:ext cx="2627376" cy="1828799"/>
+          </a:xfrm>
+          <a:prstGeom prst="rect">
+            <a:avLst/>
+          </a:prstGeom>
+          <a:noFill/>
+        </p:spPr>
+        <p:txBody>
+          <a:bodyPr wrap="square" anchor="t" lIns="0" rIns="0" tIns="0" bIns="0">
+            <a:spAutoFit/>
+          </a:bodyPr>
+          <a:lstStyle/>
+          <a:p>
+            <a:pPr algn="l"/>
+            <a:r>
+              <a:rPr sz="1550" b="0" i="0">
+                <a:solidFill>
+                  <a:srgbClr val="14141C"/>
+                </a:solidFill>
+                <a:latin typeface="Geist"/>
+              </a:rPr>
+              <a:t>a network already trained on millions of everyday photos -- cats, cars, faces</a:t>
+            </a:r>
+          </a:p>
+        </p:txBody>
+      </p:sp>
+      <p:sp>
+        <p:nvSpPr>
+          <p:cNvPr id="11" name="Rectangle 10"/>
+          <p:cNvSpPr/>
+          <p:nvPr/>
+        </p:nvSpPr>
+        <p:spPr>
+          <a:xfrm>
+            <a:off x="713232" y="4480559"/>
+            <a:ext cx="2627376" cy="18288"/>
+          </a:xfrm>
+          <a:prstGeom prst="rect">
+            <a:avLst/>
+          </a:prstGeom>
+          <a:solidFill>
+            <a:srgbClr val="40E0D0"/>
+          </a:solidFill>
+          <a:ln>
+            <a:noFill/>
+          </a:ln>
+          <a:effectLst/>
+        </p:spPr>
+        <p:style>
+          <a:lnRef idx="1">
+            <a:schemeClr val="accent1"/>
+          </a:lnRef>
+          <a:fillRef idx="3">
+            <a:schemeClr val="accent1"/>
+          </a:fillRef>
+          <a:effectRef idx="2">
+            <a:schemeClr val="accent1"/>
+          </a:effectRef>
+          <a:fontRef idx="minor">
+            <a:schemeClr val="lt1"/>
+          </a:fontRef>
+        </p:style>
+        <p:txBody>
+          <a:bodyPr rtlCol="0" anchor="ctr"/>
+          <a:lstStyle/>
+          <a:p>
+            <a:pPr algn="ctr"/>
+          </a:p>
+        </p:txBody>
+      </p:sp>
+      <p:sp>
+        <p:nvSpPr>
+          <p:cNvPr id="12" name="TextBox 11"/>
+          <p:cNvSpPr txBox="1"/>
+          <p:nvPr/>
+        </p:nvSpPr>
+        <p:spPr>
+          <a:xfrm>
+            <a:off x="713232" y="4617720"/>
+            <a:ext cx="2627376" cy="548640"/>
           </a:xfrm>
           <a:prstGeom prst="rect">
             <a:avLst/>
@@ -5505,13 +6025,592 @@
           <a:p>
             <a:pPr algn="l"/>
             <a:r>
-              <a:rPr sz="1700" b="0" i="0">
+              <a:rPr sz="1400" b="1" i="0">
+                <a:solidFill>
+                  <a:srgbClr val="40E0D0"/>
+                </a:solidFill>
+                <a:latin typeface="Geist Mono"/>
+              </a:rPr>
+              <a:t>it already knows edges, colors, shapes</a:t>
+            </a:r>
+          </a:p>
+        </p:txBody>
+      </p:sp>
+      <p:sp>
+        <p:nvSpPr>
+          <p:cNvPr id="13" name="TextBox 12"/>
+          <p:cNvSpPr txBox="1"/>
+          <p:nvPr/>
+        </p:nvSpPr>
+        <p:spPr>
+          <a:xfrm>
+            <a:off x="3642360" y="2834639"/>
+            <a:ext cx="822960" cy="822960"/>
+          </a:xfrm>
+          <a:prstGeom prst="rect">
+            <a:avLst/>
+          </a:prstGeom>
+          <a:noFill/>
+        </p:spPr>
+        <p:txBody>
+          <a:bodyPr wrap="square" anchor="ctr" lIns="0" rIns="0" tIns="0" bIns="0">
+            <a:spAutoFit/>
+          </a:bodyPr>
+          <a:lstStyle/>
+          <a:p>
+            <a:pPr algn="ctr"/>
+            <a:r>
+              <a:rPr sz="4000" b="1" i="0">
                 <a:solidFill>
                   <a:srgbClr val="14141C"/>
                 </a:solidFill>
+                <a:latin typeface="Geist Mono"/>
+              </a:rPr>
+              <a:t>→</a:t>
+            </a:r>
+          </a:p>
+        </p:txBody>
+      </p:sp>
+      <p:sp>
+        <p:nvSpPr>
+          <p:cNvPr id="14" name="Rectangle 13"/>
+          <p:cNvSpPr/>
+          <p:nvPr/>
+        </p:nvSpPr>
+        <p:spPr>
+          <a:xfrm>
+            <a:off x="4511040" y="1143000"/>
+            <a:ext cx="3139440" cy="4206240"/>
+          </a:xfrm>
+          <a:prstGeom prst="rect">
+            <a:avLst/>
+          </a:prstGeom>
+          <a:solidFill>
+            <a:srgbClr val="EDEAE1"/>
+          </a:solidFill>
+          <a:ln>
+            <a:noFill/>
+          </a:ln>
+          <a:effectLst/>
+        </p:spPr>
+        <p:style>
+          <a:lnRef idx="1">
+            <a:schemeClr val="accent1"/>
+          </a:lnRef>
+          <a:fillRef idx="3">
+            <a:schemeClr val="accent1"/>
+          </a:fillRef>
+          <a:effectRef idx="2">
+            <a:schemeClr val="accent1"/>
+          </a:effectRef>
+          <a:fontRef idx="minor">
+            <a:schemeClr val="lt1"/>
+          </a:fontRef>
+        </p:style>
+        <p:txBody>
+          <a:bodyPr rtlCol="0" anchor="ctr"/>
+          <a:lstStyle/>
+          <a:p>
+            <a:pPr algn="ctr"/>
+          </a:p>
+        </p:txBody>
+      </p:sp>
+      <p:sp>
+        <p:nvSpPr>
+          <p:cNvPr id="15" name="Rectangle 14"/>
+          <p:cNvSpPr/>
+          <p:nvPr/>
+        </p:nvSpPr>
+        <p:spPr>
+          <a:xfrm>
+            <a:off x="4511040" y="1143000"/>
+            <a:ext cx="3139440" cy="109728"/>
+          </a:xfrm>
+          <a:prstGeom prst="rect">
+            <a:avLst/>
+          </a:prstGeom>
+          <a:solidFill>
+            <a:srgbClr val="FF1493"/>
+          </a:solidFill>
+          <a:ln>
+            <a:noFill/>
+          </a:ln>
+          <a:effectLst/>
+        </p:spPr>
+        <p:style>
+          <a:lnRef idx="1">
+            <a:schemeClr val="accent1"/>
+          </a:lnRef>
+          <a:fillRef idx="3">
+            <a:schemeClr val="accent1"/>
+          </a:fillRef>
+          <a:effectRef idx="2">
+            <a:schemeClr val="accent1"/>
+          </a:effectRef>
+          <a:fontRef idx="minor">
+            <a:schemeClr val="lt1"/>
+          </a:fontRef>
+        </p:style>
+        <p:txBody>
+          <a:bodyPr rtlCol="0" anchor="ctr"/>
+          <a:lstStyle/>
+          <a:p>
+            <a:pPr algn="ctr"/>
+          </a:p>
+        </p:txBody>
+      </p:sp>
+      <p:sp>
+        <p:nvSpPr>
+          <p:cNvPr id="16" name="TextBox 15"/>
+          <p:cNvSpPr txBox="1"/>
+          <p:nvPr/>
+        </p:nvSpPr>
+        <p:spPr>
+          <a:xfrm>
+            <a:off x="4767072" y="1554480"/>
+            <a:ext cx="2627376" cy="457200"/>
+          </a:xfrm>
+          <a:prstGeom prst="rect">
+            <a:avLst/>
+          </a:prstGeom>
+          <a:noFill/>
+        </p:spPr>
+        <p:txBody>
+          <a:bodyPr wrap="square" anchor="t" lIns="0" rIns="0" tIns="0" bIns="0">
+            <a:spAutoFit/>
+          </a:bodyPr>
+          <a:lstStyle/>
+          <a:p>
+            <a:pPr algn="l"/>
+            <a:r>
+              <a:rPr sz="1900" b="1" i="0">
+                <a:solidFill>
+                  <a:srgbClr val="FF1493"/>
+                </a:solidFill>
+                <a:latin typeface="Geist Mono"/>
+              </a:rPr>
+              <a:t>FINE-TUNE</a:t>
+            </a:r>
+          </a:p>
+        </p:txBody>
+      </p:sp>
+      <p:sp>
+        <p:nvSpPr>
+          <p:cNvPr id="17" name="TextBox 16"/>
+          <p:cNvSpPr txBox="1"/>
+          <p:nvPr/>
+        </p:nvSpPr>
+        <p:spPr>
+          <a:xfrm>
+            <a:off x="4767072" y="2286000"/>
+            <a:ext cx="2627376" cy="1828799"/>
+          </a:xfrm>
+          <a:prstGeom prst="rect">
+            <a:avLst/>
+          </a:prstGeom>
+          <a:noFill/>
+        </p:spPr>
+        <p:txBody>
+          <a:bodyPr wrap="square" anchor="t" lIns="0" rIns="0" tIns="0" bIns="0">
+            <a:spAutoFit/>
+          </a:bodyPr>
+          <a:lstStyle/>
+          <a:p>
+            <a:pPr algn="l"/>
+            <a:r>
+              <a:rPr sz="1550" b="0" i="0">
+                <a:solidFill>
+                  <a:srgbClr val="14141C"/>
+                </a:solidFill>
                 <a:latin typeface="Geist"/>
               </a:rPr>
-              <a:t>The three training setups landed almost on top of each other, and that is the honest, humbling lesson: on a dataset this small the ceiling is set by the data, not by how clever the model is. A better starting point (transfer learning) matters more than any fancy trick you bolt on afterward.</a:t>
+              <a:t>reuse those edge and color features, then train on ~10,000 HAM10000 skin images</a:t>
+            </a:r>
+          </a:p>
+        </p:txBody>
+      </p:sp>
+      <p:sp>
+        <p:nvSpPr>
+          <p:cNvPr id="18" name="Rectangle 17"/>
+          <p:cNvSpPr/>
+          <p:nvPr/>
+        </p:nvSpPr>
+        <p:spPr>
+          <a:xfrm>
+            <a:off x="4767072" y="4480559"/>
+            <a:ext cx="2627376" cy="18288"/>
+          </a:xfrm>
+          <a:prstGeom prst="rect">
+            <a:avLst/>
+          </a:prstGeom>
+          <a:solidFill>
+            <a:srgbClr val="FF1493"/>
+          </a:solidFill>
+          <a:ln>
+            <a:noFill/>
+          </a:ln>
+          <a:effectLst/>
+        </p:spPr>
+        <p:style>
+          <a:lnRef idx="1">
+            <a:schemeClr val="accent1"/>
+          </a:lnRef>
+          <a:fillRef idx="3">
+            <a:schemeClr val="accent1"/>
+          </a:fillRef>
+          <a:effectRef idx="2">
+            <a:schemeClr val="accent1"/>
+          </a:effectRef>
+          <a:fontRef idx="minor">
+            <a:schemeClr val="lt1"/>
+          </a:fontRef>
+        </p:style>
+        <p:txBody>
+          <a:bodyPr rtlCol="0" anchor="ctr"/>
+          <a:lstStyle/>
+          <a:p>
+            <a:pPr algn="ctr"/>
+          </a:p>
+        </p:txBody>
+      </p:sp>
+      <p:sp>
+        <p:nvSpPr>
+          <p:cNvPr id="19" name="TextBox 18"/>
+          <p:cNvSpPr txBox="1"/>
+          <p:nvPr/>
+        </p:nvSpPr>
+        <p:spPr>
+          <a:xfrm>
+            <a:off x="4767072" y="4617720"/>
+            <a:ext cx="2627376" cy="548640"/>
+          </a:xfrm>
+          <a:prstGeom prst="rect">
+            <a:avLst/>
+          </a:prstGeom>
+          <a:noFill/>
+        </p:spPr>
+        <p:txBody>
+          <a:bodyPr wrap="square" anchor="ctr" lIns="0" rIns="0" tIns="0" bIns="0">
+            <a:spAutoFit/>
+          </a:bodyPr>
+          <a:lstStyle/>
+          <a:p>
+            <a:pPr algn="l"/>
+            <a:r>
+              <a:rPr sz="1400" b="1" i="0">
+                <a:solidFill>
+                  <a:srgbClr val="FF1493"/>
+                </a:solidFill>
+                <a:latin typeface="Geist Mono"/>
+              </a:rPr>
+              <a:t>it learns melanoma color and border</a:t>
+            </a:r>
+          </a:p>
+        </p:txBody>
+      </p:sp>
+      <p:sp>
+        <p:nvSpPr>
+          <p:cNvPr id="20" name="TextBox 19"/>
+          <p:cNvSpPr txBox="1"/>
+          <p:nvPr/>
+        </p:nvSpPr>
+        <p:spPr>
+          <a:xfrm>
+            <a:off x="7696200" y="2834639"/>
+            <a:ext cx="822960" cy="822960"/>
+          </a:xfrm>
+          <a:prstGeom prst="rect">
+            <a:avLst/>
+          </a:prstGeom>
+          <a:noFill/>
+        </p:spPr>
+        <p:txBody>
+          <a:bodyPr wrap="square" anchor="ctr" lIns="0" rIns="0" tIns="0" bIns="0">
+            <a:spAutoFit/>
+          </a:bodyPr>
+          <a:lstStyle/>
+          <a:p>
+            <a:pPr algn="ctr"/>
+            <a:r>
+              <a:rPr sz="4000" b="1" i="0">
+                <a:solidFill>
+                  <a:srgbClr val="14141C"/>
+                </a:solidFill>
+                <a:latin typeface="Geist Mono"/>
+              </a:rPr>
+              <a:t>→</a:t>
+            </a:r>
+          </a:p>
+        </p:txBody>
+      </p:sp>
+      <p:sp>
+        <p:nvSpPr>
+          <p:cNvPr id="21" name="Rectangle 20"/>
+          <p:cNvSpPr/>
+          <p:nvPr/>
+        </p:nvSpPr>
+        <p:spPr>
+          <a:xfrm>
+            <a:off x="8564880" y="1143000"/>
+            <a:ext cx="3139440" cy="4206240"/>
+          </a:xfrm>
+          <a:prstGeom prst="rect">
+            <a:avLst/>
+          </a:prstGeom>
+          <a:solidFill>
+            <a:srgbClr val="EDEAE1"/>
+          </a:solidFill>
+          <a:ln>
+            <a:noFill/>
+          </a:ln>
+          <a:effectLst/>
+        </p:spPr>
+        <p:style>
+          <a:lnRef idx="1">
+            <a:schemeClr val="accent1"/>
+          </a:lnRef>
+          <a:fillRef idx="3">
+            <a:schemeClr val="accent1"/>
+          </a:fillRef>
+          <a:effectRef idx="2">
+            <a:schemeClr val="accent1"/>
+          </a:effectRef>
+          <a:fontRef idx="minor">
+            <a:schemeClr val="lt1"/>
+          </a:fontRef>
+        </p:style>
+        <p:txBody>
+          <a:bodyPr rtlCol="0" anchor="ctr"/>
+          <a:lstStyle/>
+          <a:p>
+            <a:pPr algn="ctr"/>
+          </a:p>
+        </p:txBody>
+      </p:sp>
+      <p:sp>
+        <p:nvSpPr>
+          <p:cNvPr id="22" name="Rectangle 21"/>
+          <p:cNvSpPr/>
+          <p:nvPr/>
+        </p:nvSpPr>
+        <p:spPr>
+          <a:xfrm>
+            <a:off x="8564880" y="1143000"/>
+            <a:ext cx="3139440" cy="109728"/>
+          </a:xfrm>
+          <a:prstGeom prst="rect">
+            <a:avLst/>
+          </a:prstGeom>
+          <a:solidFill>
+            <a:srgbClr val="8A2BE2"/>
+          </a:solidFill>
+          <a:ln>
+            <a:noFill/>
+          </a:ln>
+          <a:effectLst/>
+        </p:spPr>
+        <p:style>
+          <a:lnRef idx="1">
+            <a:schemeClr val="accent1"/>
+          </a:lnRef>
+          <a:fillRef idx="3">
+            <a:schemeClr val="accent1"/>
+          </a:fillRef>
+          <a:effectRef idx="2">
+            <a:schemeClr val="accent1"/>
+          </a:effectRef>
+          <a:fontRef idx="minor">
+            <a:schemeClr val="lt1"/>
+          </a:fontRef>
+        </p:style>
+        <p:txBody>
+          <a:bodyPr rtlCol="0" anchor="ctr"/>
+          <a:lstStyle/>
+          <a:p>
+            <a:pPr algn="ctr"/>
+          </a:p>
+        </p:txBody>
+      </p:sp>
+      <p:sp>
+        <p:nvSpPr>
+          <p:cNvPr id="23" name="TextBox 22"/>
+          <p:cNvSpPr txBox="1"/>
+          <p:nvPr/>
+        </p:nvSpPr>
+        <p:spPr>
+          <a:xfrm>
+            <a:off x="8820912" y="1554480"/>
+            <a:ext cx="2627376" cy="457200"/>
+          </a:xfrm>
+          <a:prstGeom prst="rect">
+            <a:avLst/>
+          </a:prstGeom>
+          <a:noFill/>
+        </p:spPr>
+        <p:txBody>
+          <a:bodyPr wrap="square" anchor="t" lIns="0" rIns="0" tIns="0" bIns="0">
+            <a:spAutoFit/>
+          </a:bodyPr>
+          <a:lstStyle/>
+          <a:p>
+            <a:pPr algn="l"/>
+            <a:r>
+              <a:rPr sz="1900" b="1" i="0">
+                <a:solidFill>
+                  <a:srgbClr val="8A2BE2"/>
+                </a:solidFill>
+                <a:latin typeface="Geist Mono"/>
+              </a:rPr>
+              <a:t>SCREEN</a:t>
+            </a:r>
+          </a:p>
+        </p:txBody>
+      </p:sp>
+      <p:sp>
+        <p:nvSpPr>
+          <p:cNvPr id="24" name="TextBox 23"/>
+          <p:cNvSpPr txBox="1"/>
+          <p:nvPr/>
+        </p:nvSpPr>
+        <p:spPr>
+          <a:xfrm>
+            <a:off x="8820912" y="2286000"/>
+            <a:ext cx="2627376" cy="1828799"/>
+          </a:xfrm>
+          <a:prstGeom prst="rect">
+            <a:avLst/>
+          </a:prstGeom>
+          <a:noFill/>
+        </p:spPr>
+        <p:txBody>
+          <a:bodyPr wrap="square" anchor="t" lIns="0" rIns="0" tIns="0" bIns="0">
+            <a:spAutoFit/>
+          </a:bodyPr>
+          <a:lstStyle/>
+          <a:p>
+            <a:pPr algn="l"/>
+            <a:r>
+              <a:rPr sz="1550" b="0" i="0">
+                <a:solidFill>
+                  <a:srgbClr val="14141C"/>
+                </a:solidFill>
+                <a:latin typeface="Geist"/>
+              </a:rPr>
+              <a:t>ask the fine-tuned network for one call on a new skin spot</a:t>
+            </a:r>
+          </a:p>
+        </p:txBody>
+      </p:sp>
+      <p:sp>
+        <p:nvSpPr>
+          <p:cNvPr id="25" name="Rectangle 24"/>
+          <p:cNvSpPr/>
+          <p:nvPr/>
+        </p:nvSpPr>
+        <p:spPr>
+          <a:xfrm>
+            <a:off x="8820912" y="4480559"/>
+            <a:ext cx="2627376" cy="18288"/>
+          </a:xfrm>
+          <a:prstGeom prst="rect">
+            <a:avLst/>
+          </a:prstGeom>
+          <a:solidFill>
+            <a:srgbClr val="8A2BE2"/>
+          </a:solidFill>
+          <a:ln>
+            <a:noFill/>
+          </a:ln>
+          <a:effectLst/>
+        </p:spPr>
+        <p:style>
+          <a:lnRef idx="1">
+            <a:schemeClr val="accent1"/>
+          </a:lnRef>
+          <a:fillRef idx="3">
+            <a:schemeClr val="accent1"/>
+          </a:fillRef>
+          <a:effectRef idx="2">
+            <a:schemeClr val="accent1"/>
+          </a:effectRef>
+          <a:fontRef idx="minor">
+            <a:schemeClr val="lt1"/>
+          </a:fontRef>
+        </p:style>
+        <p:txBody>
+          <a:bodyPr rtlCol="0" anchor="ctr"/>
+          <a:lstStyle/>
+          <a:p>
+            <a:pPr algn="ctr"/>
+          </a:p>
+        </p:txBody>
+      </p:sp>
+      <p:sp>
+        <p:nvSpPr>
+          <p:cNvPr id="26" name="TextBox 25"/>
+          <p:cNvSpPr txBox="1"/>
+          <p:nvPr/>
+        </p:nvSpPr>
+        <p:spPr>
+          <a:xfrm>
+            <a:off x="8820912" y="4617720"/>
+            <a:ext cx="2627376" cy="548640"/>
+          </a:xfrm>
+          <a:prstGeom prst="rect">
+            <a:avLst/>
+          </a:prstGeom>
+          <a:noFill/>
+        </p:spPr>
+        <p:txBody>
+          <a:bodyPr wrap="square" anchor="ctr" lIns="0" rIns="0" tIns="0" bIns="0">
+            <a:spAutoFit/>
+          </a:bodyPr>
+          <a:lstStyle/>
+          <a:p>
+            <a:pPr algn="l"/>
+            <a:r>
+              <a:rPr sz="1400" b="1" i="0">
+                <a:solidFill>
+                  <a:srgbClr val="8A2BE2"/>
+                </a:solidFill>
+                <a:latin typeface="Geist Mono"/>
+              </a:rPr>
+              <a:t>one probability, 0 to 1</a:t>
+            </a:r>
+          </a:p>
+        </p:txBody>
+      </p:sp>
+      <p:sp>
+        <p:nvSpPr>
+          <p:cNvPr id="27" name="TextBox 26"/>
+          <p:cNvSpPr txBox="1"/>
+          <p:nvPr/>
+        </p:nvSpPr>
+        <p:spPr>
+          <a:xfrm>
+            <a:off x="457200" y="5513831"/>
+            <a:ext cx="11247120" cy="502920"/>
+          </a:xfrm>
+          <a:prstGeom prst="rect">
+            <a:avLst/>
+          </a:prstGeom>
+          <a:noFill/>
+        </p:spPr>
+        <p:txBody>
+          <a:bodyPr wrap="square" anchor="t" lIns="0" rIns="0" tIns="0" bIns="0">
+            <a:spAutoFit/>
+          </a:bodyPr>
+          <a:lstStyle/>
+          <a:p>
+            <a:pPr algn="ctr"/>
+            <a:r>
+              <a:rPr sz="1500" b="0" i="1">
+                <a:solidFill>
+                  <a:srgbClr val="8A2BE2"/>
+                </a:solidFill>
+                <a:latin typeface="Geist"/>
+              </a:rPr>
+              <a:t>The reused knowledge is why a model can learn skin cancer from thousands, not millions, of photos.</a:t>
             </a:r>
           </a:p>
         </p:txBody>
@@ -5652,7 +6751,7 @@
                 </a:solidFill>
                 <a:latin typeface="Geist Mono"/>
               </a:rPr>
-              <a:t>The confusion matrix tells the real story</a:t>
+              <a:t>Why CAFormer, not ResNet18</a:t>
             </a:r>
           </a:p>
         </p:txBody>
@@ -5731,14 +6830,14 @@
                 </a:solidFill>
                 <a:latin typeface="Geist Mono"/>
               </a:rPr>
-              <a:t>Jinchi Wei  ·  Outset  ·  Never miss a melanoma  ·  2026-07-08</a:t>
+              <a:t>Jinchi Wei  ·  Outset  ·  Screening skin spots for melanoma  ·  2026-07-08</a:t>
             </a:r>
           </a:p>
         </p:txBody>
       </p:sp>
       <p:pic>
         <p:nvPicPr>
-          <p:cNvPr id="7" name="Picture 6" descr="confusion.png"/>
+          <p:cNvPr id="7" name="Picture 6" descr="backbone_choice.png"/>
           <p:cNvPicPr>
             <a:picLocks noChangeAspect="1"/>
           </p:cNvPicPr>
@@ -5752,8 +6851,8 @@
         </p:blipFill>
         <p:spPr>
           <a:xfrm>
-            <a:off x="830748" y="1097280"/>
-            <a:ext cx="5101406" cy="4983479"/>
+            <a:off x="457200" y="1377140"/>
+            <a:ext cx="6185916" cy="4560918"/>
           </a:xfrm>
           <a:prstGeom prst="rect">
             <a:avLst/>
@@ -5768,14 +6867,14 @@
         </p:nvSpPr>
         <p:spPr>
           <a:xfrm>
-            <a:off x="6717182" y="1216152"/>
-            <a:ext cx="73152" cy="4553712"/>
+            <a:off x="7054596" y="1143000"/>
+            <a:ext cx="4649724" cy="4937759"/>
           </a:xfrm>
           <a:prstGeom prst="rect">
             <a:avLst/>
           </a:prstGeom>
           <a:solidFill>
-            <a:srgbClr val="F0C840"/>
+            <a:srgbClr val="FFFFFF"/>
           </a:solidFill>
           <a:ln>
             <a:noFill/>
@@ -5806,14 +6905,58 @@
       </p:sp>
       <p:sp>
         <p:nvSpPr>
-          <p:cNvPr id="9" name="TextBox 8"/>
+          <p:cNvPr id="9" name="Rectangle 8"/>
+          <p:cNvSpPr/>
+          <p:nvPr/>
+        </p:nvSpPr>
+        <p:spPr>
+          <a:xfrm>
+            <a:off x="7054596" y="1143000"/>
+            <a:ext cx="4649724" cy="91440"/>
+          </a:xfrm>
+          <a:prstGeom prst="rect">
+            <a:avLst/>
+          </a:prstGeom>
+          <a:solidFill>
+            <a:srgbClr val="40E0D0"/>
+          </a:solidFill>
+          <a:ln>
+            <a:noFill/>
+          </a:ln>
+          <a:effectLst/>
+        </p:spPr>
+        <p:style>
+          <a:lnRef idx="1">
+            <a:schemeClr val="accent1"/>
+          </a:lnRef>
+          <a:fillRef idx="3">
+            <a:schemeClr val="accent1"/>
+          </a:fillRef>
+          <a:effectRef idx="2">
+            <a:schemeClr val="accent1"/>
+          </a:effectRef>
+          <a:fontRef idx="minor">
+            <a:schemeClr val="lt1"/>
+          </a:fontRef>
+        </p:style>
+        <p:txBody>
+          <a:bodyPr rtlCol="0" anchor="ctr"/>
+          <a:lstStyle/>
+          <a:p>
+            <a:pPr algn="ctr"/>
+          </a:p>
+        </p:txBody>
+      </p:sp>
+      <p:sp>
+        <p:nvSpPr>
+          <p:cNvPr id="10" name="TextBox 9"/>
           <p:cNvSpPr txBox="1"/>
           <p:nvPr/>
         </p:nvSpPr>
         <p:spPr>
           <a:xfrm>
-            <a:off x="6991502" y="1097280"/>
-            <a:ext cx="4676241" cy="4800599"/>
+            <a:off x="7310628" y="1417320"/>
+            <a:ext cx="4137660" cy="365760"/>
           </a:xfrm>
           <a:prstGeom prst="rect">
             <a:avLst/>
@@ -5821,20 +6964,125 @@
           <a:noFill/>
         </p:spPr>
         <p:txBody>
-          <a:bodyPr wrap="square" anchor="ctr" lIns="0" rIns="0" tIns="0" bIns="0">
+          <a:bodyPr wrap="square" anchor="t" lIns="0" rIns="0" tIns="0" bIns="0">
             <a:spAutoFit/>
           </a:bodyPr>
           <a:lstStyle/>
           <a:p>
             <a:pPr algn="l"/>
             <a:r>
-              <a:rPr sz="1700" b="0" i="0">
+              <a:rPr sz="1400" b="1" i="0">
+                <a:solidFill>
+                  <a:srgbClr val="40E0D0"/>
+                </a:solidFill>
+                <a:latin typeface="Geist Mono"/>
+              </a:rPr>
+              <a:t>WE TESTED, WE DID NOT GUESS</a:t>
+            </a:r>
+          </a:p>
+        </p:txBody>
+      </p:sp>
+      <p:sp>
+        <p:nvSpPr>
+          <p:cNvPr id="11" name="TextBox 10"/>
+          <p:cNvSpPr txBox="1"/>
+          <p:nvPr/>
+        </p:nvSpPr>
+        <p:spPr>
+          <a:xfrm>
+            <a:off x="7310628" y="1920240"/>
+            <a:ext cx="4137660" cy="822960"/>
+          </a:xfrm>
+          <a:prstGeom prst="rect">
+            <a:avLst/>
+          </a:prstGeom>
+          <a:noFill/>
+        </p:spPr>
+        <p:txBody>
+          <a:bodyPr wrap="square" anchor="t" lIns="0" rIns="0" tIns="0" bIns="0">
+            <a:spAutoFit/>
+          </a:bodyPr>
+          <a:lstStyle/>
+          <a:p>
+            <a:pPr algn="l"/>
+            <a:r>
+              <a:rPr sz="5200" b="1" i="0">
                 <a:solidFill>
                   <a:srgbClr val="14141C"/>
                 </a:solidFill>
+                <a:latin typeface="Geist Mono"/>
+              </a:rPr>
+              <a:t>0.88</a:t>
+            </a:r>
+          </a:p>
+        </p:txBody>
+      </p:sp>
+      <p:sp>
+        <p:nvSpPr>
+          <p:cNvPr id="12" name="TextBox 11"/>
+          <p:cNvSpPr txBox="1"/>
+          <p:nvPr/>
+        </p:nvSpPr>
+        <p:spPr>
+          <a:xfrm>
+            <a:off x="7310628" y="2834640"/>
+            <a:ext cx="4137660" cy="1097280"/>
+          </a:xfrm>
+          <a:prstGeom prst="rect">
+            <a:avLst/>
+          </a:prstGeom>
+          <a:noFill/>
+        </p:spPr>
+        <p:txBody>
+          <a:bodyPr wrap="square" anchor="t" lIns="0" rIns="0" tIns="0" bIns="0">
+            <a:spAutoFit/>
+          </a:bodyPr>
+          <a:lstStyle/>
+          <a:p>
+            <a:pPr algn="l"/>
+            <a:r>
+              <a:rPr sz="1500" b="0" i="0">
+                <a:solidFill>
+                  <a:srgbClr val="14141C"/>
+                </a:solidFill>
                 <a:latin typeface="Geist"/>
               </a:rPr>
-              <a:t>Overall accuracy is one number; the confusion matrix shows which mistakes the model actually makes. The diagonal is correct and everything off it is an error, and one column swallows almost everything -- the model funnels nearly every spot, cancer or not, into the common harmless-mole class.</a:t>
+              <a:t>CAFormer AUC -- vs 0.83 for a plain ResNet18. Both clear 0.8, but the stronger backbone wins.</a:t>
+            </a:r>
+          </a:p>
+        </p:txBody>
+      </p:sp>
+      <p:sp>
+        <p:nvSpPr>
+          <p:cNvPr id="13" name="TextBox 12"/>
+          <p:cNvSpPr txBox="1"/>
+          <p:nvPr/>
+        </p:nvSpPr>
+        <p:spPr>
+          <a:xfrm>
+            <a:off x="7310628" y="4023360"/>
+            <a:ext cx="4137660" cy="914400"/>
+          </a:xfrm>
+          <a:prstGeom prst="rect">
+            <a:avLst/>
+          </a:prstGeom>
+          <a:noFill/>
+        </p:spPr>
+        <p:txBody>
+          <a:bodyPr wrap="square" anchor="t" lIns="0" rIns="0" tIns="0" bIns="0">
+            <a:spAutoFit/>
+          </a:bodyPr>
+          <a:lstStyle/>
+          <a:p>
+            <a:pPr algn="l"/>
+            <a:r>
+              <a:rPr sz="1500" b="0" i="1">
+                <a:solidFill>
+                  <a:srgbClr val="14141C"/>
+                </a:solidFill>
+                <a:latin typeface="Geist"/>
+              </a:rPr>
+              <a:t>The winner is chosen on held-out data, never on a hunch.</a:t>
             </a:r>
           </a:p>
         </p:txBody>
@@ -5975,7 +7223,7 @@
                 </a:solidFill>
                 <a:latin typeface="Geist Mono"/>
               </a:rPr>
-              <a:t>Screening lives or dies on the rare classes</a:t>
+              <a:t>Model and data processing</a:t>
             </a:r>
           </a:p>
         </p:txBody>
@@ -6054,45 +7302,319 @@
                 </a:solidFill>
                 <a:latin typeface="Geist Mono"/>
               </a:rPr>
-              <a:t>Jinchi Wei  ·  Outset  ·  Never miss a melanoma  ·  2026-07-08</a:t>
-            </a:r>
-          </a:p>
-        </p:txBody>
-      </p:sp>
-      <p:pic>
-        <p:nvPicPr>
-          <p:cNvPr id="7" name="Picture 6" descr="per_class_fairness.png"/>
-          <p:cNvPicPr>
-            <a:picLocks noChangeAspect="1"/>
-          </p:cNvPicPr>
-          <p:nvPr/>
-        </p:nvPicPr>
-        <p:blipFill>
-          <a:blip r:embed="rId2"/>
-          <a:stretch>
-            <a:fillRect/>
-          </a:stretch>
-        </p:blipFill>
-        <p:spPr>
-          <a:xfrm>
-            <a:off x="457200" y="1570418"/>
-            <a:ext cx="6523329" cy="4037203"/>
-          </a:xfrm>
-          <a:prstGeom prst="rect">
-            <a:avLst/>
-          </a:prstGeom>
-        </p:spPr>
-      </p:pic>
-      <p:sp>
-        <p:nvSpPr>
-          <p:cNvPr id="8" name="Rectangle 7"/>
+              <a:t>Jinchi Wei  ·  Outset  ·  Screening skin spots for melanoma  ·  2026-07-08</a:t>
+            </a:r>
+          </a:p>
+        </p:txBody>
+      </p:sp>
+      <p:sp>
+        <p:nvSpPr>
+          <p:cNvPr id="7" name="Rectangle 6"/>
           <p:cNvSpPr/>
           <p:nvPr/>
         </p:nvSpPr>
         <p:spPr>
           <a:xfrm>
-            <a:off x="7392009" y="1216152"/>
-            <a:ext cx="73152" cy="4553712"/>
+            <a:off x="457200" y="1051560"/>
+            <a:ext cx="822960" cy="859535"/>
+          </a:xfrm>
+          <a:prstGeom prst="rect">
+            <a:avLst/>
+          </a:prstGeom>
+          <a:solidFill>
+            <a:srgbClr val="40E0D0"/>
+          </a:solidFill>
+          <a:ln>
+            <a:noFill/>
+          </a:ln>
+          <a:effectLst/>
+        </p:spPr>
+        <p:style>
+          <a:lnRef idx="1">
+            <a:schemeClr val="accent1"/>
+          </a:lnRef>
+          <a:fillRef idx="3">
+            <a:schemeClr val="accent1"/>
+          </a:fillRef>
+          <a:effectRef idx="2">
+            <a:schemeClr val="accent1"/>
+          </a:effectRef>
+          <a:fontRef idx="minor">
+            <a:schemeClr val="lt1"/>
+          </a:fontRef>
+        </p:style>
+        <p:txBody>
+          <a:bodyPr rtlCol="0" anchor="ctr"/>
+          <a:lstStyle/>
+          <a:p>
+            <a:pPr algn="ctr"/>
+          </a:p>
+        </p:txBody>
+      </p:sp>
+      <p:sp>
+        <p:nvSpPr>
+          <p:cNvPr id="8" name="TextBox 7"/>
+          <p:cNvSpPr txBox="1"/>
+          <p:nvPr/>
+        </p:nvSpPr>
+        <p:spPr>
+          <a:xfrm>
+            <a:off x="457200" y="1051560"/>
+            <a:ext cx="822960" cy="859535"/>
+          </a:xfrm>
+          <a:prstGeom prst="rect">
+            <a:avLst/>
+          </a:prstGeom>
+          <a:noFill/>
+        </p:spPr>
+        <p:txBody>
+          <a:bodyPr wrap="square" anchor="ctr" lIns="0" rIns="0" tIns="0" bIns="0">
+            <a:spAutoFit/>
+          </a:bodyPr>
+          <a:lstStyle/>
+          <a:p>
+            <a:pPr algn="ctr"/>
+            <a:r>
+              <a:rPr sz="2600" b="1" i="0">
+                <a:solidFill>
+                  <a:srgbClr val="14141C"/>
+                </a:solidFill>
+                <a:latin typeface="Geist Mono"/>
+              </a:rPr>
+              <a:t>1</a:t>
+            </a:r>
+          </a:p>
+        </p:txBody>
+      </p:sp>
+      <p:sp>
+        <p:nvSpPr>
+          <p:cNvPr id="9" name="TextBox 8"/>
+          <p:cNvSpPr txBox="1"/>
+          <p:nvPr/>
+        </p:nvSpPr>
+        <p:spPr>
+          <a:xfrm>
+            <a:off x="1508760" y="1051560"/>
+            <a:ext cx="2377440" cy="859535"/>
+          </a:xfrm>
+          <a:prstGeom prst="rect">
+            <a:avLst/>
+          </a:prstGeom>
+          <a:noFill/>
+        </p:spPr>
+        <p:txBody>
+          <a:bodyPr wrap="square" anchor="ctr" lIns="0" rIns="0" tIns="0" bIns="0">
+            <a:spAutoFit/>
+          </a:bodyPr>
+          <a:lstStyle/>
+          <a:p>
+            <a:pPr algn="l"/>
+            <a:r>
+              <a:rPr sz="1700" b="1" i="0">
+                <a:solidFill>
+                  <a:srgbClr val="40E0D0"/>
+                </a:solidFill>
+                <a:latin typeface="Geist Mono"/>
+              </a:rPr>
+              <a:t>MODEL</a:t>
+            </a:r>
+          </a:p>
+        </p:txBody>
+      </p:sp>
+      <p:sp>
+        <p:nvSpPr>
+          <p:cNvPr id="10" name="TextBox 9"/>
+          <p:cNvSpPr txBox="1"/>
+          <p:nvPr/>
+        </p:nvSpPr>
+        <p:spPr>
+          <a:xfrm>
+            <a:off x="4023360" y="1051560"/>
+            <a:ext cx="7680960" cy="859535"/>
+          </a:xfrm>
+          <a:prstGeom prst="rect">
+            <a:avLst/>
+          </a:prstGeom>
+          <a:noFill/>
+        </p:spPr>
+        <p:txBody>
+          <a:bodyPr wrap="square" anchor="ctr" lIns="0" rIns="0" tIns="0" bIns="0">
+            <a:spAutoFit/>
+          </a:bodyPr>
+          <a:lstStyle/>
+          <a:p>
+            <a:pPr algn="l"/>
+            <a:r>
+              <a:rPr sz="1500" b="0" i="0">
+                <a:solidFill>
+                  <a:srgbClr val="14141C"/>
+                </a:solidFill>
+                <a:latin typeface="Geist"/>
+              </a:rPr>
+              <a:t>caformer_s18, pretrained, backbone FROZEN, a fresh 2-class head trained on top</a:t>
+            </a:r>
+          </a:p>
+        </p:txBody>
+      </p:sp>
+      <p:sp>
+        <p:nvSpPr>
+          <p:cNvPr id="11" name="Rectangle 10"/>
+          <p:cNvSpPr/>
+          <p:nvPr/>
+        </p:nvSpPr>
+        <p:spPr>
+          <a:xfrm>
+            <a:off x="457200" y="2139696"/>
+            <a:ext cx="822960" cy="859535"/>
+          </a:xfrm>
+          <a:prstGeom prst="rect">
+            <a:avLst/>
+          </a:prstGeom>
+          <a:solidFill>
+            <a:srgbClr val="FF1493"/>
+          </a:solidFill>
+          <a:ln>
+            <a:noFill/>
+          </a:ln>
+          <a:effectLst/>
+        </p:spPr>
+        <p:style>
+          <a:lnRef idx="1">
+            <a:schemeClr val="accent1"/>
+          </a:lnRef>
+          <a:fillRef idx="3">
+            <a:schemeClr val="accent1"/>
+          </a:fillRef>
+          <a:effectRef idx="2">
+            <a:schemeClr val="accent1"/>
+          </a:effectRef>
+          <a:fontRef idx="minor">
+            <a:schemeClr val="lt1"/>
+          </a:fontRef>
+        </p:style>
+        <p:txBody>
+          <a:bodyPr rtlCol="0" anchor="ctr"/>
+          <a:lstStyle/>
+          <a:p>
+            <a:pPr algn="ctr"/>
+          </a:p>
+        </p:txBody>
+      </p:sp>
+      <p:sp>
+        <p:nvSpPr>
+          <p:cNvPr id="12" name="TextBox 11"/>
+          <p:cNvSpPr txBox="1"/>
+          <p:nvPr/>
+        </p:nvSpPr>
+        <p:spPr>
+          <a:xfrm>
+            <a:off x="457200" y="2139696"/>
+            <a:ext cx="822960" cy="859535"/>
+          </a:xfrm>
+          <a:prstGeom prst="rect">
+            <a:avLst/>
+          </a:prstGeom>
+          <a:noFill/>
+        </p:spPr>
+        <p:txBody>
+          <a:bodyPr wrap="square" anchor="ctr" lIns="0" rIns="0" tIns="0" bIns="0">
+            <a:spAutoFit/>
+          </a:bodyPr>
+          <a:lstStyle/>
+          <a:p>
+            <a:pPr algn="ctr"/>
+            <a:r>
+              <a:rPr sz="2600" b="1" i="0">
+                <a:solidFill>
+                  <a:srgbClr val="FFFFFF"/>
+                </a:solidFill>
+                <a:latin typeface="Geist Mono"/>
+              </a:rPr>
+              <a:t>2</a:t>
+            </a:r>
+          </a:p>
+        </p:txBody>
+      </p:sp>
+      <p:sp>
+        <p:nvSpPr>
+          <p:cNvPr id="13" name="TextBox 12"/>
+          <p:cNvSpPr txBox="1"/>
+          <p:nvPr/>
+        </p:nvSpPr>
+        <p:spPr>
+          <a:xfrm>
+            <a:off x="1508760" y="2139696"/>
+            <a:ext cx="2377440" cy="859535"/>
+          </a:xfrm>
+          <a:prstGeom prst="rect">
+            <a:avLst/>
+          </a:prstGeom>
+          <a:noFill/>
+        </p:spPr>
+        <p:txBody>
+          <a:bodyPr wrap="square" anchor="ctr" lIns="0" rIns="0" tIns="0" bIns="0">
+            <a:spAutoFit/>
+          </a:bodyPr>
+          <a:lstStyle/>
+          <a:p>
+            <a:pPr algn="l"/>
+            <a:r>
+              <a:rPr sz="1700" b="1" i="0">
+                <a:solidFill>
+                  <a:srgbClr val="FF1493"/>
+                </a:solidFill>
+                <a:latin typeface="Geist Mono"/>
+              </a:rPr>
+              <a:t>RESIZE</a:t>
+            </a:r>
+          </a:p>
+        </p:txBody>
+      </p:sp>
+      <p:sp>
+        <p:nvSpPr>
+          <p:cNvPr id="14" name="TextBox 13"/>
+          <p:cNvSpPr txBox="1"/>
+          <p:nvPr/>
+        </p:nvSpPr>
+        <p:spPr>
+          <a:xfrm>
+            <a:off x="4023360" y="2139696"/>
+            <a:ext cx="7680960" cy="859535"/>
+          </a:xfrm>
+          <a:prstGeom prst="rect">
+            <a:avLst/>
+          </a:prstGeom>
+          <a:noFill/>
+        </p:spPr>
+        <p:txBody>
+          <a:bodyPr wrap="square" anchor="ctr" lIns="0" rIns="0" tIns="0" bIns="0">
+            <a:spAutoFit/>
+          </a:bodyPr>
+          <a:lstStyle/>
+          <a:p>
+            <a:pPr algn="l"/>
+            <a:r>
+              <a:rPr sz="1500" b="0" i="0">
+                <a:solidFill>
+                  <a:srgbClr val="14141C"/>
+                </a:solidFill>
+                <a:latin typeface="Geist"/>
+              </a:rPr>
+              <a:t>every image decoded to color and resized to 224x224 pixels</a:t>
+            </a:r>
+          </a:p>
+        </p:txBody>
+      </p:sp>
+      <p:sp>
+        <p:nvSpPr>
+          <p:cNvPr id="15" name="Rectangle 14"/>
+          <p:cNvSpPr/>
+          <p:nvPr/>
+        </p:nvSpPr>
+        <p:spPr>
+          <a:xfrm>
+            <a:off x="457200" y="3227832"/>
+            <a:ext cx="822960" cy="859535"/>
           </a:xfrm>
           <a:prstGeom prst="rect">
             <a:avLst/>
@@ -6129,14 +7651,14 @@
       </p:sp>
       <p:sp>
         <p:nvSpPr>
-          <p:cNvPr id="9" name="TextBox 8"/>
+          <p:cNvPr id="16" name="TextBox 15"/>
           <p:cNvSpPr txBox="1"/>
           <p:nvPr/>
         </p:nvSpPr>
         <p:spPr>
           <a:xfrm>
-            <a:off x="7666329" y="1097280"/>
-            <a:ext cx="4001414" cy="4800599"/>
+            <a:off x="457200" y="3227832"/>
+            <a:ext cx="822960" cy="859535"/>
           </a:xfrm>
           <a:prstGeom prst="rect">
             <a:avLst/>
@@ -6149,15 +7671,383 @@
           </a:bodyPr>
           <a:lstStyle/>
           <a:p>
+            <a:pPr algn="ctr"/>
+            <a:r>
+              <a:rPr sz="2600" b="1" i="0">
+                <a:solidFill>
+                  <a:srgbClr val="14141C"/>
+                </a:solidFill>
+                <a:latin typeface="Geist Mono"/>
+              </a:rPr>
+              <a:t>3</a:t>
+            </a:r>
+          </a:p>
+        </p:txBody>
+      </p:sp>
+      <p:sp>
+        <p:nvSpPr>
+          <p:cNvPr id="17" name="TextBox 16"/>
+          <p:cNvSpPr txBox="1"/>
+          <p:nvPr/>
+        </p:nvSpPr>
+        <p:spPr>
+          <a:xfrm>
+            <a:off x="1508760" y="3227832"/>
+            <a:ext cx="2377440" cy="859535"/>
+          </a:xfrm>
+          <a:prstGeom prst="rect">
+            <a:avLst/>
+          </a:prstGeom>
+          <a:noFill/>
+        </p:spPr>
+        <p:txBody>
+          <a:bodyPr wrap="square" anchor="ctr" lIns="0" rIns="0" tIns="0" bIns="0">
+            <a:spAutoFit/>
+          </a:bodyPr>
+          <a:lstStyle/>
+          <a:p>
             <a:pPr algn="l"/>
             <a:r>
-              <a:rPr sz="1700" b="0" i="0">
+              <a:rPr sz="1700" b="1" i="0">
+                <a:solidFill>
+                  <a:srgbClr val="F0C840"/>
+                </a:solidFill>
+                <a:latin typeface="Geist Mono"/>
+              </a:rPr>
+              <a:t>NORMALIZE</a:t>
+            </a:r>
+          </a:p>
+        </p:txBody>
+      </p:sp>
+      <p:sp>
+        <p:nvSpPr>
+          <p:cNvPr id="18" name="TextBox 17"/>
+          <p:cNvSpPr txBox="1"/>
+          <p:nvPr/>
+        </p:nvSpPr>
+        <p:spPr>
+          <a:xfrm>
+            <a:off x="4023360" y="3227832"/>
+            <a:ext cx="7680960" cy="859535"/>
+          </a:xfrm>
+          <a:prstGeom prst="rect">
+            <a:avLst/>
+          </a:prstGeom>
+          <a:noFill/>
+        </p:spPr>
+        <p:txBody>
+          <a:bodyPr wrap="square" anchor="ctr" lIns="0" rIns="0" tIns="0" bIns="0">
+            <a:spAutoFit/>
+          </a:bodyPr>
+          <a:lstStyle/>
+          <a:p>
+            <a:pPr algn="l"/>
+            <a:r>
+              <a:rPr sz="1500" b="0" i="0">
                 <a:solidFill>
                   <a:srgbClr val="14141C"/>
                 </a:solidFill>
                 <a:latin typeface="Geist"/>
               </a:rPr>
-              <a:t>Break accuracy down class by class and the average falls apart. The model is near-perfect on the one common class and near the floor on every rare one, including melanoma, highlighted in pink. A tool that works this differently across classes is not one you would ever deploy to screen a patient.</a:t>
+              <a:t>pixels rescaled to a fixed mean/scale, the range the backbone was trained on</a:t>
+            </a:r>
+          </a:p>
+        </p:txBody>
+      </p:sp>
+      <p:sp>
+        <p:nvSpPr>
+          <p:cNvPr id="19" name="Rectangle 18"/>
+          <p:cNvSpPr/>
+          <p:nvPr/>
+        </p:nvSpPr>
+        <p:spPr>
+          <a:xfrm>
+            <a:off x="457200" y="4315968"/>
+            <a:ext cx="822960" cy="859535"/>
+          </a:xfrm>
+          <a:prstGeom prst="rect">
+            <a:avLst/>
+          </a:prstGeom>
+          <a:solidFill>
+            <a:srgbClr val="8A2BE2"/>
+          </a:solidFill>
+          <a:ln>
+            <a:noFill/>
+          </a:ln>
+          <a:effectLst/>
+        </p:spPr>
+        <p:style>
+          <a:lnRef idx="1">
+            <a:schemeClr val="accent1"/>
+          </a:lnRef>
+          <a:fillRef idx="3">
+            <a:schemeClr val="accent1"/>
+          </a:fillRef>
+          <a:effectRef idx="2">
+            <a:schemeClr val="accent1"/>
+          </a:effectRef>
+          <a:fontRef idx="minor">
+            <a:schemeClr val="lt1"/>
+          </a:fontRef>
+        </p:style>
+        <p:txBody>
+          <a:bodyPr rtlCol="0" anchor="ctr"/>
+          <a:lstStyle/>
+          <a:p>
+            <a:pPr algn="ctr"/>
+          </a:p>
+        </p:txBody>
+      </p:sp>
+      <p:sp>
+        <p:nvSpPr>
+          <p:cNvPr id="20" name="TextBox 19"/>
+          <p:cNvSpPr txBox="1"/>
+          <p:nvPr/>
+        </p:nvSpPr>
+        <p:spPr>
+          <a:xfrm>
+            <a:off x="457200" y="4315968"/>
+            <a:ext cx="822960" cy="859535"/>
+          </a:xfrm>
+          <a:prstGeom prst="rect">
+            <a:avLst/>
+          </a:prstGeom>
+          <a:noFill/>
+        </p:spPr>
+        <p:txBody>
+          <a:bodyPr wrap="square" anchor="ctr" lIns="0" rIns="0" tIns="0" bIns="0">
+            <a:spAutoFit/>
+          </a:bodyPr>
+          <a:lstStyle/>
+          <a:p>
+            <a:pPr algn="ctr"/>
+            <a:r>
+              <a:rPr sz="2600" b="1" i="0">
+                <a:solidFill>
+                  <a:srgbClr val="FFFFFF"/>
+                </a:solidFill>
+                <a:latin typeface="Geist Mono"/>
+              </a:rPr>
+              <a:t>4</a:t>
+            </a:r>
+          </a:p>
+        </p:txBody>
+      </p:sp>
+      <p:sp>
+        <p:nvSpPr>
+          <p:cNvPr id="21" name="TextBox 20"/>
+          <p:cNvSpPr txBox="1"/>
+          <p:nvPr/>
+        </p:nvSpPr>
+        <p:spPr>
+          <a:xfrm>
+            <a:off x="1508760" y="4315968"/>
+            <a:ext cx="2377440" cy="859535"/>
+          </a:xfrm>
+          <a:prstGeom prst="rect">
+            <a:avLst/>
+          </a:prstGeom>
+          <a:noFill/>
+        </p:spPr>
+        <p:txBody>
+          <a:bodyPr wrap="square" anchor="ctr" lIns="0" rIns="0" tIns="0" bIns="0">
+            <a:spAutoFit/>
+          </a:bodyPr>
+          <a:lstStyle/>
+          <a:p>
+            <a:pPr algn="l"/>
+            <a:r>
+              <a:rPr sz="1700" b="1" i="0">
+                <a:solidFill>
+                  <a:srgbClr val="8A2BE2"/>
+                </a:solidFill>
+                <a:latin typeface="Geist Mono"/>
+              </a:rPr>
+              <a:t>CLASS-WEIGHT</a:t>
+            </a:r>
+          </a:p>
+        </p:txBody>
+      </p:sp>
+      <p:sp>
+        <p:nvSpPr>
+          <p:cNvPr id="22" name="TextBox 21"/>
+          <p:cNvSpPr txBox="1"/>
+          <p:nvPr/>
+        </p:nvSpPr>
+        <p:spPr>
+          <a:xfrm>
+            <a:off x="4023360" y="4315968"/>
+            <a:ext cx="7680960" cy="859535"/>
+          </a:xfrm>
+          <a:prstGeom prst="rect">
+            <a:avLst/>
+          </a:prstGeom>
+          <a:noFill/>
+        </p:spPr>
+        <p:txBody>
+          <a:bodyPr wrap="square" anchor="ctr" lIns="0" rIns="0" tIns="0" bIns="0">
+            <a:spAutoFit/>
+          </a:bodyPr>
+          <a:lstStyle/>
+          <a:p>
+            <a:pPr algn="l"/>
+            <a:r>
+              <a:rPr sz="1500" b="0" i="0">
+                <a:solidFill>
+                  <a:srgbClr val="14141C"/>
+                </a:solidFill>
+                <a:latin typeface="Geist"/>
+              </a:rPr>
+              <a:t>the loss up-weights the rare melanomas, so the model cannot ignore them</a:t>
+            </a:r>
+          </a:p>
+        </p:txBody>
+      </p:sp>
+      <p:sp>
+        <p:nvSpPr>
+          <p:cNvPr id="23" name="Rectangle 22"/>
+          <p:cNvSpPr/>
+          <p:nvPr/>
+        </p:nvSpPr>
+        <p:spPr>
+          <a:xfrm>
+            <a:off x="457200" y="5404104"/>
+            <a:ext cx="822960" cy="859535"/>
+          </a:xfrm>
+          <a:prstGeom prst="rect">
+            <a:avLst/>
+          </a:prstGeom>
+          <a:solidFill>
+            <a:srgbClr val="40E0D0"/>
+          </a:solidFill>
+          <a:ln>
+            <a:noFill/>
+          </a:ln>
+          <a:effectLst/>
+        </p:spPr>
+        <p:style>
+          <a:lnRef idx="1">
+            <a:schemeClr val="accent1"/>
+          </a:lnRef>
+          <a:fillRef idx="3">
+            <a:schemeClr val="accent1"/>
+          </a:fillRef>
+          <a:effectRef idx="2">
+            <a:schemeClr val="accent1"/>
+          </a:effectRef>
+          <a:fontRef idx="minor">
+            <a:schemeClr val="lt1"/>
+          </a:fontRef>
+        </p:style>
+        <p:txBody>
+          <a:bodyPr rtlCol="0" anchor="ctr"/>
+          <a:lstStyle/>
+          <a:p>
+            <a:pPr algn="ctr"/>
+          </a:p>
+        </p:txBody>
+      </p:sp>
+      <p:sp>
+        <p:nvSpPr>
+          <p:cNvPr id="24" name="TextBox 23"/>
+          <p:cNvSpPr txBox="1"/>
+          <p:nvPr/>
+        </p:nvSpPr>
+        <p:spPr>
+          <a:xfrm>
+            <a:off x="457200" y="5404104"/>
+            <a:ext cx="822960" cy="859535"/>
+          </a:xfrm>
+          <a:prstGeom prst="rect">
+            <a:avLst/>
+          </a:prstGeom>
+          <a:noFill/>
+        </p:spPr>
+        <p:txBody>
+          <a:bodyPr wrap="square" anchor="ctr" lIns="0" rIns="0" tIns="0" bIns="0">
+            <a:spAutoFit/>
+          </a:bodyPr>
+          <a:lstStyle/>
+          <a:p>
+            <a:pPr algn="ctr"/>
+            <a:r>
+              <a:rPr sz="2600" b="1" i="0">
+                <a:solidFill>
+                  <a:srgbClr val="14141C"/>
+                </a:solidFill>
+                <a:latin typeface="Geist Mono"/>
+              </a:rPr>
+              <a:t>5</a:t>
+            </a:r>
+          </a:p>
+        </p:txBody>
+      </p:sp>
+      <p:sp>
+        <p:nvSpPr>
+          <p:cNvPr id="25" name="TextBox 24"/>
+          <p:cNvSpPr txBox="1"/>
+          <p:nvPr/>
+        </p:nvSpPr>
+        <p:spPr>
+          <a:xfrm>
+            <a:off x="1508760" y="5404104"/>
+            <a:ext cx="2377440" cy="859535"/>
+          </a:xfrm>
+          <a:prstGeom prst="rect">
+            <a:avLst/>
+          </a:prstGeom>
+          <a:noFill/>
+        </p:spPr>
+        <p:txBody>
+          <a:bodyPr wrap="square" anchor="ctr" lIns="0" rIns="0" tIns="0" bIns="0">
+            <a:spAutoFit/>
+          </a:bodyPr>
+          <a:lstStyle/>
+          <a:p>
+            <a:pPr algn="l"/>
+            <a:r>
+              <a:rPr sz="1700" b="1" i="0">
+                <a:solidFill>
+                  <a:srgbClr val="40E0D0"/>
+                </a:solidFill>
+                <a:latin typeface="Geist Mono"/>
+              </a:rPr>
+              <a:t>SPLIT</a:t>
+            </a:r>
+          </a:p>
+        </p:txBody>
+      </p:sp>
+      <p:sp>
+        <p:nvSpPr>
+          <p:cNvPr id="26" name="TextBox 25"/>
+          <p:cNvSpPr txBox="1"/>
+          <p:nvPr/>
+        </p:nvSpPr>
+        <p:spPr>
+          <a:xfrm>
+            <a:off x="4023360" y="5404104"/>
+            <a:ext cx="7680960" cy="859535"/>
+          </a:xfrm>
+          <a:prstGeom prst="rect">
+            <a:avLst/>
+          </a:prstGeom>
+          <a:noFill/>
+        </p:spPr>
+        <p:txBody>
+          <a:bodyPr wrap="square" anchor="ctr" lIns="0" rIns="0" tIns="0" bIns="0">
+            <a:spAutoFit/>
+          </a:bodyPr>
+          <a:lstStyle/>
+          <a:p>
+            <a:pPr algn="l"/>
+            <a:r>
+              <a:rPr sz="1500" b="0" i="0">
+                <a:solidFill>
+                  <a:srgbClr val="14141C"/>
+                </a:solidFill>
+                <a:latin typeface="Geist"/>
+              </a:rPr>
+              <a:t>separate train / val / test; every number we report is on the held-out test set</a:t>
             </a:r>
           </a:p>
         </p:txBody>
@@ -6173,6 +8063,14 @@
 <file path=ppt/slides/slide13.xml><?xml version="1.0" encoding="utf-8"?>
 <p:sld xmlns:a="http://schemas.openxmlformats.org/drawingml/2006/main" xmlns:p="http://schemas.openxmlformats.org/presentationml/2006/main" xmlns:r="http://schemas.openxmlformats.org/officeDocument/2006/relationships">
   <p:cSld>
+    <p:bg>
+      <p:bgPr>
+        <a:solidFill>
+          <a:srgbClr val="0E1A35"/>
+        </a:solidFill>
+        <a:effectLst/>
+      </p:bgPr>
+    </p:bg>
     <p:spTree>
       <p:nvGrpSpPr>
         <p:cNvPr id="1" name=""/>
@@ -6195,7 +8093,7 @@
             <a:avLst/>
           </a:prstGeom>
           <a:solidFill>
-            <a:srgbClr val="F6F4EE"/>
+            <a:srgbClr val="0E1A35"/>
           </a:solidFill>
           <a:ln>
             <a:noFill/>
@@ -6233,13 +8131,13 @@
         <p:spPr>
           <a:xfrm>
             <a:off x="0" y="0"/>
-            <a:ext cx="201168" cy="6858000"/>
+            <a:ext cx="548640" cy="6858000"/>
           </a:xfrm>
           <a:prstGeom prst="rect">
             <a:avLst/>
           </a:prstGeom>
           <a:solidFill>
-            <a:srgbClr val="F0C840"/>
+            <a:srgbClr val="8A2BE2"/>
           </a:solidFill>
           <a:ln>
             <a:noFill/>
@@ -6270,55 +8168,20 @@
       </p:sp>
       <p:sp>
         <p:nvSpPr>
-          <p:cNvPr id="4" name="TextBox 3"/>
-          <p:cNvSpPr txBox="1"/>
-          <p:nvPr/>
-        </p:nvSpPr>
-        <p:spPr>
-          <a:xfrm>
-            <a:off x="457200" y="274320"/>
-            <a:ext cx="11247120" cy="502920"/>
-          </a:xfrm>
-          <a:prstGeom prst="rect">
-            <a:avLst/>
-          </a:prstGeom>
-          <a:noFill/>
-        </p:spPr>
-        <p:txBody>
-          <a:bodyPr wrap="square" anchor="t" lIns="0" rIns="0" tIns="0" bIns="0">
-            <a:spAutoFit/>
-          </a:bodyPr>
-          <a:lstStyle/>
-          <a:p>
-            <a:pPr algn="l"/>
-            <a:r>
-              <a:rPr sz="2800" b="1" i="0">
-                <a:solidFill>
-                  <a:srgbClr val="14141C"/>
-                </a:solidFill>
-                <a:latin typeface="Geist Mono"/>
-              </a:rPr>
-              <a:t>The one number that matters: melanoma recall</a:t>
-            </a:r>
-          </a:p>
-        </p:txBody>
-      </p:sp>
-      <p:sp>
-        <p:nvSpPr>
-          <p:cNvPr id="5" name="Rectangle 4"/>
+          <p:cNvPr id="4" name="Rectangle 3"/>
           <p:cNvSpPr/>
           <p:nvPr/>
         </p:nvSpPr>
         <p:spPr>
           <a:xfrm>
-            <a:off x="457200" y="868680"/>
-            <a:ext cx="11247120" cy="4572"/>
+            <a:off x="777240" y="640080"/>
+            <a:ext cx="164592" cy="411480"/>
           </a:xfrm>
           <a:prstGeom prst="rect">
             <a:avLst/>
           </a:prstGeom>
           <a:solidFill>
-            <a:srgbClr val="DDDDDD"/>
+            <a:srgbClr val="8A2BE2"/>
           </a:solidFill>
           <a:ln>
             <a:noFill/>
@@ -6349,14 +8212,14 @@
       </p:sp>
       <p:sp>
         <p:nvSpPr>
-          <p:cNvPr id="6" name="TextBox 5"/>
+          <p:cNvPr id="5" name="TextBox 4"/>
           <p:cNvSpPr txBox="1"/>
           <p:nvPr/>
         </p:nvSpPr>
         <p:spPr>
           <a:xfrm>
-            <a:off x="457200" y="6510528"/>
-            <a:ext cx="11247120" cy="274320"/>
+            <a:off x="1051560" y="640080"/>
+            <a:ext cx="10058400" cy="365760"/>
           </a:xfrm>
           <a:prstGeom prst="rect">
             <a:avLst/>
@@ -6371,27 +8234,27 @@
           <a:p>
             <a:pPr algn="l"/>
             <a:r>
-              <a:rPr sz="900" b="0" i="0">
-                <a:solidFill>
-                  <a:srgbClr val="555560"/>
+              <a:rPr sz="1400" b="1" i="0">
+                <a:solidFill>
+                  <a:srgbClr val="8A2BE2"/>
                 </a:solidFill>
                 <a:latin typeface="Geist Mono"/>
               </a:rPr>
-              <a:t>Jinchi Wei  ·  Outset  ·  Never miss a melanoma  ·  2026-07-08</a:t>
-            </a:r>
-          </a:p>
-        </p:txBody>
-      </p:sp>
-      <p:sp>
-        <p:nvSpPr>
-          <p:cNvPr id="7" name="TextBox 6"/>
+              <a:t>Validation</a:t>
+            </a:r>
+          </a:p>
+        </p:txBody>
+      </p:sp>
+      <p:sp>
+        <p:nvSpPr>
+          <p:cNvPr id="6" name="TextBox 5"/>
           <p:cNvSpPr txBox="1"/>
           <p:nvPr/>
         </p:nvSpPr>
         <p:spPr>
           <a:xfrm>
-            <a:off x="594360" y="1371600"/>
-            <a:ext cx="5173675" cy="411480"/>
+            <a:off x="777240" y="2194560"/>
+            <a:ext cx="10972800" cy="2743200"/>
           </a:xfrm>
           <a:prstGeom prst="rect">
             <a:avLst/>
@@ -6406,103 +8269,33 @@
           <a:p>
             <a:pPr algn="l"/>
             <a:r>
-              <a:rPr sz="1700" b="1" i="0">
-                <a:solidFill>
-                  <a:srgbClr val="FF1493"/>
+              <a:rPr sz="4400" b="1" i="0">
+                <a:solidFill>
+                  <a:srgbClr val="FFFFFF"/>
                 </a:solidFill>
                 <a:latin typeface="Geist Mono"/>
               </a:rPr>
-              <a:t>MELANOMA RECALL</a:t>
-            </a:r>
-          </a:p>
-        </p:txBody>
-      </p:sp>
-      <p:sp>
-        <p:nvSpPr>
-          <p:cNvPr id="8" name="TextBox 7"/>
-          <p:cNvSpPr txBox="1"/>
-          <p:nvPr/>
-        </p:nvSpPr>
-        <p:spPr>
-          <a:xfrm>
-            <a:off x="457200" y="1709928"/>
-            <a:ext cx="5173675" cy="1737360"/>
-          </a:xfrm>
-          <a:prstGeom prst="rect">
-            <a:avLst/>
-          </a:prstGeom>
-          <a:noFill/>
-        </p:spPr>
-        <p:txBody>
-          <a:bodyPr wrap="square" anchor="t" lIns="0" rIns="0" tIns="0" bIns="0">
-            <a:spAutoFit/>
-          </a:bodyPr>
-          <a:lstStyle/>
-          <a:p>
-            <a:pPr algn="l"/>
-            <a:r>
-              <a:rPr sz="11800" b="1" i="0">
-                <a:solidFill>
-                  <a:srgbClr val="FF1493"/>
-                </a:solidFill>
-                <a:latin typeface="Geist Mono"/>
-              </a:rPr>
-              <a:t>4.5%</a:t>
-            </a:r>
-          </a:p>
-        </p:txBody>
-      </p:sp>
-      <p:sp>
-        <p:nvSpPr>
-          <p:cNvPr id="9" name="TextBox 8"/>
-          <p:cNvSpPr txBox="1"/>
-          <p:nvPr/>
-        </p:nvSpPr>
-        <p:spPr>
-          <a:xfrm>
-            <a:off x="612648" y="3383280"/>
-            <a:ext cx="5173675" cy="365760"/>
-          </a:xfrm>
-          <a:prstGeom prst="rect">
-            <a:avLst/>
-          </a:prstGeom>
-          <a:noFill/>
-        </p:spPr>
-        <p:txBody>
-          <a:bodyPr wrap="square" anchor="t" lIns="0" rIns="0" tIns="0" bIns="0">
-            <a:spAutoFit/>
-          </a:bodyPr>
-          <a:lstStyle/>
-          <a:p>
-            <a:pPr algn="l"/>
-            <a:r>
-              <a:rPr sz="1500" b="0" i="0">
-                <a:solidFill>
-                  <a:srgbClr val="555560"/>
-                </a:solidFill>
-                <a:latin typeface="Geist"/>
-              </a:rPr>
-              <a:t>only 10 of 223 melanomas caught</a:t>
-            </a:r>
-          </a:p>
-        </p:txBody>
-      </p:sp>
-      <p:sp>
-        <p:nvSpPr>
-          <p:cNvPr id="10" name="Rectangle 9"/>
+              <a:t>RESULTS</a:t>
+            </a:r>
+          </a:p>
+        </p:txBody>
+      </p:sp>
+      <p:sp>
+        <p:nvSpPr>
+          <p:cNvPr id="7" name="Rectangle 6"/>
           <p:cNvSpPr/>
           <p:nvPr/>
         </p:nvSpPr>
         <p:spPr>
           <a:xfrm>
-            <a:off x="6080760" y="1463040"/>
-            <a:ext cx="18288" cy="2240280"/>
+            <a:off x="777240" y="5120640"/>
+            <a:ext cx="1828800" cy="18288"/>
           </a:xfrm>
           <a:prstGeom prst="rect">
             <a:avLst/>
           </a:prstGeom>
           <a:solidFill>
-            <a:srgbClr val="DDDDDD"/>
+            <a:srgbClr val="8A2BE2"/>
           </a:solidFill>
           <a:ln>
             <a:noFill/>
@@ -6533,14 +8326,14 @@
       </p:sp>
       <p:sp>
         <p:nvSpPr>
-          <p:cNvPr id="11" name="TextBox 10"/>
+          <p:cNvPr id="8" name="TextBox 7"/>
           <p:cNvSpPr txBox="1"/>
           <p:nvPr/>
         </p:nvSpPr>
         <p:spPr>
           <a:xfrm>
-            <a:off x="6586880" y="1371600"/>
-            <a:ext cx="4948732" cy="411480"/>
+            <a:off x="868680" y="6126480"/>
+            <a:ext cx="3657600" cy="320040"/>
           </a:xfrm>
           <a:prstGeom prst="rect">
             <a:avLst/>
@@ -6555,27 +8348,27 @@
           <a:p>
             <a:pPr algn="l"/>
             <a:r>
-              <a:rPr sz="1700" b="1" i="0">
-                <a:solidFill>
-                  <a:srgbClr val="14141C"/>
+              <a:rPr sz="1100" b="1" i="0">
+                <a:solidFill>
+                  <a:srgbClr val="40E0D0"/>
                 </a:solidFill>
                 <a:latin typeface="Geist Mono"/>
               </a:rPr>
-              <a:t>CANCERS MISSED</a:t>
-            </a:r>
-          </a:p>
-        </p:txBody>
-      </p:sp>
-      <p:sp>
-        <p:nvSpPr>
-          <p:cNvPr id="12" name="TextBox 11"/>
+              <a:t>Jinchi Wei</a:t>
+            </a:r>
+          </a:p>
+        </p:txBody>
+      </p:sp>
+      <p:sp>
+        <p:nvSpPr>
+          <p:cNvPr id="9" name="TextBox 8"/>
           <p:cNvSpPr txBox="1"/>
           <p:nvPr/>
         </p:nvSpPr>
         <p:spPr>
           <a:xfrm>
-            <a:off x="6474409" y="1709928"/>
-            <a:ext cx="4948732" cy="1737360"/>
+            <a:off x="2148839" y="6126480"/>
+            <a:ext cx="182880" cy="320040"/>
           </a:xfrm>
           <a:prstGeom prst="rect">
             <a:avLst/>
@@ -6590,27 +8383,27 @@
           <a:p>
             <a:pPr algn="l"/>
             <a:r>
-              <a:rPr sz="11800" b="1" i="0">
-                <a:solidFill>
-                  <a:srgbClr val="14141C"/>
+              <a:rPr sz="1100" b="0" i="0">
+                <a:solidFill>
+                  <a:srgbClr val="888888"/>
                 </a:solidFill>
                 <a:latin typeface="Geist Mono"/>
               </a:rPr>
-              <a:t>213</a:t>
-            </a:r>
-          </a:p>
-        </p:txBody>
-      </p:sp>
-      <p:sp>
-        <p:nvSpPr>
-          <p:cNvPr id="13" name="TextBox 12"/>
+              <a:t>·</a:t>
+            </a:r>
+          </a:p>
+        </p:txBody>
+      </p:sp>
+      <p:sp>
+        <p:nvSpPr>
+          <p:cNvPr id="10" name="TextBox 9"/>
           <p:cNvSpPr txBox="1"/>
           <p:nvPr/>
         </p:nvSpPr>
         <p:spPr>
           <a:xfrm>
-            <a:off x="6586880" y="3383280"/>
-            <a:ext cx="4948732" cy="365760"/>
+            <a:off x="2377439" y="6126480"/>
+            <a:ext cx="4572000" cy="320040"/>
           </a:xfrm>
           <a:prstGeom prst="rect">
             <a:avLst/>
@@ -6625,71 +8418,27 @@
           <a:p>
             <a:pPr algn="l"/>
             <a:r>
-              <a:rPr sz="1500" b="0" i="0">
-                <a:solidFill>
-                  <a:srgbClr val="555560"/>
-                </a:solidFill>
-                <a:latin typeface="Geist"/>
-              </a:rPr>
-              <a:t>waved through as harmless</a:t>
-            </a:r>
-          </a:p>
-        </p:txBody>
-      </p:sp>
-      <p:sp>
-        <p:nvSpPr>
-          <p:cNvPr id="14" name="Rectangle 13"/>
-          <p:cNvSpPr/>
-          <p:nvPr/>
-        </p:nvSpPr>
-        <p:spPr>
-          <a:xfrm>
-            <a:off x="594360" y="5093207"/>
-            <a:ext cx="10972800" cy="18288"/>
-          </a:xfrm>
-          <a:prstGeom prst="rect">
-            <a:avLst/>
-          </a:prstGeom>
-          <a:solidFill>
-            <a:srgbClr val="F0C840"/>
-          </a:solidFill>
-          <a:ln>
-            <a:noFill/>
-          </a:ln>
-          <a:effectLst/>
-        </p:spPr>
-        <p:style>
-          <a:lnRef idx="1">
-            <a:schemeClr val="accent1"/>
-          </a:lnRef>
-          <a:fillRef idx="3">
-            <a:schemeClr val="accent1"/>
-          </a:fillRef>
-          <a:effectRef idx="2">
-            <a:schemeClr val="accent1"/>
-          </a:effectRef>
-          <a:fontRef idx="minor">
-            <a:schemeClr val="lt1"/>
-          </a:fontRef>
-        </p:style>
-        <p:txBody>
-          <a:bodyPr rtlCol="0" anchor="ctr"/>
-          <a:lstStyle/>
-          <a:p>
-            <a:pPr algn="ctr"/>
-          </a:p>
-        </p:txBody>
-      </p:sp>
-      <p:sp>
-        <p:nvSpPr>
-          <p:cNvPr id="15" name="TextBox 14"/>
+              <a:rPr sz="1100" b="1" i="0">
+                <a:solidFill>
+                  <a:srgbClr val="FF1493"/>
+                </a:solidFill>
+                <a:latin typeface="Geist Mono"/>
+              </a:rPr>
+              <a:t>Outset</a:t>
+            </a:r>
+          </a:p>
+        </p:txBody>
+      </p:sp>
+      <p:sp>
+        <p:nvSpPr>
+          <p:cNvPr id="11" name="TextBox 10"/>
           <p:cNvSpPr txBox="1"/>
           <p:nvPr/>
         </p:nvSpPr>
         <p:spPr>
           <a:xfrm>
-            <a:off x="594360" y="5212079"/>
-            <a:ext cx="10972800" cy="960120"/>
+            <a:off x="3657599" y="6126480"/>
+            <a:ext cx="182880" cy="320040"/>
           </a:xfrm>
           <a:prstGeom prst="rect">
             <a:avLst/>
@@ -6697,20 +8446,55 @@
           <a:noFill/>
         </p:spPr>
         <p:txBody>
-          <a:bodyPr wrap="square" anchor="ctr" lIns="0" rIns="0" tIns="0" bIns="0">
+          <a:bodyPr wrap="square" anchor="t" lIns="0" rIns="0" tIns="0" bIns="0">
             <a:spAutoFit/>
           </a:bodyPr>
           <a:lstStyle/>
           <a:p>
             <a:pPr algn="l"/>
             <a:r>
-              <a:rPr sz="1800" b="0" i="1">
-                <a:solidFill>
-                  <a:srgbClr val="14141C"/>
-                </a:solidFill>
-                <a:latin typeface="Geist"/>
-              </a:rPr>
-              <a:t>Sixty-eight percent overall accuracy hid a tool that missed almost every cancer. A healthy-looking number can conceal a screening tool that is dangerous.</a:t>
+              <a:rPr sz="1100" b="0" i="0">
+                <a:solidFill>
+                  <a:srgbClr val="888888"/>
+                </a:solidFill>
+                <a:latin typeface="Geist Mono"/>
+              </a:rPr>
+              <a:t>·</a:t>
+            </a:r>
+          </a:p>
+        </p:txBody>
+      </p:sp>
+      <p:sp>
+        <p:nvSpPr>
+          <p:cNvPr id="12" name="TextBox 11"/>
+          <p:cNvSpPr txBox="1"/>
+          <p:nvPr/>
+        </p:nvSpPr>
+        <p:spPr>
+          <a:xfrm>
+            <a:off x="3886200" y="6126480"/>
+            <a:ext cx="7315200" cy="320040"/>
+          </a:xfrm>
+          <a:prstGeom prst="rect">
+            <a:avLst/>
+          </a:prstGeom>
+          <a:noFill/>
+        </p:spPr>
+        <p:txBody>
+          <a:bodyPr wrap="square" anchor="t" lIns="0" rIns="0" tIns="0" bIns="0">
+            <a:spAutoFit/>
+          </a:bodyPr>
+          <a:lstStyle/>
+          <a:p>
+            <a:pPr algn="l"/>
+            <a:r>
+              <a:rPr sz="1100" b="0" i="0">
+                <a:solidFill>
+                  <a:srgbClr val="888888"/>
+                </a:solidFill>
+                <a:latin typeface="Geist Mono"/>
+              </a:rPr>
+              <a:t>Screening skin spots for melanoma</a:t>
             </a:r>
           </a:p>
         </p:txBody>
@@ -6792,7 +8576,7 @@
             <a:avLst/>
           </a:prstGeom>
           <a:solidFill>
-            <a:srgbClr val="F0C840"/>
+            <a:srgbClr val="8A2BE2"/>
           </a:solidFill>
           <a:ln>
             <a:noFill/>
@@ -6851,7 +8635,7 @@
                 </a:solidFill>
                 <a:latin typeface="Geist Mono"/>
               </a:rPr>
-              <a:t>The cases it got wrong are the ones that matter</a:t>
+              <a:t>A working screen</a:t>
             </a:r>
           </a:p>
         </p:txBody>
@@ -6930,49 +8714,14 @@
                 </a:solidFill>
                 <a:latin typeface="Geist Mono"/>
               </a:rPr>
-              <a:t>Jinchi Wei  ·  Outset  ·  Never miss a melanoma  ·  2026-07-08</a:t>
-            </a:r>
-          </a:p>
-        </p:txBody>
-      </p:sp>
-      <p:sp>
-        <p:nvSpPr>
-          <p:cNvPr id="7" name="TextBox 6"/>
-          <p:cNvSpPr txBox="1"/>
-          <p:nvPr/>
-        </p:nvSpPr>
-        <p:spPr>
-          <a:xfrm>
-            <a:off x="548640" y="1097280"/>
-            <a:ext cx="11064240" cy="1051560"/>
-          </a:xfrm>
-          <a:prstGeom prst="rect">
-            <a:avLst/>
-          </a:prstGeom>
-          <a:noFill/>
-        </p:spPr>
-        <p:txBody>
-          <a:bodyPr wrap="square" anchor="t" lIns="0" rIns="0" tIns="0" bIns="0">
-            <a:spAutoFit/>
-          </a:bodyPr>
-          <a:lstStyle/>
-          <a:p>
-            <a:pPr algn="l"/>
-            <a:r>
-              <a:rPr sz="1600" b="0" i="0">
-                <a:solidFill>
-                  <a:srgbClr val="14141C"/>
-                </a:solidFill>
-                <a:latin typeface="Geist"/>
-              </a:rPr>
-              <a:t>The most revealing slide in any talk is the model's mistakes. Look how many true melanomas it labeled as harmless moles: every one is a false negative, the exact error a screening tool exists to prevent, and the reason a dermatologist would want a second look at all of them.</a:t>
+              <a:t>Jinchi Wei  ·  Outset  ·  Screening skin spots for melanoma  ·  2026-07-08</a:t>
             </a:r>
           </a:p>
         </p:txBody>
       </p:sp>
       <p:pic>
         <p:nvPicPr>
-          <p:cNvPr id="8" name="Picture 7" descr="failures.png"/>
+          <p:cNvPr id="7" name="Picture 6" descr="roc.png"/>
           <p:cNvPicPr>
             <a:picLocks noChangeAspect="1"/>
           </p:cNvPicPr>
@@ -6986,14 +8735,189 @@
         </p:blipFill>
         <p:spPr>
           <a:xfrm>
-            <a:off x="457200" y="2368459"/>
-            <a:ext cx="11247120" cy="2075361"/>
+            <a:off x="709107" y="1051560"/>
+            <a:ext cx="5344688" cy="5212079"/>
           </a:xfrm>
           <a:prstGeom prst="rect">
             <a:avLst/>
           </a:prstGeom>
         </p:spPr>
       </p:pic>
+      <p:sp>
+        <p:nvSpPr>
+          <p:cNvPr id="8" name="TextBox 7"/>
+          <p:cNvSpPr txBox="1"/>
+          <p:nvPr/>
+        </p:nvSpPr>
+        <p:spPr>
+          <a:xfrm>
+            <a:off x="6762902" y="1234440"/>
+            <a:ext cx="4941417" cy="1188720"/>
+          </a:xfrm>
+          <a:prstGeom prst="rect">
+            <a:avLst/>
+          </a:prstGeom>
+          <a:noFill/>
+        </p:spPr>
+        <p:txBody>
+          <a:bodyPr wrap="square" anchor="t" lIns="0" rIns="0" tIns="0" bIns="0">
+            <a:spAutoFit/>
+          </a:bodyPr>
+          <a:lstStyle/>
+          <a:p>
+            <a:pPr algn="l"/>
+            <a:r>
+              <a:rPr sz="8400" b="1" i="0">
+                <a:solidFill>
+                  <a:srgbClr val="F0C840"/>
+                </a:solidFill>
+                <a:latin typeface="Geist Mono"/>
+              </a:rPr>
+              <a:t>0.885</a:t>
+            </a:r>
+          </a:p>
+        </p:txBody>
+      </p:sp>
+      <p:sp>
+        <p:nvSpPr>
+          <p:cNvPr id="9" name="TextBox 8"/>
+          <p:cNvSpPr txBox="1"/>
+          <p:nvPr/>
+        </p:nvSpPr>
+        <p:spPr>
+          <a:xfrm>
+            <a:off x="6762902" y="2468880"/>
+            <a:ext cx="4941417" cy="457200"/>
+          </a:xfrm>
+          <a:prstGeom prst="rect">
+            <a:avLst/>
+          </a:prstGeom>
+          <a:noFill/>
+        </p:spPr>
+        <p:txBody>
+          <a:bodyPr wrap="square" anchor="t" lIns="0" rIns="0" tIns="0" bIns="0">
+            <a:spAutoFit/>
+          </a:bodyPr>
+          <a:lstStyle/>
+          <a:p>
+            <a:pPr algn="l"/>
+            <a:r>
+              <a:rPr sz="1700" b="1" i="0">
+                <a:solidFill>
+                  <a:srgbClr val="14141C"/>
+                </a:solidFill>
+                <a:latin typeface="Geist Mono"/>
+              </a:rPr>
+              <a:t>AUC -- the area under the ROC curve</a:t>
+            </a:r>
+          </a:p>
+        </p:txBody>
+      </p:sp>
+      <p:sp>
+        <p:nvSpPr>
+          <p:cNvPr id="10" name="TextBox 9"/>
+          <p:cNvSpPr txBox="1"/>
+          <p:nvPr/>
+        </p:nvSpPr>
+        <p:spPr>
+          <a:xfrm>
+            <a:off x="6762902" y="3063240"/>
+            <a:ext cx="4941417" cy="1280160"/>
+          </a:xfrm>
+          <a:prstGeom prst="rect">
+            <a:avLst/>
+          </a:prstGeom>
+          <a:noFill/>
+        </p:spPr>
+        <p:txBody>
+          <a:bodyPr wrap="square" anchor="t" lIns="0" rIns="0" tIns="0" bIns="0">
+            <a:spAutoFit/>
+          </a:bodyPr>
+          <a:lstStyle/>
+          <a:p>
+            <a:pPr algn="l"/>
+            <a:r>
+              <a:rPr sz="1500" b="0" i="0">
+                <a:solidFill>
+                  <a:srgbClr val="14141C"/>
+                </a:solidFill>
+                <a:latin typeface="Geist"/>
+              </a:rPr>
+              <a:t>The ROC curve sweeps every cut-off and plots melanomas caught against false alarms. AUC is the area underneath.</a:t>
+            </a:r>
+          </a:p>
+        </p:txBody>
+      </p:sp>
+      <p:sp>
+        <p:nvSpPr>
+          <p:cNvPr id="11" name="TextBox 10"/>
+          <p:cNvSpPr txBox="1"/>
+          <p:nvPr/>
+        </p:nvSpPr>
+        <p:spPr>
+          <a:xfrm>
+            <a:off x="6762902" y="4434840"/>
+            <a:ext cx="4941417" cy="457200"/>
+          </a:xfrm>
+          <a:prstGeom prst="rect">
+            <a:avLst/>
+          </a:prstGeom>
+          <a:noFill/>
+        </p:spPr>
+        <p:txBody>
+          <a:bodyPr wrap="square" anchor="t" lIns="0" rIns="0" tIns="0" bIns="0">
+            <a:spAutoFit/>
+          </a:bodyPr>
+          <a:lstStyle/>
+          <a:p>
+            <a:pPr algn="l"/>
+            <a:r>
+              <a:rPr sz="1500" b="1" i="0">
+                <a:solidFill>
+                  <a:srgbClr val="8A2BE2"/>
+                </a:solidFill>
+                <a:latin typeface="Geist Mono"/>
+              </a:rPr>
+              <a:t>0.5 = a coin flip     1.0 = perfect</a:t>
+            </a:r>
+          </a:p>
+        </p:txBody>
+      </p:sp>
+      <p:sp>
+        <p:nvSpPr>
+          <p:cNvPr id="12" name="TextBox 11"/>
+          <p:cNvSpPr txBox="1"/>
+          <p:nvPr/>
+        </p:nvSpPr>
+        <p:spPr>
+          <a:xfrm>
+            <a:off x="6762902" y="4937760"/>
+            <a:ext cx="4941417" cy="548640"/>
+          </a:xfrm>
+          <a:prstGeom prst="rect">
+            <a:avLst/>
+          </a:prstGeom>
+          <a:noFill/>
+        </p:spPr>
+        <p:txBody>
+          <a:bodyPr wrap="square" anchor="t" lIns="0" rIns="0" tIns="0" bIns="0">
+            <a:spAutoFit/>
+          </a:bodyPr>
+          <a:lstStyle/>
+          <a:p>
+            <a:pPr algn="l"/>
+            <a:r>
+              <a:rPr sz="1500" b="0" i="1">
+                <a:solidFill>
+                  <a:srgbClr val="14141C"/>
+                </a:solidFill>
+                <a:latin typeface="Geist"/>
+              </a:rPr>
+              <a:t>The curve hugs the top-left corner -- a genuinely working screen.</a:t>
+            </a:r>
+          </a:p>
+        </p:txBody>
+      </p:sp>
     </p:spTree>
   </p:cSld>
   <p:clrMapOvr>
@@ -7005,14 +8929,6 @@
 <file path=ppt/slides/slide15.xml><?xml version="1.0" encoding="utf-8"?>
 <p:sld xmlns:a="http://schemas.openxmlformats.org/drawingml/2006/main" xmlns:p="http://schemas.openxmlformats.org/presentationml/2006/main" xmlns:r="http://schemas.openxmlformats.org/officeDocument/2006/relationships">
   <p:cSld>
-    <p:bg>
-      <p:bgPr>
-        <a:solidFill>
-          <a:srgbClr val="0E1A35"/>
-        </a:solidFill>
-        <a:effectLst/>
-      </p:bgPr>
-    </p:bg>
     <p:spTree>
       <p:nvGrpSpPr>
         <p:cNvPr id="1" name=""/>
@@ -7035,7 +8951,7 @@
             <a:avLst/>
           </a:prstGeom>
           <a:solidFill>
-            <a:srgbClr val="0E1A35"/>
+            <a:srgbClr val="F6F4EE"/>
           </a:solidFill>
           <a:ln>
             <a:noFill/>
@@ -7073,7 +8989,7 @@
         <p:spPr>
           <a:xfrm>
             <a:off x="0" y="0"/>
-            <a:ext cx="548640" cy="6858000"/>
+            <a:ext cx="201168" cy="6858000"/>
           </a:xfrm>
           <a:prstGeom prst="rect">
             <a:avLst/>
@@ -7110,20 +9026,55 @@
       </p:sp>
       <p:sp>
         <p:nvSpPr>
-          <p:cNvPr id="4" name="Rectangle 3"/>
+          <p:cNvPr id="4" name="TextBox 3"/>
+          <p:cNvSpPr txBox="1"/>
+          <p:nvPr/>
+        </p:nvSpPr>
+        <p:spPr>
+          <a:xfrm>
+            <a:off x="457200" y="274320"/>
+            <a:ext cx="11247120" cy="502920"/>
+          </a:xfrm>
+          <a:prstGeom prst="rect">
+            <a:avLst/>
+          </a:prstGeom>
+          <a:noFill/>
+        </p:spPr>
+        <p:txBody>
+          <a:bodyPr wrap="square" anchor="t" lIns="0" rIns="0" tIns="0" bIns="0">
+            <a:spAutoFit/>
+          </a:bodyPr>
+          <a:lstStyle/>
+          <a:p>
+            <a:pPr algn="l"/>
+            <a:r>
+              <a:rPr sz="2800" b="1" i="0">
+                <a:solidFill>
+                  <a:srgbClr val="14141C"/>
+                </a:solidFill>
+                <a:latin typeface="Geist Mono"/>
+              </a:rPr>
+              <a:t>Tuning to miss fewer cancers</a:t>
+            </a:r>
+          </a:p>
+        </p:txBody>
+      </p:sp>
+      <p:sp>
+        <p:nvSpPr>
+          <p:cNvPr id="5" name="Rectangle 4"/>
           <p:cNvSpPr/>
           <p:nvPr/>
         </p:nvSpPr>
         <p:spPr>
           <a:xfrm>
-            <a:off x="777240" y="640080"/>
-            <a:ext cx="164592" cy="411480"/>
+            <a:off x="457200" y="868680"/>
+            <a:ext cx="11247120" cy="4572"/>
           </a:xfrm>
           <a:prstGeom prst="rect">
             <a:avLst/>
           </a:prstGeom>
           <a:solidFill>
-            <a:srgbClr val="8A2BE2"/>
+            <a:srgbClr val="DDDDDD"/>
           </a:solidFill>
           <a:ln>
             <a:noFill/>
@@ -7154,14 +9105,14 @@
       </p:sp>
       <p:sp>
         <p:nvSpPr>
-          <p:cNvPr id="5" name="TextBox 4"/>
+          <p:cNvPr id="6" name="TextBox 5"/>
           <p:cNvSpPr txBox="1"/>
           <p:nvPr/>
         </p:nvSpPr>
         <p:spPr>
           <a:xfrm>
-            <a:off x="1051560" y="640080"/>
-            <a:ext cx="10058400" cy="365760"/>
+            <a:off x="457200" y="6510528"/>
+            <a:ext cx="11247120" cy="274320"/>
           </a:xfrm>
           <a:prstGeom prst="rect">
             <a:avLst/>
@@ -7176,68 +9127,57 @@
           <a:p>
             <a:pPr algn="l"/>
             <a:r>
-              <a:rPr sz="1400" b="1" i="0">
-                <a:solidFill>
-                  <a:srgbClr val="8A2BE2"/>
+              <a:rPr sz="900" b="0" i="0">
+                <a:solidFill>
+                  <a:srgbClr val="555560"/>
                 </a:solidFill>
                 <a:latin typeface="Geist Mono"/>
               </a:rPr>
-              <a:t>Validation</a:t>
-            </a:r>
-          </a:p>
-        </p:txBody>
-      </p:sp>
-      <p:sp>
-        <p:nvSpPr>
-          <p:cNvPr id="6" name="TextBox 5"/>
-          <p:cNvSpPr txBox="1"/>
-          <p:nvPr/>
-        </p:nvSpPr>
-        <p:spPr>
-          <a:xfrm>
-            <a:off x="777240" y="2194560"/>
-            <a:ext cx="10972800" cy="2743200"/>
-          </a:xfrm>
-          <a:prstGeom prst="rect">
-            <a:avLst/>
-          </a:prstGeom>
-          <a:noFill/>
-        </p:spPr>
-        <p:txBody>
-          <a:bodyPr wrap="square" anchor="t" lIns="0" rIns="0" tIns="0" bIns="0">
-            <a:spAutoFit/>
-          </a:bodyPr>
-          <a:lstStyle/>
-          <a:p>
-            <a:pPr algn="l"/>
-            <a:r>
-              <a:rPr sz="4400" b="1" i="0">
-                <a:solidFill>
-                  <a:srgbClr val="FFFFFF"/>
-                </a:solidFill>
-                <a:latin typeface="Geist Mono"/>
-              </a:rPr>
-              <a:t>BEING HONEST</a:t>
-            </a:r>
-          </a:p>
-        </p:txBody>
-      </p:sp>
-      <p:sp>
-        <p:nvSpPr>
-          <p:cNvPr id="7" name="Rectangle 6"/>
+              <a:t>Jinchi Wei  ·  Outset  ·  Screening skin spots for melanoma  ·  2026-07-08</a:t>
+            </a:r>
+          </a:p>
+        </p:txBody>
+      </p:sp>
+      <p:pic>
+        <p:nvPicPr>
+          <p:cNvPr id="7" name="Picture 6" descr="recall_tuning.png"/>
+          <p:cNvPicPr>
+            <a:picLocks noChangeAspect="1"/>
+          </p:cNvPicPr>
+          <p:nvPr/>
+        </p:nvPicPr>
+        <p:blipFill>
+          <a:blip r:embed="rId2"/>
+          <a:stretch>
+            <a:fillRect/>
+          </a:stretch>
+        </p:blipFill>
+        <p:spPr>
+          <a:xfrm>
+            <a:off x="457200" y="1154102"/>
+            <a:ext cx="6748272" cy="5006994"/>
+          </a:xfrm>
+          <a:prstGeom prst="rect">
+            <a:avLst/>
+          </a:prstGeom>
+        </p:spPr>
+      </p:pic>
+      <p:sp>
+        <p:nvSpPr>
+          <p:cNvPr id="8" name="Rectangle 7"/>
           <p:cNvSpPr/>
           <p:nvPr/>
         </p:nvSpPr>
         <p:spPr>
           <a:xfrm>
-            <a:off x="777240" y="5120640"/>
-            <a:ext cx="1828800" cy="18288"/>
+            <a:off x="7571231" y="1188720"/>
+            <a:ext cx="4133088" cy="1600200"/>
           </a:xfrm>
           <a:prstGeom prst="rect">
             <a:avLst/>
           </a:prstGeom>
           <a:solidFill>
-            <a:srgbClr val="8A2BE2"/>
+            <a:srgbClr val="40E0D0"/>
           </a:solidFill>
           <a:ln>
             <a:noFill/>
@@ -7268,14 +9208,14 @@
       </p:sp>
       <p:sp>
         <p:nvSpPr>
-          <p:cNvPr id="8" name="TextBox 7"/>
+          <p:cNvPr id="9" name="TextBox 8"/>
           <p:cNvSpPr txBox="1"/>
           <p:nvPr/>
         </p:nvSpPr>
         <p:spPr>
           <a:xfrm>
-            <a:off x="868680" y="6126480"/>
-            <a:ext cx="3657600" cy="320040"/>
+            <a:off x="7799831" y="1371600"/>
+            <a:ext cx="3675888" cy="640080"/>
           </a:xfrm>
           <a:prstGeom prst="rect">
             <a:avLst/>
@@ -7290,27 +9230,27 @@
           <a:p>
             <a:pPr algn="l"/>
             <a:r>
-              <a:rPr sz="1100" b="1" i="0">
-                <a:solidFill>
-                  <a:srgbClr val="40E0D0"/>
+              <a:rPr sz="3200" b="1" i="0">
+                <a:solidFill>
+                  <a:srgbClr val="14141C"/>
                 </a:solidFill>
                 <a:latin typeface="Geist Mono"/>
               </a:rPr>
-              <a:t>Jinchi Wei</a:t>
-            </a:r>
-          </a:p>
-        </p:txBody>
-      </p:sp>
-      <p:sp>
-        <p:nvSpPr>
-          <p:cNvPr id="9" name="TextBox 8"/>
+              <a:t>74% → 90%</a:t>
+            </a:r>
+          </a:p>
+        </p:txBody>
+      </p:sp>
+      <p:sp>
+        <p:nvSpPr>
+          <p:cNvPr id="10" name="TextBox 9"/>
           <p:cNvSpPr txBox="1"/>
           <p:nvPr/>
         </p:nvSpPr>
         <p:spPr>
           <a:xfrm>
-            <a:off x="2148839" y="6126480"/>
-            <a:ext cx="182880" cy="320040"/>
+            <a:off x="7799831" y="2103120"/>
+            <a:ext cx="3675888" cy="548640"/>
           </a:xfrm>
           <a:prstGeom prst="rect">
             <a:avLst/>
@@ -7325,27 +9265,27 @@
           <a:p>
             <a:pPr algn="l"/>
             <a:r>
-              <a:rPr sz="1100" b="0" i="0">
-                <a:solidFill>
-                  <a:srgbClr val="888888"/>
-                </a:solidFill>
-                <a:latin typeface="Geist Mono"/>
-              </a:rPr>
-              <a:t>·</a:t>
-            </a:r>
-          </a:p>
-        </p:txBody>
-      </p:sp>
-      <p:sp>
-        <p:nvSpPr>
-          <p:cNvPr id="10" name="TextBox 9"/>
+              <a:rPr sz="1400" b="0" i="0">
+                <a:solidFill>
+                  <a:srgbClr val="14141C"/>
+                </a:solidFill>
+                <a:latin typeface="Geist"/>
+              </a:rPr>
+              <a:t>melanomas caught (recall), after we lower the threshold</a:t>
+            </a:r>
+          </a:p>
+        </p:txBody>
+      </p:sp>
+      <p:sp>
+        <p:nvSpPr>
+          <p:cNvPr id="11" name="TextBox 10"/>
           <p:cNvSpPr txBox="1"/>
           <p:nvPr/>
         </p:nvSpPr>
         <p:spPr>
           <a:xfrm>
-            <a:off x="2377439" y="6126480"/>
-            <a:ext cx="4572000" cy="320040"/>
+            <a:off x="7571231" y="3108960"/>
+            <a:ext cx="4133088" cy="365760"/>
           </a:xfrm>
           <a:prstGeom prst="rect">
             <a:avLst/>
@@ -7360,27 +9300,27 @@
           <a:p>
             <a:pPr algn="l"/>
             <a:r>
-              <a:rPr sz="1100" b="1" i="0">
+              <a:rPr sz="1400" b="1" i="0">
                 <a:solidFill>
                   <a:srgbClr val="FF1493"/>
                 </a:solidFill>
                 <a:latin typeface="Geist Mono"/>
               </a:rPr>
-              <a:t>Outset</a:t>
-            </a:r>
-          </a:p>
-        </p:txBody>
-      </p:sp>
-      <p:sp>
-        <p:nvSpPr>
-          <p:cNvPr id="11" name="TextBox 10"/>
+              <a:t>THE COST WE ACCEPT</a:t>
+            </a:r>
+          </a:p>
+        </p:txBody>
+      </p:sp>
+      <p:sp>
+        <p:nvSpPr>
+          <p:cNvPr id="12" name="TextBox 11"/>
           <p:cNvSpPr txBox="1"/>
           <p:nvPr/>
         </p:nvSpPr>
         <p:spPr>
           <a:xfrm>
-            <a:off x="3657599" y="6126480"/>
-            <a:ext cx="182880" cy="320040"/>
+            <a:off x="7571231" y="3566160"/>
+            <a:ext cx="4133088" cy="1828800"/>
           </a:xfrm>
           <a:prstGeom prst="rect">
             <a:avLst/>
@@ -7395,48 +9335,13 @@
           <a:p>
             <a:pPr algn="l"/>
             <a:r>
-              <a:rPr sz="1100" b="0" i="0">
-                <a:solidFill>
-                  <a:srgbClr val="888888"/>
-                </a:solidFill>
-                <a:latin typeface="Geist Mono"/>
-              </a:rPr>
-              <a:t>·</a:t>
-            </a:r>
-          </a:p>
-        </p:txBody>
-      </p:sp>
-      <p:sp>
-        <p:nvSpPr>
-          <p:cNvPr id="12" name="TextBox 11"/>
-          <p:cNvSpPr txBox="1"/>
-          <p:nvPr/>
-        </p:nvSpPr>
-        <p:spPr>
-          <a:xfrm>
-            <a:off x="3886200" y="6126480"/>
-            <a:ext cx="7315200" cy="320040"/>
-          </a:xfrm>
-          <a:prstGeom prst="rect">
-            <a:avLst/>
-          </a:prstGeom>
-          <a:noFill/>
-        </p:spPr>
-        <p:txBody>
-          <a:bodyPr wrap="square" anchor="t" lIns="0" rIns="0" tIns="0" bIns="0">
-            <a:spAutoFit/>
-          </a:bodyPr>
-          <a:lstStyle/>
-          <a:p>
-            <a:pPr algn="l"/>
-            <a:r>
-              <a:rPr sz="1100" b="0" i="0">
-                <a:solidFill>
-                  <a:srgbClr val="888888"/>
-                </a:solidFill>
-                <a:latin typeface="Geist Mono"/>
-              </a:rPr>
-              <a:t>Never miss a melanoma</a:t>
+              <a:rPr sz="1500" b="0" i="0">
+                <a:solidFill>
+                  <a:srgbClr val="14141C"/>
+                </a:solidFill>
+                <a:latin typeface="Geist"/>
+              </a:rPr>
+              <a:t>Specificity slips 85% → 70%: more healthy spots get a second look. For a screen, that is the right trade -- a few extra check-ups to avoid a missed cancer.</a:t>
             </a:r>
           </a:p>
         </p:txBody>
@@ -7577,7 +9482,7 @@
                 </a:solidFill>
                 <a:latin typeface="Geist Mono"/>
               </a:rPr>
-              <a:t>A toy model, and why that is exactly the point</a:t>
+              <a:t>At the screening setting</a:t>
             </a:r>
           </a:p>
         </p:txBody>
@@ -7656,46 +9561,35 @@
                 </a:solidFill>
                 <a:latin typeface="Geist Mono"/>
               </a:rPr>
-              <a:t>Jinchi Wei  ·  Outset  ·  Never miss a melanoma  ·  2026-07-08</a:t>
-            </a:r>
-          </a:p>
-        </p:txBody>
-      </p:sp>
-      <p:sp>
-        <p:nvSpPr>
-          <p:cNvPr id="7" name="TextBox 6"/>
-          <p:cNvSpPr txBox="1"/>
-          <p:nvPr/>
-        </p:nvSpPr>
-        <p:spPr>
-          <a:xfrm>
-            <a:off x="457200" y="1051560"/>
-            <a:ext cx="5848502" cy="4846319"/>
-          </a:xfrm>
-          <a:prstGeom prst="rect">
-            <a:avLst/>
-          </a:prstGeom>
-          <a:noFill/>
-        </p:spPr>
-        <p:txBody>
-          <a:bodyPr wrap="square" anchor="ctr" lIns="0" rIns="0" tIns="0" bIns="0">
-            <a:spAutoFit/>
-          </a:bodyPr>
-          <a:lstStyle/>
-          <a:p>
-            <a:pPr algn="l"/>
-            <a:r>
-              <a:rPr sz="1800" b="0" i="0">
-                <a:solidFill>
-                  <a:srgbClr val="14141C"/>
-                </a:solidFill>
-                <a:latin typeface="Geist"/>
-              </a:rPr>
-              <a:t>This model is far too small and simple to trust on a real patient: sixty-four-pixel grayscale thumbnails throw away the color and fine texture that dermatologists and real systems rely on, and its melanoma recall is nowhere near safe (Wei 2024). The point was never the score -- it was learning the screening mindset: never miss the dangerous case, and never let a shiny number fool you.</a:t>
-            </a:r>
-          </a:p>
-        </p:txBody>
-      </p:sp>
+              <a:t>Jinchi Wei  ·  Outset  ·  Screening skin spots for melanoma  ·  2026-07-08</a:t>
+            </a:r>
+          </a:p>
+        </p:txBody>
+      </p:sp>
+      <p:pic>
+        <p:nvPicPr>
+          <p:cNvPr id="7" name="Picture 6" descr="confusion.png"/>
+          <p:cNvPicPr>
+            <a:picLocks noChangeAspect="1"/>
+          </p:cNvPicPr>
+          <p:nvPr/>
+        </p:nvPicPr>
+        <p:blipFill>
+          <a:blip r:embed="rId2"/>
+          <a:stretch>
+            <a:fillRect/>
+          </a:stretch>
+        </p:blipFill>
+        <p:spPr>
+          <a:xfrm>
+            <a:off x="457200" y="1380944"/>
+            <a:ext cx="5623560" cy="4553310"/>
+          </a:xfrm>
+          <a:prstGeom prst="rect">
+            <a:avLst/>
+          </a:prstGeom>
+        </p:spPr>
+      </p:pic>
       <p:sp>
         <p:nvSpPr>
           <p:cNvPr id="8" name="Rectangle 7"/>
@@ -7704,14 +9598,14 @@
         </p:nvSpPr>
         <p:spPr>
           <a:xfrm>
-            <a:off x="6924294" y="2537459"/>
-            <a:ext cx="4780026" cy="1874519"/>
+            <a:off x="6446520" y="1188720"/>
+            <a:ext cx="128016" cy="1234440"/>
           </a:xfrm>
           <a:prstGeom prst="rect">
             <a:avLst/>
           </a:prstGeom>
           <a:solidFill>
-            <a:srgbClr val="FAFAFC"/>
+            <a:srgbClr val="40E0D0"/>
           </a:solidFill>
           <a:ln>
             <a:noFill/>
@@ -7742,20 +9636,90 @@
       </p:sp>
       <p:sp>
         <p:nvSpPr>
-          <p:cNvPr id="9" name="Rectangle 8"/>
+          <p:cNvPr id="9" name="TextBox 8"/>
+          <p:cNvSpPr txBox="1"/>
+          <p:nvPr/>
+        </p:nvSpPr>
+        <p:spPr>
+          <a:xfrm>
+            <a:off x="6720840" y="1188720"/>
+            <a:ext cx="1554480" cy="1234440"/>
+          </a:xfrm>
+          <a:prstGeom prst="rect">
+            <a:avLst/>
+          </a:prstGeom>
+          <a:noFill/>
+        </p:spPr>
+        <p:txBody>
+          <a:bodyPr wrap="square" anchor="ctr" lIns="0" rIns="0" tIns="0" bIns="0">
+            <a:spAutoFit/>
+          </a:bodyPr>
+          <a:lstStyle/>
+          <a:p>
+            <a:pPr algn="l"/>
+            <a:r>
+              <a:rPr sz="4000" b="1" i="0">
+                <a:solidFill>
+                  <a:srgbClr val="40E0D0"/>
+                </a:solidFill>
+                <a:latin typeface="Geist Mono"/>
+              </a:rPr>
+              <a:t>130</a:t>
+            </a:r>
+          </a:p>
+        </p:txBody>
+      </p:sp>
+      <p:sp>
+        <p:nvSpPr>
+          <p:cNvPr id="10" name="TextBox 9"/>
+          <p:cNvSpPr txBox="1"/>
+          <p:nvPr/>
+        </p:nvSpPr>
+        <p:spPr>
+          <a:xfrm>
+            <a:off x="8366760" y="1188720"/>
+            <a:ext cx="3337560" cy="1234440"/>
+          </a:xfrm>
+          <a:prstGeom prst="rect">
+            <a:avLst/>
+          </a:prstGeom>
+          <a:noFill/>
+        </p:spPr>
+        <p:txBody>
+          <a:bodyPr wrap="square" anchor="ctr" lIns="0" rIns="0" tIns="0" bIns="0">
+            <a:spAutoFit/>
+          </a:bodyPr>
+          <a:lstStyle/>
+          <a:p>
+            <a:pPr algn="l"/>
+            <a:r>
+              <a:rPr sz="1500" b="0" i="0">
+                <a:solidFill>
+                  <a:srgbClr val="14141C"/>
+                </a:solidFill>
+                <a:latin typeface="Geist"/>
+              </a:rPr>
+              <a:t>melanomas CAUGHT -- the wins</a:t>
+            </a:r>
+          </a:p>
+        </p:txBody>
+      </p:sp>
+      <p:sp>
+        <p:nvSpPr>
+          <p:cNvPr id="11" name="Rectangle 10"/>
           <p:cNvSpPr/>
           <p:nvPr/>
         </p:nvSpPr>
         <p:spPr>
           <a:xfrm>
-            <a:off x="6924294" y="2537459"/>
-            <a:ext cx="4780026" cy="54864"/>
+            <a:off x="6446520" y="2560320"/>
+            <a:ext cx="128016" cy="1234440"/>
           </a:xfrm>
           <a:prstGeom prst="rect">
             <a:avLst/>
           </a:prstGeom>
           <a:solidFill>
-            <a:srgbClr val="8A2BE2"/>
+            <a:srgbClr val="FF1493"/>
           </a:solidFill>
           <a:ln>
             <a:noFill/>
@@ -7786,14 +9750,14 @@
       </p:sp>
       <p:sp>
         <p:nvSpPr>
-          <p:cNvPr id="10" name="TextBox 9"/>
+          <p:cNvPr id="12" name="TextBox 11"/>
           <p:cNvSpPr txBox="1"/>
           <p:nvPr/>
         </p:nvSpPr>
         <p:spPr>
           <a:xfrm>
-            <a:off x="7088886" y="2628899"/>
-            <a:ext cx="4450842" cy="384048"/>
+            <a:off x="6720840" y="2560320"/>
+            <a:ext cx="1554480" cy="1234440"/>
           </a:xfrm>
           <a:prstGeom prst="rect">
             <a:avLst/>
@@ -7801,34 +9765,34 @@
           <a:noFill/>
         </p:spPr>
         <p:txBody>
-          <a:bodyPr wrap="square" anchor="t" lIns="0" rIns="0" tIns="0" bIns="0">
+          <a:bodyPr wrap="square" anchor="ctr" lIns="0" rIns="0" tIns="0" bIns="0">
             <a:spAutoFit/>
           </a:bodyPr>
           <a:lstStyle/>
           <a:p>
             <a:pPr algn="l"/>
             <a:r>
-              <a:rPr sz="1400" b="1" i="0">
-                <a:solidFill>
-                  <a:srgbClr val="8A2BE2"/>
+              <a:rPr sz="4000" b="1" i="0">
+                <a:solidFill>
+                  <a:srgbClr val="FF1493"/>
                 </a:solidFill>
                 <a:latin typeface="Geist Mono"/>
               </a:rPr>
-              <a:t>A REAL TOOL WOULD</a:t>
-            </a:r>
-          </a:p>
-        </p:txBody>
-      </p:sp>
-      <p:sp>
-        <p:nvSpPr>
-          <p:cNvPr id="11" name="TextBox 10"/>
+              <a:t>14</a:t>
+            </a:r>
+          </a:p>
+        </p:txBody>
+      </p:sp>
+      <p:sp>
+        <p:nvSpPr>
+          <p:cNvPr id="13" name="TextBox 12"/>
           <p:cNvSpPr txBox="1"/>
           <p:nvPr/>
         </p:nvSpPr>
         <p:spPr>
           <a:xfrm>
-            <a:off x="7088886" y="3177539"/>
-            <a:ext cx="4450842" cy="1142999"/>
+            <a:off x="8366760" y="2560320"/>
+            <a:ext cx="3337560" cy="1234440"/>
           </a:xfrm>
           <a:prstGeom prst="rect">
             <a:avLst/>
@@ -7836,20 +9800,134 @@
           <a:noFill/>
         </p:spPr>
         <p:txBody>
-          <a:bodyPr wrap="square" anchor="t" lIns="0" rIns="0" tIns="0" bIns="0">
+          <a:bodyPr wrap="square" anchor="ctr" lIns="0" rIns="0" tIns="0" bIns="0">
             <a:spAutoFit/>
           </a:bodyPr>
           <a:lstStyle/>
           <a:p>
             <a:pPr algn="l"/>
             <a:r>
-              <a:rPr sz="1200" b="0" i="0">
+              <a:rPr sz="1500" b="0" i="0">
                 <a:solidFill>
                   <a:srgbClr val="14141C"/>
                 </a:solidFill>
                 <a:latin typeface="Geist"/>
               </a:rPr>
-              <a:t>Train on full-resolution color images. Deliberately tune its threshold toward high sensitivity. Be validated across many hospitals before it ever sees a patient.</a:t>
+              <a:t>melanomas MISSED -- each one a real danger</a:t>
+            </a:r>
+          </a:p>
+        </p:txBody>
+      </p:sp>
+      <p:sp>
+        <p:nvSpPr>
+          <p:cNvPr id="14" name="Rectangle 13"/>
+          <p:cNvSpPr/>
+          <p:nvPr/>
+        </p:nvSpPr>
+        <p:spPr>
+          <a:xfrm>
+            <a:off x="6446520" y="3931920"/>
+            <a:ext cx="128016" cy="1234440"/>
+          </a:xfrm>
+          <a:prstGeom prst="rect">
+            <a:avLst/>
+          </a:prstGeom>
+          <a:solidFill>
+            <a:srgbClr val="F0C840"/>
+          </a:solidFill>
+          <a:ln>
+            <a:noFill/>
+          </a:ln>
+          <a:effectLst/>
+        </p:spPr>
+        <p:style>
+          <a:lnRef idx="1">
+            <a:schemeClr val="accent1"/>
+          </a:lnRef>
+          <a:fillRef idx="3">
+            <a:schemeClr val="accent1"/>
+          </a:fillRef>
+          <a:effectRef idx="2">
+            <a:schemeClr val="accent1"/>
+          </a:effectRef>
+          <a:fontRef idx="minor">
+            <a:schemeClr val="lt1"/>
+          </a:fontRef>
+        </p:style>
+        <p:txBody>
+          <a:bodyPr rtlCol="0" anchor="ctr"/>
+          <a:lstStyle/>
+          <a:p>
+            <a:pPr algn="ctr"/>
+          </a:p>
+        </p:txBody>
+      </p:sp>
+      <p:sp>
+        <p:nvSpPr>
+          <p:cNvPr id="15" name="TextBox 14"/>
+          <p:cNvSpPr txBox="1"/>
+          <p:nvPr/>
+        </p:nvSpPr>
+        <p:spPr>
+          <a:xfrm>
+            <a:off x="6720840" y="3931920"/>
+            <a:ext cx="1554480" cy="1234440"/>
+          </a:xfrm>
+          <a:prstGeom prst="rect">
+            <a:avLst/>
+          </a:prstGeom>
+          <a:noFill/>
+        </p:spPr>
+        <p:txBody>
+          <a:bodyPr wrap="square" anchor="ctr" lIns="0" rIns="0" tIns="0" bIns="0">
+            <a:spAutoFit/>
+          </a:bodyPr>
+          <a:lstStyle/>
+          <a:p>
+            <a:pPr algn="l"/>
+            <a:r>
+              <a:rPr sz="4000" b="1" i="0">
+                <a:solidFill>
+                  <a:srgbClr val="F0C840"/>
+                </a:solidFill>
+                <a:latin typeface="Geist Mono"/>
+              </a:rPr>
+              <a:t>340</a:t>
+            </a:r>
+          </a:p>
+        </p:txBody>
+      </p:sp>
+      <p:sp>
+        <p:nvSpPr>
+          <p:cNvPr id="16" name="TextBox 15"/>
+          <p:cNvSpPr txBox="1"/>
+          <p:nvPr/>
+        </p:nvSpPr>
+        <p:spPr>
+          <a:xfrm>
+            <a:off x="8366760" y="3931920"/>
+            <a:ext cx="3337560" cy="1234440"/>
+          </a:xfrm>
+          <a:prstGeom prst="rect">
+            <a:avLst/>
+          </a:prstGeom>
+          <a:noFill/>
+        </p:spPr>
+        <p:txBody>
+          <a:bodyPr wrap="square" anchor="ctr" lIns="0" rIns="0" tIns="0" bIns="0">
+            <a:spAutoFit/>
+          </a:bodyPr>
+          <a:lstStyle/>
+          <a:p>
+            <a:pPr algn="l"/>
+            <a:r>
+              <a:rPr sz="1500" b="0" i="0">
+                <a:solidFill>
+                  <a:srgbClr val="14141C"/>
+                </a:solidFill>
+                <a:latin typeface="Geist"/>
+              </a:rPr>
+              <a:t>false alarms -- each just an extra check-up</a:t>
             </a:r>
           </a:p>
         </p:txBody>
@@ -7990,7 +10068,7 @@
                 </a:solidFill>
                 <a:latin typeface="Geist Mono"/>
               </a:rPr>
-              <a:t>References, and thank you</a:t>
+              <a:t>Does it work for women and men?</a:t>
             </a:r>
           </a:p>
         </p:txBody>
@@ -8069,137 +10147,51 @@
                 </a:solidFill>
                 <a:latin typeface="Geist Mono"/>
               </a:rPr>
-              <a:t>Jinchi Wei  ·  Outset  ·  Never miss a melanoma  ·  2026-07-08</a:t>
-            </a:r>
-          </a:p>
-        </p:txBody>
-      </p:sp>
-      <p:sp>
-        <p:nvSpPr>
-          <p:cNvPr id="7" name="TextBox 6"/>
-          <p:cNvSpPr txBox="1"/>
-          <p:nvPr/>
-        </p:nvSpPr>
-        <p:spPr>
-          <a:xfrm>
-            <a:off x="502920" y="1051560"/>
-            <a:ext cx="11247120" cy="365760"/>
-          </a:xfrm>
-          <a:prstGeom prst="rect">
-            <a:avLst/>
-          </a:prstGeom>
-          <a:noFill/>
-        </p:spPr>
-        <p:txBody>
-          <a:bodyPr wrap="square" anchor="t" lIns="0" rIns="0" tIns="0" bIns="0">
-            <a:spAutoFit/>
-          </a:bodyPr>
-          <a:lstStyle/>
-          <a:p>
-            <a:pPr algn="l"/>
-            <a:r>
-              <a:rPr sz="1500" b="1" i="0">
-                <a:solidFill>
-                  <a:srgbClr val="8A2BE2"/>
-                </a:solidFill>
-                <a:latin typeface="Geist Mono"/>
-              </a:rPr>
-              <a:t>SEVEN PAPERS GROUNDED THIS PROJECT</a:t>
-            </a:r>
-          </a:p>
-        </p:txBody>
-      </p:sp>
-      <p:sp>
-        <p:nvSpPr>
-          <p:cNvPr id="8" name="TextBox 7"/>
-          <p:cNvSpPr txBox="1"/>
-          <p:nvPr/>
-        </p:nvSpPr>
-        <p:spPr>
-          <a:xfrm>
-            <a:off x="502920" y="1600200"/>
-            <a:ext cx="5398617" cy="3657599"/>
-          </a:xfrm>
-          <a:prstGeom prst="rect">
-            <a:avLst/>
-          </a:prstGeom>
-          <a:noFill/>
-        </p:spPr>
-        <p:txBody>
-          <a:bodyPr wrap="square" anchor="t" lIns="0" rIns="0" tIns="0" bIns="0">
-            <a:spAutoFit/>
-          </a:bodyPr>
-          <a:lstStyle/>
-          <a:p>
-            <a:pPr algn="l"/>
-            <a:r>
-              <a:rPr sz="1300" b="0" i="0">
-                <a:solidFill>
-                  <a:srgbClr val="14141C"/>
-                </a:solidFill>
-                <a:latin typeface="Geist"/>
-              </a:rPr>
-              <a:t>[1] Esteva et al. 2017 -- Dermatologist-level classification of skin cancer with deep neural networks. Nature.
-[2] Tschandl et al. 2018 -- The HAM10000 dermatoscopy dataset. Scientific Data.
-[3] Haenssle et al. 2018 -- Man against machine: a CNN vs 58 dermatologists. Annals of Oncology.
-[4] Tschandl et al. 2019 -- Human readers vs machine learning for pigmented lesions. Lancet Oncology.</a:t>
-            </a:r>
-          </a:p>
-        </p:txBody>
-      </p:sp>
-      <p:sp>
-        <p:nvSpPr>
-          <p:cNvPr id="9" name="TextBox 8"/>
-          <p:cNvSpPr txBox="1"/>
-          <p:nvPr/>
-        </p:nvSpPr>
-        <p:spPr>
-          <a:xfrm>
-            <a:off x="6305702" y="1600200"/>
-            <a:ext cx="5173675" cy="3657599"/>
-          </a:xfrm>
-          <a:prstGeom prst="rect">
-            <a:avLst/>
-          </a:prstGeom>
-          <a:noFill/>
-        </p:spPr>
-        <p:txBody>
-          <a:bodyPr wrap="square" anchor="t" lIns="0" rIns="0" tIns="0" bIns="0">
-            <a:spAutoFit/>
-          </a:bodyPr>
-          <a:lstStyle/>
-          <a:p>
-            <a:pPr algn="l"/>
-            <a:r>
-              <a:rPr sz="1300" b="0" i="0">
-                <a:solidFill>
-                  <a:srgbClr val="14141C"/>
-                </a:solidFill>
-                <a:latin typeface="Geist"/>
-              </a:rPr>
-              <a:t>[5] Kim et al. 2022 -- Transfer learning for medical image classification: a review. BMC Medical Imaging.
-[6] Trevethan 2017 -- Sensitivity, specificity, and predictive values. Frontiers in Public Health.
-[7] Wei et al. 2024 -- Artificial intelligence and skin cancer. Frontiers in Medicine.</a:t>
-            </a:r>
-          </a:p>
-        </p:txBody>
-      </p:sp>
-      <p:sp>
-        <p:nvSpPr>
-          <p:cNvPr id="10" name="Rectangle 9"/>
+              <a:t>Jinchi Wei  ·  Outset  ·  Screening skin spots for melanoma  ·  2026-07-08</a:t>
+            </a:r>
+          </a:p>
+        </p:txBody>
+      </p:sp>
+      <p:pic>
+        <p:nvPicPr>
+          <p:cNvPr id="7" name="Picture 6" descr="fairness_by_sex.png"/>
+          <p:cNvPicPr>
+            <a:picLocks noChangeAspect="1"/>
+          </p:cNvPicPr>
+          <p:nvPr/>
+        </p:nvPicPr>
+        <p:blipFill>
+          <a:blip r:embed="rId2"/>
+          <a:stretch>
+            <a:fillRect/>
+          </a:stretch>
+        </p:blipFill>
+        <p:spPr>
+          <a:xfrm>
+            <a:off x="457200" y="1408674"/>
+            <a:ext cx="6073444" cy="4497850"/>
+          </a:xfrm>
+          <a:prstGeom prst="rect">
+            <a:avLst/>
+          </a:prstGeom>
+        </p:spPr>
+      </p:pic>
+      <p:sp>
+        <p:nvSpPr>
+          <p:cNvPr id="8" name="Rectangle 7"/>
           <p:cNvSpPr/>
           <p:nvPr/>
         </p:nvSpPr>
         <p:spPr>
           <a:xfrm>
-            <a:off x="502920" y="5532120"/>
-            <a:ext cx="11155680" cy="18288"/>
+            <a:off x="6942124" y="1143000"/>
+            <a:ext cx="4762195" cy="1371600"/>
           </a:xfrm>
           <a:prstGeom prst="rect">
             <a:avLst/>
           </a:prstGeom>
           <a:solidFill>
-            <a:srgbClr val="8A2BE2"/>
+            <a:srgbClr val="40E0D0"/>
           </a:solidFill>
           <a:ln>
             <a:noFill/>
@@ -8230,14 +10222,49 @@
       </p:sp>
       <p:sp>
         <p:nvSpPr>
-          <p:cNvPr id="11" name="TextBox 10"/>
+          <p:cNvPr id="9" name="TextBox 8"/>
           <p:cNvSpPr txBox="1"/>
           <p:nvPr/>
         </p:nvSpPr>
         <p:spPr>
           <a:xfrm>
-            <a:off x="502920" y="5660136"/>
-            <a:ext cx="11155680" cy="502920"/>
+            <a:off x="7198156" y="1234440"/>
+            <a:ext cx="4250131" cy="777240"/>
+          </a:xfrm>
+          <a:prstGeom prst="rect">
+            <a:avLst/>
+          </a:prstGeom>
+          <a:noFill/>
+        </p:spPr>
+        <p:txBody>
+          <a:bodyPr wrap="square" anchor="ctr" lIns="0" rIns="0" tIns="0" bIns="0">
+            <a:spAutoFit/>
+          </a:bodyPr>
+          <a:lstStyle/>
+          <a:p>
+            <a:pPr algn="l"/>
+            <a:r>
+              <a:rPr sz="3800" b="1" i="0">
+                <a:solidFill>
+                  <a:srgbClr val="14141C"/>
+                </a:solidFill>
+                <a:latin typeface="Geist Mono"/>
+              </a:rPr>
+              <a:t>0.91</a:t>
+            </a:r>
+          </a:p>
+        </p:txBody>
+      </p:sp>
+      <p:sp>
+        <p:nvSpPr>
+          <p:cNvPr id="10" name="TextBox 9"/>
+          <p:cNvSpPr txBox="1"/>
+          <p:nvPr/>
+        </p:nvSpPr>
+        <p:spPr>
+          <a:xfrm>
+            <a:off x="7198156" y="1965960"/>
+            <a:ext cx="4250131" cy="457200"/>
           </a:xfrm>
           <a:prstGeom prst="rect">
             <a:avLst/>
@@ -8252,13 +10279,162 @@
           <a:p>
             <a:pPr algn="l"/>
             <a:r>
-              <a:rPr sz="1800" b="1" i="0">
+              <a:rPr sz="1400" b="0" i="0">
                 <a:solidFill>
                   <a:srgbClr val="14141C"/>
                 </a:solidFill>
+                <a:latin typeface="Geist"/>
+              </a:rPr>
+              <a:t>AUC for men</a:t>
+            </a:r>
+          </a:p>
+        </p:txBody>
+      </p:sp>
+      <p:sp>
+        <p:nvSpPr>
+          <p:cNvPr id="11" name="Rectangle 10"/>
+          <p:cNvSpPr/>
+          <p:nvPr/>
+        </p:nvSpPr>
+        <p:spPr>
+          <a:xfrm>
+            <a:off x="6942124" y="2651760"/>
+            <a:ext cx="4762195" cy="1371600"/>
+          </a:xfrm>
+          <a:prstGeom prst="rect">
+            <a:avLst/>
+          </a:prstGeom>
+          <a:solidFill>
+            <a:srgbClr val="FF1493"/>
+          </a:solidFill>
+          <a:ln>
+            <a:noFill/>
+          </a:ln>
+          <a:effectLst/>
+        </p:spPr>
+        <p:style>
+          <a:lnRef idx="1">
+            <a:schemeClr val="accent1"/>
+          </a:lnRef>
+          <a:fillRef idx="3">
+            <a:schemeClr val="accent1"/>
+          </a:fillRef>
+          <a:effectRef idx="2">
+            <a:schemeClr val="accent1"/>
+          </a:effectRef>
+          <a:fontRef idx="minor">
+            <a:schemeClr val="lt1"/>
+          </a:fontRef>
+        </p:style>
+        <p:txBody>
+          <a:bodyPr rtlCol="0" anchor="ctr"/>
+          <a:lstStyle/>
+          <a:p>
+            <a:pPr algn="ctr"/>
+          </a:p>
+        </p:txBody>
+      </p:sp>
+      <p:sp>
+        <p:nvSpPr>
+          <p:cNvPr id="12" name="TextBox 11"/>
+          <p:cNvSpPr txBox="1"/>
+          <p:nvPr/>
+        </p:nvSpPr>
+        <p:spPr>
+          <a:xfrm>
+            <a:off x="7198156" y="2743200"/>
+            <a:ext cx="4250131" cy="777240"/>
+          </a:xfrm>
+          <a:prstGeom prst="rect">
+            <a:avLst/>
+          </a:prstGeom>
+          <a:noFill/>
+        </p:spPr>
+        <p:txBody>
+          <a:bodyPr wrap="square" anchor="ctr" lIns="0" rIns="0" tIns="0" bIns="0">
+            <a:spAutoFit/>
+          </a:bodyPr>
+          <a:lstStyle/>
+          <a:p>
+            <a:pPr algn="l"/>
+            <a:r>
+              <a:rPr sz="3800" b="1" i="0">
+                <a:solidFill>
+                  <a:srgbClr val="FFFFFF"/>
+                </a:solidFill>
                 <a:latin typeface="Geist Mono"/>
               </a:rPr>
-              <a:t>Thank you for watching  --  go build something you can honestly evaluate.</a:t>
+              <a:t>0.85</a:t>
+            </a:r>
+          </a:p>
+        </p:txBody>
+      </p:sp>
+      <p:sp>
+        <p:nvSpPr>
+          <p:cNvPr id="13" name="TextBox 12"/>
+          <p:cNvSpPr txBox="1"/>
+          <p:nvPr/>
+        </p:nvSpPr>
+        <p:spPr>
+          <a:xfrm>
+            <a:off x="7198156" y="3474720"/>
+            <a:ext cx="4250131" cy="457200"/>
+          </a:xfrm>
+          <a:prstGeom prst="rect">
+            <a:avLst/>
+          </a:prstGeom>
+          <a:noFill/>
+        </p:spPr>
+        <p:txBody>
+          <a:bodyPr wrap="square" anchor="t" lIns="0" rIns="0" tIns="0" bIns="0">
+            <a:spAutoFit/>
+          </a:bodyPr>
+          <a:lstStyle/>
+          <a:p>
+            <a:pPr algn="l"/>
+            <a:r>
+              <a:rPr sz="1400" b="0" i="0">
+                <a:solidFill>
+                  <a:srgbClr val="FFFFFF"/>
+                </a:solidFill>
+                <a:latin typeface="Geist"/>
+              </a:rPr>
+              <a:t>AUC for women</a:t>
+            </a:r>
+          </a:p>
+        </p:txBody>
+      </p:sp>
+      <p:sp>
+        <p:nvSpPr>
+          <p:cNvPr id="14" name="TextBox 13"/>
+          <p:cNvSpPr txBox="1"/>
+          <p:nvPr/>
+        </p:nvSpPr>
+        <p:spPr>
+          <a:xfrm>
+            <a:off x="6942124" y="4251960"/>
+            <a:ext cx="4762195" cy="1097280"/>
+          </a:xfrm>
+          <a:prstGeom prst="rect">
+            <a:avLst/>
+          </a:prstGeom>
+          <a:noFill/>
+        </p:spPr>
+        <p:txBody>
+          <a:bodyPr wrap="square" anchor="t" lIns="0" rIns="0" tIns="0" bIns="0">
+            <a:spAutoFit/>
+          </a:bodyPr>
+          <a:lstStyle/>
+          <a:p>
+            <a:pPr algn="l"/>
+            <a:r>
+              <a:rPr sz="1500" b="0" i="1">
+                <a:solidFill>
+                  <a:srgbClr val="14141C"/>
+                </a:solidFill>
+                <a:latin typeface="Geist"/>
+              </a:rPr>
+              <a:t>Mind the 0.06 gap. Both clear 0.8, but a screen you trust means naming where it is weaker -- and working to close it.</a:t>
             </a:r>
           </a:p>
         </p:txBody>
@@ -8272,6 +10448,329 @@
 </file>
 
 <file path=ppt/slides/slide18.xml><?xml version="1.0" encoding="utf-8"?>
+<p:sld xmlns:a="http://schemas.openxmlformats.org/drawingml/2006/main" xmlns:p="http://schemas.openxmlformats.org/presentationml/2006/main" xmlns:r="http://schemas.openxmlformats.org/officeDocument/2006/relationships">
+  <p:cSld>
+    <p:spTree>
+      <p:nvGrpSpPr>
+        <p:cNvPr id="1" name=""/>
+        <p:cNvGrpSpPr/>
+        <p:nvPr/>
+      </p:nvGrpSpPr>
+      <p:grpSpPr/>
+      <p:sp>
+        <p:nvSpPr>
+          <p:cNvPr id="2" name="Rectangle 1"/>
+          <p:cNvSpPr/>
+          <p:nvPr/>
+        </p:nvSpPr>
+        <p:spPr>
+          <a:xfrm>
+            <a:off x="0" y="0"/>
+            <a:ext cx="12191695" cy="6858000"/>
+          </a:xfrm>
+          <a:prstGeom prst="rect">
+            <a:avLst/>
+          </a:prstGeom>
+          <a:solidFill>
+            <a:srgbClr val="F6F4EE"/>
+          </a:solidFill>
+          <a:ln>
+            <a:noFill/>
+          </a:ln>
+          <a:effectLst/>
+        </p:spPr>
+        <p:style>
+          <a:lnRef idx="1">
+            <a:schemeClr val="accent1"/>
+          </a:lnRef>
+          <a:fillRef idx="3">
+            <a:schemeClr val="accent1"/>
+          </a:fillRef>
+          <a:effectRef idx="2">
+            <a:schemeClr val="accent1"/>
+          </a:effectRef>
+          <a:fontRef idx="minor">
+            <a:schemeClr val="lt1"/>
+          </a:fontRef>
+        </p:style>
+        <p:txBody>
+          <a:bodyPr rtlCol="0" anchor="ctr"/>
+          <a:lstStyle/>
+          <a:p>
+            <a:pPr algn="ctr"/>
+          </a:p>
+        </p:txBody>
+      </p:sp>
+      <p:sp>
+        <p:nvSpPr>
+          <p:cNvPr id="3" name="Rectangle 2"/>
+          <p:cNvSpPr/>
+          <p:nvPr/>
+        </p:nvSpPr>
+        <p:spPr>
+          <a:xfrm>
+            <a:off x="0" y="0"/>
+            <a:ext cx="201168" cy="6858000"/>
+          </a:xfrm>
+          <a:prstGeom prst="rect">
+            <a:avLst/>
+          </a:prstGeom>
+          <a:solidFill>
+            <a:srgbClr val="8A2BE2"/>
+          </a:solidFill>
+          <a:ln>
+            <a:noFill/>
+          </a:ln>
+          <a:effectLst/>
+        </p:spPr>
+        <p:style>
+          <a:lnRef idx="1">
+            <a:schemeClr val="accent1"/>
+          </a:lnRef>
+          <a:fillRef idx="3">
+            <a:schemeClr val="accent1"/>
+          </a:fillRef>
+          <a:effectRef idx="2">
+            <a:schemeClr val="accent1"/>
+          </a:effectRef>
+          <a:fontRef idx="minor">
+            <a:schemeClr val="lt1"/>
+          </a:fontRef>
+        </p:style>
+        <p:txBody>
+          <a:bodyPr rtlCol="0" anchor="ctr"/>
+          <a:lstStyle/>
+          <a:p>
+            <a:pPr algn="ctr"/>
+          </a:p>
+        </p:txBody>
+      </p:sp>
+      <p:sp>
+        <p:nvSpPr>
+          <p:cNvPr id="4" name="TextBox 3"/>
+          <p:cNvSpPr txBox="1"/>
+          <p:nvPr/>
+        </p:nvSpPr>
+        <p:spPr>
+          <a:xfrm>
+            <a:off x="457200" y="274320"/>
+            <a:ext cx="11247120" cy="502920"/>
+          </a:xfrm>
+          <a:prstGeom prst="rect">
+            <a:avLst/>
+          </a:prstGeom>
+          <a:noFill/>
+        </p:spPr>
+        <p:txBody>
+          <a:bodyPr wrap="square" anchor="t" lIns="0" rIns="0" tIns="0" bIns="0">
+            <a:spAutoFit/>
+          </a:bodyPr>
+          <a:lstStyle/>
+          <a:p>
+            <a:pPr algn="l"/>
+            <a:r>
+              <a:rPr sz="2800" b="1" i="0">
+                <a:solidFill>
+                  <a:srgbClr val="14141C"/>
+                </a:solidFill>
+                <a:latin typeface="Geist Mono"/>
+              </a:rPr>
+              <a:t>Where the screen looks</a:t>
+            </a:r>
+          </a:p>
+        </p:txBody>
+      </p:sp>
+      <p:sp>
+        <p:nvSpPr>
+          <p:cNvPr id="5" name="Rectangle 4"/>
+          <p:cNvSpPr/>
+          <p:nvPr/>
+        </p:nvSpPr>
+        <p:spPr>
+          <a:xfrm>
+            <a:off x="457200" y="868680"/>
+            <a:ext cx="11247120" cy="4572"/>
+          </a:xfrm>
+          <a:prstGeom prst="rect">
+            <a:avLst/>
+          </a:prstGeom>
+          <a:solidFill>
+            <a:srgbClr val="DDDDDD"/>
+          </a:solidFill>
+          <a:ln>
+            <a:noFill/>
+          </a:ln>
+          <a:effectLst/>
+        </p:spPr>
+        <p:style>
+          <a:lnRef idx="1">
+            <a:schemeClr val="accent1"/>
+          </a:lnRef>
+          <a:fillRef idx="3">
+            <a:schemeClr val="accent1"/>
+          </a:fillRef>
+          <a:effectRef idx="2">
+            <a:schemeClr val="accent1"/>
+          </a:effectRef>
+          <a:fontRef idx="minor">
+            <a:schemeClr val="lt1"/>
+          </a:fontRef>
+        </p:style>
+        <p:txBody>
+          <a:bodyPr rtlCol="0" anchor="ctr"/>
+          <a:lstStyle/>
+          <a:p>
+            <a:pPr algn="ctr"/>
+          </a:p>
+        </p:txBody>
+      </p:sp>
+      <p:sp>
+        <p:nvSpPr>
+          <p:cNvPr id="6" name="TextBox 5"/>
+          <p:cNvSpPr txBox="1"/>
+          <p:nvPr/>
+        </p:nvSpPr>
+        <p:spPr>
+          <a:xfrm>
+            <a:off x="457200" y="6510528"/>
+            <a:ext cx="11247120" cy="274320"/>
+          </a:xfrm>
+          <a:prstGeom prst="rect">
+            <a:avLst/>
+          </a:prstGeom>
+          <a:noFill/>
+        </p:spPr>
+        <p:txBody>
+          <a:bodyPr wrap="square" anchor="t" lIns="0" rIns="0" tIns="0" bIns="0">
+            <a:spAutoFit/>
+          </a:bodyPr>
+          <a:lstStyle/>
+          <a:p>
+            <a:pPr algn="l"/>
+            <a:r>
+              <a:rPr sz="900" b="0" i="0">
+                <a:solidFill>
+                  <a:srgbClr val="555560"/>
+                </a:solidFill>
+                <a:latin typeface="Geist Mono"/>
+              </a:rPr>
+              <a:t>Jinchi Wei  ·  Outset  ·  Screening skin spots for melanoma  ·  2026-07-08</a:t>
+            </a:r>
+          </a:p>
+        </p:txBody>
+      </p:sp>
+      <p:pic>
+        <p:nvPicPr>
+          <p:cNvPr id="7" name="Picture 6" descr="gradcam.png"/>
+          <p:cNvPicPr>
+            <a:picLocks noChangeAspect="1"/>
+          </p:cNvPicPr>
+          <p:nvPr/>
+        </p:nvPicPr>
+        <p:blipFill>
+          <a:blip r:embed="rId2"/>
+          <a:stretch>
+            <a:fillRect/>
+          </a:stretch>
+        </p:blipFill>
+        <p:spPr>
+          <a:xfrm>
+            <a:off x="2523640" y="1051560"/>
+            <a:ext cx="7114238" cy="4297679"/>
+          </a:xfrm>
+          <a:prstGeom prst="rect">
+            <a:avLst/>
+          </a:prstGeom>
+        </p:spPr>
+      </p:pic>
+      <p:sp>
+        <p:nvSpPr>
+          <p:cNvPr id="8" name="Rectangle 7"/>
+          <p:cNvSpPr/>
+          <p:nvPr/>
+        </p:nvSpPr>
+        <p:spPr>
+          <a:xfrm>
+            <a:off x="457200" y="5458968"/>
+            <a:ext cx="11247120" cy="713232"/>
+          </a:xfrm>
+          <a:prstGeom prst="rect">
+            <a:avLst/>
+          </a:prstGeom>
+          <a:solidFill>
+            <a:srgbClr val="EDEAE1"/>
+          </a:solidFill>
+          <a:ln>
+            <a:noFill/>
+          </a:ln>
+          <a:effectLst/>
+        </p:spPr>
+        <p:style>
+          <a:lnRef idx="1">
+            <a:schemeClr val="accent1"/>
+          </a:lnRef>
+          <a:fillRef idx="3">
+            <a:schemeClr val="accent1"/>
+          </a:fillRef>
+          <a:effectRef idx="2">
+            <a:schemeClr val="accent1"/>
+          </a:effectRef>
+          <a:fontRef idx="minor">
+            <a:schemeClr val="lt1"/>
+          </a:fontRef>
+        </p:style>
+        <p:txBody>
+          <a:bodyPr rtlCol="0" anchor="ctr"/>
+          <a:lstStyle/>
+          <a:p>
+            <a:pPr algn="ctr"/>
+          </a:p>
+        </p:txBody>
+      </p:sp>
+      <p:sp>
+        <p:nvSpPr>
+          <p:cNvPr id="9" name="TextBox 8"/>
+          <p:cNvSpPr txBox="1"/>
+          <p:nvPr/>
+        </p:nvSpPr>
+        <p:spPr>
+          <a:xfrm>
+            <a:off x="731520" y="5550407"/>
+            <a:ext cx="10698480" cy="548640"/>
+          </a:xfrm>
+          <a:prstGeom prst="rect">
+            <a:avLst/>
+          </a:prstGeom>
+          <a:noFill/>
+        </p:spPr>
+        <p:txBody>
+          <a:bodyPr wrap="square" anchor="ctr" lIns="0" rIns="0" tIns="0" bIns="0">
+            <a:spAutoFit/>
+          </a:bodyPr>
+          <a:lstStyle/>
+          <a:p>
+            <a:pPr algn="l"/>
+            <a:r>
+              <a:rPr sz="1450" b="0" i="0">
+                <a:solidFill>
+                  <a:srgbClr val="14141C"/>
+                </a:solidFill>
+                <a:latin typeface="Geist"/>
+              </a:rPr>
+              <a:t>Grad-CAM = feature importance for an image: the bright areas sit ON the pigmented lesion -- the same cues a dermatologist reads, not a hair, a ruler, or the frame corner.</a:t>
+            </a:r>
+          </a:p>
+        </p:txBody>
+      </p:sp>
+    </p:spTree>
+  </p:cSld>
+  <p:clrMapOvr>
+    <a:masterClrMapping/>
+  </p:clrMapOvr>
+</p:sld>
+</file>
+
+<file path=ppt/slides/slide19.xml><?xml version="1.0" encoding="utf-8"?>
 <p:sld xmlns:a="http://schemas.openxmlformats.org/drawingml/2006/main" xmlns:p="http://schemas.openxmlformats.org/presentationml/2006/main" xmlns:r="http://schemas.openxmlformats.org/officeDocument/2006/relationships">
   <p:cSld>
     <p:bg>
@@ -8342,7 +10841,7 @@
         <p:spPr>
           <a:xfrm>
             <a:off x="0" y="0"/>
-            <a:ext cx="731520" cy="6858000"/>
+            <a:ext cx="548640" cy="6858000"/>
           </a:xfrm>
           <a:prstGeom prst="rect">
             <a:avLst/>
@@ -8385,14 +10884,14 @@
         </p:nvSpPr>
         <p:spPr>
           <a:xfrm>
-            <a:off x="731520" y="0"/>
-            <a:ext cx="228600" cy="6858000"/>
+            <a:off x="777240" y="640080"/>
+            <a:ext cx="164592" cy="411480"/>
           </a:xfrm>
           <a:prstGeom prst="rect">
             <a:avLst/>
           </a:prstGeom>
           <a:solidFill>
-            <a:srgbClr val="FF1493"/>
+            <a:srgbClr val="40E0D0"/>
           </a:solidFill>
           <a:ln>
             <a:noFill/>
@@ -8429,8 +10928,8 @@
         </p:nvSpPr>
         <p:spPr>
           <a:xfrm>
-            <a:off x="1188720" y="1417320"/>
-            <a:ext cx="10058400" cy="1280160"/>
+            <a:off x="1051560" y="640080"/>
+            <a:ext cx="10058400" cy="365760"/>
           </a:xfrm>
           <a:prstGeom prst="rect">
             <a:avLst/>
@@ -8443,15 +10942,15 @@
           </a:bodyPr>
           <a:lstStyle/>
           <a:p>
-            <a:pPr algn="ctr"/>
-            <a:r>
-              <a:rPr sz="6000" b="1" i="0">
-                <a:solidFill>
-                  <a:srgbClr val="FF1493"/>
+            <a:pPr algn="l"/>
+            <a:r>
+              <a:rPr sz="1400" b="1" i="0">
+                <a:solidFill>
+                  <a:srgbClr val="40E0D0"/>
                 </a:solidFill>
                 <a:latin typeface="Geist Mono"/>
               </a:rPr>
-              <a:t>Thank You</a:t>
+              <a:t>Overview</a:t>
             </a:r>
           </a:p>
         </p:txBody>
@@ -8464,8 +10963,8 @@
         </p:nvSpPr>
         <p:spPr>
           <a:xfrm>
-            <a:off x="1188720" y="3246120"/>
-            <a:ext cx="10058400" cy="640080"/>
+            <a:off x="777240" y="2194560"/>
+            <a:ext cx="10972800" cy="2743200"/>
           </a:xfrm>
           <a:prstGeom prst="rect">
             <a:avLst/>
@@ -8478,29 +10977,73 @@
           </a:bodyPr>
           <a:lstStyle/>
           <a:p>
+            <a:pPr algn="l"/>
+            <a:r>
+              <a:rPr sz="4400" b="1" i="0">
+                <a:solidFill>
+                  <a:srgbClr val="FFFFFF"/>
+                </a:solidFill>
+                <a:latin typeface="Geist Mono"/>
+              </a:rPr>
+              <a:t>BEING HONEST</a:t>
+            </a:r>
+          </a:p>
+        </p:txBody>
+      </p:sp>
+      <p:sp>
+        <p:nvSpPr>
+          <p:cNvPr id="7" name="Rectangle 6"/>
+          <p:cNvSpPr/>
+          <p:nvPr/>
+        </p:nvSpPr>
+        <p:spPr>
+          <a:xfrm>
+            <a:off x="777240" y="5120640"/>
+            <a:ext cx="1828800" cy="18288"/>
+          </a:xfrm>
+          <a:prstGeom prst="rect">
+            <a:avLst/>
+          </a:prstGeom>
+          <a:solidFill>
+            <a:srgbClr val="40E0D0"/>
+          </a:solidFill>
+          <a:ln>
+            <a:noFill/>
+          </a:ln>
+          <a:effectLst/>
+        </p:spPr>
+        <p:style>
+          <a:lnRef idx="1">
+            <a:schemeClr val="accent1"/>
+          </a:lnRef>
+          <a:fillRef idx="3">
+            <a:schemeClr val="accent1"/>
+          </a:fillRef>
+          <a:effectRef idx="2">
+            <a:schemeClr val="accent1"/>
+          </a:effectRef>
+          <a:fontRef idx="minor">
+            <a:schemeClr val="lt1"/>
+          </a:fontRef>
+        </p:style>
+        <p:txBody>
+          <a:bodyPr rtlCol="0" anchor="ctr"/>
+          <a:lstStyle/>
+          <a:p>
             <a:pPr algn="ctr"/>
-            <a:r>
-              <a:rPr sz="3000" b="0" i="0">
-                <a:solidFill>
-                  <a:srgbClr val="40E0D0"/>
-                </a:solidFill>
-                <a:latin typeface="Noto Sans CJK TC"/>
-              </a:rPr>
-              <a:t>魏晉祺</a:t>
-            </a:r>
-          </a:p>
-        </p:txBody>
-      </p:sp>
-      <p:sp>
-        <p:nvSpPr>
-          <p:cNvPr id="7" name="TextBox 6"/>
+          </a:p>
+        </p:txBody>
+      </p:sp>
+      <p:sp>
+        <p:nvSpPr>
+          <p:cNvPr id="8" name="TextBox 7"/>
           <p:cNvSpPr txBox="1"/>
           <p:nvPr/>
         </p:nvSpPr>
         <p:spPr>
           <a:xfrm>
-            <a:off x="1188720" y="3922776"/>
-            <a:ext cx="10058400" cy="457200"/>
+            <a:off x="868680" y="6126480"/>
+            <a:ext cx="3657600" cy="320040"/>
           </a:xfrm>
           <a:prstGeom prst="rect">
             <a:avLst/>
@@ -8513,9 +11056,9 @@
           </a:bodyPr>
           <a:lstStyle/>
           <a:p>
-            <a:pPr algn="ctr"/>
-            <a:r>
-              <a:rPr sz="2000" b="1" i="0">
+            <a:pPr algn="l"/>
+            <a:r>
+              <a:rPr sz="1100" b="1" i="0">
                 <a:solidFill>
                   <a:srgbClr val="40E0D0"/>
                 </a:solidFill>
@@ -8528,14 +11071,14 @@
       </p:sp>
       <p:sp>
         <p:nvSpPr>
-          <p:cNvPr id="8" name="TextBox 7"/>
+          <p:cNvPr id="9" name="TextBox 8"/>
           <p:cNvSpPr txBox="1"/>
           <p:nvPr/>
         </p:nvSpPr>
         <p:spPr>
           <a:xfrm>
-            <a:off x="1188720" y="4398264"/>
-            <a:ext cx="10058400" cy="365760"/>
+            <a:off x="2148839" y="6126480"/>
+            <a:ext cx="182880" cy="320040"/>
           </a:xfrm>
           <a:prstGeom prst="rect">
             <a:avLst/>
@@ -8548,29 +11091,29 @@
           </a:bodyPr>
           <a:lstStyle/>
           <a:p>
-            <a:pPr algn="ctr"/>
-            <a:r>
-              <a:rPr sz="1300" b="0" i="0">
-                <a:solidFill>
-                  <a:srgbClr val="FFFFFF"/>
-                </a:solidFill>
-                <a:latin typeface="Geist"/>
-              </a:rPr>
-              <a:t>Outset</a:t>
-            </a:r>
-          </a:p>
-        </p:txBody>
-      </p:sp>
-      <p:sp>
-        <p:nvSpPr>
-          <p:cNvPr id="9" name="TextBox 8"/>
+            <a:pPr algn="l"/>
+            <a:r>
+              <a:rPr sz="1100" b="0" i="0">
+                <a:solidFill>
+                  <a:srgbClr val="888888"/>
+                </a:solidFill>
+                <a:latin typeface="Geist Mono"/>
+              </a:rPr>
+              <a:t>·</a:t>
+            </a:r>
+          </a:p>
+        </p:txBody>
+      </p:sp>
+      <p:sp>
+        <p:nvSpPr>
+          <p:cNvPr id="10" name="TextBox 9"/>
           <p:cNvSpPr txBox="1"/>
           <p:nvPr/>
         </p:nvSpPr>
         <p:spPr>
           <a:xfrm>
-            <a:off x="1188720" y="4837176"/>
-            <a:ext cx="10058400" cy="365760"/>
+            <a:off x="2377439" y="6126480"/>
+            <a:ext cx="4572000" cy="320040"/>
           </a:xfrm>
           <a:prstGeom prst="rect">
             <a:avLst/>
@@ -8583,67 +11126,89 @@
           </a:bodyPr>
           <a:lstStyle/>
           <a:p>
-            <a:pPr algn="ctr"/>
-            <a:r>
-              <a:rPr sz="1600" b="0" i="0">
-                <a:solidFill>
-                  <a:srgbClr val="F0C840"/>
+            <a:pPr algn="l"/>
+            <a:r>
+              <a:rPr sz="1100" b="1" i="0">
+                <a:solidFill>
+                  <a:srgbClr val="FF1493"/>
                 </a:solidFill>
                 <a:latin typeface="Geist Mono"/>
               </a:rPr>
-              <a:t>jinchikwei@gmail.com</a:t>
-            </a:r>
-          </a:p>
-        </p:txBody>
-      </p:sp>
-      <p:pic>
-        <p:nvPicPr>
-          <p:cNvPr id="10" name="Picture 9" descr="meng.png"/>
-          <p:cNvPicPr>
-            <a:picLocks noChangeAspect="1"/>
-          </p:cNvPicPr>
-          <p:nvPr/>
-        </p:nvPicPr>
-        <p:blipFill>
-          <a:blip r:embed="rId2"/>
-          <a:stretch>
-            <a:fillRect/>
-          </a:stretch>
-        </p:blipFill>
-        <p:spPr>
-          <a:xfrm>
-            <a:off x="10086477" y="5486400"/>
-            <a:ext cx="690906" cy="914400"/>
-          </a:xfrm>
-          <a:prstGeom prst="rect">
-            <a:avLst/>
-          </a:prstGeom>
-        </p:spPr>
-      </p:pic>
-      <p:pic>
-        <p:nvPicPr>
-          <p:cNvPr id="11" name="Picture 10" descr="xiang.png"/>
-          <p:cNvPicPr>
-            <a:picLocks noChangeAspect="1"/>
-          </p:cNvPicPr>
-          <p:nvPr/>
-        </p:nvPicPr>
-        <p:blipFill>
-          <a:blip r:embed="rId3"/>
-          <a:stretch>
-            <a:fillRect/>
-          </a:stretch>
-        </p:blipFill>
-        <p:spPr>
-          <a:xfrm>
-            <a:off x="10978551" y="5486400"/>
-            <a:ext cx="755944" cy="914400"/>
-          </a:xfrm>
-          <a:prstGeom prst="rect">
-            <a:avLst/>
-          </a:prstGeom>
-        </p:spPr>
-      </p:pic>
+              <a:t>Outset</a:t>
+            </a:r>
+          </a:p>
+        </p:txBody>
+      </p:sp>
+      <p:sp>
+        <p:nvSpPr>
+          <p:cNvPr id="11" name="TextBox 10"/>
+          <p:cNvSpPr txBox="1"/>
+          <p:nvPr/>
+        </p:nvSpPr>
+        <p:spPr>
+          <a:xfrm>
+            <a:off x="3657599" y="6126480"/>
+            <a:ext cx="182880" cy="320040"/>
+          </a:xfrm>
+          <a:prstGeom prst="rect">
+            <a:avLst/>
+          </a:prstGeom>
+          <a:noFill/>
+        </p:spPr>
+        <p:txBody>
+          <a:bodyPr wrap="square" anchor="t" lIns="0" rIns="0" tIns="0" bIns="0">
+            <a:spAutoFit/>
+          </a:bodyPr>
+          <a:lstStyle/>
+          <a:p>
+            <a:pPr algn="l"/>
+            <a:r>
+              <a:rPr sz="1100" b="0" i="0">
+                <a:solidFill>
+                  <a:srgbClr val="888888"/>
+                </a:solidFill>
+                <a:latin typeface="Geist Mono"/>
+              </a:rPr>
+              <a:t>·</a:t>
+            </a:r>
+          </a:p>
+        </p:txBody>
+      </p:sp>
+      <p:sp>
+        <p:nvSpPr>
+          <p:cNvPr id="12" name="TextBox 11"/>
+          <p:cNvSpPr txBox="1"/>
+          <p:nvPr/>
+        </p:nvSpPr>
+        <p:spPr>
+          <a:xfrm>
+            <a:off x="3886200" y="6126480"/>
+            <a:ext cx="7315200" cy="320040"/>
+          </a:xfrm>
+          <a:prstGeom prst="rect">
+            <a:avLst/>
+          </a:prstGeom>
+          <a:noFill/>
+        </p:spPr>
+        <p:txBody>
+          <a:bodyPr wrap="square" anchor="t" lIns="0" rIns="0" tIns="0" bIns="0">
+            <a:spAutoFit/>
+          </a:bodyPr>
+          <a:lstStyle/>
+          <a:p>
+            <a:pPr algn="l"/>
+            <a:r>
+              <a:rPr sz="1100" b="0" i="0">
+                <a:solidFill>
+                  <a:srgbClr val="888888"/>
+                </a:solidFill>
+                <a:latin typeface="Geist Mono"/>
+              </a:rPr>
+              <a:t>Screening skin spots for melanoma</a:t>
+            </a:r>
+          </a:p>
+        </p:txBody>
+      </p:sp>
     </p:spTree>
   </p:cSld>
   <p:clrMapOvr>
@@ -9086,11 +11651,2154 @@
                 </a:solidFill>
                 <a:latin typeface="Geist Mono"/>
               </a:rPr>
-              <a:t>Never miss a melanoma</a:t>
-            </a:r>
-          </a:p>
-        </p:txBody>
-      </p:sp>
+              <a:t>Screening skin spots for melanoma</a:t>
+            </a:r>
+          </a:p>
+        </p:txBody>
+      </p:sp>
+    </p:spTree>
+  </p:cSld>
+  <p:clrMapOvr>
+    <a:masterClrMapping/>
+  </p:clrMapOvr>
+</p:sld>
+</file>
+
+<file path=ppt/slides/slide20.xml><?xml version="1.0" encoding="utf-8"?>
+<p:sld xmlns:a="http://schemas.openxmlformats.org/drawingml/2006/main" xmlns:p="http://schemas.openxmlformats.org/presentationml/2006/main" xmlns:r="http://schemas.openxmlformats.org/officeDocument/2006/relationships">
+  <p:cSld>
+    <p:spTree>
+      <p:nvGrpSpPr>
+        <p:cNvPr id="1" name=""/>
+        <p:cNvGrpSpPr/>
+        <p:nvPr/>
+      </p:nvGrpSpPr>
+      <p:grpSpPr/>
+      <p:sp>
+        <p:nvSpPr>
+          <p:cNvPr id="2" name="Rectangle 1"/>
+          <p:cNvSpPr/>
+          <p:nvPr/>
+        </p:nvSpPr>
+        <p:spPr>
+          <a:xfrm>
+            <a:off x="0" y="0"/>
+            <a:ext cx="12191695" cy="6858000"/>
+          </a:xfrm>
+          <a:prstGeom prst="rect">
+            <a:avLst/>
+          </a:prstGeom>
+          <a:solidFill>
+            <a:srgbClr val="F6F4EE"/>
+          </a:solidFill>
+          <a:ln>
+            <a:noFill/>
+          </a:ln>
+          <a:effectLst/>
+        </p:spPr>
+        <p:style>
+          <a:lnRef idx="1">
+            <a:schemeClr val="accent1"/>
+          </a:lnRef>
+          <a:fillRef idx="3">
+            <a:schemeClr val="accent1"/>
+          </a:fillRef>
+          <a:effectRef idx="2">
+            <a:schemeClr val="accent1"/>
+          </a:effectRef>
+          <a:fontRef idx="minor">
+            <a:schemeClr val="lt1"/>
+          </a:fontRef>
+        </p:style>
+        <p:txBody>
+          <a:bodyPr rtlCol="0" anchor="ctr"/>
+          <a:lstStyle/>
+          <a:p>
+            <a:pPr algn="ctr"/>
+          </a:p>
+        </p:txBody>
+      </p:sp>
+      <p:sp>
+        <p:nvSpPr>
+          <p:cNvPr id="3" name="Rectangle 2"/>
+          <p:cNvSpPr/>
+          <p:nvPr/>
+        </p:nvSpPr>
+        <p:spPr>
+          <a:xfrm>
+            <a:off x="0" y="0"/>
+            <a:ext cx="201168" cy="6858000"/>
+          </a:xfrm>
+          <a:prstGeom prst="rect">
+            <a:avLst/>
+          </a:prstGeom>
+          <a:solidFill>
+            <a:srgbClr val="40E0D0"/>
+          </a:solidFill>
+          <a:ln>
+            <a:noFill/>
+          </a:ln>
+          <a:effectLst/>
+        </p:spPr>
+        <p:style>
+          <a:lnRef idx="1">
+            <a:schemeClr val="accent1"/>
+          </a:lnRef>
+          <a:fillRef idx="3">
+            <a:schemeClr val="accent1"/>
+          </a:fillRef>
+          <a:effectRef idx="2">
+            <a:schemeClr val="accent1"/>
+          </a:effectRef>
+          <a:fontRef idx="minor">
+            <a:schemeClr val="lt1"/>
+          </a:fontRef>
+        </p:style>
+        <p:txBody>
+          <a:bodyPr rtlCol="0" anchor="ctr"/>
+          <a:lstStyle/>
+          <a:p>
+            <a:pPr algn="ctr"/>
+          </a:p>
+        </p:txBody>
+      </p:sp>
+      <p:sp>
+        <p:nvSpPr>
+          <p:cNvPr id="4" name="TextBox 3"/>
+          <p:cNvSpPr txBox="1"/>
+          <p:nvPr/>
+        </p:nvSpPr>
+        <p:spPr>
+          <a:xfrm>
+            <a:off x="457200" y="274320"/>
+            <a:ext cx="11247120" cy="502920"/>
+          </a:xfrm>
+          <a:prstGeom prst="rect">
+            <a:avLst/>
+          </a:prstGeom>
+          <a:noFill/>
+        </p:spPr>
+        <p:txBody>
+          <a:bodyPr wrap="square" anchor="t" lIns="0" rIns="0" tIns="0" bIns="0">
+            <a:spAutoFit/>
+          </a:bodyPr>
+          <a:lstStyle/>
+          <a:p>
+            <a:pPr algn="l"/>
+            <a:r>
+              <a:rPr sz="2800" b="1" i="0">
+                <a:solidFill>
+                  <a:srgbClr val="14141C"/>
+                </a:solidFill>
+                <a:latin typeface="Geist Mono"/>
+              </a:rPr>
+              <a:t>What it can and cannot do</a:t>
+            </a:r>
+          </a:p>
+        </p:txBody>
+      </p:sp>
+      <p:sp>
+        <p:nvSpPr>
+          <p:cNvPr id="5" name="Rectangle 4"/>
+          <p:cNvSpPr/>
+          <p:nvPr/>
+        </p:nvSpPr>
+        <p:spPr>
+          <a:xfrm>
+            <a:off x="457200" y="868680"/>
+            <a:ext cx="11247120" cy="4572"/>
+          </a:xfrm>
+          <a:prstGeom prst="rect">
+            <a:avLst/>
+          </a:prstGeom>
+          <a:solidFill>
+            <a:srgbClr val="DDDDDD"/>
+          </a:solidFill>
+          <a:ln>
+            <a:noFill/>
+          </a:ln>
+          <a:effectLst/>
+        </p:spPr>
+        <p:style>
+          <a:lnRef idx="1">
+            <a:schemeClr val="accent1"/>
+          </a:lnRef>
+          <a:fillRef idx="3">
+            <a:schemeClr val="accent1"/>
+          </a:fillRef>
+          <a:effectRef idx="2">
+            <a:schemeClr val="accent1"/>
+          </a:effectRef>
+          <a:fontRef idx="minor">
+            <a:schemeClr val="lt1"/>
+          </a:fontRef>
+        </p:style>
+        <p:txBody>
+          <a:bodyPr rtlCol="0" anchor="ctr"/>
+          <a:lstStyle/>
+          <a:p>
+            <a:pPr algn="ctr"/>
+          </a:p>
+        </p:txBody>
+      </p:sp>
+      <p:sp>
+        <p:nvSpPr>
+          <p:cNvPr id="6" name="TextBox 5"/>
+          <p:cNvSpPr txBox="1"/>
+          <p:nvPr/>
+        </p:nvSpPr>
+        <p:spPr>
+          <a:xfrm>
+            <a:off x="457200" y="6510528"/>
+            <a:ext cx="11247120" cy="274320"/>
+          </a:xfrm>
+          <a:prstGeom prst="rect">
+            <a:avLst/>
+          </a:prstGeom>
+          <a:noFill/>
+        </p:spPr>
+        <p:txBody>
+          <a:bodyPr wrap="square" anchor="t" lIns="0" rIns="0" tIns="0" bIns="0">
+            <a:spAutoFit/>
+          </a:bodyPr>
+          <a:lstStyle/>
+          <a:p>
+            <a:pPr algn="l"/>
+            <a:r>
+              <a:rPr sz="900" b="0" i="0">
+                <a:solidFill>
+                  <a:srgbClr val="555560"/>
+                </a:solidFill>
+                <a:latin typeface="Geist Mono"/>
+              </a:rPr>
+              <a:t>Jinchi Wei  ·  Outset  ·  Screening skin spots for melanoma  ·  2026-07-08</a:t>
+            </a:r>
+          </a:p>
+        </p:txBody>
+      </p:sp>
+      <p:sp>
+        <p:nvSpPr>
+          <p:cNvPr id="7" name="Rectangle 6"/>
+          <p:cNvSpPr/>
+          <p:nvPr/>
+        </p:nvSpPr>
+        <p:spPr>
+          <a:xfrm>
+            <a:off x="502920" y="1106424"/>
+            <a:ext cx="3535680" cy="5120640"/>
+          </a:xfrm>
+          <a:prstGeom prst="rect">
+            <a:avLst/>
+          </a:prstGeom>
+          <a:solidFill>
+            <a:srgbClr val="E4E1D9"/>
+          </a:solidFill>
+          <a:ln>
+            <a:noFill/>
+          </a:ln>
+          <a:effectLst/>
+        </p:spPr>
+        <p:style>
+          <a:lnRef idx="1">
+            <a:schemeClr val="accent1"/>
+          </a:lnRef>
+          <a:fillRef idx="3">
+            <a:schemeClr val="accent1"/>
+          </a:fillRef>
+          <a:effectRef idx="2">
+            <a:schemeClr val="accent1"/>
+          </a:effectRef>
+          <a:fontRef idx="minor">
+            <a:schemeClr val="lt1"/>
+          </a:fontRef>
+        </p:style>
+        <p:txBody>
+          <a:bodyPr rtlCol="0" anchor="ctr"/>
+          <a:lstStyle/>
+          <a:p>
+            <a:pPr algn="ctr"/>
+          </a:p>
+        </p:txBody>
+      </p:sp>
+      <p:sp>
+        <p:nvSpPr>
+          <p:cNvPr id="8" name="Rectangle 7"/>
+          <p:cNvSpPr/>
+          <p:nvPr/>
+        </p:nvSpPr>
+        <p:spPr>
+          <a:xfrm>
+            <a:off x="457200" y="1051560"/>
+            <a:ext cx="3535680" cy="5120640"/>
+          </a:xfrm>
+          <a:prstGeom prst="rect">
+            <a:avLst/>
+          </a:prstGeom>
+          <a:solidFill>
+            <a:srgbClr val="FFFFFF"/>
+          </a:solidFill>
+          <a:ln>
+            <a:noFill/>
+          </a:ln>
+          <a:effectLst/>
+        </p:spPr>
+        <p:style>
+          <a:lnRef idx="1">
+            <a:schemeClr val="accent1"/>
+          </a:lnRef>
+          <a:fillRef idx="3">
+            <a:schemeClr val="accent1"/>
+          </a:fillRef>
+          <a:effectRef idx="2">
+            <a:schemeClr val="accent1"/>
+          </a:effectRef>
+          <a:fontRef idx="minor">
+            <a:schemeClr val="lt1"/>
+          </a:fontRef>
+        </p:style>
+        <p:txBody>
+          <a:bodyPr rtlCol="0" anchor="ctr"/>
+          <a:lstStyle/>
+          <a:p>
+            <a:pPr algn="ctr"/>
+          </a:p>
+        </p:txBody>
+      </p:sp>
+      <p:sp>
+        <p:nvSpPr>
+          <p:cNvPr id="9" name="Rectangle 8"/>
+          <p:cNvSpPr/>
+          <p:nvPr/>
+        </p:nvSpPr>
+        <p:spPr>
+          <a:xfrm>
+            <a:off x="457200" y="1051560"/>
+            <a:ext cx="3535680" cy="91440"/>
+          </a:xfrm>
+          <a:prstGeom prst="rect">
+            <a:avLst/>
+          </a:prstGeom>
+          <a:solidFill>
+            <a:srgbClr val="40E0D0"/>
+          </a:solidFill>
+          <a:ln>
+            <a:noFill/>
+          </a:ln>
+          <a:effectLst/>
+        </p:spPr>
+        <p:style>
+          <a:lnRef idx="1">
+            <a:schemeClr val="accent1"/>
+          </a:lnRef>
+          <a:fillRef idx="3">
+            <a:schemeClr val="accent1"/>
+          </a:fillRef>
+          <a:effectRef idx="2">
+            <a:schemeClr val="accent1"/>
+          </a:effectRef>
+          <a:fontRef idx="minor">
+            <a:schemeClr val="lt1"/>
+          </a:fontRef>
+        </p:style>
+        <p:txBody>
+          <a:bodyPr rtlCol="0" anchor="ctr"/>
+          <a:lstStyle/>
+          <a:p>
+            <a:pPr algn="ctr"/>
+          </a:p>
+        </p:txBody>
+      </p:sp>
+      <p:sp>
+        <p:nvSpPr>
+          <p:cNvPr id="10" name="TextBox 9"/>
+          <p:cNvSpPr txBox="1"/>
+          <p:nvPr/>
+        </p:nvSpPr>
+        <p:spPr>
+          <a:xfrm>
+            <a:off x="713232" y="1600200"/>
+            <a:ext cx="3023616" cy="457200"/>
+          </a:xfrm>
+          <a:prstGeom prst="rect">
+            <a:avLst/>
+          </a:prstGeom>
+          <a:noFill/>
+        </p:spPr>
+        <p:txBody>
+          <a:bodyPr wrap="square" anchor="t" lIns="0" rIns="0" tIns="0" bIns="0">
+            <a:spAutoFit/>
+          </a:bodyPr>
+          <a:lstStyle/>
+          <a:p>
+            <a:pPr algn="l"/>
+            <a:r>
+              <a:rPr sz="1700" b="1" i="0">
+                <a:solidFill>
+                  <a:srgbClr val="40E0D0"/>
+                </a:solidFill>
+                <a:latin typeface="Geist Mono"/>
+              </a:rPr>
+              <a:t>IT WORKS</a:t>
+            </a:r>
+          </a:p>
+        </p:txBody>
+      </p:sp>
+      <p:sp>
+        <p:nvSpPr>
+          <p:cNvPr id="11" name="TextBox 10"/>
+          <p:cNvSpPr txBox="1"/>
+          <p:nvPr/>
+        </p:nvSpPr>
+        <p:spPr>
+          <a:xfrm>
+            <a:off x="713232" y="2286000"/>
+            <a:ext cx="3023616" cy="3017520"/>
+          </a:xfrm>
+          <a:prstGeom prst="rect">
+            <a:avLst/>
+          </a:prstGeom>
+          <a:noFill/>
+        </p:spPr>
+        <p:txBody>
+          <a:bodyPr wrap="square" anchor="t" lIns="0" rIns="0" tIns="0" bIns="0">
+            <a:spAutoFit/>
+          </a:bodyPr>
+          <a:lstStyle/>
+          <a:p>
+            <a:pPr algn="l"/>
+            <a:r>
+              <a:rPr sz="1600" b="0" i="0">
+                <a:solidFill>
+                  <a:srgbClr val="14141C"/>
+                </a:solidFill>
+                <a:latin typeface="Geist"/>
+              </a:rPr>
+              <a:t>A real melanoma screen on real dermatoscopy: AUC 0.885, tuned to catch 90% of melanomas, and it looks at the lesion for the right reasons.</a:t>
+            </a:r>
+          </a:p>
+        </p:txBody>
+      </p:sp>
+      <p:sp>
+        <p:nvSpPr>
+          <p:cNvPr id="12" name="Rectangle 11"/>
+          <p:cNvSpPr/>
+          <p:nvPr/>
+        </p:nvSpPr>
+        <p:spPr>
+          <a:xfrm>
+            <a:off x="457200" y="5212080"/>
+            <a:ext cx="3535680" cy="18288"/>
+          </a:xfrm>
+          <a:prstGeom prst="rect">
+            <a:avLst/>
+          </a:prstGeom>
+          <a:solidFill>
+            <a:srgbClr val="E4E1D9"/>
+          </a:solidFill>
+          <a:ln>
+            <a:noFill/>
+          </a:ln>
+          <a:effectLst/>
+        </p:spPr>
+        <p:style>
+          <a:lnRef idx="1">
+            <a:schemeClr val="accent1"/>
+          </a:lnRef>
+          <a:fillRef idx="3">
+            <a:schemeClr val="accent1"/>
+          </a:fillRef>
+          <a:effectRef idx="2">
+            <a:schemeClr val="accent1"/>
+          </a:effectRef>
+          <a:fontRef idx="minor">
+            <a:schemeClr val="lt1"/>
+          </a:fontRef>
+        </p:style>
+        <p:txBody>
+          <a:bodyPr rtlCol="0" anchor="ctr"/>
+          <a:lstStyle/>
+          <a:p>
+            <a:pPr algn="ctr"/>
+          </a:p>
+        </p:txBody>
+      </p:sp>
+      <p:sp>
+        <p:nvSpPr>
+          <p:cNvPr id="13" name="TextBox 12"/>
+          <p:cNvSpPr txBox="1"/>
+          <p:nvPr/>
+        </p:nvSpPr>
+        <p:spPr>
+          <a:xfrm>
+            <a:off x="713232" y="5349240"/>
+            <a:ext cx="3023616" cy="548640"/>
+          </a:xfrm>
+          <a:prstGeom prst="rect">
+            <a:avLst/>
+          </a:prstGeom>
+          <a:noFill/>
+        </p:spPr>
+        <p:txBody>
+          <a:bodyPr wrap="square" anchor="ctr" lIns="0" rIns="0" tIns="0" bIns="0">
+            <a:spAutoFit/>
+          </a:bodyPr>
+          <a:lstStyle/>
+          <a:p>
+            <a:pPr algn="l"/>
+            <a:r>
+              <a:rPr sz="1500" b="1" i="0">
+                <a:solidFill>
+                  <a:srgbClr val="40E0D0"/>
+                </a:solidFill>
+                <a:latin typeface="Geist Mono"/>
+              </a:rPr>
+              <a:t>AUC 0.885 · recall 90%</a:t>
+            </a:r>
+          </a:p>
+        </p:txBody>
+      </p:sp>
+      <p:sp>
+        <p:nvSpPr>
+          <p:cNvPr id="14" name="Rectangle 13"/>
+          <p:cNvSpPr/>
+          <p:nvPr/>
+        </p:nvSpPr>
+        <p:spPr>
+          <a:xfrm>
+            <a:off x="4358640" y="1106424"/>
+            <a:ext cx="3535680" cy="5120640"/>
+          </a:xfrm>
+          <a:prstGeom prst="rect">
+            <a:avLst/>
+          </a:prstGeom>
+          <a:solidFill>
+            <a:srgbClr val="E4E1D9"/>
+          </a:solidFill>
+          <a:ln>
+            <a:noFill/>
+          </a:ln>
+          <a:effectLst/>
+        </p:spPr>
+        <p:style>
+          <a:lnRef idx="1">
+            <a:schemeClr val="accent1"/>
+          </a:lnRef>
+          <a:fillRef idx="3">
+            <a:schemeClr val="accent1"/>
+          </a:fillRef>
+          <a:effectRef idx="2">
+            <a:schemeClr val="accent1"/>
+          </a:effectRef>
+          <a:fontRef idx="minor">
+            <a:schemeClr val="lt1"/>
+          </a:fontRef>
+        </p:style>
+        <p:txBody>
+          <a:bodyPr rtlCol="0" anchor="ctr"/>
+          <a:lstStyle/>
+          <a:p>
+            <a:pPr algn="ctr"/>
+          </a:p>
+        </p:txBody>
+      </p:sp>
+      <p:sp>
+        <p:nvSpPr>
+          <p:cNvPr id="15" name="Rectangle 14"/>
+          <p:cNvSpPr/>
+          <p:nvPr/>
+        </p:nvSpPr>
+        <p:spPr>
+          <a:xfrm>
+            <a:off x="4312920" y="1051560"/>
+            <a:ext cx="3535680" cy="5120640"/>
+          </a:xfrm>
+          <a:prstGeom prst="rect">
+            <a:avLst/>
+          </a:prstGeom>
+          <a:solidFill>
+            <a:srgbClr val="FFFFFF"/>
+          </a:solidFill>
+          <a:ln>
+            <a:noFill/>
+          </a:ln>
+          <a:effectLst/>
+        </p:spPr>
+        <p:style>
+          <a:lnRef idx="1">
+            <a:schemeClr val="accent1"/>
+          </a:lnRef>
+          <a:fillRef idx="3">
+            <a:schemeClr val="accent1"/>
+          </a:fillRef>
+          <a:effectRef idx="2">
+            <a:schemeClr val="accent1"/>
+          </a:effectRef>
+          <a:fontRef idx="minor">
+            <a:schemeClr val="lt1"/>
+          </a:fontRef>
+        </p:style>
+        <p:txBody>
+          <a:bodyPr rtlCol="0" anchor="ctr"/>
+          <a:lstStyle/>
+          <a:p>
+            <a:pPr algn="ctr"/>
+          </a:p>
+        </p:txBody>
+      </p:sp>
+      <p:sp>
+        <p:nvSpPr>
+          <p:cNvPr id="16" name="Rectangle 15"/>
+          <p:cNvSpPr/>
+          <p:nvPr/>
+        </p:nvSpPr>
+        <p:spPr>
+          <a:xfrm>
+            <a:off x="4312920" y="1051560"/>
+            <a:ext cx="3535680" cy="91440"/>
+          </a:xfrm>
+          <a:prstGeom prst="rect">
+            <a:avLst/>
+          </a:prstGeom>
+          <a:solidFill>
+            <a:srgbClr val="FF1493"/>
+          </a:solidFill>
+          <a:ln>
+            <a:noFill/>
+          </a:ln>
+          <a:effectLst/>
+        </p:spPr>
+        <p:style>
+          <a:lnRef idx="1">
+            <a:schemeClr val="accent1"/>
+          </a:lnRef>
+          <a:fillRef idx="3">
+            <a:schemeClr val="accent1"/>
+          </a:fillRef>
+          <a:effectRef idx="2">
+            <a:schemeClr val="accent1"/>
+          </a:effectRef>
+          <a:fontRef idx="minor">
+            <a:schemeClr val="lt1"/>
+          </a:fontRef>
+        </p:style>
+        <p:txBody>
+          <a:bodyPr rtlCol="0" anchor="ctr"/>
+          <a:lstStyle/>
+          <a:p>
+            <a:pPr algn="ctr"/>
+          </a:p>
+        </p:txBody>
+      </p:sp>
+      <p:sp>
+        <p:nvSpPr>
+          <p:cNvPr id="17" name="TextBox 16"/>
+          <p:cNvSpPr txBox="1"/>
+          <p:nvPr/>
+        </p:nvSpPr>
+        <p:spPr>
+          <a:xfrm>
+            <a:off x="4568952" y="1600200"/>
+            <a:ext cx="3023616" cy="457200"/>
+          </a:xfrm>
+          <a:prstGeom prst="rect">
+            <a:avLst/>
+          </a:prstGeom>
+          <a:noFill/>
+        </p:spPr>
+        <p:txBody>
+          <a:bodyPr wrap="square" anchor="t" lIns="0" rIns="0" tIns="0" bIns="0">
+            <a:spAutoFit/>
+          </a:bodyPr>
+          <a:lstStyle/>
+          <a:p>
+            <a:pPr algn="l"/>
+            <a:r>
+              <a:rPr sz="1700" b="1" i="0">
+                <a:solidFill>
+                  <a:srgbClr val="FF1493"/>
+                </a:solidFill>
+                <a:latin typeface="Geist Mono"/>
+              </a:rPr>
+              <a:t>BUT IT IS UNEVEN</a:t>
+            </a:r>
+          </a:p>
+        </p:txBody>
+      </p:sp>
+      <p:sp>
+        <p:nvSpPr>
+          <p:cNvPr id="18" name="TextBox 17"/>
+          <p:cNvSpPr txBox="1"/>
+          <p:nvPr/>
+        </p:nvSpPr>
+        <p:spPr>
+          <a:xfrm>
+            <a:off x="4568952" y="2286000"/>
+            <a:ext cx="3023616" cy="3017520"/>
+          </a:xfrm>
+          <a:prstGeom prst="rect">
+            <a:avLst/>
+          </a:prstGeom>
+          <a:noFill/>
+        </p:spPr>
+        <p:txBody>
+          <a:bodyPr wrap="square" anchor="t" lIns="0" rIns="0" tIns="0" bIns="0">
+            <a:spAutoFit/>
+          </a:bodyPr>
+          <a:lstStyle/>
+          <a:p>
+            <a:pPr algn="l"/>
+            <a:r>
+              <a:rPr sz="1600" b="0" i="0">
+                <a:solidFill>
+                  <a:srgbClr val="14141C"/>
+                </a:solidFill>
+                <a:latin typeface="Geist"/>
+              </a:rPr>
+              <a:t>A real gap by sex (0.85 vs 0.91), and HAM10000 skews toward lighter skin -- so performance on darker skin is unproven here.</a:t>
+            </a:r>
+          </a:p>
+        </p:txBody>
+      </p:sp>
+      <p:sp>
+        <p:nvSpPr>
+          <p:cNvPr id="19" name="Rectangle 18"/>
+          <p:cNvSpPr/>
+          <p:nvPr/>
+        </p:nvSpPr>
+        <p:spPr>
+          <a:xfrm>
+            <a:off x="4312920" y="5212080"/>
+            <a:ext cx="3535680" cy="18288"/>
+          </a:xfrm>
+          <a:prstGeom prst="rect">
+            <a:avLst/>
+          </a:prstGeom>
+          <a:solidFill>
+            <a:srgbClr val="E4E1D9"/>
+          </a:solidFill>
+          <a:ln>
+            <a:noFill/>
+          </a:ln>
+          <a:effectLst/>
+        </p:spPr>
+        <p:style>
+          <a:lnRef idx="1">
+            <a:schemeClr val="accent1"/>
+          </a:lnRef>
+          <a:fillRef idx="3">
+            <a:schemeClr val="accent1"/>
+          </a:fillRef>
+          <a:effectRef idx="2">
+            <a:schemeClr val="accent1"/>
+          </a:effectRef>
+          <a:fontRef idx="minor">
+            <a:schemeClr val="lt1"/>
+          </a:fontRef>
+        </p:style>
+        <p:txBody>
+          <a:bodyPr rtlCol="0" anchor="ctr"/>
+          <a:lstStyle/>
+          <a:p>
+            <a:pPr algn="ctr"/>
+          </a:p>
+        </p:txBody>
+      </p:sp>
+      <p:sp>
+        <p:nvSpPr>
+          <p:cNvPr id="20" name="TextBox 19"/>
+          <p:cNvSpPr txBox="1"/>
+          <p:nvPr/>
+        </p:nvSpPr>
+        <p:spPr>
+          <a:xfrm>
+            <a:off x="4568952" y="5349240"/>
+            <a:ext cx="3023616" cy="548640"/>
+          </a:xfrm>
+          <a:prstGeom prst="rect">
+            <a:avLst/>
+          </a:prstGeom>
+          <a:noFill/>
+        </p:spPr>
+        <p:txBody>
+          <a:bodyPr wrap="square" anchor="ctr" lIns="0" rIns="0" tIns="0" bIns="0">
+            <a:spAutoFit/>
+          </a:bodyPr>
+          <a:lstStyle/>
+          <a:p>
+            <a:pPr algn="l"/>
+            <a:r>
+              <a:rPr sz="1500" b="1" i="0">
+                <a:solidFill>
+                  <a:srgbClr val="FF1493"/>
+                </a:solidFill>
+                <a:latin typeface="Geist Mono"/>
+              </a:rPr>
+              <a:t>a real 0.06 gap by sex</a:t>
+            </a:r>
+          </a:p>
+        </p:txBody>
+      </p:sp>
+      <p:sp>
+        <p:nvSpPr>
+          <p:cNvPr id="21" name="Rectangle 20"/>
+          <p:cNvSpPr/>
+          <p:nvPr/>
+        </p:nvSpPr>
+        <p:spPr>
+          <a:xfrm>
+            <a:off x="8214360" y="1106424"/>
+            <a:ext cx="3535680" cy="5120640"/>
+          </a:xfrm>
+          <a:prstGeom prst="rect">
+            <a:avLst/>
+          </a:prstGeom>
+          <a:solidFill>
+            <a:srgbClr val="E4E1D9"/>
+          </a:solidFill>
+          <a:ln>
+            <a:noFill/>
+          </a:ln>
+          <a:effectLst/>
+        </p:spPr>
+        <p:style>
+          <a:lnRef idx="1">
+            <a:schemeClr val="accent1"/>
+          </a:lnRef>
+          <a:fillRef idx="3">
+            <a:schemeClr val="accent1"/>
+          </a:fillRef>
+          <a:effectRef idx="2">
+            <a:schemeClr val="accent1"/>
+          </a:effectRef>
+          <a:fontRef idx="minor">
+            <a:schemeClr val="lt1"/>
+          </a:fontRef>
+        </p:style>
+        <p:txBody>
+          <a:bodyPr rtlCol="0" anchor="ctr"/>
+          <a:lstStyle/>
+          <a:p>
+            <a:pPr algn="ctr"/>
+          </a:p>
+        </p:txBody>
+      </p:sp>
+      <p:sp>
+        <p:nvSpPr>
+          <p:cNvPr id="22" name="Rectangle 21"/>
+          <p:cNvSpPr/>
+          <p:nvPr/>
+        </p:nvSpPr>
+        <p:spPr>
+          <a:xfrm>
+            <a:off x="8168640" y="1051560"/>
+            <a:ext cx="3535680" cy="5120640"/>
+          </a:xfrm>
+          <a:prstGeom prst="rect">
+            <a:avLst/>
+          </a:prstGeom>
+          <a:solidFill>
+            <a:srgbClr val="FFFFFF"/>
+          </a:solidFill>
+          <a:ln>
+            <a:noFill/>
+          </a:ln>
+          <a:effectLst/>
+        </p:spPr>
+        <p:style>
+          <a:lnRef idx="1">
+            <a:schemeClr val="accent1"/>
+          </a:lnRef>
+          <a:fillRef idx="3">
+            <a:schemeClr val="accent1"/>
+          </a:fillRef>
+          <a:effectRef idx="2">
+            <a:schemeClr val="accent1"/>
+          </a:effectRef>
+          <a:fontRef idx="minor">
+            <a:schemeClr val="lt1"/>
+          </a:fontRef>
+        </p:style>
+        <p:txBody>
+          <a:bodyPr rtlCol="0" anchor="ctr"/>
+          <a:lstStyle/>
+          <a:p>
+            <a:pPr algn="ctr"/>
+          </a:p>
+        </p:txBody>
+      </p:sp>
+      <p:sp>
+        <p:nvSpPr>
+          <p:cNvPr id="23" name="Rectangle 22"/>
+          <p:cNvSpPr/>
+          <p:nvPr/>
+        </p:nvSpPr>
+        <p:spPr>
+          <a:xfrm>
+            <a:off x="8168640" y="1051560"/>
+            <a:ext cx="3535680" cy="91440"/>
+          </a:xfrm>
+          <a:prstGeom prst="rect">
+            <a:avLst/>
+          </a:prstGeom>
+          <a:solidFill>
+            <a:srgbClr val="8A2BE2"/>
+          </a:solidFill>
+          <a:ln>
+            <a:noFill/>
+          </a:ln>
+          <a:effectLst/>
+        </p:spPr>
+        <p:style>
+          <a:lnRef idx="1">
+            <a:schemeClr val="accent1"/>
+          </a:lnRef>
+          <a:fillRef idx="3">
+            <a:schemeClr val="accent1"/>
+          </a:fillRef>
+          <a:effectRef idx="2">
+            <a:schemeClr val="accent1"/>
+          </a:effectRef>
+          <a:fontRef idx="minor">
+            <a:schemeClr val="lt1"/>
+          </a:fontRef>
+        </p:style>
+        <p:txBody>
+          <a:bodyPr rtlCol="0" anchor="ctr"/>
+          <a:lstStyle/>
+          <a:p>
+            <a:pPr algn="ctr"/>
+          </a:p>
+        </p:txBody>
+      </p:sp>
+      <p:sp>
+        <p:nvSpPr>
+          <p:cNvPr id="24" name="TextBox 23"/>
+          <p:cNvSpPr txBox="1"/>
+          <p:nvPr/>
+        </p:nvSpPr>
+        <p:spPr>
+          <a:xfrm>
+            <a:off x="8424672" y="1600200"/>
+            <a:ext cx="3023616" cy="457200"/>
+          </a:xfrm>
+          <a:prstGeom prst="rect">
+            <a:avLst/>
+          </a:prstGeom>
+          <a:noFill/>
+        </p:spPr>
+        <p:txBody>
+          <a:bodyPr wrap="square" anchor="t" lIns="0" rIns="0" tIns="0" bIns="0">
+            <a:spAutoFit/>
+          </a:bodyPr>
+          <a:lstStyle/>
+          <a:p>
+            <a:pPr algn="l"/>
+            <a:r>
+              <a:rPr sz="1700" b="1" i="0">
+                <a:solidFill>
+                  <a:srgbClr val="8A2BE2"/>
+                </a:solidFill>
+                <a:latin typeface="Geist Mono"/>
+              </a:rPr>
+              <a:t>A REAL TOOL</a:t>
+            </a:r>
+          </a:p>
+        </p:txBody>
+      </p:sp>
+      <p:sp>
+        <p:nvSpPr>
+          <p:cNvPr id="25" name="TextBox 24"/>
+          <p:cNvSpPr txBox="1"/>
+          <p:nvPr/>
+        </p:nvSpPr>
+        <p:spPr>
+          <a:xfrm>
+            <a:off x="8424672" y="2286000"/>
+            <a:ext cx="3023616" cy="3017520"/>
+          </a:xfrm>
+          <a:prstGeom prst="rect">
+            <a:avLst/>
+          </a:prstGeom>
+          <a:noFill/>
+        </p:spPr>
+        <p:txBody>
+          <a:bodyPr wrap="square" anchor="t" lIns="0" rIns="0" tIns="0" bIns="0">
+            <a:spAutoFit/>
+          </a:bodyPr>
+          <a:lstStyle/>
+          <a:p>
+            <a:pPr algn="l"/>
+            <a:r>
+              <a:rPr sz="1600" b="0" i="0">
+                <a:solidFill>
+                  <a:srgbClr val="14141C"/>
+                </a:solidFill>
+                <a:latin typeface="Geist"/>
+              </a:rPr>
+              <a:t>Would train on more diverse patients, be validated across many hospitals, and keep a dermatologist in the loop before touching a patient.</a:t>
+            </a:r>
+          </a:p>
+        </p:txBody>
+      </p:sp>
+      <p:sp>
+        <p:nvSpPr>
+          <p:cNvPr id="26" name="Rectangle 25"/>
+          <p:cNvSpPr/>
+          <p:nvPr/>
+        </p:nvSpPr>
+        <p:spPr>
+          <a:xfrm>
+            <a:off x="8168640" y="5212080"/>
+            <a:ext cx="3535680" cy="18288"/>
+          </a:xfrm>
+          <a:prstGeom prst="rect">
+            <a:avLst/>
+          </a:prstGeom>
+          <a:solidFill>
+            <a:srgbClr val="E4E1D9"/>
+          </a:solidFill>
+          <a:ln>
+            <a:noFill/>
+          </a:ln>
+          <a:effectLst/>
+        </p:spPr>
+        <p:style>
+          <a:lnRef idx="1">
+            <a:schemeClr val="accent1"/>
+          </a:lnRef>
+          <a:fillRef idx="3">
+            <a:schemeClr val="accent1"/>
+          </a:fillRef>
+          <a:effectRef idx="2">
+            <a:schemeClr val="accent1"/>
+          </a:effectRef>
+          <a:fontRef idx="minor">
+            <a:schemeClr val="lt1"/>
+          </a:fontRef>
+        </p:style>
+        <p:txBody>
+          <a:bodyPr rtlCol="0" anchor="ctr"/>
+          <a:lstStyle/>
+          <a:p>
+            <a:pPr algn="ctr"/>
+          </a:p>
+        </p:txBody>
+      </p:sp>
+      <p:sp>
+        <p:nvSpPr>
+          <p:cNvPr id="27" name="TextBox 26"/>
+          <p:cNvSpPr txBox="1"/>
+          <p:nvPr/>
+        </p:nvSpPr>
+        <p:spPr>
+          <a:xfrm>
+            <a:off x="8424672" y="5349240"/>
+            <a:ext cx="3023616" cy="548640"/>
+          </a:xfrm>
+          <a:prstGeom prst="rect">
+            <a:avLst/>
+          </a:prstGeom>
+          <a:noFill/>
+        </p:spPr>
+        <p:txBody>
+          <a:bodyPr wrap="square" anchor="ctr" lIns="0" rIns="0" tIns="0" bIns="0">
+            <a:spAutoFit/>
+          </a:bodyPr>
+          <a:lstStyle/>
+          <a:p>
+            <a:pPr algn="l"/>
+            <a:r>
+              <a:rPr sz="1500" b="1" i="0">
+                <a:solidFill>
+                  <a:srgbClr val="8A2BE2"/>
+                </a:solidFill>
+                <a:latin typeface="Geist Mono"/>
+              </a:rPr>
+              <a:t>not ready for a patient</a:t>
+            </a:r>
+          </a:p>
+        </p:txBody>
+      </p:sp>
+    </p:spTree>
+  </p:cSld>
+  <p:clrMapOvr>
+    <a:masterClrMapping/>
+  </p:clrMapOvr>
+</p:sld>
+</file>
+
+<file path=ppt/slides/slide21.xml><?xml version="1.0" encoding="utf-8"?>
+<p:sld xmlns:a="http://schemas.openxmlformats.org/drawingml/2006/main" xmlns:p="http://schemas.openxmlformats.org/presentationml/2006/main" xmlns:r="http://schemas.openxmlformats.org/officeDocument/2006/relationships">
+  <p:cSld>
+    <p:spTree>
+      <p:nvGrpSpPr>
+        <p:cNvPr id="1" name=""/>
+        <p:cNvGrpSpPr/>
+        <p:nvPr/>
+      </p:nvGrpSpPr>
+      <p:grpSpPr/>
+      <p:sp>
+        <p:nvSpPr>
+          <p:cNvPr id="2" name="Rectangle 1"/>
+          <p:cNvSpPr/>
+          <p:nvPr/>
+        </p:nvSpPr>
+        <p:spPr>
+          <a:xfrm>
+            <a:off x="0" y="0"/>
+            <a:ext cx="12191695" cy="6858000"/>
+          </a:xfrm>
+          <a:prstGeom prst="rect">
+            <a:avLst/>
+          </a:prstGeom>
+          <a:solidFill>
+            <a:srgbClr val="F6F4EE"/>
+          </a:solidFill>
+          <a:ln>
+            <a:noFill/>
+          </a:ln>
+          <a:effectLst/>
+        </p:spPr>
+        <p:style>
+          <a:lnRef idx="1">
+            <a:schemeClr val="accent1"/>
+          </a:lnRef>
+          <a:fillRef idx="3">
+            <a:schemeClr val="accent1"/>
+          </a:fillRef>
+          <a:effectRef idx="2">
+            <a:schemeClr val="accent1"/>
+          </a:effectRef>
+          <a:fontRef idx="minor">
+            <a:schemeClr val="lt1"/>
+          </a:fontRef>
+        </p:style>
+        <p:txBody>
+          <a:bodyPr rtlCol="0" anchor="ctr"/>
+          <a:lstStyle/>
+          <a:p>
+            <a:pPr algn="ctr"/>
+          </a:p>
+        </p:txBody>
+      </p:sp>
+      <p:sp>
+        <p:nvSpPr>
+          <p:cNvPr id="3" name="Rectangle 2"/>
+          <p:cNvSpPr/>
+          <p:nvPr/>
+        </p:nvSpPr>
+        <p:spPr>
+          <a:xfrm>
+            <a:off x="0" y="0"/>
+            <a:ext cx="201168" cy="6858000"/>
+          </a:xfrm>
+          <a:prstGeom prst="rect">
+            <a:avLst/>
+          </a:prstGeom>
+          <a:solidFill>
+            <a:srgbClr val="40E0D0"/>
+          </a:solidFill>
+          <a:ln>
+            <a:noFill/>
+          </a:ln>
+          <a:effectLst/>
+        </p:spPr>
+        <p:style>
+          <a:lnRef idx="1">
+            <a:schemeClr val="accent1"/>
+          </a:lnRef>
+          <a:fillRef idx="3">
+            <a:schemeClr val="accent1"/>
+          </a:fillRef>
+          <a:effectRef idx="2">
+            <a:schemeClr val="accent1"/>
+          </a:effectRef>
+          <a:fontRef idx="minor">
+            <a:schemeClr val="lt1"/>
+          </a:fontRef>
+        </p:style>
+        <p:txBody>
+          <a:bodyPr rtlCol="0" anchor="ctr"/>
+          <a:lstStyle/>
+          <a:p>
+            <a:pPr algn="ctr"/>
+          </a:p>
+        </p:txBody>
+      </p:sp>
+      <p:sp>
+        <p:nvSpPr>
+          <p:cNvPr id="4" name="TextBox 3"/>
+          <p:cNvSpPr txBox="1"/>
+          <p:nvPr/>
+        </p:nvSpPr>
+        <p:spPr>
+          <a:xfrm>
+            <a:off x="457200" y="274320"/>
+            <a:ext cx="11247120" cy="502920"/>
+          </a:xfrm>
+          <a:prstGeom prst="rect">
+            <a:avLst/>
+          </a:prstGeom>
+          <a:noFill/>
+        </p:spPr>
+        <p:txBody>
+          <a:bodyPr wrap="square" anchor="t" lIns="0" rIns="0" tIns="0" bIns="0">
+            <a:spAutoFit/>
+          </a:bodyPr>
+          <a:lstStyle/>
+          <a:p>
+            <a:pPr algn="l"/>
+            <a:r>
+              <a:rPr sz="2800" b="1" i="0">
+                <a:solidFill>
+                  <a:srgbClr val="14141C"/>
+                </a:solidFill>
+                <a:latin typeface="Geist Mono"/>
+              </a:rPr>
+              <a:t>References</a:t>
+            </a:r>
+          </a:p>
+        </p:txBody>
+      </p:sp>
+      <p:sp>
+        <p:nvSpPr>
+          <p:cNvPr id="5" name="Rectangle 4"/>
+          <p:cNvSpPr/>
+          <p:nvPr/>
+        </p:nvSpPr>
+        <p:spPr>
+          <a:xfrm>
+            <a:off x="457200" y="868680"/>
+            <a:ext cx="11247120" cy="4572"/>
+          </a:xfrm>
+          <a:prstGeom prst="rect">
+            <a:avLst/>
+          </a:prstGeom>
+          <a:solidFill>
+            <a:srgbClr val="DDDDDD"/>
+          </a:solidFill>
+          <a:ln>
+            <a:noFill/>
+          </a:ln>
+          <a:effectLst/>
+        </p:spPr>
+        <p:style>
+          <a:lnRef idx="1">
+            <a:schemeClr val="accent1"/>
+          </a:lnRef>
+          <a:fillRef idx="3">
+            <a:schemeClr val="accent1"/>
+          </a:fillRef>
+          <a:effectRef idx="2">
+            <a:schemeClr val="accent1"/>
+          </a:effectRef>
+          <a:fontRef idx="minor">
+            <a:schemeClr val="lt1"/>
+          </a:fontRef>
+        </p:style>
+        <p:txBody>
+          <a:bodyPr rtlCol="0" anchor="ctr"/>
+          <a:lstStyle/>
+          <a:p>
+            <a:pPr algn="ctr"/>
+          </a:p>
+        </p:txBody>
+      </p:sp>
+      <p:sp>
+        <p:nvSpPr>
+          <p:cNvPr id="6" name="TextBox 5"/>
+          <p:cNvSpPr txBox="1"/>
+          <p:nvPr/>
+        </p:nvSpPr>
+        <p:spPr>
+          <a:xfrm>
+            <a:off x="457200" y="6510528"/>
+            <a:ext cx="11247120" cy="274320"/>
+          </a:xfrm>
+          <a:prstGeom prst="rect">
+            <a:avLst/>
+          </a:prstGeom>
+          <a:noFill/>
+        </p:spPr>
+        <p:txBody>
+          <a:bodyPr wrap="square" anchor="t" lIns="0" rIns="0" tIns="0" bIns="0">
+            <a:spAutoFit/>
+          </a:bodyPr>
+          <a:lstStyle/>
+          <a:p>
+            <a:pPr algn="l"/>
+            <a:r>
+              <a:rPr sz="900" b="0" i="0">
+                <a:solidFill>
+                  <a:srgbClr val="555560"/>
+                </a:solidFill>
+                <a:latin typeface="Geist Mono"/>
+              </a:rPr>
+              <a:t>Jinchi Wei  ·  Outset  ·  Screening skin spots for melanoma  ·  2026-07-08</a:t>
+            </a:r>
+          </a:p>
+        </p:txBody>
+      </p:sp>
+      <p:sp>
+        <p:nvSpPr>
+          <p:cNvPr id="7" name="TextBox 6"/>
+          <p:cNvSpPr txBox="1"/>
+          <p:nvPr/>
+        </p:nvSpPr>
+        <p:spPr>
+          <a:xfrm>
+            <a:off x="457200" y="1097280"/>
+            <a:ext cx="5349240" cy="365760"/>
+          </a:xfrm>
+          <a:prstGeom prst="rect">
+            <a:avLst/>
+          </a:prstGeom>
+          <a:noFill/>
+        </p:spPr>
+        <p:txBody>
+          <a:bodyPr wrap="square" anchor="t" lIns="0" rIns="0" tIns="0" bIns="0">
+            <a:spAutoFit/>
+          </a:bodyPr>
+          <a:lstStyle/>
+          <a:p>
+            <a:pPr algn="l"/>
+            <a:r>
+              <a:rPr sz="1600" b="1" i="0">
+                <a:solidFill>
+                  <a:srgbClr val="40E0D0"/>
+                </a:solidFill>
+                <a:latin typeface="Geist Mono"/>
+              </a:rPr>
+              <a:t>LANDMARKS &amp; DATA</a:t>
+            </a:r>
+          </a:p>
+        </p:txBody>
+      </p:sp>
+      <p:sp>
+        <p:nvSpPr>
+          <p:cNvPr id="8" name="TextBox 7"/>
+          <p:cNvSpPr txBox="1"/>
+          <p:nvPr/>
+        </p:nvSpPr>
+        <p:spPr>
+          <a:xfrm>
+            <a:off x="457200" y="1600200"/>
+            <a:ext cx="5349240" cy="4571999"/>
+          </a:xfrm>
+          <a:prstGeom prst="rect">
+            <a:avLst/>
+          </a:prstGeom>
+          <a:noFill/>
+        </p:spPr>
+        <p:txBody>
+          <a:bodyPr wrap="square" anchor="t" lIns="0" rIns="0" tIns="0" bIns="0">
+            <a:spAutoFit/>
+          </a:bodyPr>
+          <a:lstStyle/>
+          <a:p>
+            <a:pPr algn="l"/>
+            <a:r>
+              <a:rPr sz="1450" b="0" i="0">
+                <a:solidFill>
+                  <a:srgbClr val="14141C"/>
+                </a:solidFill>
+                <a:latin typeface="Geist"/>
+              </a:rPr>
+              <a:t>[1] Esteva et al. 2017, Nature -- one network matched 21 dermatologists.
+[2] Tschandl, Rosendahl &amp; Kittler 2018, Sci Data -- the HAM10000 dataset.
+[3] Haenssle et al. 2018, Ann Oncol -- CNN vs 58 dermatologists on melanoma.
+[4] Tschandl et al. 2019, Lancet Oncol -- machines vs human readers, international.</a:t>
+            </a:r>
+          </a:p>
+        </p:txBody>
+      </p:sp>
+      <p:sp>
+        <p:nvSpPr>
+          <p:cNvPr id="9" name="TextBox 8"/>
+          <p:cNvSpPr txBox="1"/>
+          <p:nvPr/>
+        </p:nvSpPr>
+        <p:spPr>
+          <a:xfrm>
+            <a:off x="6355080" y="1097280"/>
+            <a:ext cx="5349240" cy="365760"/>
+          </a:xfrm>
+          <a:prstGeom prst="rect">
+            <a:avLst/>
+          </a:prstGeom>
+          <a:noFill/>
+        </p:spPr>
+        <p:txBody>
+          <a:bodyPr wrap="square" anchor="t" lIns="0" rIns="0" tIns="0" bIns="0">
+            <a:spAutoFit/>
+          </a:bodyPr>
+          <a:lstStyle/>
+          <a:p>
+            <a:pPr algn="l"/>
+            <a:r>
+              <a:rPr sz="1600" b="1" i="0">
+                <a:solidFill>
+                  <a:srgbClr val="FF1493"/>
+                </a:solidFill>
+                <a:latin typeface="Geist Mono"/>
+              </a:rPr>
+              <a:t>METHODS &amp; PRIMERS</a:t>
+            </a:r>
+          </a:p>
+        </p:txBody>
+      </p:sp>
+      <p:sp>
+        <p:nvSpPr>
+          <p:cNvPr id="10" name="TextBox 9"/>
+          <p:cNvSpPr txBox="1"/>
+          <p:nvPr/>
+        </p:nvSpPr>
+        <p:spPr>
+          <a:xfrm>
+            <a:off x="6355080" y="1600200"/>
+            <a:ext cx="5349240" cy="4571999"/>
+          </a:xfrm>
+          <a:prstGeom prst="rect">
+            <a:avLst/>
+          </a:prstGeom>
+          <a:noFill/>
+        </p:spPr>
+        <p:txBody>
+          <a:bodyPr wrap="square" anchor="t" lIns="0" rIns="0" tIns="0" bIns="0">
+            <a:spAutoFit/>
+          </a:bodyPr>
+          <a:lstStyle/>
+          <a:p>
+            <a:pPr algn="l"/>
+            <a:r>
+              <a:rPr sz="1450" b="0" i="0">
+                <a:solidFill>
+                  <a:srgbClr val="14141C"/>
+                </a:solidFill>
+                <a:latin typeface="Geist"/>
+              </a:rPr>
+              <a:t>[5] Kim et al. 2022, BMC Med Imaging -- transfer learning for medical images.
+[6] Trevethan 2017, Front Public Health -- sensitivity, specificity, and their pitfalls.
+[7] Wei et al. 2024, Front Med -- AI and skin cancer: how well it works and the gaps.</a:t>
+            </a:r>
+          </a:p>
+        </p:txBody>
+      </p:sp>
+    </p:spTree>
+  </p:cSld>
+  <p:clrMapOvr>
+    <a:masterClrMapping/>
+  </p:clrMapOvr>
+</p:sld>
+</file>
+
+<file path=ppt/slides/slide22.xml><?xml version="1.0" encoding="utf-8"?>
+<p:sld xmlns:a="http://schemas.openxmlformats.org/drawingml/2006/main" xmlns:p="http://schemas.openxmlformats.org/presentationml/2006/main" xmlns:r="http://schemas.openxmlformats.org/officeDocument/2006/relationships">
+  <p:cSld>
+    <p:spTree>
+      <p:nvGrpSpPr>
+        <p:cNvPr id="1" name=""/>
+        <p:cNvGrpSpPr/>
+        <p:nvPr/>
+      </p:nvGrpSpPr>
+      <p:grpSpPr/>
+      <p:sp>
+        <p:nvSpPr>
+          <p:cNvPr id="2" name="Rectangle 1"/>
+          <p:cNvSpPr/>
+          <p:nvPr/>
+        </p:nvSpPr>
+        <p:spPr>
+          <a:xfrm>
+            <a:off x="0" y="0"/>
+            <a:ext cx="12191695" cy="6858000"/>
+          </a:xfrm>
+          <a:prstGeom prst="rect">
+            <a:avLst/>
+          </a:prstGeom>
+          <a:solidFill>
+            <a:srgbClr val="F6F4EE"/>
+          </a:solidFill>
+          <a:ln>
+            <a:noFill/>
+          </a:ln>
+          <a:effectLst/>
+        </p:spPr>
+        <p:style>
+          <a:lnRef idx="1">
+            <a:schemeClr val="accent1"/>
+          </a:lnRef>
+          <a:fillRef idx="3">
+            <a:schemeClr val="accent1"/>
+          </a:fillRef>
+          <a:effectRef idx="2">
+            <a:schemeClr val="accent1"/>
+          </a:effectRef>
+          <a:fontRef idx="minor">
+            <a:schemeClr val="lt1"/>
+          </a:fontRef>
+        </p:style>
+        <p:txBody>
+          <a:bodyPr rtlCol="0" anchor="ctr"/>
+          <a:lstStyle/>
+          <a:p>
+            <a:pPr algn="ctr"/>
+          </a:p>
+        </p:txBody>
+      </p:sp>
+      <p:sp>
+        <p:nvSpPr>
+          <p:cNvPr id="3" name="Rectangle 2"/>
+          <p:cNvSpPr/>
+          <p:nvPr/>
+        </p:nvSpPr>
+        <p:spPr>
+          <a:xfrm>
+            <a:off x="0" y="0"/>
+            <a:ext cx="201168" cy="6858000"/>
+          </a:xfrm>
+          <a:prstGeom prst="rect">
+            <a:avLst/>
+          </a:prstGeom>
+          <a:solidFill>
+            <a:srgbClr val="40E0D0"/>
+          </a:solidFill>
+          <a:ln>
+            <a:noFill/>
+          </a:ln>
+          <a:effectLst/>
+        </p:spPr>
+        <p:style>
+          <a:lnRef idx="1">
+            <a:schemeClr val="accent1"/>
+          </a:lnRef>
+          <a:fillRef idx="3">
+            <a:schemeClr val="accent1"/>
+          </a:fillRef>
+          <a:effectRef idx="2">
+            <a:schemeClr val="accent1"/>
+          </a:effectRef>
+          <a:fontRef idx="minor">
+            <a:schemeClr val="lt1"/>
+          </a:fontRef>
+        </p:style>
+        <p:txBody>
+          <a:bodyPr rtlCol="0" anchor="ctr"/>
+          <a:lstStyle/>
+          <a:p>
+            <a:pPr algn="ctr"/>
+          </a:p>
+        </p:txBody>
+      </p:sp>
+      <p:sp>
+        <p:nvSpPr>
+          <p:cNvPr id="4" name="TextBox 3"/>
+          <p:cNvSpPr txBox="1"/>
+          <p:nvPr/>
+        </p:nvSpPr>
+        <p:spPr>
+          <a:xfrm>
+            <a:off x="457200" y="274320"/>
+            <a:ext cx="11247120" cy="502920"/>
+          </a:xfrm>
+          <a:prstGeom prst="rect">
+            <a:avLst/>
+          </a:prstGeom>
+          <a:noFill/>
+        </p:spPr>
+        <p:txBody>
+          <a:bodyPr wrap="square" anchor="t" lIns="0" rIns="0" tIns="0" bIns="0">
+            <a:spAutoFit/>
+          </a:bodyPr>
+          <a:lstStyle/>
+          <a:p>
+            <a:pPr algn="l"/>
+            <a:r>
+              <a:rPr sz="2800" b="1" i="0">
+                <a:solidFill>
+                  <a:srgbClr val="14141C"/>
+                </a:solidFill>
+                <a:latin typeface="Geist Mono"/>
+              </a:rPr>
+              <a:t>The honest bottom line</a:t>
+            </a:r>
+          </a:p>
+        </p:txBody>
+      </p:sp>
+      <p:sp>
+        <p:nvSpPr>
+          <p:cNvPr id="5" name="Rectangle 4"/>
+          <p:cNvSpPr/>
+          <p:nvPr/>
+        </p:nvSpPr>
+        <p:spPr>
+          <a:xfrm>
+            <a:off x="457200" y="868680"/>
+            <a:ext cx="11247120" cy="4572"/>
+          </a:xfrm>
+          <a:prstGeom prst="rect">
+            <a:avLst/>
+          </a:prstGeom>
+          <a:solidFill>
+            <a:srgbClr val="DDDDDD"/>
+          </a:solidFill>
+          <a:ln>
+            <a:noFill/>
+          </a:ln>
+          <a:effectLst/>
+        </p:spPr>
+        <p:style>
+          <a:lnRef idx="1">
+            <a:schemeClr val="accent1"/>
+          </a:lnRef>
+          <a:fillRef idx="3">
+            <a:schemeClr val="accent1"/>
+          </a:fillRef>
+          <a:effectRef idx="2">
+            <a:schemeClr val="accent1"/>
+          </a:effectRef>
+          <a:fontRef idx="minor">
+            <a:schemeClr val="lt1"/>
+          </a:fontRef>
+        </p:style>
+        <p:txBody>
+          <a:bodyPr rtlCol="0" anchor="ctr"/>
+          <a:lstStyle/>
+          <a:p>
+            <a:pPr algn="ctr"/>
+          </a:p>
+        </p:txBody>
+      </p:sp>
+      <p:sp>
+        <p:nvSpPr>
+          <p:cNvPr id="6" name="TextBox 5"/>
+          <p:cNvSpPr txBox="1"/>
+          <p:nvPr/>
+        </p:nvSpPr>
+        <p:spPr>
+          <a:xfrm>
+            <a:off x="457200" y="6510528"/>
+            <a:ext cx="11247120" cy="274320"/>
+          </a:xfrm>
+          <a:prstGeom prst="rect">
+            <a:avLst/>
+          </a:prstGeom>
+          <a:noFill/>
+        </p:spPr>
+        <p:txBody>
+          <a:bodyPr wrap="square" anchor="t" lIns="0" rIns="0" tIns="0" bIns="0">
+            <a:spAutoFit/>
+          </a:bodyPr>
+          <a:lstStyle/>
+          <a:p>
+            <a:pPr algn="l"/>
+            <a:r>
+              <a:rPr sz="900" b="0" i="0">
+                <a:solidFill>
+                  <a:srgbClr val="555560"/>
+                </a:solidFill>
+                <a:latin typeface="Geist Mono"/>
+              </a:rPr>
+              <a:t>Jinchi Wei  ·  Outset  ·  Screening skin spots for melanoma  ·  2026-07-08</a:t>
+            </a:r>
+          </a:p>
+        </p:txBody>
+      </p:sp>
+      <p:sp>
+        <p:nvSpPr>
+          <p:cNvPr id="7" name="TextBox 6"/>
+          <p:cNvSpPr txBox="1"/>
+          <p:nvPr/>
+        </p:nvSpPr>
+        <p:spPr>
+          <a:xfrm>
+            <a:off x="457200" y="2302459"/>
+            <a:ext cx="11247120" cy="1005840"/>
+          </a:xfrm>
+          <a:prstGeom prst="rect">
+            <a:avLst/>
+          </a:prstGeom>
+          <a:noFill/>
+        </p:spPr>
+        <p:txBody>
+          <a:bodyPr wrap="square" anchor="t" lIns="0" rIns="0" tIns="0" bIns="0">
+            <a:spAutoFit/>
+          </a:bodyPr>
+          <a:lstStyle/>
+          <a:p>
+            <a:pPr algn="ctr"/>
+            <a:r>
+              <a:rPr sz="3200" b="1" i="0">
+                <a:solidFill>
+                  <a:srgbClr val="40E0D0"/>
+                </a:solidFill>
+                <a:latin typeface="Geist Mono"/>
+              </a:rPr>
+              <a:t>A screen earns trust by catching the dangerous case.</a:t>
+            </a:r>
+          </a:p>
+        </p:txBody>
+      </p:sp>
+      <p:sp>
+        <p:nvSpPr>
+          <p:cNvPr id="8" name="Rectangle 7"/>
+          <p:cNvSpPr/>
+          <p:nvPr/>
+        </p:nvSpPr>
+        <p:spPr>
+          <a:xfrm>
+            <a:off x="4983480" y="3582619"/>
+            <a:ext cx="2194560" cy="45720"/>
+          </a:xfrm>
+          <a:prstGeom prst="rect">
+            <a:avLst/>
+          </a:prstGeom>
+          <a:solidFill>
+            <a:srgbClr val="40E0D0"/>
+          </a:solidFill>
+          <a:ln>
+            <a:noFill/>
+          </a:ln>
+          <a:effectLst/>
+        </p:spPr>
+        <p:style>
+          <a:lnRef idx="1">
+            <a:schemeClr val="accent1"/>
+          </a:lnRef>
+          <a:fillRef idx="3">
+            <a:schemeClr val="accent1"/>
+          </a:fillRef>
+          <a:effectRef idx="2">
+            <a:schemeClr val="accent1"/>
+          </a:effectRef>
+          <a:fontRef idx="minor">
+            <a:schemeClr val="lt1"/>
+          </a:fontRef>
+        </p:style>
+        <p:txBody>
+          <a:bodyPr rtlCol="0" anchor="ctr"/>
+          <a:lstStyle/>
+          <a:p>
+            <a:pPr algn="ctr"/>
+          </a:p>
+        </p:txBody>
+      </p:sp>
+      <p:sp>
+        <p:nvSpPr>
+          <p:cNvPr id="9" name="TextBox 8"/>
+          <p:cNvSpPr txBox="1"/>
+          <p:nvPr/>
+        </p:nvSpPr>
+        <p:spPr>
+          <a:xfrm>
+            <a:off x="1371600" y="4085539"/>
+            <a:ext cx="9418320" cy="1097280"/>
+          </a:xfrm>
+          <a:prstGeom prst="rect">
+            <a:avLst/>
+          </a:prstGeom>
+          <a:noFill/>
+        </p:spPr>
+        <p:txBody>
+          <a:bodyPr wrap="square" anchor="t" lIns="0" rIns="0" tIns="0" bIns="0">
+            <a:spAutoFit/>
+          </a:bodyPr>
+          <a:lstStyle/>
+          <a:p>
+            <a:pPr algn="ctr"/>
+            <a:r>
+              <a:rPr sz="1900" b="0" i="0">
+                <a:solidFill>
+                  <a:srgbClr val="14141C"/>
+                </a:solidFill>
+                <a:latin typeface="Geist"/>
+              </a:rPr>
+              <a:t>Tune the threshold on purpose, check who it works for -- then use a validated tool and a dermatologist to actually screen a patient.</a:t>
+            </a:r>
+          </a:p>
+        </p:txBody>
+      </p:sp>
+    </p:spTree>
+  </p:cSld>
+  <p:clrMapOvr>
+    <a:masterClrMapping/>
+  </p:clrMapOvr>
+</p:sld>
+</file>
+
+<file path=ppt/slides/slide23.xml><?xml version="1.0" encoding="utf-8"?>
+<p:sld xmlns:a="http://schemas.openxmlformats.org/drawingml/2006/main" xmlns:p="http://schemas.openxmlformats.org/presentationml/2006/main" xmlns:r="http://schemas.openxmlformats.org/officeDocument/2006/relationships">
+  <p:cSld>
+    <p:bg>
+      <p:bgPr>
+        <a:solidFill>
+          <a:srgbClr val="0E1A35"/>
+        </a:solidFill>
+        <a:effectLst/>
+      </p:bgPr>
+    </p:bg>
+    <p:spTree>
+      <p:nvGrpSpPr>
+        <p:cNvPr id="1" name=""/>
+        <p:cNvGrpSpPr/>
+        <p:nvPr/>
+      </p:nvGrpSpPr>
+      <p:grpSpPr/>
+      <p:sp>
+        <p:nvSpPr>
+          <p:cNvPr id="2" name="Rectangle 1"/>
+          <p:cNvSpPr/>
+          <p:nvPr/>
+        </p:nvSpPr>
+        <p:spPr>
+          <a:xfrm>
+            <a:off x="0" y="0"/>
+            <a:ext cx="12191695" cy="6858000"/>
+          </a:xfrm>
+          <a:prstGeom prst="rect">
+            <a:avLst/>
+          </a:prstGeom>
+          <a:solidFill>
+            <a:srgbClr val="0E1A35"/>
+          </a:solidFill>
+          <a:ln>
+            <a:noFill/>
+          </a:ln>
+          <a:effectLst/>
+        </p:spPr>
+        <p:style>
+          <a:lnRef idx="1">
+            <a:schemeClr val="accent1"/>
+          </a:lnRef>
+          <a:fillRef idx="3">
+            <a:schemeClr val="accent1"/>
+          </a:fillRef>
+          <a:effectRef idx="2">
+            <a:schemeClr val="accent1"/>
+          </a:effectRef>
+          <a:fontRef idx="minor">
+            <a:schemeClr val="lt1"/>
+          </a:fontRef>
+        </p:style>
+        <p:txBody>
+          <a:bodyPr rtlCol="0" anchor="ctr"/>
+          <a:lstStyle/>
+          <a:p>
+            <a:pPr algn="ctr"/>
+          </a:p>
+        </p:txBody>
+      </p:sp>
+      <p:sp>
+        <p:nvSpPr>
+          <p:cNvPr id="3" name="Rectangle 2"/>
+          <p:cNvSpPr/>
+          <p:nvPr/>
+        </p:nvSpPr>
+        <p:spPr>
+          <a:xfrm>
+            <a:off x="0" y="0"/>
+            <a:ext cx="731520" cy="6858000"/>
+          </a:xfrm>
+          <a:prstGeom prst="rect">
+            <a:avLst/>
+          </a:prstGeom>
+          <a:solidFill>
+            <a:srgbClr val="40E0D0"/>
+          </a:solidFill>
+          <a:ln>
+            <a:noFill/>
+          </a:ln>
+          <a:effectLst/>
+        </p:spPr>
+        <p:style>
+          <a:lnRef idx="1">
+            <a:schemeClr val="accent1"/>
+          </a:lnRef>
+          <a:fillRef idx="3">
+            <a:schemeClr val="accent1"/>
+          </a:fillRef>
+          <a:effectRef idx="2">
+            <a:schemeClr val="accent1"/>
+          </a:effectRef>
+          <a:fontRef idx="minor">
+            <a:schemeClr val="lt1"/>
+          </a:fontRef>
+        </p:style>
+        <p:txBody>
+          <a:bodyPr rtlCol="0" anchor="ctr"/>
+          <a:lstStyle/>
+          <a:p>
+            <a:pPr algn="ctr"/>
+          </a:p>
+        </p:txBody>
+      </p:sp>
+      <p:sp>
+        <p:nvSpPr>
+          <p:cNvPr id="4" name="Rectangle 3"/>
+          <p:cNvSpPr/>
+          <p:nvPr/>
+        </p:nvSpPr>
+        <p:spPr>
+          <a:xfrm>
+            <a:off x="731520" y="0"/>
+            <a:ext cx="228600" cy="6858000"/>
+          </a:xfrm>
+          <a:prstGeom prst="rect">
+            <a:avLst/>
+          </a:prstGeom>
+          <a:solidFill>
+            <a:srgbClr val="FF1493"/>
+          </a:solidFill>
+          <a:ln>
+            <a:noFill/>
+          </a:ln>
+          <a:effectLst/>
+        </p:spPr>
+        <p:style>
+          <a:lnRef idx="1">
+            <a:schemeClr val="accent1"/>
+          </a:lnRef>
+          <a:fillRef idx="3">
+            <a:schemeClr val="accent1"/>
+          </a:fillRef>
+          <a:effectRef idx="2">
+            <a:schemeClr val="accent1"/>
+          </a:effectRef>
+          <a:fontRef idx="minor">
+            <a:schemeClr val="lt1"/>
+          </a:fontRef>
+        </p:style>
+        <p:txBody>
+          <a:bodyPr rtlCol="0" anchor="ctr"/>
+          <a:lstStyle/>
+          <a:p>
+            <a:pPr algn="ctr"/>
+          </a:p>
+        </p:txBody>
+      </p:sp>
+      <p:sp>
+        <p:nvSpPr>
+          <p:cNvPr id="5" name="TextBox 4"/>
+          <p:cNvSpPr txBox="1"/>
+          <p:nvPr/>
+        </p:nvSpPr>
+        <p:spPr>
+          <a:xfrm>
+            <a:off x="1188720" y="1417320"/>
+            <a:ext cx="10058400" cy="1280160"/>
+          </a:xfrm>
+          <a:prstGeom prst="rect">
+            <a:avLst/>
+          </a:prstGeom>
+          <a:noFill/>
+        </p:spPr>
+        <p:txBody>
+          <a:bodyPr wrap="square" anchor="t" lIns="0" rIns="0" tIns="0" bIns="0">
+            <a:spAutoFit/>
+          </a:bodyPr>
+          <a:lstStyle/>
+          <a:p>
+            <a:pPr algn="ctr"/>
+            <a:r>
+              <a:rPr sz="6000" b="1" i="0">
+                <a:solidFill>
+                  <a:srgbClr val="FF1493"/>
+                </a:solidFill>
+                <a:latin typeface="Geist Mono"/>
+              </a:rPr>
+              <a:t>Thank You</a:t>
+            </a:r>
+          </a:p>
+        </p:txBody>
+      </p:sp>
+      <p:sp>
+        <p:nvSpPr>
+          <p:cNvPr id="6" name="TextBox 5"/>
+          <p:cNvSpPr txBox="1"/>
+          <p:nvPr/>
+        </p:nvSpPr>
+        <p:spPr>
+          <a:xfrm>
+            <a:off x="1188720" y="3246120"/>
+            <a:ext cx="10058400" cy="640080"/>
+          </a:xfrm>
+          <a:prstGeom prst="rect">
+            <a:avLst/>
+          </a:prstGeom>
+          <a:noFill/>
+        </p:spPr>
+        <p:txBody>
+          <a:bodyPr wrap="square" anchor="t" lIns="0" rIns="0" tIns="0" bIns="0">
+            <a:spAutoFit/>
+          </a:bodyPr>
+          <a:lstStyle/>
+          <a:p>
+            <a:pPr algn="ctr"/>
+            <a:r>
+              <a:rPr sz="3000" b="0" i="0">
+                <a:solidFill>
+                  <a:srgbClr val="40E0D0"/>
+                </a:solidFill>
+                <a:latin typeface="Noto Sans CJK TC"/>
+              </a:rPr>
+              <a:t>魏晉祺</a:t>
+            </a:r>
+          </a:p>
+        </p:txBody>
+      </p:sp>
+      <p:sp>
+        <p:nvSpPr>
+          <p:cNvPr id="7" name="TextBox 6"/>
+          <p:cNvSpPr txBox="1"/>
+          <p:nvPr/>
+        </p:nvSpPr>
+        <p:spPr>
+          <a:xfrm>
+            <a:off x="1188720" y="3922776"/>
+            <a:ext cx="10058400" cy="457200"/>
+          </a:xfrm>
+          <a:prstGeom prst="rect">
+            <a:avLst/>
+          </a:prstGeom>
+          <a:noFill/>
+        </p:spPr>
+        <p:txBody>
+          <a:bodyPr wrap="square" anchor="t" lIns="0" rIns="0" tIns="0" bIns="0">
+            <a:spAutoFit/>
+          </a:bodyPr>
+          <a:lstStyle/>
+          <a:p>
+            <a:pPr algn="ctr"/>
+            <a:r>
+              <a:rPr sz="2000" b="1" i="0">
+                <a:solidFill>
+                  <a:srgbClr val="40E0D0"/>
+                </a:solidFill>
+                <a:latin typeface="Geist Mono"/>
+              </a:rPr>
+              <a:t>Jinchi Wei</a:t>
+            </a:r>
+          </a:p>
+        </p:txBody>
+      </p:sp>
+      <p:sp>
+        <p:nvSpPr>
+          <p:cNvPr id="8" name="TextBox 7"/>
+          <p:cNvSpPr txBox="1"/>
+          <p:nvPr/>
+        </p:nvSpPr>
+        <p:spPr>
+          <a:xfrm>
+            <a:off x="1188720" y="4398264"/>
+            <a:ext cx="10058400" cy="365760"/>
+          </a:xfrm>
+          <a:prstGeom prst="rect">
+            <a:avLst/>
+          </a:prstGeom>
+          <a:noFill/>
+        </p:spPr>
+        <p:txBody>
+          <a:bodyPr wrap="square" anchor="t" lIns="0" rIns="0" tIns="0" bIns="0">
+            <a:spAutoFit/>
+          </a:bodyPr>
+          <a:lstStyle/>
+          <a:p>
+            <a:pPr algn="ctr"/>
+            <a:r>
+              <a:rPr sz="1300" b="0" i="0">
+                <a:solidFill>
+                  <a:srgbClr val="FFFFFF"/>
+                </a:solidFill>
+                <a:latin typeface="Geist"/>
+              </a:rPr>
+              <a:t>Outset</a:t>
+            </a:r>
+          </a:p>
+        </p:txBody>
+      </p:sp>
+      <p:sp>
+        <p:nvSpPr>
+          <p:cNvPr id="9" name="TextBox 8"/>
+          <p:cNvSpPr txBox="1"/>
+          <p:nvPr/>
+        </p:nvSpPr>
+        <p:spPr>
+          <a:xfrm>
+            <a:off x="1188720" y="4837176"/>
+            <a:ext cx="10058400" cy="365760"/>
+          </a:xfrm>
+          <a:prstGeom prst="rect">
+            <a:avLst/>
+          </a:prstGeom>
+          <a:noFill/>
+        </p:spPr>
+        <p:txBody>
+          <a:bodyPr wrap="square" anchor="t" lIns="0" rIns="0" tIns="0" bIns="0">
+            <a:spAutoFit/>
+          </a:bodyPr>
+          <a:lstStyle/>
+          <a:p>
+            <a:pPr algn="ctr"/>
+            <a:r>
+              <a:rPr sz="1600" b="0" i="0">
+                <a:solidFill>
+                  <a:srgbClr val="F0C840"/>
+                </a:solidFill>
+                <a:latin typeface="Geist Mono"/>
+              </a:rPr>
+              <a:t>jinchikwei@gmail.com</a:t>
+            </a:r>
+          </a:p>
+        </p:txBody>
+      </p:sp>
+      <p:pic>
+        <p:nvPicPr>
+          <p:cNvPr id="10" name="Picture 9" descr="meng.png"/>
+          <p:cNvPicPr>
+            <a:picLocks noChangeAspect="1"/>
+          </p:cNvPicPr>
+          <p:nvPr/>
+        </p:nvPicPr>
+        <p:blipFill>
+          <a:blip r:embed="rId2"/>
+          <a:stretch>
+            <a:fillRect/>
+          </a:stretch>
+        </p:blipFill>
+        <p:spPr>
+          <a:xfrm>
+            <a:off x="10086477" y="5486400"/>
+            <a:ext cx="690906" cy="914400"/>
+          </a:xfrm>
+          <a:prstGeom prst="rect">
+            <a:avLst/>
+          </a:prstGeom>
+        </p:spPr>
+      </p:pic>
+      <p:pic>
+        <p:nvPicPr>
+          <p:cNvPr id="11" name="Picture 10" descr="xiang.png"/>
+          <p:cNvPicPr>
+            <a:picLocks noChangeAspect="1"/>
+          </p:cNvPicPr>
+          <p:nvPr/>
+        </p:nvPicPr>
+        <p:blipFill>
+          <a:blip r:embed="rId3"/>
+          <a:stretch>
+            <a:fillRect/>
+          </a:stretch>
+        </p:blipFill>
+        <p:spPr>
+          <a:xfrm>
+            <a:off x="10978551" y="5486400"/>
+            <a:ext cx="755944" cy="914400"/>
+          </a:xfrm>
+          <a:prstGeom prst="rect">
+            <a:avLst/>
+          </a:prstGeom>
+        </p:spPr>
+      </p:pic>
     </p:spTree>
   </p:cSld>
   <p:clrMapOvr>
@@ -9227,7 +13935,7 @@
                 </a:solidFill>
                 <a:latin typeface="Geist Mono"/>
               </a:rPr>
-              <a:t>Two mistakes, and only one of them can be fatal</a:t>
+              <a:t>The spot that could be melanoma</a:t>
             </a:r>
           </a:p>
         </p:txBody>
@@ -9306,14 +14014,14 @@
                 </a:solidFill>
                 <a:latin typeface="Geist Mono"/>
               </a:rPr>
-              <a:t>Jinchi Wei  ·  Outset  ·  Never miss a melanoma  ·  2026-07-08</a:t>
+              <a:t>Jinchi Wei  ·  Outset  ·  Screening skin spots for melanoma  ·  2026-07-08</a:t>
             </a:r>
           </a:p>
         </p:txBody>
       </p:sp>
       <p:pic>
         <p:nvPicPr>
-          <p:cNvPr id="7" name="Picture 6" descr="intro_cost_of_a_miss.png"/>
+          <p:cNvPr id="7" name="Picture 6" descr="intro_dermatoscope.png"/>
           <p:cNvPicPr>
             <a:picLocks noChangeAspect="1"/>
           </p:cNvPicPr>
@@ -9327,8 +14035,8 @@
         </p:blipFill>
         <p:spPr>
           <a:xfrm>
-            <a:off x="457200" y="1367105"/>
-            <a:ext cx="5623560" cy="4443829"/>
+            <a:off x="2294166" y="1051560"/>
+            <a:ext cx="7573187" cy="4754879"/>
           </a:xfrm>
           <a:prstGeom prst="rect">
             <a:avLst/>
@@ -9337,58 +14045,14 @@
       </p:pic>
       <p:sp>
         <p:nvSpPr>
-          <p:cNvPr id="8" name="Rectangle 7"/>
-          <p:cNvSpPr/>
-          <p:nvPr/>
-        </p:nvSpPr>
-        <p:spPr>
-          <a:xfrm>
-            <a:off x="6492240" y="1216152"/>
-            <a:ext cx="73152" cy="4553712"/>
-          </a:xfrm>
-          <a:prstGeom prst="rect">
-            <a:avLst/>
-          </a:prstGeom>
-          <a:solidFill>
-            <a:srgbClr val="40E0D0"/>
-          </a:solidFill>
-          <a:ln>
-            <a:noFill/>
-          </a:ln>
-          <a:effectLst/>
-        </p:spPr>
-        <p:style>
-          <a:lnRef idx="1">
-            <a:schemeClr val="accent1"/>
-          </a:lnRef>
-          <a:fillRef idx="3">
-            <a:schemeClr val="accent1"/>
-          </a:fillRef>
-          <a:effectRef idx="2">
-            <a:schemeClr val="accent1"/>
-          </a:effectRef>
-          <a:fontRef idx="minor">
-            <a:schemeClr val="lt1"/>
-          </a:fontRef>
-        </p:style>
-        <p:txBody>
-          <a:bodyPr rtlCol="0" anchor="ctr"/>
-          <a:lstStyle/>
-          <a:p>
-            <a:pPr algn="ctr"/>
-          </a:p>
-        </p:txBody>
-      </p:sp>
-      <p:sp>
-        <p:nvSpPr>
-          <p:cNvPr id="9" name="TextBox 8"/>
+          <p:cNvPr id="8" name="TextBox 7"/>
           <p:cNvSpPr txBox="1"/>
           <p:nvPr/>
         </p:nvSpPr>
         <p:spPr>
           <a:xfrm>
-            <a:off x="6766560" y="1097280"/>
-            <a:ext cx="4901184" cy="4800599"/>
+            <a:off x="1371600" y="5897879"/>
+            <a:ext cx="9418320" cy="457200"/>
           </a:xfrm>
           <a:prstGeom prst="rect">
             <a:avLst/>
@@ -9396,20 +14060,20 @@
           <a:noFill/>
         </p:spPr>
         <p:txBody>
-          <a:bodyPr wrap="square" anchor="ctr" lIns="0" rIns="0" tIns="0" bIns="0">
+          <a:bodyPr wrap="square" anchor="t" lIns="0" rIns="0" tIns="0" bIns="0">
             <a:spAutoFit/>
           </a:bodyPr>
           <a:lstStyle/>
           <a:p>
-            <a:pPr algn="l"/>
-            <a:r>
-              <a:rPr sz="1700" b="0" i="0">
+            <a:pPr algn="ctr"/>
+            <a:r>
+              <a:rPr sz="1400" b="0" i="1">
                 <a:solidFill>
                   <a:srgbClr val="14141C"/>
                 </a:solidFill>
                 <a:latin typeface="Geist"/>
               </a:rPr>
-              <a:t>Dermatology-AI looks at a photo of a skin spot and estimates how likely it is to be cancer, and landmark studies showed a neural network can match or beat dermatologists at exactly this task (Esteva 2017, Haenssle 2018). But for a screening tool the goal is not to be right on average -- it is to never wave a real melanoma through as harmless, because that missed cancer is the one mistake that can kill.</a:t>
+              <a:t>A dermatoscope magnifies the spot; the screen must sort seven look-alikes and never wave the melanoma through.</a:t>
             </a:r>
           </a:p>
         </p:txBody>
@@ -9544,13 +14208,13 @@
           <a:p>
             <a:pPr algn="l"/>
             <a:r>
-              <a:rPr sz="2600" b="1" i="0">
+              <a:rPr sz="2800" b="1" i="0">
                 <a:solidFill>
                   <a:srgbClr val="14141C"/>
                 </a:solidFill>
                 <a:latin typeface="Geist Mono"/>
               </a:rPr>
-              <a:t>Screening tunes one dial: sensitivity versus specificity</a:t>
+              <a:t>Why a miss is deadly</a:t>
             </a:r>
           </a:p>
         </p:txBody>
@@ -9629,14 +14293,14 @@
                 </a:solidFill>
                 <a:latin typeface="Geist Mono"/>
               </a:rPr>
-              <a:t>Jinchi Wei  ·  Outset  ·  Never miss a melanoma  ·  2026-07-08</a:t>
+              <a:t>Jinchi Wei  ·  Outset  ·  Screening skin spots for melanoma  ·  2026-07-08</a:t>
             </a:r>
           </a:p>
         </p:txBody>
       </p:sp>
       <p:pic>
         <p:nvPicPr>
-          <p:cNvPr id="7" name="Picture 6" descr="intro_sensitivity_tradeoff.png"/>
+          <p:cNvPr id="7" name="Picture 6" descr="intro_cost_of_a_miss.png"/>
           <p:cNvPicPr>
             <a:picLocks noChangeAspect="1"/>
           </p:cNvPicPr>
@@ -9650,8 +14314,8 @@
         </p:blipFill>
         <p:spPr>
           <a:xfrm>
-            <a:off x="457200" y="1534562"/>
-            <a:ext cx="6523329" cy="4108914"/>
+            <a:off x="457200" y="1665068"/>
+            <a:ext cx="6298387" cy="3985062"/>
           </a:xfrm>
           <a:prstGeom prst="rect">
             <a:avLst/>
@@ -9660,45 +14324,36 @@
       </p:pic>
       <p:sp>
         <p:nvSpPr>
-          <p:cNvPr id="8" name="Rectangle 7"/>
-          <p:cNvSpPr/>
-          <p:nvPr/>
-        </p:nvSpPr>
-        <p:spPr>
-          <a:xfrm>
-            <a:off x="7392009" y="1216152"/>
-            <a:ext cx="73152" cy="4553712"/>
-          </a:xfrm>
-          <a:prstGeom prst="rect">
-            <a:avLst/>
-          </a:prstGeom>
-          <a:solidFill>
-            <a:srgbClr val="40E0D0"/>
-          </a:solidFill>
-          <a:ln>
-            <a:noFill/>
-          </a:ln>
-          <a:effectLst/>
-        </p:spPr>
-        <p:style>
-          <a:lnRef idx="1">
-            <a:schemeClr val="accent1"/>
-          </a:lnRef>
-          <a:fillRef idx="3">
-            <a:schemeClr val="accent1"/>
-          </a:fillRef>
-          <a:effectRef idx="2">
-            <a:schemeClr val="accent1"/>
-          </a:effectRef>
-          <a:fontRef idx="minor">
-            <a:schemeClr val="lt1"/>
-          </a:fontRef>
-        </p:style>
-        <p:txBody>
-          <a:bodyPr rtlCol="0" anchor="ctr"/>
-          <a:lstStyle/>
-          <a:p>
-            <a:pPr algn="ctr"/>
+          <p:cNvPr id="8" name="TextBox 7"/>
+          <p:cNvSpPr txBox="1"/>
+          <p:nvPr/>
+        </p:nvSpPr>
+        <p:spPr>
+          <a:xfrm>
+            <a:off x="7167067" y="1188720"/>
+            <a:ext cx="4537252" cy="365760"/>
+          </a:xfrm>
+          <a:prstGeom prst="rect">
+            <a:avLst/>
+          </a:prstGeom>
+          <a:noFill/>
+        </p:spPr>
+        <p:txBody>
+          <a:bodyPr wrap="square" anchor="t" lIns="0" rIns="0" tIns="0" bIns="0">
+            <a:spAutoFit/>
+          </a:bodyPr>
+          <a:lstStyle/>
+          <a:p>
+            <a:pPr algn="l"/>
+            <a:r>
+              <a:rPr sz="1500" b="1" i="0">
+                <a:solidFill>
+                  <a:srgbClr val="FF1493"/>
+                </a:solidFill>
+                <a:latin typeface="Geist Mono"/>
+              </a:rPr>
+              <a:t>TWO MISTAKES, ONE IS WORSE</a:t>
+            </a:r>
           </a:p>
         </p:txBody>
       </p:sp>
@@ -9710,8 +14365,8 @@
         </p:nvSpPr>
         <p:spPr>
           <a:xfrm>
-            <a:off x="7666329" y="1097280"/>
-            <a:ext cx="4001414" cy="4800599"/>
+            <a:off x="7167067" y="1737360"/>
+            <a:ext cx="4537252" cy="1234440"/>
           </a:xfrm>
           <a:prstGeom prst="rect">
             <a:avLst/>
@@ -9719,20 +14374,90 @@
           <a:noFill/>
         </p:spPr>
         <p:txBody>
-          <a:bodyPr wrap="square" anchor="ctr" lIns="0" rIns="0" tIns="0" bIns="0">
+          <a:bodyPr wrap="square" anchor="t" lIns="0" rIns="0" tIns="0" bIns="0">
             <a:spAutoFit/>
           </a:bodyPr>
           <a:lstStyle/>
           <a:p>
             <a:pPr algn="l"/>
             <a:r>
-              <a:rPr sz="1700" b="0" i="0">
+              <a:rPr sz="1600" b="0" i="0">
                 <a:solidFill>
                   <a:srgbClr val="14141C"/>
                 </a:solidFill>
                 <a:latin typeface="Geist"/>
               </a:rPr>
-              <a:t>Every screening model has a decision threshold, and where you set it is a trade-off you cannot escape. Slide it one way and you catch more cancers but raise more false alarms; slide it the other way and you calm the false alarms but start missing real disease. Screening deliberately favors sensitivity -- catching the cancers -- because a false alarm just costs a follow-up visit (Trevethan 2017).</a:t>
+              <a:t>A false negative -- a real melanoma called harmless -- lets a cancer keep growing, and can be fatal.</a:t>
+            </a:r>
+          </a:p>
+        </p:txBody>
+      </p:sp>
+      <p:sp>
+        <p:nvSpPr>
+          <p:cNvPr id="10" name="TextBox 9"/>
+          <p:cNvSpPr txBox="1"/>
+          <p:nvPr/>
+        </p:nvSpPr>
+        <p:spPr>
+          <a:xfrm>
+            <a:off x="7167067" y="3017520"/>
+            <a:ext cx="4537252" cy="1005840"/>
+          </a:xfrm>
+          <a:prstGeom prst="rect">
+            <a:avLst/>
+          </a:prstGeom>
+          <a:noFill/>
+        </p:spPr>
+        <p:txBody>
+          <a:bodyPr wrap="square" anchor="t" lIns="0" rIns="0" tIns="0" bIns="0">
+            <a:spAutoFit/>
+          </a:bodyPr>
+          <a:lstStyle/>
+          <a:p>
+            <a:pPr algn="l"/>
+            <a:r>
+              <a:rPr sz="1600" b="0" i="0">
+                <a:solidFill>
+                  <a:srgbClr val="14141C"/>
+                </a:solidFill>
+                <a:latin typeface="Geist"/>
+              </a:rPr>
+              <a:t>A false positive is just one extra check-up. The costs are wildly lopsided.</a:t>
+            </a:r>
+          </a:p>
+        </p:txBody>
+      </p:sp>
+      <p:sp>
+        <p:nvSpPr>
+          <p:cNvPr id="11" name="TextBox 10"/>
+          <p:cNvSpPr txBox="1"/>
+          <p:nvPr/>
+        </p:nvSpPr>
+        <p:spPr>
+          <a:xfrm>
+            <a:off x="7167067" y="4114800"/>
+            <a:ext cx="4537252" cy="1188720"/>
+          </a:xfrm>
+          <a:prstGeom prst="rect">
+            <a:avLst/>
+          </a:prstGeom>
+          <a:noFill/>
+        </p:spPr>
+        <p:txBody>
+          <a:bodyPr wrap="square" anchor="t" lIns="0" rIns="0" tIns="0" bIns="0">
+            <a:spAutoFit/>
+          </a:bodyPr>
+          <a:lstStyle/>
+          <a:p>
+            <a:pPr algn="l"/>
+            <a:r>
+              <a:rPr sz="1600" b="0" i="1">
+                <a:solidFill>
+                  <a:srgbClr val="8A2BE2"/>
+                </a:solidFill>
+                <a:latin typeface="Geist"/>
+              </a:rPr>
+              <a:t>So we do not chase balanced accuracy. We deliberately tilt the screen toward catching cancers.</a:t>
             </a:r>
           </a:p>
         </p:txBody>
@@ -9873,7 +14598,7 @@
                 </a:solidFill>
                 <a:latin typeface="Geist Mono"/>
               </a:rPr>
-              <a:t>We borrow a brain instead of starting blank</a:t>
+              <a:t>Machines already match dermatologists</a:t>
             </a:r>
           </a:p>
         </p:txBody>
@@ -9952,14 +14677,14 @@
                 </a:solidFill>
                 <a:latin typeface="Geist Mono"/>
               </a:rPr>
-              <a:t>Jinchi Wei  ·  Outset  ·  Never miss a melanoma  ·  2026-07-08</a:t>
+              <a:t>Jinchi Wei  ·  Outset  ·  Screening skin spots for melanoma  ·  2026-07-08</a:t>
             </a:r>
           </a:p>
         </p:txBody>
       </p:sp>
       <p:pic>
         <p:nvPicPr>
-          <p:cNvPr id="7" name="Picture 6" descr="intro_transfer_learning.png"/>
+          <p:cNvPr id="7" name="Picture 6" descr="intro_esteva_2017.png"/>
           <p:cNvPicPr>
             <a:picLocks noChangeAspect="1"/>
           </p:cNvPicPr>
@@ -9973,8 +14698,8 @@
         </p:blipFill>
         <p:spPr>
           <a:xfrm>
-            <a:off x="2230856" y="1097280"/>
-            <a:ext cx="7699806" cy="3023006"/>
+            <a:off x="3503985" y="1051560"/>
+            <a:ext cx="5153549" cy="4160519"/>
           </a:xfrm>
           <a:prstGeom prst="rect">
             <a:avLst/>
@@ -9983,45 +14708,36 @@
       </p:pic>
       <p:sp>
         <p:nvSpPr>
-          <p:cNvPr id="8" name="Rectangle 7"/>
-          <p:cNvSpPr/>
-          <p:nvPr/>
-        </p:nvSpPr>
-        <p:spPr>
-          <a:xfrm>
-            <a:off x="475488" y="4257446"/>
-            <a:ext cx="73152" cy="1869033"/>
-          </a:xfrm>
-          <a:prstGeom prst="rect">
-            <a:avLst/>
-          </a:prstGeom>
-          <a:solidFill>
-            <a:srgbClr val="40E0D0"/>
-          </a:solidFill>
-          <a:ln>
-            <a:noFill/>
-          </a:ln>
-          <a:effectLst/>
-        </p:spPr>
-        <p:style>
-          <a:lnRef idx="1">
-            <a:schemeClr val="accent1"/>
-          </a:lnRef>
-          <a:fillRef idx="3">
-            <a:schemeClr val="accent1"/>
-          </a:fillRef>
-          <a:effectRef idx="2">
-            <a:schemeClr val="accent1"/>
-          </a:effectRef>
-          <a:fontRef idx="minor">
-            <a:schemeClr val="lt1"/>
-          </a:fontRef>
-        </p:style>
-        <p:txBody>
-          <a:bodyPr rtlCol="0" anchor="ctr"/>
+          <p:cNvPr id="8" name="TextBox 7"/>
+          <p:cNvSpPr txBox="1"/>
+          <p:nvPr/>
+        </p:nvSpPr>
+        <p:spPr>
+          <a:xfrm>
+            <a:off x="457200" y="5376671"/>
+            <a:ext cx="3566160" cy="502920"/>
+          </a:xfrm>
+          <a:prstGeom prst="rect">
+            <a:avLst/>
+          </a:prstGeom>
+          <a:noFill/>
+        </p:spPr>
+        <p:txBody>
+          <a:bodyPr wrap="square" anchor="t" lIns="0" rIns="0" tIns="0" bIns="0">
+            <a:spAutoFit/>
+          </a:bodyPr>
           <a:lstStyle/>
           <a:p>
             <a:pPr algn="ctr"/>
+            <a:r>
+              <a:rPr sz="3000" b="1" i="0">
+                <a:solidFill>
+                  <a:srgbClr val="40E0D0"/>
+                </a:solidFill>
+                <a:latin typeface="Geist Mono"/>
+              </a:rPr>
+              <a:t>129,450</a:t>
+            </a:r>
           </a:p>
         </p:txBody>
       </p:sp>
@@ -10033,8 +14749,8 @@
         </p:nvSpPr>
         <p:spPr>
           <a:xfrm>
-            <a:off x="731520" y="4184294"/>
-            <a:ext cx="10789920" cy="2051913"/>
+            <a:off x="457200" y="5907023"/>
+            <a:ext cx="3566160" cy="411480"/>
           </a:xfrm>
           <a:prstGeom prst="rect">
             <a:avLst/>
@@ -10042,20 +14758,160 @@
           <a:noFill/>
         </p:spPr>
         <p:txBody>
-          <a:bodyPr wrap="square" anchor="ctr" lIns="0" rIns="0" tIns="0" bIns="0">
+          <a:bodyPr wrap="square" anchor="t" lIns="0" rIns="0" tIns="0" bIns="0">
             <a:spAutoFit/>
           </a:bodyPr>
           <a:lstStyle/>
           <a:p>
-            <a:pPr algn="l"/>
-            <a:r>
-              <a:rPr sz="1600" b="0" i="0">
+            <a:pPr algn="ctr"/>
+            <a:r>
+              <a:rPr sz="1250" b="0" i="0">
                 <a:solidFill>
                   <a:srgbClr val="14141C"/>
                 </a:solidFill>
                 <a:latin typeface="Geist"/>
               </a:rPr>
-              <a:t>We only have about ten thousand skin images, far too few to teach a network vision from scratch. So we use transfer learning: start from a network already trained on millions of everyday photos, keep everything it learned about edges, colors, and textures, and fine-tune only a small new head on the skin images (Kim 2022). That borrowed knowledge is why a model can learn skin cancer from thousands, not millions, of pictures.</a:t>
+              <a:t>clinical images it learned from</a:t>
+            </a:r>
+          </a:p>
+        </p:txBody>
+      </p:sp>
+      <p:sp>
+        <p:nvSpPr>
+          <p:cNvPr id="10" name="TextBox 9"/>
+          <p:cNvSpPr txBox="1"/>
+          <p:nvPr/>
+        </p:nvSpPr>
+        <p:spPr>
+          <a:xfrm>
+            <a:off x="4297680" y="5376671"/>
+            <a:ext cx="3566160" cy="502920"/>
+          </a:xfrm>
+          <a:prstGeom prst="rect">
+            <a:avLst/>
+          </a:prstGeom>
+          <a:noFill/>
+        </p:spPr>
+        <p:txBody>
+          <a:bodyPr wrap="square" anchor="t" lIns="0" rIns="0" tIns="0" bIns="0">
+            <a:spAutoFit/>
+          </a:bodyPr>
+          <a:lstStyle/>
+          <a:p>
+            <a:pPr algn="ctr"/>
+            <a:r>
+              <a:rPr sz="3000" b="1" i="0">
+                <a:solidFill>
+                  <a:srgbClr val="FF1493"/>
+                </a:solidFill>
+                <a:latin typeface="Geist Mono"/>
+              </a:rPr>
+              <a:t>21</a:t>
+            </a:r>
+          </a:p>
+        </p:txBody>
+      </p:sp>
+      <p:sp>
+        <p:nvSpPr>
+          <p:cNvPr id="11" name="TextBox 10"/>
+          <p:cNvSpPr txBox="1"/>
+          <p:nvPr/>
+        </p:nvSpPr>
+        <p:spPr>
+          <a:xfrm>
+            <a:off x="4297680" y="5907023"/>
+            <a:ext cx="3566160" cy="411480"/>
+          </a:xfrm>
+          <a:prstGeom prst="rect">
+            <a:avLst/>
+          </a:prstGeom>
+          <a:noFill/>
+        </p:spPr>
+        <p:txBody>
+          <a:bodyPr wrap="square" anchor="t" lIns="0" rIns="0" tIns="0" bIns="0">
+            <a:spAutoFit/>
+          </a:bodyPr>
+          <a:lstStyle/>
+          <a:p>
+            <a:pPr algn="ctr"/>
+            <a:r>
+              <a:rPr sz="1250" b="0" i="0">
+                <a:solidFill>
+                  <a:srgbClr val="14141C"/>
+                </a:solidFill>
+                <a:latin typeface="Geist"/>
+              </a:rPr>
+              <a:t>board-certified dermatologists it matched</a:t>
+            </a:r>
+          </a:p>
+        </p:txBody>
+      </p:sp>
+      <p:sp>
+        <p:nvSpPr>
+          <p:cNvPr id="12" name="TextBox 11"/>
+          <p:cNvSpPr txBox="1"/>
+          <p:nvPr/>
+        </p:nvSpPr>
+        <p:spPr>
+          <a:xfrm>
+            <a:off x="8138160" y="5376671"/>
+            <a:ext cx="3566160" cy="502920"/>
+          </a:xfrm>
+          <a:prstGeom prst="rect">
+            <a:avLst/>
+          </a:prstGeom>
+          <a:noFill/>
+        </p:spPr>
+        <p:txBody>
+          <a:bodyPr wrap="square" anchor="t" lIns="0" rIns="0" tIns="0" bIns="0">
+            <a:spAutoFit/>
+          </a:bodyPr>
+          <a:lstStyle/>
+          <a:p>
+            <a:pPr algn="ctr"/>
+            <a:r>
+              <a:rPr sz="3000" b="1" i="0">
+                <a:solidFill>
+                  <a:srgbClr val="8A2BE2"/>
+                </a:solidFill>
+                <a:latin typeface="Geist Mono"/>
+              </a:rPr>
+              <a:t>2017</a:t>
+            </a:r>
+          </a:p>
+        </p:txBody>
+      </p:sp>
+      <p:sp>
+        <p:nvSpPr>
+          <p:cNvPr id="13" name="TextBox 12"/>
+          <p:cNvSpPr txBox="1"/>
+          <p:nvPr/>
+        </p:nvSpPr>
+        <p:spPr>
+          <a:xfrm>
+            <a:off x="8138160" y="5907023"/>
+            <a:ext cx="3566160" cy="411480"/>
+          </a:xfrm>
+          <a:prstGeom prst="rect">
+            <a:avLst/>
+          </a:prstGeom>
+          <a:noFill/>
+        </p:spPr>
+        <p:txBody>
+          <a:bodyPr wrap="square" anchor="t" lIns="0" rIns="0" tIns="0" bIns="0">
+            <a:spAutoFit/>
+          </a:bodyPr>
+          <a:lstStyle/>
+          <a:p>
+            <a:pPr algn="ctr"/>
+            <a:r>
+              <a:rPr sz="1250" b="0" i="0">
+                <a:solidFill>
+                  <a:srgbClr val="14141C"/>
+                </a:solidFill>
+                <a:latin typeface="Geist"/>
+              </a:rPr>
+              <a:t>the year this stopped being science fiction</a:t>
             </a:r>
           </a:p>
         </p:txBody>
@@ -10283,7 +15139,7 @@
                 </a:solidFill>
                 <a:latin typeface="Geist Mono"/>
               </a:rPr>
-              <a:t>METHODS</a:t>
+              <a:t>THE DATA</a:t>
             </a:r>
           </a:p>
         </p:txBody>
@@ -10502,7 +15358,7 @@
                 </a:solidFill>
                 <a:latin typeface="Geist Mono"/>
               </a:rPr>
-              <a:t>Never miss a melanoma</a:t>
+              <a:t>Screening skin spots for melanoma</a:t>
             </a:r>
           </a:p>
         </p:txBody>
@@ -10637,13 +15493,13 @@
           <a:p>
             <a:pPr algn="l"/>
             <a:r>
-              <a:rPr sz="2400" b="1" i="0">
+              <a:rPr sz="2800" b="1" i="0">
                 <a:solidFill>
                   <a:srgbClr val="14141C"/>
                 </a:solidFill>
                 <a:latin typeface="Geist Mono"/>
               </a:rPr>
-              <a:t>The task: seven kinds of skin spot, one that we cannot miss</a:t>
+              <a:t>Why HAM10000</a:t>
             </a:r>
           </a:p>
         </p:txBody>
@@ -10722,100 +15578,21 @@
                 </a:solidFill>
                 <a:latin typeface="Geist Mono"/>
               </a:rPr>
-              <a:t>Jinchi Wei  ·  Outset  ·  Never miss a melanoma  ·  2026-07-08</a:t>
-            </a:r>
-          </a:p>
-        </p:txBody>
-      </p:sp>
-      <p:sp>
-        <p:nvSpPr>
-          <p:cNvPr id="7" name="TextBox 6"/>
-          <p:cNvSpPr txBox="1"/>
+              <a:t>Jinchi Wei  ·  Outset  ·  Screening skin spots for melanoma  ·  2026-07-08</a:t>
+            </a:r>
+          </a:p>
+        </p:txBody>
+      </p:sp>
+      <p:sp>
+        <p:nvSpPr>
+          <p:cNvPr id="7" name="Rectangle 6"/>
+          <p:cNvSpPr/>
           <p:nvPr/>
         </p:nvSpPr>
         <p:spPr>
           <a:xfrm>
             <a:off x="457200" y="1051560"/>
-            <a:ext cx="5848502" cy="4846319"/>
-          </a:xfrm>
-          <a:prstGeom prst="rect">
-            <a:avLst/>
-          </a:prstGeom>
-          <a:noFill/>
-        </p:spPr>
-        <p:txBody>
-          <a:bodyPr wrap="square" anchor="ctr" lIns="0" rIns="0" tIns="0" bIns="0">
-            <a:spAutoFit/>
-          </a:bodyPr>
-          <a:lstStyle/>
-          <a:p>
-            <a:pPr algn="l"/>
-            <a:r>
-              <a:rPr sz="1800" b="0" i="0">
-                <a:solidFill>
-                  <a:srgbClr val="14141C"/>
-                </a:solidFill>
-                <a:latin typeface="Geist"/>
-              </a:rPr>
-              <a:t>Our data is DermaMNIST, a tidy version of the HAM10000 dermatoscopy collection with seven kinds of skin lesion, one of which is melanoma -- the class we cannot afford to miss (Tschandl 2018).</a:t>
-            </a:r>
-          </a:p>
-        </p:txBody>
-      </p:sp>
-      <p:sp>
-        <p:nvSpPr>
-          <p:cNvPr id="8" name="Rectangle 7"/>
-          <p:cNvSpPr/>
-          <p:nvPr/>
-        </p:nvSpPr>
-        <p:spPr>
-          <a:xfrm>
-            <a:off x="6924294" y="2537459"/>
-            <a:ext cx="4780026" cy="1874519"/>
-          </a:xfrm>
-          <a:prstGeom prst="rect">
-            <a:avLst/>
-          </a:prstGeom>
-          <a:solidFill>
-            <a:srgbClr val="FAFAFC"/>
-          </a:solidFill>
-          <a:ln>
-            <a:noFill/>
-          </a:ln>
-          <a:effectLst/>
-        </p:spPr>
-        <p:style>
-          <a:lnRef idx="1">
-            <a:schemeClr val="accent1"/>
-          </a:lnRef>
-          <a:fillRef idx="3">
-            <a:schemeClr val="accent1"/>
-          </a:fillRef>
-          <a:effectRef idx="2">
-            <a:schemeClr val="accent1"/>
-          </a:effectRef>
-          <a:fontRef idx="minor">
-            <a:schemeClr val="lt1"/>
-          </a:fontRef>
-        </p:style>
-        <p:txBody>
-          <a:bodyPr rtlCol="0" anchor="ctr"/>
-          <a:lstStyle/>
-          <a:p>
-            <a:pPr algn="ctr"/>
-          </a:p>
-        </p:txBody>
-      </p:sp>
-      <p:sp>
-        <p:nvSpPr>
-          <p:cNvPr id="9" name="Rectangle 8"/>
-          <p:cNvSpPr/>
-          <p:nvPr/>
-        </p:nvSpPr>
-        <p:spPr>
-          <a:xfrm>
-            <a:off x="6924294" y="2537459"/>
-            <a:ext cx="4780026" cy="54864"/>
+            <a:ext cx="3535680" cy="5120640"/>
           </a:xfrm>
           <a:prstGeom prst="rect">
             <a:avLst/>
@@ -10852,14 +15629,49 @@
       </p:sp>
       <p:sp>
         <p:nvSpPr>
-          <p:cNvPr id="10" name="TextBox 9"/>
+          <p:cNvPr id="8" name="TextBox 7"/>
           <p:cNvSpPr txBox="1"/>
           <p:nvPr/>
         </p:nvSpPr>
         <p:spPr>
           <a:xfrm>
-            <a:off x="7088886" y="2628899"/>
-            <a:ext cx="4450842" cy="384048"/>
+            <a:off x="713232" y="1920239"/>
+            <a:ext cx="3023616" cy="1371600"/>
+          </a:xfrm>
+          <a:prstGeom prst="rect">
+            <a:avLst/>
+          </a:prstGeom>
+          <a:noFill/>
+        </p:spPr>
+        <p:txBody>
+          <a:bodyPr wrap="square" anchor="ctr" lIns="0" rIns="0" tIns="0" bIns="0">
+            <a:spAutoFit/>
+          </a:bodyPr>
+          <a:lstStyle/>
+          <a:p>
+            <a:pPr algn="l"/>
+            <a:r>
+              <a:rPr sz="6000" b="1" i="0">
+                <a:solidFill>
+                  <a:srgbClr val="FFFFFF"/>
+                </a:solidFill>
+                <a:latin typeface="Geist Mono"/>
+              </a:rPr>
+              <a:t>10,015</a:t>
+            </a:r>
+          </a:p>
+        </p:txBody>
+      </p:sp>
+      <p:sp>
+        <p:nvSpPr>
+          <p:cNvPr id="9" name="TextBox 8"/>
+          <p:cNvSpPr txBox="1"/>
+          <p:nvPr/>
+        </p:nvSpPr>
+        <p:spPr>
+          <a:xfrm>
+            <a:off x="713232" y="3474720"/>
+            <a:ext cx="3023616" cy="1828800"/>
           </a:xfrm>
           <a:prstGeom prst="rect">
             <a:avLst/>
@@ -10874,14 +15686,58 @@
           <a:p>
             <a:pPr algn="l"/>
             <a:r>
-              <a:rPr sz="1400" b="1" i="0">
-                <a:solidFill>
-                  <a:srgbClr val="FF1493"/>
-                </a:solidFill>
-                <a:latin typeface="Geist Mono"/>
-              </a:rPr>
-              <a:t>THE CATCH  --  IMBALANCE</a:t>
-            </a:r>
+              <a:rPr sz="1500" b="0" i="0">
+                <a:solidFill>
+                  <a:srgbClr val="FFFFFF"/>
+                </a:solidFill>
+                <a:latin typeface="Geist"/>
+              </a:rPr>
+              <a:t>real dermatoscopy images -- the kind a clinic actually captures, not cartoons</a:t>
+            </a:r>
+          </a:p>
+        </p:txBody>
+      </p:sp>
+      <p:sp>
+        <p:nvSpPr>
+          <p:cNvPr id="10" name="Rectangle 9"/>
+          <p:cNvSpPr/>
+          <p:nvPr/>
+        </p:nvSpPr>
+        <p:spPr>
+          <a:xfrm>
+            <a:off x="4312920" y="1051560"/>
+            <a:ext cx="3535680" cy="5120640"/>
+          </a:xfrm>
+          <a:prstGeom prst="rect">
+            <a:avLst/>
+          </a:prstGeom>
+          <a:solidFill>
+            <a:srgbClr val="8A2BE2"/>
+          </a:solidFill>
+          <a:ln>
+            <a:noFill/>
+          </a:ln>
+          <a:effectLst/>
+        </p:spPr>
+        <p:style>
+          <a:lnRef idx="1">
+            <a:schemeClr val="accent1"/>
+          </a:lnRef>
+          <a:fillRef idx="3">
+            <a:schemeClr val="accent1"/>
+          </a:fillRef>
+          <a:effectRef idx="2">
+            <a:schemeClr val="accent1"/>
+          </a:effectRef>
+          <a:fontRef idx="minor">
+            <a:schemeClr val="lt1"/>
+          </a:fontRef>
+        </p:style>
+        <p:txBody>
+          <a:bodyPr rtlCol="0" anchor="ctr"/>
+          <a:lstStyle/>
+          <a:p>
+            <a:pPr algn="ctr"/>
           </a:p>
         </p:txBody>
       </p:sp>
@@ -10893,8 +15749,43 @@
         </p:nvSpPr>
         <p:spPr>
           <a:xfrm>
-            <a:off x="7088886" y="3177539"/>
-            <a:ext cx="4450842" cy="1142999"/>
+            <a:off x="4568952" y="1920239"/>
+            <a:ext cx="3023616" cy="1371600"/>
+          </a:xfrm>
+          <a:prstGeom prst="rect">
+            <a:avLst/>
+          </a:prstGeom>
+          <a:noFill/>
+        </p:spPr>
+        <p:txBody>
+          <a:bodyPr wrap="square" anchor="ctr" lIns="0" rIns="0" tIns="0" bIns="0">
+            <a:spAutoFit/>
+          </a:bodyPr>
+          <a:lstStyle/>
+          <a:p>
+            <a:pPr algn="l"/>
+            <a:r>
+              <a:rPr sz="6000" b="1" i="0">
+                <a:solidFill>
+                  <a:srgbClr val="FFFFFF"/>
+                </a:solidFill>
+                <a:latin typeface="Geist Mono"/>
+              </a:rPr>
+              <a:t>7</a:t>
+            </a:r>
+          </a:p>
+        </p:txBody>
+      </p:sp>
+      <p:sp>
+        <p:nvSpPr>
+          <p:cNvPr id="12" name="TextBox 11"/>
+          <p:cNvSpPr txBox="1"/>
+          <p:nvPr/>
+        </p:nvSpPr>
+        <p:spPr>
+          <a:xfrm>
+            <a:off x="4568952" y="3474720"/>
+            <a:ext cx="3023616" cy="1828800"/>
           </a:xfrm>
           <a:prstGeom prst="rect">
             <a:avLst/>
@@ -10909,13 +15800,127 @@
           <a:p>
             <a:pPr algn="l"/>
             <a:r>
-              <a:rPr sz="1200" b="0" i="0">
+              <a:rPr sz="1500" b="0" i="0">
+                <a:solidFill>
+                  <a:srgbClr val="FFFFFF"/>
+                </a:solidFill>
+                <a:latin typeface="Geist"/>
+              </a:rPr>
+              <a:t>lesion types, which we collapse to one screening question: melanoma vs. everything else</a:t>
+            </a:r>
+          </a:p>
+        </p:txBody>
+      </p:sp>
+      <p:sp>
+        <p:nvSpPr>
+          <p:cNvPr id="13" name="Rectangle 12"/>
+          <p:cNvSpPr/>
+          <p:nvPr/>
+        </p:nvSpPr>
+        <p:spPr>
+          <a:xfrm>
+            <a:off x="8168640" y="1051560"/>
+            <a:ext cx="3535680" cy="5120640"/>
+          </a:xfrm>
+          <a:prstGeom prst="rect">
+            <a:avLst/>
+          </a:prstGeom>
+          <a:solidFill>
+            <a:srgbClr val="40E0D0"/>
+          </a:solidFill>
+          <a:ln>
+            <a:noFill/>
+          </a:ln>
+          <a:effectLst/>
+        </p:spPr>
+        <p:style>
+          <a:lnRef idx="1">
+            <a:schemeClr val="accent1"/>
+          </a:lnRef>
+          <a:fillRef idx="3">
+            <a:schemeClr val="accent1"/>
+          </a:fillRef>
+          <a:effectRef idx="2">
+            <a:schemeClr val="accent1"/>
+          </a:effectRef>
+          <a:fontRef idx="minor">
+            <a:schemeClr val="lt1"/>
+          </a:fontRef>
+        </p:style>
+        <p:txBody>
+          <a:bodyPr rtlCol="0" anchor="ctr"/>
+          <a:lstStyle/>
+          <a:p>
+            <a:pPr algn="ctr"/>
+          </a:p>
+        </p:txBody>
+      </p:sp>
+      <p:sp>
+        <p:nvSpPr>
+          <p:cNvPr id="14" name="TextBox 13"/>
+          <p:cNvSpPr txBox="1"/>
+          <p:nvPr/>
+        </p:nvSpPr>
+        <p:spPr>
+          <a:xfrm>
+            <a:off x="8424672" y="1920239"/>
+            <a:ext cx="3023616" cy="1371600"/>
+          </a:xfrm>
+          <a:prstGeom prst="rect">
+            <a:avLst/>
+          </a:prstGeom>
+          <a:noFill/>
+        </p:spPr>
+        <p:txBody>
+          <a:bodyPr wrap="square" anchor="ctr" lIns="0" rIns="0" tIns="0" bIns="0">
+            <a:spAutoFit/>
+          </a:bodyPr>
+          <a:lstStyle/>
+          <a:p>
+            <a:pPr algn="l"/>
+            <a:r>
+              <a:rPr sz="6000" b="1" i="0">
                 <a:solidFill>
                   <a:srgbClr val="14141C"/>
                 </a:solidFill>
+                <a:latin typeface="Geist Mono"/>
+              </a:rPr>
+              <a:t>11%</a:t>
+            </a:r>
+          </a:p>
+        </p:txBody>
+      </p:sp>
+      <p:sp>
+        <p:nvSpPr>
+          <p:cNvPr id="15" name="TextBox 14"/>
+          <p:cNvSpPr txBox="1"/>
+          <p:nvPr/>
+        </p:nvSpPr>
+        <p:spPr>
+          <a:xfrm>
+            <a:off x="8424672" y="3474720"/>
+            <a:ext cx="3023616" cy="1828800"/>
+          </a:xfrm>
+          <a:prstGeom prst="rect">
+            <a:avLst/>
+          </a:prstGeom>
+          <a:noFill/>
+        </p:spPr>
+        <p:txBody>
+          <a:bodyPr wrap="square" anchor="t" lIns="0" rIns="0" tIns="0" bIns="0">
+            <a:spAutoFit/>
+          </a:bodyPr>
+          <a:lstStyle/>
+          <a:p>
+            <a:pPr algn="l"/>
+            <a:r>
+              <a:rPr sz="1500" b="0" i="0">
+                <a:solidFill>
+                  <a:srgbClr val="14141C"/>
+                </a:solidFill>
                 <a:latin typeface="Geist"/>
               </a:rPr>
-              <a:t>About two-thirds of every set is harmless moles. Melanoma is only a thin slice -- exactly the setup where a lazy model can look accurate while catching almost no cancers.</a:t>
+              <a:t>are melanoma -- the rare, deadly class -- and every image records age and sex, so we can audit fairness</a:t>
             </a:r>
           </a:p>
         </p:txBody>
@@ -11056,7 +16061,7 @@
                 </a:solidFill>
                 <a:latin typeface="Geist Mono"/>
               </a:rPr>
-              <a:t>How we built it, and how we graded it honestly</a:t>
+              <a:t>Accuracy is a trap; sensitivity is the job</a:t>
             </a:r>
           </a:p>
         </p:txBody>
@@ -11135,46 +16140,35 @@
                 </a:solidFill>
                 <a:latin typeface="Geist Mono"/>
               </a:rPr>
-              <a:t>Jinchi Wei  ·  Outset  ·  Never miss a melanoma  ·  2026-07-08</a:t>
-            </a:r>
-          </a:p>
-        </p:txBody>
-      </p:sp>
-      <p:sp>
-        <p:nvSpPr>
-          <p:cNvPr id="7" name="TextBox 6"/>
-          <p:cNvSpPr txBox="1"/>
-          <p:nvPr/>
-        </p:nvSpPr>
-        <p:spPr>
-          <a:xfrm>
-            <a:off x="457200" y="1051560"/>
-            <a:ext cx="5848502" cy="4846319"/>
-          </a:xfrm>
-          <a:prstGeom prst="rect">
-            <a:avLst/>
-          </a:prstGeom>
-          <a:noFill/>
-        </p:spPr>
-        <p:txBody>
-          <a:bodyPr wrap="square" anchor="ctr" lIns="0" rIns="0" tIns="0" bIns="0">
-            <a:spAutoFit/>
-          </a:bodyPr>
-          <a:lstStyle/>
-          <a:p>
-            <a:pPr algn="l"/>
-            <a:r>
-              <a:rPr sz="1800" b="0" i="0">
-                <a:solidFill>
-                  <a:srgbClr val="14141C"/>
-                </a:solidFill>
-                <a:latin typeface="Geist"/>
-              </a:rPr>
-              <a:t>We trained the network three ways -- from scratch, pretrained, and pretrained with augmentation -- and then audited the best one the way a regulator would, refusing to grade on accuracy alone.</a:t>
-            </a:r>
-          </a:p>
-        </p:txBody>
-      </p:sp>
+              <a:t>Jinchi Wei  ·  Outset  ·  Screening skin spots for melanoma  ·  2026-07-08</a:t>
+            </a:r>
+          </a:p>
+        </p:txBody>
+      </p:sp>
+      <p:pic>
+        <p:nvPicPr>
+          <p:cNvPr id="7" name="Picture 6" descr="intro_sensitivity_tradeoff.png"/>
+          <p:cNvPicPr>
+            <a:picLocks noChangeAspect="1"/>
+          </p:cNvPicPr>
+          <p:nvPr/>
+        </p:nvPicPr>
+        <p:blipFill>
+          <a:blip r:embed="rId2"/>
+          <a:stretch>
+            <a:fillRect/>
+          </a:stretch>
+        </p:blipFill>
+        <p:spPr>
+          <a:xfrm>
+            <a:off x="3312621" y="1051560"/>
+            <a:ext cx="5536276" cy="3794759"/>
+          </a:xfrm>
+          <a:prstGeom prst="rect">
+            <a:avLst/>
+          </a:prstGeom>
+        </p:spPr>
+      </p:pic>
       <p:sp>
         <p:nvSpPr>
           <p:cNvPr id="8" name="Rectangle 7"/>
@@ -11183,52 +16177,8 @@
         </p:nvSpPr>
         <p:spPr>
           <a:xfrm>
-            <a:off x="6924294" y="2537459"/>
-            <a:ext cx="4780026" cy="1874519"/>
-          </a:xfrm>
-          <a:prstGeom prst="rect">
-            <a:avLst/>
-          </a:prstGeom>
-          <a:solidFill>
-            <a:srgbClr val="FAFAFC"/>
-          </a:solidFill>
-          <a:ln>
-            <a:noFill/>
-          </a:ln>
-          <a:effectLst/>
-        </p:spPr>
-        <p:style>
-          <a:lnRef idx="1">
-            <a:schemeClr val="accent1"/>
-          </a:lnRef>
-          <a:fillRef idx="3">
-            <a:schemeClr val="accent1"/>
-          </a:fillRef>
-          <a:effectRef idx="2">
-            <a:schemeClr val="accent1"/>
-          </a:effectRef>
-          <a:fontRef idx="minor">
-            <a:schemeClr val="lt1"/>
-          </a:fontRef>
-        </p:style>
-        <p:txBody>
-          <a:bodyPr rtlCol="0" anchor="ctr"/>
-          <a:lstStyle/>
-          <a:p>
-            <a:pPr algn="ctr"/>
-          </a:p>
-        </p:txBody>
-      </p:sp>
-      <p:sp>
-        <p:nvSpPr>
-          <p:cNvPr id="9" name="Rectangle 8"/>
-          <p:cNvSpPr/>
-          <p:nvPr/>
-        </p:nvSpPr>
-        <p:spPr>
-          <a:xfrm>
-            <a:off x="6924294" y="2537459"/>
-            <a:ext cx="4780026" cy="54864"/>
+            <a:off x="457200" y="4983480"/>
+            <a:ext cx="5463540" cy="1234440"/>
           </a:xfrm>
           <a:prstGeom prst="rect">
             <a:avLst/>
@@ -11265,14 +16215,14 @@
       </p:sp>
       <p:sp>
         <p:nvSpPr>
-          <p:cNvPr id="10" name="TextBox 9"/>
+          <p:cNvPr id="9" name="TextBox 8"/>
           <p:cNvSpPr txBox="1"/>
           <p:nvPr/>
         </p:nvSpPr>
         <p:spPr>
           <a:xfrm>
-            <a:off x="7088886" y="2628899"/>
-            <a:ext cx="4450842" cy="384048"/>
+            <a:off x="731520" y="5093208"/>
+            <a:ext cx="4914900" cy="502920"/>
           </a:xfrm>
           <a:prstGeom prst="rect">
             <a:avLst/>
@@ -11287,27 +16237,27 @@
           <a:p>
             <a:pPr algn="l"/>
             <a:r>
-              <a:rPr sz="1400" b="1" i="0">
-                <a:solidFill>
-                  <a:srgbClr val="FF1493"/>
+              <a:rPr sz="3000" b="1" i="0">
+                <a:solidFill>
+                  <a:srgbClr val="FFFFFF"/>
                 </a:solidFill>
                 <a:latin typeface="Geist Mono"/>
               </a:rPr>
-              <a:t>WE GRADED ON</a:t>
-            </a:r>
-          </a:p>
-        </p:txBody>
-      </p:sp>
-      <p:sp>
-        <p:nvSpPr>
-          <p:cNvPr id="11" name="TextBox 10"/>
+              <a:t>89% / 0%</a:t>
+            </a:r>
+          </a:p>
+        </p:txBody>
+      </p:sp>
+      <p:sp>
+        <p:nvSpPr>
+          <p:cNvPr id="10" name="TextBox 9"/>
           <p:cNvSpPr txBox="1"/>
           <p:nvPr/>
         </p:nvSpPr>
         <p:spPr>
           <a:xfrm>
-            <a:off x="7088886" y="3177539"/>
-            <a:ext cx="4450842" cy="1142999"/>
+            <a:off x="731520" y="5641848"/>
+            <a:ext cx="4914900" cy="502920"/>
           </a:xfrm>
           <a:prstGeom prst="rect">
             <a:avLst/>
@@ -11322,13 +16272,127 @@
           <a:p>
             <a:pPr algn="l"/>
             <a:r>
-              <a:rPr sz="1200" b="0" i="0">
+              <a:rPr sz="1350" b="0" i="0">
+                <a:solidFill>
+                  <a:srgbClr val="FFFFFF"/>
+                </a:solidFill>
+                <a:latin typeface="Geist"/>
+              </a:rPr>
+              <a:t>a lazy "always not melanoma" model: 89% accurate, catches ZERO cancers</a:t>
+            </a:r>
+          </a:p>
+        </p:txBody>
+      </p:sp>
+      <p:sp>
+        <p:nvSpPr>
+          <p:cNvPr id="11" name="Rectangle 10"/>
+          <p:cNvSpPr/>
+          <p:nvPr/>
+        </p:nvSpPr>
+        <p:spPr>
+          <a:xfrm>
+            <a:off x="6240780" y="4983480"/>
+            <a:ext cx="5463540" cy="1234440"/>
+          </a:xfrm>
+          <a:prstGeom prst="rect">
+            <a:avLst/>
+          </a:prstGeom>
+          <a:solidFill>
+            <a:srgbClr val="40E0D0"/>
+          </a:solidFill>
+          <a:ln>
+            <a:noFill/>
+          </a:ln>
+          <a:effectLst/>
+        </p:spPr>
+        <p:style>
+          <a:lnRef idx="1">
+            <a:schemeClr val="accent1"/>
+          </a:lnRef>
+          <a:fillRef idx="3">
+            <a:schemeClr val="accent1"/>
+          </a:fillRef>
+          <a:effectRef idx="2">
+            <a:schemeClr val="accent1"/>
+          </a:effectRef>
+          <a:fontRef idx="minor">
+            <a:schemeClr val="lt1"/>
+          </a:fontRef>
+        </p:style>
+        <p:txBody>
+          <a:bodyPr rtlCol="0" anchor="ctr"/>
+          <a:lstStyle/>
+          <a:p>
+            <a:pPr algn="ctr"/>
+          </a:p>
+        </p:txBody>
+      </p:sp>
+      <p:sp>
+        <p:nvSpPr>
+          <p:cNvPr id="12" name="TextBox 11"/>
+          <p:cNvSpPr txBox="1"/>
+          <p:nvPr/>
+        </p:nvSpPr>
+        <p:spPr>
+          <a:xfrm>
+            <a:off x="6515100" y="5093208"/>
+            <a:ext cx="4914900" cy="502920"/>
+          </a:xfrm>
+          <a:prstGeom prst="rect">
+            <a:avLst/>
+          </a:prstGeom>
+          <a:noFill/>
+        </p:spPr>
+        <p:txBody>
+          <a:bodyPr wrap="square" anchor="t" lIns="0" rIns="0" tIns="0" bIns="0">
+            <a:spAutoFit/>
+          </a:bodyPr>
+          <a:lstStyle/>
+          <a:p>
+            <a:pPr algn="l"/>
+            <a:r>
+              <a:rPr sz="2600" b="1" i="0">
                 <a:solidFill>
                   <a:srgbClr val="14141C"/>
                 </a:solidFill>
+                <a:latin typeface="Geist Mono"/>
+              </a:rPr>
+              <a:t>the fix: one dial</a:t>
+            </a:r>
+          </a:p>
+        </p:txBody>
+      </p:sp>
+      <p:sp>
+        <p:nvSpPr>
+          <p:cNvPr id="13" name="TextBox 12"/>
+          <p:cNvSpPr txBox="1"/>
+          <p:nvPr/>
+        </p:nvSpPr>
+        <p:spPr>
+          <a:xfrm>
+            <a:off x="6515100" y="5641848"/>
+            <a:ext cx="4914900" cy="502920"/>
+          </a:xfrm>
+          <a:prstGeom prst="rect">
+            <a:avLst/>
+          </a:prstGeom>
+          <a:noFill/>
+        </p:spPr>
+        <p:txBody>
+          <a:bodyPr wrap="square" anchor="t" lIns="0" rIns="0" tIns="0" bIns="0">
+            <a:spAutoFit/>
+          </a:bodyPr>
+          <a:lstStyle/>
+          <a:p>
+            <a:pPr algn="l"/>
+            <a:r>
+              <a:rPr sz="1350" b="0" i="0">
+                <a:solidFill>
+                  <a:srgbClr val="14141C"/>
+                </a:solidFill>
                 <a:latin typeface="Geist"/>
               </a:rPr>
-              <a:t>Melanoma recall -- the share of true melanomas actually caught. On this data that single number, not overall accuracy, is what decides whether the tool is safe.</a:t>
+              <a:t>slide the decision threshold left to catch more melanomas -- we grade on sensitivity, not accuracy</a:t>
             </a:r>
           </a:p>
         </p:txBody>
@@ -11556,7 +16620,7 @@
                 </a:solidFill>
                 <a:latin typeface="Geist Mono"/>
               </a:rPr>
-              <a:t>RESULTS</a:t>
+              <a:t>THE MODEL</a:t>
             </a:r>
           </a:p>
         </p:txBody>
@@ -11775,7 +16839,7 @@
                 </a:solidFill>
                 <a:latin typeface="Geist Mono"/>
               </a:rPr>
-              <a:t>Never miss a melanoma</a:t>
+              <a:t>Screening skin spots for melanoma</a:t>
             </a:r>
           </a:p>
         </p:txBody>
